--- a/templates/master_worship.pptx
+++ b/templates/master_worship.pptx
@@ -17,6 +17,8 @@
     <p:sldId id="265" r:id="rId16"/>
     <p:sldId id="266" r:id="rId17"/>
     <p:sldId id="267" r:id="rId18"/>
+    <p:sldId id="268" r:id="rId19"/>
+    <p:sldId id="269" r:id="rId20"/>
   </p:sldIdLst>
   <p:sldSz cx="12191695" cy="6858000" type="screen4x3"/>
   <p:notesSz cx="6858000" cy="9144000"/>
@@ -5247,13 +5249,13 @@
         </p:nvCxnSpPr>
         <p:spPr>
           <a:xfrm>
-            <a:off x="4983480.0" y="1627632"/>
-            <a:ext cx="822960.0" cy="0"/>
+            <a:off x="1618488" y="1719072"/>
+            <a:ext cx="320040" cy="0"/>
           </a:xfrm>
           <a:prstGeom prst="line">
             <a:avLst/>
           </a:prstGeom>
-          <a:ln w="15240">
+          <a:ln w="14604">
             <a:solidFill>
               <a:srgbClr val="D8B87A"/>
             </a:solidFill>
@@ -5282,13 +5284,13 @@
         </p:nvCxnSpPr>
         <p:spPr>
           <a:xfrm>
-            <a:off x="6355080.0" y="1627632"/>
-            <a:ext cx="822960.0" cy="0"/>
+            <a:off x="1618488" y="1719072"/>
+            <a:ext cx="0" cy="320040"/>
           </a:xfrm>
           <a:prstGeom prst="line">
             <a:avLst/>
           </a:prstGeom>
-          <a:ln w="15240">
+          <a:ln w="14604">
             <a:solidFill>
               <a:srgbClr val="D8B87A"/>
             </a:solidFill>
@@ -5309,92 +5311,76 @@
           </a:fontRef>
         </p:style>
       </p:cxnSp>
-      <p:sp>
-        <p:nvSpPr>
-          <p:cNvPr id="35" name="Diamond 34"/>
-          <p:cNvSpPr/>
-          <p:nvPr/>
-        </p:nvSpPr>
-        <p:spPr>
-          <a:xfrm>
-            <a:off x="4800600" y="1581912"/>
-            <a:ext cx="91440" cy="91440"/>
-          </a:xfrm>
-          <a:prstGeom prst="diamond">
-            <a:avLst/>
-          </a:prstGeom>
-          <a:solidFill>
-            <a:srgbClr val="D8B87A"/>
-          </a:solidFill>
-          <a:ln>
-            <a:noFill/>
-          </a:ln>
-        </p:spPr>
-        <p:style>
-          <a:lnRef idx="1">
-            <a:schemeClr val="accent1"/>
-          </a:lnRef>
-          <a:fillRef idx="3">
-            <a:schemeClr val="accent1"/>
-          </a:fillRef>
-          <a:effectRef idx="2">
-            <a:schemeClr val="accent1"/>
-          </a:effectRef>
-          <a:fontRef idx="minor">
-            <a:schemeClr val="lt1"/>
-          </a:fontRef>
-        </p:style>
-        <p:txBody>
-          <a:bodyPr rtlCol="0" anchor="ctr"/>
-          <a:lstStyle/>
-          <a:p>
-            <a:pPr algn="ctr"/>
-          </a:p>
-        </p:txBody>
-      </p:sp>
-      <p:sp>
-        <p:nvSpPr>
-          <p:cNvPr id="36" name="Diamond 35"/>
-          <p:cNvSpPr/>
-          <p:nvPr/>
-        </p:nvSpPr>
-        <p:spPr>
-          <a:xfrm>
-            <a:off x="7269480" y="1581912"/>
-            <a:ext cx="91440" cy="91440"/>
-          </a:xfrm>
-          <a:prstGeom prst="diamond">
-            <a:avLst/>
-          </a:prstGeom>
-          <a:solidFill>
-            <a:srgbClr val="D8B87A"/>
-          </a:solidFill>
-          <a:ln>
-            <a:noFill/>
-          </a:ln>
-        </p:spPr>
-        <p:style>
-          <a:lnRef idx="1">
-            <a:schemeClr val="accent1"/>
-          </a:lnRef>
-          <a:fillRef idx="3">
-            <a:schemeClr val="accent1"/>
-          </a:fillRef>
-          <a:effectRef idx="2">
-            <a:schemeClr val="accent1"/>
-          </a:effectRef>
-          <a:fontRef idx="minor">
-            <a:schemeClr val="lt1"/>
-          </a:fontRef>
-        </p:style>
-        <p:txBody>
-          <a:bodyPr rtlCol="0" anchor="ctr"/>
-          <a:lstStyle/>
-          <a:p>
-            <a:pPr algn="ctr"/>
-          </a:p>
-        </p:txBody>
-      </p:sp>
+      <p:cxnSp>
+        <p:nvCxnSpPr>
+          <p:cNvPr id="35" name="Connector 34"/>
+          <p:cNvCxnSpPr/>
+          <p:nvPr/>
+        </p:nvCxnSpPr>
+        <p:spPr>
+          <a:xfrm>
+            <a:off x="10222992" y="1719072"/>
+            <a:ext cx="320040" cy="0"/>
+          </a:xfrm>
+          <a:prstGeom prst="line">
+            <a:avLst/>
+          </a:prstGeom>
+          <a:ln w="14604">
+            <a:solidFill>
+              <a:srgbClr val="D8B87A"/>
+            </a:solidFill>
+          </a:ln>
+        </p:spPr>
+        <p:style>
+          <a:lnRef idx="2">
+            <a:schemeClr val="accent1"/>
+          </a:lnRef>
+          <a:fillRef idx="0">
+            <a:schemeClr val="accent1"/>
+          </a:fillRef>
+          <a:effectRef idx="1">
+            <a:schemeClr val="accent1"/>
+          </a:effectRef>
+          <a:fontRef idx="minor">
+            <a:schemeClr val="tx1"/>
+          </a:fontRef>
+        </p:style>
+      </p:cxnSp>
+      <p:cxnSp>
+        <p:nvCxnSpPr>
+          <p:cNvPr id="36" name="Connector 35"/>
+          <p:cNvCxnSpPr/>
+          <p:nvPr/>
+        </p:nvCxnSpPr>
+        <p:spPr>
+          <a:xfrm>
+            <a:off x="10543032" y="1719072"/>
+            <a:ext cx="0" cy="320040"/>
+          </a:xfrm>
+          <a:prstGeom prst="line">
+            <a:avLst/>
+          </a:prstGeom>
+          <a:ln w="14604">
+            <a:solidFill>
+              <a:srgbClr val="D8B87A"/>
+            </a:solidFill>
+          </a:ln>
+        </p:spPr>
+        <p:style>
+          <a:lnRef idx="2">
+            <a:schemeClr val="accent1"/>
+          </a:lnRef>
+          <a:fillRef idx="0">
+            <a:schemeClr val="accent1"/>
+          </a:fillRef>
+          <a:effectRef idx="1">
+            <a:schemeClr val="accent1"/>
+          </a:effectRef>
+          <a:fontRef idx="minor">
+            <a:schemeClr val="tx1"/>
+          </a:fontRef>
+        </p:style>
+      </p:cxnSp>
       <p:sp>
         <p:nvSpPr>
           <p:cNvPr id="37" name="TextBox 36"/>
@@ -5430,7 +5416,7 @@
                 </a:solidFill>
                 <a:latin typeface="Malgun Gothic"/>
               </a:rPr>
-              <a:t>8. 감사와 봉헌</a:t>
+              <a:t>7. 오늘의 말씀</a:t>
             </a:r>
           </a:p>
         </p:txBody>
@@ -5472,14 +5458,14 @@
       </p:cxnSp>
       <p:sp>
         <p:nvSpPr>
-          <p:cNvPr id="39" name="HYMN_3"/>
+          <p:cNvPr id="39" name="TextBox 38"/>
           <p:cNvSpPr txBox="1"/>
           <p:nvPr/>
         </p:nvSpPr>
         <p:spPr>
           <a:xfrm>
-            <a:off x="1691640" y="2331720"/>
-            <a:ext cx="8778240" cy="1554480"/>
+            <a:off x="1691640" y="960120"/>
+            <a:ext cx="8778240" cy="777240"/>
           </a:xfrm>
           <a:prstGeom prst="rect">
             <a:avLst/>
@@ -5499,52 +5485,57 @@
               </a:spcAft>
             </a:pPr>
             <a:r>
-              <a:rPr sz="4400" b="1">
+              <a:rPr sz="3600" b="1">
                 <a:solidFill>
                   <a:srgbClr val="FFF8F0"/>
                 </a:solidFill>
                 <a:latin typeface="Malgun Gothic"/>
               </a:rPr>
-              <a:t>{{HYMN_3}}</a:t>
+              <a:t>{{SCRIPTURE_REF}}</a:t>
             </a:r>
           </a:p>
         </p:txBody>
       </p:sp>
-      <p:cxnSp>
-        <p:nvCxnSpPr>
-          <p:cNvPr id="40" name="Connector 39"/>
-          <p:cNvCxnSpPr/>
-          <p:nvPr/>
-        </p:nvCxnSpPr>
-        <p:spPr>
-          <a:xfrm>
-            <a:off x="5394960.0" y="4160520"/>
-            <a:ext cx="1371600.0" cy="0"/>
-          </a:xfrm>
-          <a:prstGeom prst="line">
-            <a:avLst/>
-          </a:prstGeom>
-          <a:ln w="15240">
-            <a:solidFill>
-              <a:srgbClr val="D8B87A"/>
-            </a:solidFill>
-          </a:ln>
-        </p:spPr>
-        <p:style>
-          <a:lnRef idx="2">
-            <a:schemeClr val="accent1"/>
-          </a:lnRef>
-          <a:fillRef idx="0">
-            <a:schemeClr val="accent1"/>
-          </a:fillRef>
-          <a:effectRef idx="1">
-            <a:schemeClr val="accent1"/>
-          </a:effectRef>
-          <a:fontRef idx="minor">
-            <a:schemeClr val="tx1"/>
-          </a:fontRef>
-        </p:style>
-      </p:cxnSp>
+      <p:sp>
+        <p:nvSpPr>
+          <p:cNvPr id="40" name="BIBLE_TEXT_1"/>
+          <p:cNvSpPr txBox="1"/>
+          <p:nvPr/>
+        </p:nvSpPr>
+        <p:spPr>
+          <a:xfrm>
+            <a:off x="1691640" y="1828800"/>
+            <a:ext cx="8778240" cy="4297680"/>
+          </a:xfrm>
+          <a:prstGeom prst="rect">
+            <a:avLst/>
+          </a:prstGeom>
+          <a:noFill/>
+        </p:spPr>
+        <p:txBody>
+          <a:bodyPr wrap="square" anchor="t" lIns="18288" rIns="73152" tIns="18288" bIns="18288"/>
+          <a:lstStyle/>
+          <a:p>
+            <a:pPr algn="ctr">
+              <a:lnSpc>
+                <a:spcPct val="130000"/>
+              </a:lnSpc>
+              <a:spcAft>
+                <a:spcPts val="600"/>
+              </a:spcAft>
+            </a:pPr>
+            <a:r>
+              <a:rPr sz="2800" b="0">
+                <a:solidFill>
+                  <a:srgbClr val="FFF8F0"/>
+                </a:solidFill>
+                <a:latin typeface="Malgun Gothic"/>
+              </a:rPr>
+              <a:t>{{BIBLE_TEXT_1}}</a:t>
+            </a:r>
+          </a:p>
+        </p:txBody>
+      </p:sp>
     </p:spTree>
   </p:cSld>
   <p:clrMapOvr>
@@ -6864,13 +6855,13 @@
         </p:nvCxnSpPr>
         <p:spPr>
           <a:xfrm>
-            <a:off x="4663440.0" y="1627632"/>
-            <a:ext cx="274320.0" cy="0"/>
+            <a:off x="4800600.0" y="1874519"/>
+            <a:ext cx="914400.0" cy="0"/>
           </a:xfrm>
           <a:prstGeom prst="line">
             <a:avLst/>
           </a:prstGeom>
-          <a:ln w="14604">
+          <a:ln w="13970">
             <a:solidFill>
               <a:srgbClr val="D8B87A"/>
             </a:solidFill>
@@ -6899,113 +6890,8 @@
         </p:nvCxnSpPr>
         <p:spPr>
           <a:xfrm>
-            <a:off x="4800600.0" y="1490472"/>
-            <a:ext cx="0.0" cy="274320"/>
-          </a:xfrm>
-          <a:prstGeom prst="line">
-            <a:avLst/>
-          </a:prstGeom>
-          <a:ln w="14604">
-            <a:solidFill>
-              <a:srgbClr val="D8B87A"/>
-            </a:solidFill>
-          </a:ln>
-        </p:spPr>
-        <p:style>
-          <a:lnRef idx="2">
-            <a:schemeClr val="accent1"/>
-          </a:lnRef>
-          <a:fillRef idx="0">
-            <a:schemeClr val="accent1"/>
-          </a:fillRef>
-          <a:effectRef idx="1">
-            <a:schemeClr val="accent1"/>
-          </a:effectRef>
-          <a:fontRef idx="minor">
-            <a:schemeClr val="tx1"/>
-          </a:fontRef>
-        </p:style>
-      </p:cxnSp>
-      <p:cxnSp>
-        <p:nvCxnSpPr>
-          <p:cNvPr id="35" name="Connector 34"/>
-          <p:cNvCxnSpPr/>
-          <p:nvPr/>
-        </p:nvCxnSpPr>
-        <p:spPr>
-          <a:xfrm>
-            <a:off x="7223760.0" y="1627632"/>
-            <a:ext cx="274320.0" cy="0"/>
-          </a:xfrm>
-          <a:prstGeom prst="line">
-            <a:avLst/>
-          </a:prstGeom>
-          <a:ln w="14604">
-            <a:solidFill>
-              <a:srgbClr val="D8B87A"/>
-            </a:solidFill>
-          </a:ln>
-        </p:spPr>
-        <p:style>
-          <a:lnRef idx="2">
-            <a:schemeClr val="accent1"/>
-          </a:lnRef>
-          <a:fillRef idx="0">
-            <a:schemeClr val="accent1"/>
-          </a:fillRef>
-          <a:effectRef idx="1">
-            <a:schemeClr val="accent1"/>
-          </a:effectRef>
-          <a:fontRef idx="minor">
-            <a:schemeClr val="tx1"/>
-          </a:fontRef>
-        </p:style>
-      </p:cxnSp>
-      <p:cxnSp>
-        <p:nvCxnSpPr>
-          <p:cNvPr id="36" name="Connector 35"/>
-          <p:cNvCxnSpPr/>
-          <p:nvPr/>
-        </p:nvCxnSpPr>
-        <p:spPr>
-          <a:xfrm>
-            <a:off x="7360920.0" y="1490472"/>
-            <a:ext cx="0.0" cy="274320"/>
-          </a:xfrm>
-          <a:prstGeom prst="line">
-            <a:avLst/>
-          </a:prstGeom>
-          <a:ln w="14604">
-            <a:solidFill>
-              <a:srgbClr val="D8B87A"/>
-            </a:solidFill>
-          </a:ln>
-        </p:spPr>
-        <p:style>
-          <a:lnRef idx="2">
-            <a:schemeClr val="accent1"/>
-          </a:lnRef>
-          <a:fillRef idx="0">
-            <a:schemeClr val="accent1"/>
-          </a:fillRef>
-          <a:effectRef idx="1">
-            <a:schemeClr val="accent1"/>
-          </a:effectRef>
-          <a:fontRef idx="minor">
-            <a:schemeClr val="tx1"/>
-          </a:fontRef>
-        </p:style>
-      </p:cxnSp>
-      <p:cxnSp>
-        <p:nvCxnSpPr>
-          <p:cNvPr id="37" name="Connector 36"/>
-          <p:cNvCxnSpPr/>
-          <p:nvPr/>
-        </p:nvCxnSpPr>
-        <p:spPr>
-          <a:xfrm>
-            <a:off x="5257800.0" y="6126480"/>
-            <a:ext cx="1645920.0" cy="0"/>
+            <a:off x="6446520.0" y="1874519"/>
+            <a:ext cx="914400.0" cy="0"/>
           </a:xfrm>
           <a:prstGeom prst="line">
             <a:avLst/>
@@ -7033,7 +6919,93 @@
       </p:cxnSp>
       <p:sp>
         <p:nvSpPr>
-          <p:cNvPr id="38" name="TextBox 37"/>
+          <p:cNvPr id="35" name="Diamond 34"/>
+          <p:cNvSpPr/>
+          <p:nvPr/>
+        </p:nvSpPr>
+        <p:spPr>
+          <a:xfrm>
+            <a:off x="4613148" y="1824227"/>
+            <a:ext cx="100584" cy="100584"/>
+          </a:xfrm>
+          <a:prstGeom prst="diamond">
+            <a:avLst/>
+          </a:prstGeom>
+          <a:solidFill>
+            <a:srgbClr val="D8B87A"/>
+          </a:solidFill>
+          <a:ln>
+            <a:noFill/>
+          </a:ln>
+        </p:spPr>
+        <p:style>
+          <a:lnRef idx="1">
+            <a:schemeClr val="accent1"/>
+          </a:lnRef>
+          <a:fillRef idx="3">
+            <a:schemeClr val="accent1"/>
+          </a:fillRef>
+          <a:effectRef idx="2">
+            <a:schemeClr val="accent1"/>
+          </a:effectRef>
+          <a:fontRef idx="minor">
+            <a:schemeClr val="lt1"/>
+          </a:fontRef>
+        </p:style>
+        <p:txBody>
+          <a:bodyPr rtlCol="0" anchor="ctr"/>
+          <a:lstStyle/>
+          <a:p>
+            <a:pPr algn="ctr"/>
+          </a:p>
+        </p:txBody>
+      </p:sp>
+      <p:sp>
+        <p:nvSpPr>
+          <p:cNvPr id="36" name="Diamond 35"/>
+          <p:cNvSpPr/>
+          <p:nvPr/>
+        </p:nvSpPr>
+        <p:spPr>
+          <a:xfrm>
+            <a:off x="7447788" y="1824227"/>
+            <a:ext cx="100584" cy="100584"/>
+          </a:xfrm>
+          <a:prstGeom prst="diamond">
+            <a:avLst/>
+          </a:prstGeom>
+          <a:solidFill>
+            <a:srgbClr val="D8B87A"/>
+          </a:solidFill>
+          <a:ln>
+            <a:noFill/>
+          </a:ln>
+        </p:spPr>
+        <p:style>
+          <a:lnRef idx="1">
+            <a:schemeClr val="accent1"/>
+          </a:lnRef>
+          <a:fillRef idx="3">
+            <a:schemeClr val="accent1"/>
+          </a:fillRef>
+          <a:effectRef idx="2">
+            <a:schemeClr val="accent1"/>
+          </a:effectRef>
+          <a:fontRef idx="minor">
+            <a:schemeClr val="lt1"/>
+          </a:fontRef>
+        </p:style>
+        <p:txBody>
+          <a:bodyPr rtlCol="0" anchor="ctr"/>
+          <a:lstStyle/>
+          <a:p>
+            <a:pPr algn="ctr"/>
+          </a:p>
+        </p:txBody>
+      </p:sp>
+      <p:sp>
+        <p:nvSpPr>
+          <p:cNvPr id="37" name="TextBox 36"/>
           <p:cNvSpPr txBox="1"/>
           <p:nvPr/>
         </p:nvSpPr>
@@ -7066,14 +7038,14 @@
                 </a:solidFill>
                 <a:latin typeface="Malgun Gothic"/>
               </a:rPr>
-              <a:t>9. 축도</a:t>
+              <a:t>설교제목</a:t>
             </a:r>
           </a:p>
         </p:txBody>
       </p:sp>
       <p:cxnSp>
         <p:nvCxnSpPr>
-          <p:cNvPr id="39" name="Connector 38"/>
+          <p:cNvPr id="38" name="Connector 37"/>
           <p:cNvCxnSpPr/>
           <p:nvPr/>
         </p:nvCxnSpPr>
@@ -7108,14 +7080,14 @@
       </p:cxnSp>
       <p:sp>
         <p:nvSpPr>
-          <p:cNvPr id="40" name="TextBox 39"/>
+          <p:cNvPr id="39" name="SERMON_TITLE"/>
           <p:cNvSpPr txBox="1"/>
           <p:nvPr/>
         </p:nvSpPr>
         <p:spPr>
           <a:xfrm>
-            <a:off x="1691640" y="960120"/>
-            <a:ext cx="8778240" cy="777240"/>
+            <a:off x="1691640" y="2240280"/>
+            <a:ext cx="8778240" cy="2011680"/>
           </a:xfrm>
           <a:prstGeom prst="rect">
             <a:avLst/>
@@ -7135,27 +7107,27 @@
               </a:spcAft>
             </a:pPr>
             <a:r>
-              <a:rPr sz="3600" b="1">
+              <a:rPr sz="5200" b="1">
                 <a:solidFill>
                   <a:srgbClr val="FFF8F0"/>
                 </a:solidFill>
                 <a:latin typeface="Malgun Gothic"/>
               </a:rPr>
-              <a:t>축도</a:t>
+              <a:t>{{SERMON_TITLE}}</a:t>
             </a:r>
           </a:p>
         </p:txBody>
       </p:sp>
       <p:sp>
         <p:nvSpPr>
-          <p:cNvPr id="41" name="BENEDICTION_BODY"/>
+          <p:cNvPr id="40" name="SERMON_SUBTITLE"/>
           <p:cNvSpPr txBox="1"/>
           <p:nvPr/>
         </p:nvSpPr>
         <p:spPr>
           <a:xfrm>
-            <a:off x="1691640" y="1828800"/>
-            <a:ext cx="8778240" cy="4297680"/>
+            <a:off x="1691640" y="4572000"/>
+            <a:ext cx="8778240" cy="365760"/>
           </a:xfrm>
           <a:prstGeom prst="rect">
             <a:avLst/>
@@ -7168,20 +7140,95 @@
           <a:p>
             <a:pPr algn="ctr">
               <a:lnSpc>
-                <a:spcPct val="130000"/>
+                <a:spcPct val="115000"/>
               </a:lnSpc>
               <a:spcAft>
-                <a:spcPts val="600"/>
+                <a:spcPts val="0"/>
               </a:spcAft>
             </a:pPr>
             <a:r>
-              <a:rPr sz="2800" b="0">
+              <a:rPr sz="2200" b="0">
                 <a:solidFill>
-                  <a:srgbClr val="FFF8F0"/>
+                  <a:srgbClr val="B6C0CA"/>
                 </a:solidFill>
                 <a:latin typeface="Malgun Gothic"/>
               </a:rPr>
-              <a:t>{{BENEDICTION_BODY}}</a:t>
+              <a:t>{{SERMON_SUBTITLE}}</a:t>
+            </a:r>
+          </a:p>
+        </p:txBody>
+      </p:sp>
+      <p:cxnSp>
+        <p:nvCxnSpPr>
+          <p:cNvPr id="41" name="Connector 40"/>
+          <p:cNvCxnSpPr/>
+          <p:nvPr/>
+        </p:nvCxnSpPr>
+        <p:spPr>
+          <a:xfrm>
+            <a:off x="5349240.0" y="5074920"/>
+            <a:ext cx="1463040.0" cy="0"/>
+          </a:xfrm>
+          <a:prstGeom prst="line">
+            <a:avLst/>
+          </a:prstGeom>
+          <a:ln w="15240">
+            <a:solidFill>
+              <a:srgbClr val="D8B87A"/>
+            </a:solidFill>
+          </a:ln>
+        </p:spPr>
+        <p:style>
+          <a:lnRef idx="2">
+            <a:schemeClr val="accent1"/>
+          </a:lnRef>
+          <a:fillRef idx="0">
+            <a:schemeClr val="accent1"/>
+          </a:fillRef>
+          <a:effectRef idx="1">
+            <a:schemeClr val="accent1"/>
+          </a:effectRef>
+          <a:fontRef idx="minor">
+            <a:schemeClr val="tx1"/>
+          </a:fontRef>
+        </p:style>
+      </p:cxnSp>
+      <p:sp>
+        <p:nvSpPr>
+          <p:cNvPr id="42" name="PREACHER"/>
+          <p:cNvSpPr txBox="1"/>
+          <p:nvPr/>
+        </p:nvSpPr>
+        <p:spPr>
+          <a:xfrm>
+            <a:off x="1691640" y="5303520"/>
+            <a:ext cx="8778240" cy="365760"/>
+          </a:xfrm>
+          <a:prstGeom prst="rect">
+            <a:avLst/>
+          </a:prstGeom>
+          <a:noFill/>
+        </p:spPr>
+        <p:txBody>
+          <a:bodyPr wrap="square" anchor="t" lIns="18288" rIns="73152" tIns="18288" bIns="18288"/>
+          <a:lstStyle/>
+          <a:p>
+            <a:pPr algn="ctr">
+              <a:lnSpc>
+                <a:spcPct val="110000"/>
+              </a:lnSpc>
+              <a:spcAft>
+                <a:spcPts val="0"/>
+              </a:spcAft>
+            </a:pPr>
+            <a:r>
+              <a:rPr sz="2200" b="0">
+                <a:solidFill>
+                  <a:srgbClr val="B6C0CA"/>
+                </a:solidFill>
+                <a:latin typeface="Malgun Gothic"/>
+              </a:rPr>
+              <a:t>{{PREACHER}}</a:t>
             </a:r>
           </a:p>
         </p:txBody>
@@ -8497,18 +8544,88 @@
           </a:p>
         </p:txBody>
       </p:sp>
-      <p:sp>
-        <p:nvSpPr>
-          <p:cNvPr id="33" name="Rectangle 32"/>
-          <p:cNvSpPr/>
-          <p:nvPr/>
-        </p:nvSpPr>
-        <p:spPr>
-          <a:xfrm>
-            <a:off x="1691640" y="1572768"/>
-            <a:ext cx="8778240" cy="36576"/>
-          </a:xfrm>
-          <a:prstGeom prst="rect">
+      <p:cxnSp>
+        <p:nvCxnSpPr>
+          <p:cNvPr id="33" name="Connector 32"/>
+          <p:cNvCxnSpPr/>
+          <p:nvPr/>
+        </p:nvCxnSpPr>
+        <p:spPr>
+          <a:xfrm>
+            <a:off x="4983480.0" y="1627632"/>
+            <a:ext cx="822960.0" cy="0"/>
+          </a:xfrm>
+          <a:prstGeom prst="line">
+            <a:avLst/>
+          </a:prstGeom>
+          <a:ln w="15240">
+            <a:solidFill>
+              <a:srgbClr val="D8B87A"/>
+            </a:solidFill>
+          </a:ln>
+        </p:spPr>
+        <p:style>
+          <a:lnRef idx="2">
+            <a:schemeClr val="accent1"/>
+          </a:lnRef>
+          <a:fillRef idx="0">
+            <a:schemeClr val="accent1"/>
+          </a:fillRef>
+          <a:effectRef idx="1">
+            <a:schemeClr val="accent1"/>
+          </a:effectRef>
+          <a:fontRef idx="minor">
+            <a:schemeClr val="tx1"/>
+          </a:fontRef>
+        </p:style>
+      </p:cxnSp>
+      <p:cxnSp>
+        <p:nvCxnSpPr>
+          <p:cNvPr id="34" name="Connector 33"/>
+          <p:cNvCxnSpPr/>
+          <p:nvPr/>
+        </p:nvCxnSpPr>
+        <p:spPr>
+          <a:xfrm>
+            <a:off x="6355080.0" y="1627632"/>
+            <a:ext cx="822960.0" cy="0"/>
+          </a:xfrm>
+          <a:prstGeom prst="line">
+            <a:avLst/>
+          </a:prstGeom>
+          <a:ln w="15240">
+            <a:solidFill>
+              <a:srgbClr val="D8B87A"/>
+            </a:solidFill>
+          </a:ln>
+        </p:spPr>
+        <p:style>
+          <a:lnRef idx="2">
+            <a:schemeClr val="accent1"/>
+          </a:lnRef>
+          <a:fillRef idx="0">
+            <a:schemeClr val="accent1"/>
+          </a:fillRef>
+          <a:effectRef idx="1">
+            <a:schemeClr val="accent1"/>
+          </a:effectRef>
+          <a:fontRef idx="minor">
+            <a:schemeClr val="tx1"/>
+          </a:fontRef>
+        </p:style>
+      </p:cxnSp>
+      <p:sp>
+        <p:nvSpPr>
+          <p:cNvPr id="35" name="Diamond 34"/>
+          <p:cNvSpPr/>
+          <p:nvPr/>
+        </p:nvSpPr>
+        <p:spPr>
+          <a:xfrm>
+            <a:off x="4800600" y="1581912"/>
+            <a:ext cx="91440" cy="91440"/>
+          </a:xfrm>
+          <a:prstGeom prst="diamond">
             <a:avLst/>
           </a:prstGeom>
           <a:solidFill>
@@ -8542,7 +8659,50 @@
       </p:sp>
       <p:sp>
         <p:nvSpPr>
-          <p:cNvPr id="34" name="TextBox 33"/>
+          <p:cNvPr id="36" name="Diamond 35"/>
+          <p:cNvSpPr/>
+          <p:nvPr/>
+        </p:nvSpPr>
+        <p:spPr>
+          <a:xfrm>
+            <a:off x="7269480" y="1581912"/>
+            <a:ext cx="91440" cy="91440"/>
+          </a:xfrm>
+          <a:prstGeom prst="diamond">
+            <a:avLst/>
+          </a:prstGeom>
+          <a:solidFill>
+            <a:srgbClr val="D8B87A"/>
+          </a:solidFill>
+          <a:ln>
+            <a:noFill/>
+          </a:ln>
+        </p:spPr>
+        <p:style>
+          <a:lnRef idx="1">
+            <a:schemeClr val="accent1"/>
+          </a:lnRef>
+          <a:fillRef idx="3">
+            <a:schemeClr val="accent1"/>
+          </a:fillRef>
+          <a:effectRef idx="2">
+            <a:schemeClr val="accent1"/>
+          </a:effectRef>
+          <a:fontRef idx="minor">
+            <a:schemeClr val="lt1"/>
+          </a:fontRef>
+        </p:style>
+        <p:txBody>
+          <a:bodyPr rtlCol="0" anchor="ctr"/>
+          <a:lstStyle/>
+          <a:p>
+            <a:pPr algn="ctr"/>
+          </a:p>
+        </p:txBody>
+      </p:sp>
+      <p:sp>
+        <p:nvSpPr>
+          <p:cNvPr id="37" name="TextBox 36"/>
           <p:cNvSpPr txBox="1"/>
           <p:nvPr/>
         </p:nvSpPr>
@@ -8575,11 +8735,1502 @@
                 </a:solidFill>
                 <a:latin typeface="Malgun Gothic"/>
               </a:rPr>
-              <a:t>소식 · 광고</a:t>
+              <a:t>9. 감사와 봉헌</a:t>
             </a:r>
           </a:p>
         </p:txBody>
       </p:sp>
+      <p:cxnSp>
+        <p:nvCxnSpPr>
+          <p:cNvPr id="38" name="Connector 37"/>
+          <p:cNvCxnSpPr/>
+          <p:nvPr/>
+        </p:nvCxnSpPr>
+        <p:spPr>
+          <a:xfrm>
+            <a:off x="5257800.0" y="749808"/>
+            <a:ext cx="1645920.0" cy="0"/>
+          </a:xfrm>
+          <a:prstGeom prst="line">
+            <a:avLst/>
+          </a:prstGeom>
+          <a:ln w="17145">
+            <a:solidFill>
+              <a:srgbClr val="D8B87A"/>
+            </a:solidFill>
+          </a:ln>
+        </p:spPr>
+        <p:style>
+          <a:lnRef idx="2">
+            <a:schemeClr val="accent1"/>
+          </a:lnRef>
+          <a:fillRef idx="0">
+            <a:schemeClr val="accent1"/>
+          </a:fillRef>
+          <a:effectRef idx="1">
+            <a:schemeClr val="accent1"/>
+          </a:effectRef>
+          <a:fontRef idx="minor">
+            <a:schemeClr val="tx1"/>
+          </a:fontRef>
+        </p:style>
+      </p:cxnSp>
+      <p:sp>
+        <p:nvSpPr>
+          <p:cNvPr id="39" name="HYMN_3"/>
+          <p:cNvSpPr txBox="1"/>
+          <p:nvPr/>
+        </p:nvSpPr>
+        <p:spPr>
+          <a:xfrm>
+            <a:off x="1691640" y="2331720"/>
+            <a:ext cx="8778240" cy="1554480"/>
+          </a:xfrm>
+          <a:prstGeom prst="rect">
+            <a:avLst/>
+          </a:prstGeom>
+          <a:noFill/>
+        </p:spPr>
+        <p:txBody>
+          <a:bodyPr wrap="square" anchor="ctr" lIns="18288" rIns="73152" tIns="18288" bIns="18288"/>
+          <a:lstStyle/>
+          <a:p>
+            <a:pPr algn="ctr">
+              <a:lnSpc>
+                <a:spcPct val="115000"/>
+              </a:lnSpc>
+              <a:spcAft>
+                <a:spcPts val="0"/>
+              </a:spcAft>
+            </a:pPr>
+            <a:r>
+              <a:rPr sz="4400" b="1">
+                <a:solidFill>
+                  <a:srgbClr val="FFF8F0"/>
+                </a:solidFill>
+                <a:latin typeface="Malgun Gothic"/>
+              </a:rPr>
+              <a:t>{{HYMN_3}}</a:t>
+            </a:r>
+          </a:p>
+        </p:txBody>
+      </p:sp>
+      <p:cxnSp>
+        <p:nvCxnSpPr>
+          <p:cNvPr id="40" name="Connector 39"/>
+          <p:cNvCxnSpPr/>
+          <p:nvPr/>
+        </p:nvCxnSpPr>
+        <p:spPr>
+          <a:xfrm>
+            <a:off x="5394960.0" y="4160520"/>
+            <a:ext cx="1371600.0" cy="0"/>
+          </a:xfrm>
+          <a:prstGeom prst="line">
+            <a:avLst/>
+          </a:prstGeom>
+          <a:ln w="15240">
+            <a:solidFill>
+              <a:srgbClr val="D8B87A"/>
+            </a:solidFill>
+          </a:ln>
+        </p:spPr>
+        <p:style>
+          <a:lnRef idx="2">
+            <a:schemeClr val="accent1"/>
+          </a:lnRef>
+          <a:fillRef idx="0">
+            <a:schemeClr val="accent1"/>
+          </a:fillRef>
+          <a:effectRef idx="1">
+            <a:schemeClr val="accent1"/>
+          </a:effectRef>
+          <a:fontRef idx="minor">
+            <a:schemeClr val="tx1"/>
+          </a:fontRef>
+        </p:style>
+      </p:cxnSp>
+    </p:spTree>
+  </p:cSld>
+  <p:clrMapOvr>
+    <a:masterClrMapping/>
+  </p:clrMapOvr>
+</p:sld>
+</file>
+
+<file path=ppt/slides/slide13.xml><?xml version="1.0" encoding="utf-8"?>
+<p:sld xmlns:a="http://schemas.openxmlformats.org/drawingml/2006/main" xmlns:p="http://schemas.openxmlformats.org/presentationml/2006/main" xmlns:r="http://schemas.openxmlformats.org/officeDocument/2006/relationships">
+  <p:cSld>
+    <p:bg>
+      <p:bgPr>
+        <a:solidFill>
+          <a:srgbClr val="0E1218"/>
+        </a:solidFill>
+        <a:effectLst/>
+      </p:bgPr>
+    </p:bg>
+    <p:spTree>
+      <p:nvGrpSpPr>
+        <p:cNvPr id="1" name=""/>
+        <p:cNvGrpSpPr/>
+        <p:nvPr/>
+      </p:nvGrpSpPr>
+      <p:grpSpPr/>
+      <p:sp>
+        <p:nvSpPr>
+          <p:cNvPr id="2" name="Rectangle 1"/>
+          <p:cNvSpPr/>
+          <p:nvPr/>
+        </p:nvSpPr>
+        <p:spPr>
+          <a:xfrm>
+            <a:off x="0" y="0"/>
+            <a:ext cx="12191695" cy="2148840"/>
+          </a:xfrm>
+          <a:prstGeom prst="rect">
+            <a:avLst/>
+          </a:prstGeom>
+          <a:solidFill>
+            <a:srgbClr val="181F2A"/>
+          </a:solidFill>
+          <a:ln>
+            <a:noFill/>
+          </a:ln>
+        </p:spPr>
+        <p:style>
+          <a:lnRef idx="1">
+            <a:schemeClr val="accent1"/>
+          </a:lnRef>
+          <a:fillRef idx="3">
+            <a:schemeClr val="accent1"/>
+          </a:fillRef>
+          <a:effectRef idx="2">
+            <a:schemeClr val="accent1"/>
+          </a:effectRef>
+          <a:fontRef idx="minor">
+            <a:schemeClr val="lt1"/>
+          </a:fontRef>
+        </p:style>
+        <p:txBody>
+          <a:bodyPr rtlCol="0" anchor="ctr"/>
+          <a:lstStyle/>
+          <a:p>
+            <a:pPr algn="ctr"/>
+          </a:p>
+        </p:txBody>
+      </p:sp>
+      <p:sp>
+        <p:nvSpPr>
+          <p:cNvPr id="3" name="Rectangle 2"/>
+          <p:cNvSpPr/>
+          <p:nvPr/>
+        </p:nvSpPr>
+        <p:spPr>
+          <a:xfrm>
+            <a:off x="0" y="1965960"/>
+            <a:ext cx="12191695" cy="2651760"/>
+          </a:xfrm>
+          <a:prstGeom prst="rect">
+            <a:avLst/>
+          </a:prstGeom>
+          <a:solidFill>
+            <a:srgbClr val="151C26"/>
+          </a:solidFill>
+          <a:ln>
+            <a:noFill/>
+          </a:ln>
+        </p:spPr>
+        <p:style>
+          <a:lnRef idx="1">
+            <a:schemeClr val="accent1"/>
+          </a:lnRef>
+          <a:fillRef idx="3">
+            <a:schemeClr val="accent1"/>
+          </a:fillRef>
+          <a:effectRef idx="2">
+            <a:schemeClr val="accent1"/>
+          </a:effectRef>
+          <a:fontRef idx="minor">
+            <a:schemeClr val="lt1"/>
+          </a:fontRef>
+        </p:style>
+        <p:txBody>
+          <a:bodyPr rtlCol="0" anchor="ctr"/>
+          <a:lstStyle/>
+          <a:p>
+            <a:pPr algn="ctr"/>
+          </a:p>
+        </p:txBody>
+      </p:sp>
+      <p:sp>
+        <p:nvSpPr>
+          <p:cNvPr id="4" name="Rectangle 3"/>
+          <p:cNvSpPr/>
+          <p:nvPr/>
+        </p:nvSpPr>
+        <p:spPr>
+          <a:xfrm>
+            <a:off x="0" y="5943600"/>
+            <a:ext cx="12191695" cy="914400"/>
+          </a:xfrm>
+          <a:prstGeom prst="rect">
+            <a:avLst/>
+          </a:prstGeom>
+          <a:solidFill>
+            <a:srgbClr val="0A0D12"/>
+          </a:solidFill>
+          <a:ln>
+            <a:noFill/>
+          </a:ln>
+        </p:spPr>
+        <p:style>
+          <a:lnRef idx="1">
+            <a:schemeClr val="accent1"/>
+          </a:lnRef>
+          <a:fillRef idx="3">
+            <a:schemeClr val="accent1"/>
+          </a:fillRef>
+          <a:effectRef idx="2">
+            <a:schemeClr val="accent1"/>
+          </a:effectRef>
+          <a:fontRef idx="minor">
+            <a:schemeClr val="lt1"/>
+          </a:fontRef>
+        </p:style>
+        <p:txBody>
+          <a:bodyPr rtlCol="0" anchor="ctr"/>
+          <a:lstStyle/>
+          <a:p>
+            <a:pPr algn="ctr"/>
+          </a:p>
+        </p:txBody>
+      </p:sp>
+      <p:sp>
+        <p:nvSpPr>
+          <p:cNvPr id="5" name="Rectangle 4"/>
+          <p:cNvSpPr/>
+          <p:nvPr/>
+        </p:nvSpPr>
+        <p:spPr>
+          <a:xfrm>
+            <a:off x="1371600" y="256032"/>
+            <a:ext cx="9418320" cy="6263640"/>
+          </a:xfrm>
+          <a:prstGeom prst="rect">
+            <a:avLst/>
+          </a:prstGeom>
+          <a:solidFill>
+            <a:srgbClr val="1A232E"/>
+          </a:solidFill>
+          <a:ln>
+            <a:noFill/>
+          </a:ln>
+        </p:spPr>
+        <p:style>
+          <a:lnRef idx="1">
+            <a:schemeClr val="accent1"/>
+          </a:lnRef>
+          <a:fillRef idx="3">
+            <a:schemeClr val="accent1"/>
+          </a:fillRef>
+          <a:effectRef idx="2">
+            <a:schemeClr val="accent1"/>
+          </a:effectRef>
+          <a:fontRef idx="minor">
+            <a:schemeClr val="lt1"/>
+          </a:fontRef>
+        </p:style>
+        <p:txBody>
+          <a:bodyPr rtlCol="0" anchor="ctr"/>
+          <a:lstStyle/>
+          <a:p>
+            <a:pPr algn="ctr"/>
+          </a:p>
+        </p:txBody>
+      </p:sp>
+      <p:sp>
+        <p:nvSpPr>
+          <p:cNvPr id="6" name="Rectangle 5"/>
+          <p:cNvSpPr/>
+          <p:nvPr/>
+        </p:nvSpPr>
+        <p:spPr>
+          <a:xfrm>
+            <a:off x="0" y="0"/>
+            <a:ext cx="128016" cy="6858000"/>
+          </a:xfrm>
+          <a:prstGeom prst="rect">
+            <a:avLst/>
+          </a:prstGeom>
+          <a:solidFill>
+            <a:srgbClr val="D8B87A"/>
+          </a:solidFill>
+          <a:ln>
+            <a:noFill/>
+          </a:ln>
+        </p:spPr>
+        <p:style>
+          <a:lnRef idx="1">
+            <a:schemeClr val="accent1"/>
+          </a:lnRef>
+          <a:fillRef idx="3">
+            <a:schemeClr val="accent1"/>
+          </a:fillRef>
+          <a:effectRef idx="2">
+            <a:schemeClr val="accent1"/>
+          </a:effectRef>
+          <a:fontRef idx="minor">
+            <a:schemeClr val="lt1"/>
+          </a:fontRef>
+        </p:style>
+        <p:txBody>
+          <a:bodyPr rtlCol="0" anchor="ctr"/>
+          <a:lstStyle/>
+          <a:p>
+            <a:pPr algn="ctr"/>
+          </a:p>
+        </p:txBody>
+      </p:sp>
+      <p:sp>
+        <p:nvSpPr>
+          <p:cNvPr id="7" name="Rectangle 6"/>
+          <p:cNvSpPr/>
+          <p:nvPr/>
+        </p:nvSpPr>
+        <p:spPr>
+          <a:xfrm>
+            <a:off x="128016" y="0"/>
+            <a:ext cx="82296" cy="6858000"/>
+          </a:xfrm>
+          <a:prstGeom prst="rect">
+            <a:avLst/>
+          </a:prstGeom>
+          <a:solidFill>
+            <a:srgbClr val="7E9E90"/>
+          </a:solidFill>
+          <a:ln>
+            <a:noFill/>
+          </a:ln>
+        </p:spPr>
+        <p:style>
+          <a:lnRef idx="1">
+            <a:schemeClr val="accent1"/>
+          </a:lnRef>
+          <a:fillRef idx="3">
+            <a:schemeClr val="accent1"/>
+          </a:fillRef>
+          <a:effectRef idx="2">
+            <a:schemeClr val="accent1"/>
+          </a:effectRef>
+          <a:fontRef idx="minor">
+            <a:schemeClr val="lt1"/>
+          </a:fontRef>
+        </p:style>
+        <p:txBody>
+          <a:bodyPr rtlCol="0" anchor="ctr"/>
+          <a:lstStyle/>
+          <a:p>
+            <a:pPr algn="ctr"/>
+          </a:p>
+        </p:txBody>
+      </p:sp>
+      <p:sp>
+        <p:nvSpPr>
+          <p:cNvPr id="8" name="Rectangle 7"/>
+          <p:cNvSpPr/>
+          <p:nvPr/>
+        </p:nvSpPr>
+        <p:spPr>
+          <a:xfrm>
+            <a:off x="11978640" y="0"/>
+            <a:ext cx="91440" cy="6858000"/>
+          </a:xfrm>
+          <a:prstGeom prst="rect">
+            <a:avLst/>
+          </a:prstGeom>
+          <a:solidFill>
+            <a:srgbClr val="C48A94"/>
+          </a:solidFill>
+          <a:ln>
+            <a:noFill/>
+          </a:ln>
+        </p:spPr>
+        <p:style>
+          <a:lnRef idx="1">
+            <a:schemeClr val="accent1"/>
+          </a:lnRef>
+          <a:fillRef idx="3">
+            <a:schemeClr val="accent1"/>
+          </a:fillRef>
+          <a:effectRef idx="2">
+            <a:schemeClr val="accent1"/>
+          </a:effectRef>
+          <a:fontRef idx="minor">
+            <a:schemeClr val="lt1"/>
+          </a:fontRef>
+        </p:style>
+        <p:txBody>
+          <a:bodyPr rtlCol="0" anchor="ctr"/>
+          <a:lstStyle/>
+          <a:p>
+            <a:pPr algn="ctr"/>
+          </a:p>
+        </p:txBody>
+      </p:sp>
+      <p:sp>
+        <p:nvSpPr>
+          <p:cNvPr id="9" name="Rectangle 8"/>
+          <p:cNvSpPr/>
+          <p:nvPr/>
+        </p:nvSpPr>
+        <p:spPr>
+          <a:xfrm>
+            <a:off x="12070080" y="0"/>
+            <a:ext cx="118872" cy="6858000"/>
+          </a:xfrm>
+          <a:prstGeom prst="rect">
+            <a:avLst/>
+          </a:prstGeom>
+          <a:solidFill>
+            <a:srgbClr val="8E5E6A"/>
+          </a:solidFill>
+          <a:ln>
+            <a:noFill/>
+          </a:ln>
+        </p:spPr>
+        <p:style>
+          <a:lnRef idx="1">
+            <a:schemeClr val="accent1"/>
+          </a:lnRef>
+          <a:fillRef idx="3">
+            <a:schemeClr val="accent1"/>
+          </a:fillRef>
+          <a:effectRef idx="2">
+            <a:schemeClr val="accent1"/>
+          </a:effectRef>
+          <a:fontRef idx="minor">
+            <a:schemeClr val="lt1"/>
+          </a:fontRef>
+        </p:style>
+        <p:txBody>
+          <a:bodyPr rtlCol="0" anchor="ctr"/>
+          <a:lstStyle/>
+          <a:p>
+            <a:pPr algn="ctr"/>
+          </a:p>
+        </p:txBody>
+      </p:sp>
+      <p:cxnSp>
+        <p:nvCxnSpPr>
+          <p:cNvPr id="10" name="Connector 9"/>
+          <p:cNvCxnSpPr/>
+          <p:nvPr/>
+        </p:nvCxnSpPr>
+        <p:spPr>
+          <a:xfrm>
+            <a:off x="1554480" y="292608"/>
+            <a:ext cx="9052560" cy="0"/>
+          </a:xfrm>
+          <a:prstGeom prst="line">
+            <a:avLst/>
+          </a:prstGeom>
+          <a:ln w="13970">
+            <a:solidFill>
+              <a:srgbClr val="D8B87A"/>
+            </a:solidFill>
+          </a:ln>
+        </p:spPr>
+        <p:style>
+          <a:lnRef idx="2">
+            <a:schemeClr val="accent1"/>
+          </a:lnRef>
+          <a:fillRef idx="0">
+            <a:schemeClr val="accent1"/>
+          </a:fillRef>
+          <a:effectRef idx="1">
+            <a:schemeClr val="accent1"/>
+          </a:effectRef>
+          <a:fontRef idx="minor">
+            <a:schemeClr val="tx1"/>
+          </a:fontRef>
+        </p:style>
+      </p:cxnSp>
+      <p:cxnSp>
+        <p:nvCxnSpPr>
+          <p:cNvPr id="11" name="Connector 10"/>
+          <p:cNvCxnSpPr/>
+          <p:nvPr/>
+        </p:nvCxnSpPr>
+        <p:spPr>
+          <a:xfrm>
+            <a:off x="1554480" y="6446520"/>
+            <a:ext cx="9052560" cy="0"/>
+          </a:xfrm>
+          <a:prstGeom prst="line">
+            <a:avLst/>
+          </a:prstGeom>
+          <a:ln w="13970">
+            <a:solidFill>
+              <a:srgbClr val="D8B87A"/>
+            </a:solidFill>
+          </a:ln>
+        </p:spPr>
+        <p:style>
+          <a:lnRef idx="2">
+            <a:schemeClr val="accent1"/>
+          </a:lnRef>
+          <a:fillRef idx="0">
+            <a:schemeClr val="accent1"/>
+          </a:fillRef>
+          <a:effectRef idx="1">
+            <a:schemeClr val="accent1"/>
+          </a:effectRef>
+          <a:fontRef idx="minor">
+            <a:schemeClr val="tx1"/>
+          </a:fontRef>
+        </p:style>
+      </p:cxnSp>
+      <p:sp>
+        <p:nvSpPr>
+          <p:cNvPr id="12" name="Rectangle 11"/>
+          <p:cNvSpPr/>
+          <p:nvPr/>
+        </p:nvSpPr>
+        <p:spPr>
+          <a:xfrm>
+            <a:off x="237744" y="6565392"/>
+            <a:ext cx="11951208" cy="292608"/>
+          </a:xfrm>
+          <a:prstGeom prst="rect">
+            <a:avLst/>
+          </a:prstGeom>
+          <a:solidFill>
+            <a:srgbClr val="0A0D12"/>
+          </a:solidFill>
+          <a:ln>
+            <a:noFill/>
+          </a:ln>
+        </p:spPr>
+        <p:style>
+          <a:lnRef idx="1">
+            <a:schemeClr val="accent1"/>
+          </a:lnRef>
+          <a:fillRef idx="3">
+            <a:schemeClr val="accent1"/>
+          </a:fillRef>
+          <a:effectRef idx="2">
+            <a:schemeClr val="accent1"/>
+          </a:effectRef>
+          <a:fontRef idx="minor">
+            <a:schemeClr val="lt1"/>
+          </a:fontRef>
+        </p:style>
+        <p:txBody>
+          <a:bodyPr rtlCol="0" anchor="ctr"/>
+          <a:lstStyle/>
+          <a:p>
+            <a:pPr algn="ctr"/>
+          </a:p>
+        </p:txBody>
+      </p:sp>
+      <p:sp>
+        <p:nvSpPr>
+          <p:cNvPr id="13" name="Oval 12"/>
+          <p:cNvSpPr/>
+          <p:nvPr/>
+        </p:nvSpPr>
+        <p:spPr>
+          <a:xfrm>
+            <a:off x="654939" y="5891251"/>
+            <a:ext cx="116586" cy="116586"/>
+          </a:xfrm>
+          <a:prstGeom prst="ellipse">
+            <a:avLst/>
+          </a:prstGeom>
+          <a:solidFill>
+            <a:srgbClr val="D6A4AC"/>
+          </a:solidFill>
+          <a:ln>
+            <a:noFill/>
+          </a:ln>
+        </p:spPr>
+        <p:style>
+          <a:lnRef idx="1">
+            <a:schemeClr val="accent1"/>
+          </a:lnRef>
+          <a:fillRef idx="3">
+            <a:schemeClr val="accent1"/>
+          </a:fillRef>
+          <a:effectRef idx="2">
+            <a:schemeClr val="accent1"/>
+          </a:effectRef>
+          <a:fontRef idx="minor">
+            <a:schemeClr val="lt1"/>
+          </a:fontRef>
+        </p:style>
+        <p:txBody>
+          <a:bodyPr rtlCol="0" anchor="ctr"/>
+          <a:lstStyle/>
+          <a:p>
+            <a:pPr algn="ctr"/>
+          </a:p>
+        </p:txBody>
+      </p:sp>
+      <p:sp>
+        <p:nvSpPr>
+          <p:cNvPr id="14" name="Oval 13"/>
+          <p:cNvSpPr/>
+          <p:nvPr/>
+        </p:nvSpPr>
+        <p:spPr>
+          <a:xfrm>
+            <a:off x="732663" y="5953430"/>
+            <a:ext cx="116586" cy="116586"/>
+          </a:xfrm>
+          <a:prstGeom prst="ellipse">
+            <a:avLst/>
+          </a:prstGeom>
+          <a:solidFill>
+            <a:srgbClr val="D6A4AC"/>
+          </a:solidFill>
+          <a:ln>
+            <a:noFill/>
+          </a:ln>
+        </p:spPr>
+        <p:style>
+          <a:lnRef idx="1">
+            <a:schemeClr val="accent1"/>
+          </a:lnRef>
+          <a:fillRef idx="3">
+            <a:schemeClr val="accent1"/>
+          </a:fillRef>
+          <a:effectRef idx="2">
+            <a:schemeClr val="accent1"/>
+          </a:effectRef>
+          <a:fontRef idx="minor">
+            <a:schemeClr val="lt1"/>
+          </a:fontRef>
+        </p:style>
+        <p:txBody>
+          <a:bodyPr rtlCol="0" anchor="ctr"/>
+          <a:lstStyle/>
+          <a:p>
+            <a:pPr algn="ctr"/>
+          </a:p>
+        </p:txBody>
+      </p:sp>
+      <p:sp>
+        <p:nvSpPr>
+          <p:cNvPr id="15" name="Oval 14"/>
+          <p:cNvSpPr/>
+          <p:nvPr/>
+        </p:nvSpPr>
+        <p:spPr>
+          <a:xfrm>
+            <a:off x="709345" y="6046698"/>
+            <a:ext cx="116586" cy="116586"/>
+          </a:xfrm>
+          <a:prstGeom prst="ellipse">
+            <a:avLst/>
+          </a:prstGeom>
+          <a:solidFill>
+            <a:srgbClr val="D6A4AC"/>
+          </a:solidFill>
+          <a:ln>
+            <a:noFill/>
+          </a:ln>
+        </p:spPr>
+        <p:style>
+          <a:lnRef idx="1">
+            <a:schemeClr val="accent1"/>
+          </a:lnRef>
+          <a:fillRef idx="3">
+            <a:schemeClr val="accent1"/>
+          </a:fillRef>
+          <a:effectRef idx="2">
+            <a:schemeClr val="accent1"/>
+          </a:effectRef>
+          <a:fontRef idx="minor">
+            <a:schemeClr val="lt1"/>
+          </a:fontRef>
+        </p:style>
+        <p:txBody>
+          <a:bodyPr rtlCol="0" anchor="ctr"/>
+          <a:lstStyle/>
+          <a:p>
+            <a:pPr algn="ctr"/>
+          </a:p>
+        </p:txBody>
+      </p:sp>
+      <p:sp>
+        <p:nvSpPr>
+          <p:cNvPr id="16" name="Oval 15"/>
+          <p:cNvSpPr/>
+          <p:nvPr/>
+        </p:nvSpPr>
+        <p:spPr>
+          <a:xfrm>
+            <a:off x="600533" y="6046698"/>
+            <a:ext cx="116586" cy="116586"/>
+          </a:xfrm>
+          <a:prstGeom prst="ellipse">
+            <a:avLst/>
+          </a:prstGeom>
+          <a:solidFill>
+            <a:srgbClr val="D6A4AC"/>
+          </a:solidFill>
+          <a:ln>
+            <a:noFill/>
+          </a:ln>
+        </p:spPr>
+        <p:style>
+          <a:lnRef idx="1">
+            <a:schemeClr val="accent1"/>
+          </a:lnRef>
+          <a:fillRef idx="3">
+            <a:schemeClr val="accent1"/>
+          </a:fillRef>
+          <a:effectRef idx="2">
+            <a:schemeClr val="accent1"/>
+          </a:effectRef>
+          <a:fontRef idx="minor">
+            <a:schemeClr val="lt1"/>
+          </a:fontRef>
+        </p:style>
+        <p:txBody>
+          <a:bodyPr rtlCol="0" anchor="ctr"/>
+          <a:lstStyle/>
+          <a:p>
+            <a:pPr algn="ctr"/>
+          </a:p>
+        </p:txBody>
+      </p:sp>
+      <p:sp>
+        <p:nvSpPr>
+          <p:cNvPr id="17" name="Oval 16"/>
+          <p:cNvSpPr/>
+          <p:nvPr/>
+        </p:nvSpPr>
+        <p:spPr>
+          <a:xfrm>
+            <a:off x="577215" y="5953430"/>
+            <a:ext cx="116586" cy="116586"/>
+          </a:xfrm>
+          <a:prstGeom prst="ellipse">
+            <a:avLst/>
+          </a:prstGeom>
+          <a:solidFill>
+            <a:srgbClr val="D6A4AC"/>
+          </a:solidFill>
+          <a:ln>
+            <a:noFill/>
+          </a:ln>
+        </p:spPr>
+        <p:style>
+          <a:lnRef idx="1">
+            <a:schemeClr val="accent1"/>
+          </a:lnRef>
+          <a:fillRef idx="3">
+            <a:schemeClr val="accent1"/>
+          </a:fillRef>
+          <a:effectRef idx="2">
+            <a:schemeClr val="accent1"/>
+          </a:effectRef>
+          <a:fontRef idx="minor">
+            <a:schemeClr val="lt1"/>
+          </a:fontRef>
+        </p:style>
+        <p:txBody>
+          <a:bodyPr rtlCol="0" anchor="ctr"/>
+          <a:lstStyle/>
+          <a:p>
+            <a:pPr algn="ctr"/>
+          </a:p>
+        </p:txBody>
+      </p:sp>
+      <p:sp>
+        <p:nvSpPr>
+          <p:cNvPr id="18" name="Oval 17"/>
+          <p:cNvSpPr/>
+          <p:nvPr/>
+        </p:nvSpPr>
+        <p:spPr>
+          <a:xfrm>
+            <a:off x="670484" y="5992292"/>
+            <a:ext cx="85496" cy="85496"/>
+          </a:xfrm>
+          <a:prstGeom prst="ellipse">
+            <a:avLst/>
+          </a:prstGeom>
+          <a:solidFill>
+            <a:srgbClr val="C48A94"/>
+          </a:solidFill>
+          <a:ln>
+            <a:noFill/>
+          </a:ln>
+        </p:spPr>
+        <p:style>
+          <a:lnRef idx="1">
+            <a:schemeClr val="accent1"/>
+          </a:lnRef>
+          <a:fillRef idx="3">
+            <a:schemeClr val="accent1"/>
+          </a:fillRef>
+          <a:effectRef idx="2">
+            <a:schemeClr val="accent1"/>
+          </a:effectRef>
+          <a:fontRef idx="minor">
+            <a:schemeClr val="lt1"/>
+          </a:fontRef>
+        </p:style>
+        <p:txBody>
+          <a:bodyPr rtlCol="0" anchor="ctr"/>
+          <a:lstStyle/>
+          <a:p>
+            <a:pPr algn="ctr"/>
+          </a:p>
+        </p:txBody>
+      </p:sp>
+      <p:sp>
+        <p:nvSpPr>
+          <p:cNvPr id="19" name="Oval 18"/>
+          <p:cNvSpPr/>
+          <p:nvPr/>
+        </p:nvSpPr>
+        <p:spPr>
+          <a:xfrm>
+            <a:off x="798728" y="6073902"/>
+            <a:ext cx="108813" cy="54406"/>
+          </a:xfrm>
+          <a:prstGeom prst="ellipse">
+            <a:avLst/>
+          </a:prstGeom>
+          <a:solidFill>
+            <a:srgbClr val="7E9E90"/>
+          </a:solidFill>
+          <a:ln>
+            <a:noFill/>
+          </a:ln>
+        </p:spPr>
+        <p:style>
+          <a:lnRef idx="1">
+            <a:schemeClr val="accent1"/>
+          </a:lnRef>
+          <a:fillRef idx="3">
+            <a:schemeClr val="accent1"/>
+          </a:fillRef>
+          <a:effectRef idx="2">
+            <a:schemeClr val="accent1"/>
+          </a:effectRef>
+          <a:fontRef idx="minor">
+            <a:schemeClr val="lt1"/>
+          </a:fontRef>
+        </p:style>
+        <p:txBody>
+          <a:bodyPr rtlCol="0" anchor="ctr"/>
+          <a:lstStyle/>
+          <a:p>
+            <a:pPr algn="ctr"/>
+          </a:p>
+        </p:txBody>
+      </p:sp>
+      <p:sp>
+        <p:nvSpPr>
+          <p:cNvPr id="20" name="Oval 19"/>
+          <p:cNvSpPr/>
+          <p:nvPr/>
+        </p:nvSpPr>
+        <p:spPr>
+          <a:xfrm>
+            <a:off x="11389995" y="5891251"/>
+            <a:ext cx="116586" cy="116586"/>
+          </a:xfrm>
+          <a:prstGeom prst="ellipse">
+            <a:avLst/>
+          </a:prstGeom>
+          <a:solidFill>
+            <a:srgbClr val="D6A4AC"/>
+          </a:solidFill>
+          <a:ln>
+            <a:noFill/>
+          </a:ln>
+        </p:spPr>
+        <p:style>
+          <a:lnRef idx="1">
+            <a:schemeClr val="accent1"/>
+          </a:lnRef>
+          <a:fillRef idx="3">
+            <a:schemeClr val="accent1"/>
+          </a:fillRef>
+          <a:effectRef idx="2">
+            <a:schemeClr val="accent1"/>
+          </a:effectRef>
+          <a:fontRef idx="minor">
+            <a:schemeClr val="lt1"/>
+          </a:fontRef>
+        </p:style>
+        <p:txBody>
+          <a:bodyPr rtlCol="0" anchor="ctr"/>
+          <a:lstStyle/>
+          <a:p>
+            <a:pPr algn="ctr"/>
+          </a:p>
+        </p:txBody>
+      </p:sp>
+      <p:sp>
+        <p:nvSpPr>
+          <p:cNvPr id="21" name="Oval 20"/>
+          <p:cNvSpPr/>
+          <p:nvPr/>
+        </p:nvSpPr>
+        <p:spPr>
+          <a:xfrm>
+            <a:off x="11467719" y="5953430"/>
+            <a:ext cx="116586" cy="116586"/>
+          </a:xfrm>
+          <a:prstGeom prst="ellipse">
+            <a:avLst/>
+          </a:prstGeom>
+          <a:solidFill>
+            <a:srgbClr val="D6A4AC"/>
+          </a:solidFill>
+          <a:ln>
+            <a:noFill/>
+          </a:ln>
+        </p:spPr>
+        <p:style>
+          <a:lnRef idx="1">
+            <a:schemeClr val="accent1"/>
+          </a:lnRef>
+          <a:fillRef idx="3">
+            <a:schemeClr val="accent1"/>
+          </a:fillRef>
+          <a:effectRef idx="2">
+            <a:schemeClr val="accent1"/>
+          </a:effectRef>
+          <a:fontRef idx="minor">
+            <a:schemeClr val="lt1"/>
+          </a:fontRef>
+        </p:style>
+        <p:txBody>
+          <a:bodyPr rtlCol="0" anchor="ctr"/>
+          <a:lstStyle/>
+          <a:p>
+            <a:pPr algn="ctr"/>
+          </a:p>
+        </p:txBody>
+      </p:sp>
+      <p:sp>
+        <p:nvSpPr>
+          <p:cNvPr id="22" name="Oval 21"/>
+          <p:cNvSpPr/>
+          <p:nvPr/>
+        </p:nvSpPr>
+        <p:spPr>
+          <a:xfrm>
+            <a:off x="11444401" y="6046698"/>
+            <a:ext cx="116586" cy="116586"/>
+          </a:xfrm>
+          <a:prstGeom prst="ellipse">
+            <a:avLst/>
+          </a:prstGeom>
+          <a:solidFill>
+            <a:srgbClr val="D6A4AC"/>
+          </a:solidFill>
+          <a:ln>
+            <a:noFill/>
+          </a:ln>
+        </p:spPr>
+        <p:style>
+          <a:lnRef idx="1">
+            <a:schemeClr val="accent1"/>
+          </a:lnRef>
+          <a:fillRef idx="3">
+            <a:schemeClr val="accent1"/>
+          </a:fillRef>
+          <a:effectRef idx="2">
+            <a:schemeClr val="accent1"/>
+          </a:effectRef>
+          <a:fontRef idx="minor">
+            <a:schemeClr val="lt1"/>
+          </a:fontRef>
+        </p:style>
+        <p:txBody>
+          <a:bodyPr rtlCol="0" anchor="ctr"/>
+          <a:lstStyle/>
+          <a:p>
+            <a:pPr algn="ctr"/>
+          </a:p>
+        </p:txBody>
+      </p:sp>
+      <p:sp>
+        <p:nvSpPr>
+          <p:cNvPr id="23" name="Oval 22"/>
+          <p:cNvSpPr/>
+          <p:nvPr/>
+        </p:nvSpPr>
+        <p:spPr>
+          <a:xfrm>
+            <a:off x="11335589" y="6046698"/>
+            <a:ext cx="116586" cy="116586"/>
+          </a:xfrm>
+          <a:prstGeom prst="ellipse">
+            <a:avLst/>
+          </a:prstGeom>
+          <a:solidFill>
+            <a:srgbClr val="D6A4AC"/>
+          </a:solidFill>
+          <a:ln>
+            <a:noFill/>
+          </a:ln>
+        </p:spPr>
+        <p:style>
+          <a:lnRef idx="1">
+            <a:schemeClr val="accent1"/>
+          </a:lnRef>
+          <a:fillRef idx="3">
+            <a:schemeClr val="accent1"/>
+          </a:fillRef>
+          <a:effectRef idx="2">
+            <a:schemeClr val="accent1"/>
+          </a:effectRef>
+          <a:fontRef idx="minor">
+            <a:schemeClr val="lt1"/>
+          </a:fontRef>
+        </p:style>
+        <p:txBody>
+          <a:bodyPr rtlCol="0" anchor="ctr"/>
+          <a:lstStyle/>
+          <a:p>
+            <a:pPr algn="ctr"/>
+          </a:p>
+        </p:txBody>
+      </p:sp>
+      <p:sp>
+        <p:nvSpPr>
+          <p:cNvPr id="24" name="Oval 23"/>
+          <p:cNvSpPr/>
+          <p:nvPr/>
+        </p:nvSpPr>
+        <p:spPr>
+          <a:xfrm>
+            <a:off x="11312271" y="5953430"/>
+            <a:ext cx="116586" cy="116586"/>
+          </a:xfrm>
+          <a:prstGeom prst="ellipse">
+            <a:avLst/>
+          </a:prstGeom>
+          <a:solidFill>
+            <a:srgbClr val="D6A4AC"/>
+          </a:solidFill>
+          <a:ln>
+            <a:noFill/>
+          </a:ln>
+        </p:spPr>
+        <p:style>
+          <a:lnRef idx="1">
+            <a:schemeClr val="accent1"/>
+          </a:lnRef>
+          <a:fillRef idx="3">
+            <a:schemeClr val="accent1"/>
+          </a:fillRef>
+          <a:effectRef idx="2">
+            <a:schemeClr val="accent1"/>
+          </a:effectRef>
+          <a:fontRef idx="minor">
+            <a:schemeClr val="lt1"/>
+          </a:fontRef>
+        </p:style>
+        <p:txBody>
+          <a:bodyPr rtlCol="0" anchor="ctr"/>
+          <a:lstStyle/>
+          <a:p>
+            <a:pPr algn="ctr"/>
+          </a:p>
+        </p:txBody>
+      </p:sp>
+      <p:sp>
+        <p:nvSpPr>
+          <p:cNvPr id="25" name="Oval 24"/>
+          <p:cNvSpPr/>
+          <p:nvPr/>
+        </p:nvSpPr>
+        <p:spPr>
+          <a:xfrm>
+            <a:off x="11405540" y="5992292"/>
+            <a:ext cx="85496" cy="85496"/>
+          </a:xfrm>
+          <a:prstGeom prst="ellipse">
+            <a:avLst/>
+          </a:prstGeom>
+          <a:solidFill>
+            <a:srgbClr val="C48A94"/>
+          </a:solidFill>
+          <a:ln>
+            <a:noFill/>
+          </a:ln>
+        </p:spPr>
+        <p:style>
+          <a:lnRef idx="1">
+            <a:schemeClr val="accent1"/>
+          </a:lnRef>
+          <a:fillRef idx="3">
+            <a:schemeClr val="accent1"/>
+          </a:fillRef>
+          <a:effectRef idx="2">
+            <a:schemeClr val="accent1"/>
+          </a:effectRef>
+          <a:fontRef idx="minor">
+            <a:schemeClr val="lt1"/>
+          </a:fontRef>
+        </p:style>
+        <p:txBody>
+          <a:bodyPr rtlCol="0" anchor="ctr"/>
+          <a:lstStyle/>
+          <a:p>
+            <a:pPr algn="ctr"/>
+          </a:p>
+        </p:txBody>
+      </p:sp>
+      <p:sp>
+        <p:nvSpPr>
+          <p:cNvPr id="26" name="Oval 25"/>
+          <p:cNvSpPr/>
+          <p:nvPr/>
+        </p:nvSpPr>
+        <p:spPr>
+          <a:xfrm>
+            <a:off x="11533784" y="6073902"/>
+            <a:ext cx="108813" cy="54406"/>
+          </a:xfrm>
+          <a:prstGeom prst="ellipse">
+            <a:avLst/>
+          </a:prstGeom>
+          <a:solidFill>
+            <a:srgbClr val="7E9E90"/>
+          </a:solidFill>
+          <a:ln>
+            <a:noFill/>
+          </a:ln>
+        </p:spPr>
+        <p:style>
+          <a:lnRef idx="1">
+            <a:schemeClr val="accent1"/>
+          </a:lnRef>
+          <a:fillRef idx="3">
+            <a:schemeClr val="accent1"/>
+          </a:fillRef>
+          <a:effectRef idx="2">
+            <a:schemeClr val="accent1"/>
+          </a:effectRef>
+          <a:fontRef idx="minor">
+            <a:schemeClr val="lt1"/>
+          </a:fontRef>
+        </p:style>
+        <p:txBody>
+          <a:bodyPr rtlCol="0" anchor="ctr"/>
+          <a:lstStyle/>
+          <a:p>
+            <a:pPr algn="ctr"/>
+          </a:p>
+        </p:txBody>
+      </p:sp>
+      <p:cxnSp>
+        <p:nvCxnSpPr>
+          <p:cNvPr id="27" name="Connector 26"/>
+          <p:cNvCxnSpPr/>
+          <p:nvPr/>
+        </p:nvCxnSpPr>
+        <p:spPr>
+          <a:xfrm>
+            <a:off x="1600200" y="365760"/>
+            <a:ext cx="274320" cy="0"/>
+          </a:xfrm>
+          <a:prstGeom prst="line">
+            <a:avLst/>
+          </a:prstGeom>
+          <a:ln w="14604">
+            <a:solidFill>
+              <a:srgbClr val="D8B87A"/>
+            </a:solidFill>
+          </a:ln>
+        </p:spPr>
+        <p:style>
+          <a:lnRef idx="2">
+            <a:schemeClr val="accent1"/>
+          </a:lnRef>
+          <a:fillRef idx="0">
+            <a:schemeClr val="accent1"/>
+          </a:fillRef>
+          <a:effectRef idx="1">
+            <a:schemeClr val="accent1"/>
+          </a:effectRef>
+          <a:fontRef idx="minor">
+            <a:schemeClr val="tx1"/>
+          </a:fontRef>
+        </p:style>
+      </p:cxnSp>
+      <p:cxnSp>
+        <p:nvCxnSpPr>
+          <p:cNvPr id="28" name="Connector 27"/>
+          <p:cNvCxnSpPr/>
+          <p:nvPr/>
+        </p:nvCxnSpPr>
+        <p:spPr>
+          <a:xfrm>
+            <a:off x="1600200" y="365760"/>
+            <a:ext cx="0" cy="274320"/>
+          </a:xfrm>
+          <a:prstGeom prst="line">
+            <a:avLst/>
+          </a:prstGeom>
+          <a:ln w="14604">
+            <a:solidFill>
+              <a:srgbClr val="D8B87A"/>
+            </a:solidFill>
+          </a:ln>
+        </p:spPr>
+        <p:style>
+          <a:lnRef idx="2">
+            <a:schemeClr val="accent1"/>
+          </a:lnRef>
+          <a:fillRef idx="0">
+            <a:schemeClr val="accent1"/>
+          </a:fillRef>
+          <a:effectRef idx="1">
+            <a:schemeClr val="accent1"/>
+          </a:effectRef>
+          <a:fontRef idx="minor">
+            <a:schemeClr val="tx1"/>
+          </a:fontRef>
+        </p:style>
+      </p:cxnSp>
+      <p:cxnSp>
+        <p:nvCxnSpPr>
+          <p:cNvPr id="29" name="Connector 28"/>
+          <p:cNvCxnSpPr/>
+          <p:nvPr/>
+        </p:nvCxnSpPr>
+        <p:spPr>
+          <a:xfrm>
+            <a:off x="10287000" y="365760"/>
+            <a:ext cx="274320" cy="0"/>
+          </a:xfrm>
+          <a:prstGeom prst="line">
+            <a:avLst/>
+          </a:prstGeom>
+          <a:ln w="14604">
+            <a:solidFill>
+              <a:srgbClr val="D8B87A"/>
+            </a:solidFill>
+          </a:ln>
+        </p:spPr>
+        <p:style>
+          <a:lnRef idx="2">
+            <a:schemeClr val="accent1"/>
+          </a:lnRef>
+          <a:fillRef idx="0">
+            <a:schemeClr val="accent1"/>
+          </a:fillRef>
+          <a:effectRef idx="1">
+            <a:schemeClr val="accent1"/>
+          </a:effectRef>
+          <a:fontRef idx="minor">
+            <a:schemeClr val="tx1"/>
+          </a:fontRef>
+        </p:style>
+      </p:cxnSp>
+      <p:cxnSp>
+        <p:nvCxnSpPr>
+          <p:cNvPr id="30" name="Connector 29"/>
+          <p:cNvCxnSpPr/>
+          <p:nvPr/>
+        </p:nvCxnSpPr>
+        <p:spPr>
+          <a:xfrm>
+            <a:off x="10561320" y="365760"/>
+            <a:ext cx="0" cy="274320"/>
+          </a:xfrm>
+          <a:prstGeom prst="line">
+            <a:avLst/>
+          </a:prstGeom>
+          <a:ln w="14604">
+            <a:solidFill>
+              <a:srgbClr val="D8B87A"/>
+            </a:solidFill>
+          </a:ln>
+        </p:spPr>
+        <p:style>
+          <a:lnRef idx="2">
+            <a:schemeClr val="accent1"/>
+          </a:lnRef>
+          <a:fillRef idx="0">
+            <a:schemeClr val="accent1"/>
+          </a:fillRef>
+          <a:effectRef idx="1">
+            <a:schemeClr val="accent1"/>
+          </a:effectRef>
+          <a:fontRef idx="minor">
+            <a:schemeClr val="tx1"/>
+          </a:fontRef>
+        </p:style>
+      </p:cxnSp>
+      <p:sp>
+        <p:nvSpPr>
+          <p:cNvPr id="31" name="Diamond 30"/>
+          <p:cNvSpPr/>
+          <p:nvPr/>
+        </p:nvSpPr>
+        <p:spPr>
+          <a:xfrm>
+            <a:off x="1193292" y="3296412"/>
+            <a:ext cx="82296" cy="82296"/>
+          </a:xfrm>
+          <a:prstGeom prst="diamond">
+            <a:avLst/>
+          </a:prstGeom>
+          <a:solidFill>
+            <a:srgbClr val="D8B87A"/>
+          </a:solidFill>
+          <a:ln>
+            <a:noFill/>
+          </a:ln>
+        </p:spPr>
+        <p:style>
+          <a:lnRef idx="1">
+            <a:schemeClr val="accent1"/>
+          </a:lnRef>
+          <a:fillRef idx="3">
+            <a:schemeClr val="accent1"/>
+          </a:fillRef>
+          <a:effectRef idx="2">
+            <a:schemeClr val="accent1"/>
+          </a:effectRef>
+          <a:fontRef idx="minor">
+            <a:schemeClr val="lt1"/>
+          </a:fontRef>
+        </p:style>
+        <p:txBody>
+          <a:bodyPr rtlCol="0" anchor="ctr"/>
+          <a:lstStyle/>
+          <a:p>
+            <a:pPr algn="ctr"/>
+          </a:p>
+        </p:txBody>
+      </p:sp>
+      <p:sp>
+        <p:nvSpPr>
+          <p:cNvPr id="32" name="Diamond 31"/>
+          <p:cNvSpPr/>
+          <p:nvPr/>
+        </p:nvSpPr>
+        <p:spPr>
+          <a:xfrm>
+            <a:off x="10885932" y="3296412"/>
+            <a:ext cx="82296" cy="82296"/>
+          </a:xfrm>
+          <a:prstGeom prst="diamond">
+            <a:avLst/>
+          </a:prstGeom>
+          <a:solidFill>
+            <a:srgbClr val="D8B87A"/>
+          </a:solidFill>
+          <a:ln>
+            <a:noFill/>
+          </a:ln>
+        </p:spPr>
+        <p:style>
+          <a:lnRef idx="1">
+            <a:schemeClr val="accent1"/>
+          </a:lnRef>
+          <a:fillRef idx="3">
+            <a:schemeClr val="accent1"/>
+          </a:fillRef>
+          <a:effectRef idx="2">
+            <a:schemeClr val="accent1"/>
+          </a:effectRef>
+          <a:fontRef idx="minor">
+            <a:schemeClr val="lt1"/>
+          </a:fontRef>
+        </p:style>
+        <p:txBody>
+          <a:bodyPr rtlCol="0" anchor="ctr"/>
+          <a:lstStyle/>
+          <a:p>
+            <a:pPr algn="ctr"/>
+          </a:p>
+        </p:txBody>
+      </p:sp>
+      <p:cxnSp>
+        <p:nvCxnSpPr>
+          <p:cNvPr id="33" name="Connector 32"/>
+          <p:cNvCxnSpPr/>
+          <p:nvPr/>
+        </p:nvCxnSpPr>
+        <p:spPr>
+          <a:xfrm>
+            <a:off x="4663440.0" y="1627632"/>
+            <a:ext cx="274320.0" cy="0"/>
+          </a:xfrm>
+          <a:prstGeom prst="line">
+            <a:avLst/>
+          </a:prstGeom>
+          <a:ln w="14604">
+            <a:solidFill>
+              <a:srgbClr val="D8B87A"/>
+            </a:solidFill>
+          </a:ln>
+        </p:spPr>
+        <p:style>
+          <a:lnRef idx="2">
+            <a:schemeClr val="accent1"/>
+          </a:lnRef>
+          <a:fillRef idx="0">
+            <a:schemeClr val="accent1"/>
+          </a:fillRef>
+          <a:effectRef idx="1">
+            <a:schemeClr val="accent1"/>
+          </a:effectRef>
+          <a:fontRef idx="minor">
+            <a:schemeClr val="tx1"/>
+          </a:fontRef>
+        </p:style>
+      </p:cxnSp>
+      <p:cxnSp>
+        <p:nvCxnSpPr>
+          <p:cNvPr id="34" name="Connector 33"/>
+          <p:cNvCxnSpPr/>
+          <p:nvPr/>
+        </p:nvCxnSpPr>
+        <p:spPr>
+          <a:xfrm>
+            <a:off x="4800600.0" y="1490472"/>
+            <a:ext cx="0.0" cy="274320"/>
+          </a:xfrm>
+          <a:prstGeom prst="line">
+            <a:avLst/>
+          </a:prstGeom>
+          <a:ln w="14604">
+            <a:solidFill>
+              <a:srgbClr val="D8B87A"/>
+            </a:solidFill>
+          </a:ln>
+        </p:spPr>
+        <p:style>
+          <a:lnRef idx="2">
+            <a:schemeClr val="accent1"/>
+          </a:lnRef>
+          <a:fillRef idx="0">
+            <a:schemeClr val="accent1"/>
+          </a:fillRef>
+          <a:effectRef idx="1">
+            <a:schemeClr val="accent1"/>
+          </a:effectRef>
+          <a:fontRef idx="minor">
+            <a:schemeClr val="tx1"/>
+          </a:fontRef>
+        </p:style>
+      </p:cxnSp>
       <p:cxnSp>
         <p:nvCxnSpPr>
           <p:cNvPr id="35" name="Connector 34"/>
@@ -8588,6 +10239,151 @@
         </p:nvCxnSpPr>
         <p:spPr>
           <a:xfrm>
+            <a:off x="7223760.0" y="1627632"/>
+            <a:ext cx="274320.0" cy="0"/>
+          </a:xfrm>
+          <a:prstGeom prst="line">
+            <a:avLst/>
+          </a:prstGeom>
+          <a:ln w="14604">
+            <a:solidFill>
+              <a:srgbClr val="D8B87A"/>
+            </a:solidFill>
+          </a:ln>
+        </p:spPr>
+        <p:style>
+          <a:lnRef idx="2">
+            <a:schemeClr val="accent1"/>
+          </a:lnRef>
+          <a:fillRef idx="0">
+            <a:schemeClr val="accent1"/>
+          </a:fillRef>
+          <a:effectRef idx="1">
+            <a:schemeClr val="accent1"/>
+          </a:effectRef>
+          <a:fontRef idx="minor">
+            <a:schemeClr val="tx1"/>
+          </a:fontRef>
+        </p:style>
+      </p:cxnSp>
+      <p:cxnSp>
+        <p:nvCxnSpPr>
+          <p:cNvPr id="36" name="Connector 35"/>
+          <p:cNvCxnSpPr/>
+          <p:nvPr/>
+        </p:nvCxnSpPr>
+        <p:spPr>
+          <a:xfrm>
+            <a:off x="7360920.0" y="1490472"/>
+            <a:ext cx="0.0" cy="274320"/>
+          </a:xfrm>
+          <a:prstGeom prst="line">
+            <a:avLst/>
+          </a:prstGeom>
+          <a:ln w="14604">
+            <a:solidFill>
+              <a:srgbClr val="D8B87A"/>
+            </a:solidFill>
+          </a:ln>
+        </p:spPr>
+        <p:style>
+          <a:lnRef idx="2">
+            <a:schemeClr val="accent1"/>
+          </a:lnRef>
+          <a:fillRef idx="0">
+            <a:schemeClr val="accent1"/>
+          </a:fillRef>
+          <a:effectRef idx="1">
+            <a:schemeClr val="accent1"/>
+          </a:effectRef>
+          <a:fontRef idx="minor">
+            <a:schemeClr val="tx1"/>
+          </a:fontRef>
+        </p:style>
+      </p:cxnSp>
+      <p:cxnSp>
+        <p:nvCxnSpPr>
+          <p:cNvPr id="37" name="Connector 36"/>
+          <p:cNvCxnSpPr/>
+          <p:nvPr/>
+        </p:nvCxnSpPr>
+        <p:spPr>
+          <a:xfrm>
+            <a:off x="5257800.0" y="6126480"/>
+            <a:ext cx="1645920.0" cy="0"/>
+          </a:xfrm>
+          <a:prstGeom prst="line">
+            <a:avLst/>
+          </a:prstGeom>
+          <a:ln w="13970">
+            <a:solidFill>
+              <a:srgbClr val="D8B87A"/>
+            </a:solidFill>
+          </a:ln>
+        </p:spPr>
+        <p:style>
+          <a:lnRef idx="2">
+            <a:schemeClr val="accent1"/>
+          </a:lnRef>
+          <a:fillRef idx="0">
+            <a:schemeClr val="accent1"/>
+          </a:fillRef>
+          <a:effectRef idx="1">
+            <a:schemeClr val="accent1"/>
+          </a:effectRef>
+          <a:fontRef idx="minor">
+            <a:schemeClr val="tx1"/>
+          </a:fontRef>
+        </p:style>
+      </p:cxnSp>
+      <p:sp>
+        <p:nvSpPr>
+          <p:cNvPr id="38" name="TextBox 37"/>
+          <p:cNvSpPr txBox="1"/>
+          <p:nvPr/>
+        </p:nvSpPr>
+        <p:spPr>
+          <a:xfrm>
+            <a:off x="1691640" y="384048"/>
+            <a:ext cx="8778240" cy="292608"/>
+          </a:xfrm>
+          <a:prstGeom prst="rect">
+            <a:avLst/>
+          </a:prstGeom>
+          <a:noFill/>
+        </p:spPr>
+        <p:txBody>
+          <a:bodyPr wrap="square" anchor="ctr" lIns="18288" rIns="73152" tIns="18288" bIns="18288"/>
+          <a:lstStyle/>
+          <a:p>
+            <a:pPr algn="ctr">
+              <a:lnSpc>
+                <a:spcPct val="100000"/>
+              </a:lnSpc>
+              <a:spcAft>
+                <a:spcPts val="0"/>
+              </a:spcAft>
+            </a:pPr>
+            <a:r>
+              <a:rPr sz="1600" b="0">
+                <a:solidFill>
+                  <a:srgbClr val="D8B87A"/>
+                </a:solidFill>
+                <a:latin typeface="Malgun Gothic"/>
+              </a:rPr>
+              <a:t>10. 축도</a:t>
+            </a:r>
+          </a:p>
+        </p:txBody>
+      </p:sp>
+      <p:cxnSp>
+        <p:nvCxnSpPr>
+          <p:cNvPr id="39" name="Connector 38"/>
+          <p:cNvCxnSpPr/>
+          <p:nvPr/>
+        </p:nvCxnSpPr>
+        <p:spPr>
+          <a:xfrm>
             <a:off x="5257800.0" y="749808"/>
             <a:ext cx="1645920.0" cy="0"/>
           </a:xfrm>
@@ -8617,7 +10413,7 @@
       </p:cxnSp>
       <p:sp>
         <p:nvSpPr>
-          <p:cNvPr id="36" name="TextBox 35"/>
+          <p:cNvPr id="40" name="TextBox 39"/>
           <p:cNvSpPr txBox="1"/>
           <p:nvPr/>
         </p:nvSpPr>
@@ -8650,7 +10446,1516 @@
                 </a:solidFill>
                 <a:latin typeface="Malgun Gothic"/>
               </a:rPr>
-              <a:t>소식 · 광고</a:t>
+              <a:t>축도</a:t>
+            </a:r>
+          </a:p>
+        </p:txBody>
+      </p:sp>
+      <p:sp>
+        <p:nvSpPr>
+          <p:cNvPr id="41" name="BENEDICTION_BODY"/>
+          <p:cNvSpPr txBox="1"/>
+          <p:nvPr/>
+        </p:nvSpPr>
+        <p:spPr>
+          <a:xfrm>
+            <a:off x="1691640" y="1828800"/>
+            <a:ext cx="8778240" cy="4297680"/>
+          </a:xfrm>
+          <a:prstGeom prst="rect">
+            <a:avLst/>
+          </a:prstGeom>
+          <a:noFill/>
+        </p:spPr>
+        <p:txBody>
+          <a:bodyPr wrap="square" anchor="t" lIns="18288" rIns="73152" tIns="18288" bIns="18288"/>
+          <a:lstStyle/>
+          <a:p>
+            <a:pPr algn="ctr">
+              <a:lnSpc>
+                <a:spcPct val="130000"/>
+              </a:lnSpc>
+              <a:spcAft>
+                <a:spcPts val="600"/>
+              </a:spcAft>
+            </a:pPr>
+            <a:r>
+              <a:rPr sz="2800" b="0">
+                <a:solidFill>
+                  <a:srgbClr val="FFF8F0"/>
+                </a:solidFill>
+                <a:latin typeface="Malgun Gothic"/>
+              </a:rPr>
+              <a:t>{{BENEDICTION_BODY}}</a:t>
+            </a:r>
+          </a:p>
+        </p:txBody>
+      </p:sp>
+    </p:spTree>
+  </p:cSld>
+  <p:clrMapOvr>
+    <a:masterClrMapping/>
+  </p:clrMapOvr>
+</p:sld>
+</file>
+
+<file path=ppt/slides/slide14.xml><?xml version="1.0" encoding="utf-8"?>
+<p:sld xmlns:a="http://schemas.openxmlformats.org/drawingml/2006/main" xmlns:p="http://schemas.openxmlformats.org/presentationml/2006/main" xmlns:r="http://schemas.openxmlformats.org/officeDocument/2006/relationships">
+  <p:cSld>
+    <p:bg>
+      <p:bgPr>
+        <a:solidFill>
+          <a:srgbClr val="0E1218"/>
+        </a:solidFill>
+        <a:effectLst/>
+      </p:bgPr>
+    </p:bg>
+    <p:spTree>
+      <p:nvGrpSpPr>
+        <p:cNvPr id="1" name=""/>
+        <p:cNvGrpSpPr/>
+        <p:nvPr/>
+      </p:nvGrpSpPr>
+      <p:grpSpPr/>
+      <p:sp>
+        <p:nvSpPr>
+          <p:cNvPr id="2" name="Rectangle 1"/>
+          <p:cNvSpPr/>
+          <p:nvPr/>
+        </p:nvSpPr>
+        <p:spPr>
+          <a:xfrm>
+            <a:off x="0" y="0"/>
+            <a:ext cx="12191695" cy="2148840"/>
+          </a:xfrm>
+          <a:prstGeom prst="rect">
+            <a:avLst/>
+          </a:prstGeom>
+          <a:solidFill>
+            <a:srgbClr val="181F2A"/>
+          </a:solidFill>
+          <a:ln>
+            <a:noFill/>
+          </a:ln>
+        </p:spPr>
+        <p:style>
+          <a:lnRef idx="1">
+            <a:schemeClr val="accent1"/>
+          </a:lnRef>
+          <a:fillRef idx="3">
+            <a:schemeClr val="accent1"/>
+          </a:fillRef>
+          <a:effectRef idx="2">
+            <a:schemeClr val="accent1"/>
+          </a:effectRef>
+          <a:fontRef idx="minor">
+            <a:schemeClr val="lt1"/>
+          </a:fontRef>
+        </p:style>
+        <p:txBody>
+          <a:bodyPr rtlCol="0" anchor="ctr"/>
+          <a:lstStyle/>
+          <a:p>
+            <a:pPr algn="ctr"/>
+          </a:p>
+        </p:txBody>
+      </p:sp>
+      <p:sp>
+        <p:nvSpPr>
+          <p:cNvPr id="3" name="Rectangle 2"/>
+          <p:cNvSpPr/>
+          <p:nvPr/>
+        </p:nvSpPr>
+        <p:spPr>
+          <a:xfrm>
+            <a:off x="0" y="1965960"/>
+            <a:ext cx="12191695" cy="2651760"/>
+          </a:xfrm>
+          <a:prstGeom prst="rect">
+            <a:avLst/>
+          </a:prstGeom>
+          <a:solidFill>
+            <a:srgbClr val="151C26"/>
+          </a:solidFill>
+          <a:ln>
+            <a:noFill/>
+          </a:ln>
+        </p:spPr>
+        <p:style>
+          <a:lnRef idx="1">
+            <a:schemeClr val="accent1"/>
+          </a:lnRef>
+          <a:fillRef idx="3">
+            <a:schemeClr val="accent1"/>
+          </a:fillRef>
+          <a:effectRef idx="2">
+            <a:schemeClr val="accent1"/>
+          </a:effectRef>
+          <a:fontRef idx="minor">
+            <a:schemeClr val="lt1"/>
+          </a:fontRef>
+        </p:style>
+        <p:txBody>
+          <a:bodyPr rtlCol="0" anchor="ctr"/>
+          <a:lstStyle/>
+          <a:p>
+            <a:pPr algn="ctr"/>
+          </a:p>
+        </p:txBody>
+      </p:sp>
+      <p:sp>
+        <p:nvSpPr>
+          <p:cNvPr id="4" name="Rectangle 3"/>
+          <p:cNvSpPr/>
+          <p:nvPr/>
+        </p:nvSpPr>
+        <p:spPr>
+          <a:xfrm>
+            <a:off x="0" y="5943600"/>
+            <a:ext cx="12191695" cy="914400"/>
+          </a:xfrm>
+          <a:prstGeom prst="rect">
+            <a:avLst/>
+          </a:prstGeom>
+          <a:solidFill>
+            <a:srgbClr val="0A0D12"/>
+          </a:solidFill>
+          <a:ln>
+            <a:noFill/>
+          </a:ln>
+        </p:spPr>
+        <p:style>
+          <a:lnRef idx="1">
+            <a:schemeClr val="accent1"/>
+          </a:lnRef>
+          <a:fillRef idx="3">
+            <a:schemeClr val="accent1"/>
+          </a:fillRef>
+          <a:effectRef idx="2">
+            <a:schemeClr val="accent1"/>
+          </a:effectRef>
+          <a:fontRef idx="minor">
+            <a:schemeClr val="lt1"/>
+          </a:fontRef>
+        </p:style>
+        <p:txBody>
+          <a:bodyPr rtlCol="0" anchor="ctr"/>
+          <a:lstStyle/>
+          <a:p>
+            <a:pPr algn="ctr"/>
+          </a:p>
+        </p:txBody>
+      </p:sp>
+      <p:sp>
+        <p:nvSpPr>
+          <p:cNvPr id="5" name="Rectangle 4"/>
+          <p:cNvSpPr/>
+          <p:nvPr/>
+        </p:nvSpPr>
+        <p:spPr>
+          <a:xfrm>
+            <a:off x="1371600" y="256032"/>
+            <a:ext cx="9418320" cy="6263640"/>
+          </a:xfrm>
+          <a:prstGeom prst="rect">
+            <a:avLst/>
+          </a:prstGeom>
+          <a:solidFill>
+            <a:srgbClr val="1A232E"/>
+          </a:solidFill>
+          <a:ln>
+            <a:noFill/>
+          </a:ln>
+        </p:spPr>
+        <p:style>
+          <a:lnRef idx="1">
+            <a:schemeClr val="accent1"/>
+          </a:lnRef>
+          <a:fillRef idx="3">
+            <a:schemeClr val="accent1"/>
+          </a:fillRef>
+          <a:effectRef idx="2">
+            <a:schemeClr val="accent1"/>
+          </a:effectRef>
+          <a:fontRef idx="minor">
+            <a:schemeClr val="lt1"/>
+          </a:fontRef>
+        </p:style>
+        <p:txBody>
+          <a:bodyPr rtlCol="0" anchor="ctr"/>
+          <a:lstStyle/>
+          <a:p>
+            <a:pPr algn="ctr"/>
+          </a:p>
+        </p:txBody>
+      </p:sp>
+      <p:sp>
+        <p:nvSpPr>
+          <p:cNvPr id="6" name="Rectangle 5"/>
+          <p:cNvSpPr/>
+          <p:nvPr/>
+        </p:nvSpPr>
+        <p:spPr>
+          <a:xfrm>
+            <a:off x="0" y="0"/>
+            <a:ext cx="128016" cy="6858000"/>
+          </a:xfrm>
+          <a:prstGeom prst="rect">
+            <a:avLst/>
+          </a:prstGeom>
+          <a:solidFill>
+            <a:srgbClr val="D8B87A"/>
+          </a:solidFill>
+          <a:ln>
+            <a:noFill/>
+          </a:ln>
+        </p:spPr>
+        <p:style>
+          <a:lnRef idx="1">
+            <a:schemeClr val="accent1"/>
+          </a:lnRef>
+          <a:fillRef idx="3">
+            <a:schemeClr val="accent1"/>
+          </a:fillRef>
+          <a:effectRef idx="2">
+            <a:schemeClr val="accent1"/>
+          </a:effectRef>
+          <a:fontRef idx="minor">
+            <a:schemeClr val="lt1"/>
+          </a:fontRef>
+        </p:style>
+        <p:txBody>
+          <a:bodyPr rtlCol="0" anchor="ctr"/>
+          <a:lstStyle/>
+          <a:p>
+            <a:pPr algn="ctr"/>
+          </a:p>
+        </p:txBody>
+      </p:sp>
+      <p:sp>
+        <p:nvSpPr>
+          <p:cNvPr id="7" name="Rectangle 6"/>
+          <p:cNvSpPr/>
+          <p:nvPr/>
+        </p:nvSpPr>
+        <p:spPr>
+          <a:xfrm>
+            <a:off x="128016" y="0"/>
+            <a:ext cx="82296" cy="6858000"/>
+          </a:xfrm>
+          <a:prstGeom prst="rect">
+            <a:avLst/>
+          </a:prstGeom>
+          <a:solidFill>
+            <a:srgbClr val="7E9E90"/>
+          </a:solidFill>
+          <a:ln>
+            <a:noFill/>
+          </a:ln>
+        </p:spPr>
+        <p:style>
+          <a:lnRef idx="1">
+            <a:schemeClr val="accent1"/>
+          </a:lnRef>
+          <a:fillRef idx="3">
+            <a:schemeClr val="accent1"/>
+          </a:fillRef>
+          <a:effectRef idx="2">
+            <a:schemeClr val="accent1"/>
+          </a:effectRef>
+          <a:fontRef idx="minor">
+            <a:schemeClr val="lt1"/>
+          </a:fontRef>
+        </p:style>
+        <p:txBody>
+          <a:bodyPr rtlCol="0" anchor="ctr"/>
+          <a:lstStyle/>
+          <a:p>
+            <a:pPr algn="ctr"/>
+          </a:p>
+        </p:txBody>
+      </p:sp>
+      <p:sp>
+        <p:nvSpPr>
+          <p:cNvPr id="8" name="Rectangle 7"/>
+          <p:cNvSpPr/>
+          <p:nvPr/>
+        </p:nvSpPr>
+        <p:spPr>
+          <a:xfrm>
+            <a:off x="11978640" y="0"/>
+            <a:ext cx="91440" cy="6858000"/>
+          </a:xfrm>
+          <a:prstGeom prst="rect">
+            <a:avLst/>
+          </a:prstGeom>
+          <a:solidFill>
+            <a:srgbClr val="C48A94"/>
+          </a:solidFill>
+          <a:ln>
+            <a:noFill/>
+          </a:ln>
+        </p:spPr>
+        <p:style>
+          <a:lnRef idx="1">
+            <a:schemeClr val="accent1"/>
+          </a:lnRef>
+          <a:fillRef idx="3">
+            <a:schemeClr val="accent1"/>
+          </a:fillRef>
+          <a:effectRef idx="2">
+            <a:schemeClr val="accent1"/>
+          </a:effectRef>
+          <a:fontRef idx="minor">
+            <a:schemeClr val="lt1"/>
+          </a:fontRef>
+        </p:style>
+        <p:txBody>
+          <a:bodyPr rtlCol="0" anchor="ctr"/>
+          <a:lstStyle/>
+          <a:p>
+            <a:pPr algn="ctr"/>
+          </a:p>
+        </p:txBody>
+      </p:sp>
+      <p:sp>
+        <p:nvSpPr>
+          <p:cNvPr id="9" name="Rectangle 8"/>
+          <p:cNvSpPr/>
+          <p:nvPr/>
+        </p:nvSpPr>
+        <p:spPr>
+          <a:xfrm>
+            <a:off x="12070080" y="0"/>
+            <a:ext cx="118872" cy="6858000"/>
+          </a:xfrm>
+          <a:prstGeom prst="rect">
+            <a:avLst/>
+          </a:prstGeom>
+          <a:solidFill>
+            <a:srgbClr val="8E5E6A"/>
+          </a:solidFill>
+          <a:ln>
+            <a:noFill/>
+          </a:ln>
+        </p:spPr>
+        <p:style>
+          <a:lnRef idx="1">
+            <a:schemeClr val="accent1"/>
+          </a:lnRef>
+          <a:fillRef idx="3">
+            <a:schemeClr val="accent1"/>
+          </a:fillRef>
+          <a:effectRef idx="2">
+            <a:schemeClr val="accent1"/>
+          </a:effectRef>
+          <a:fontRef idx="minor">
+            <a:schemeClr val="lt1"/>
+          </a:fontRef>
+        </p:style>
+        <p:txBody>
+          <a:bodyPr rtlCol="0" anchor="ctr"/>
+          <a:lstStyle/>
+          <a:p>
+            <a:pPr algn="ctr"/>
+          </a:p>
+        </p:txBody>
+      </p:sp>
+      <p:cxnSp>
+        <p:nvCxnSpPr>
+          <p:cNvPr id="10" name="Connector 9"/>
+          <p:cNvCxnSpPr/>
+          <p:nvPr/>
+        </p:nvCxnSpPr>
+        <p:spPr>
+          <a:xfrm>
+            <a:off x="1554480" y="292608"/>
+            <a:ext cx="9052560" cy="0"/>
+          </a:xfrm>
+          <a:prstGeom prst="line">
+            <a:avLst/>
+          </a:prstGeom>
+          <a:ln w="13970">
+            <a:solidFill>
+              <a:srgbClr val="D8B87A"/>
+            </a:solidFill>
+          </a:ln>
+        </p:spPr>
+        <p:style>
+          <a:lnRef idx="2">
+            <a:schemeClr val="accent1"/>
+          </a:lnRef>
+          <a:fillRef idx="0">
+            <a:schemeClr val="accent1"/>
+          </a:fillRef>
+          <a:effectRef idx="1">
+            <a:schemeClr val="accent1"/>
+          </a:effectRef>
+          <a:fontRef idx="minor">
+            <a:schemeClr val="tx1"/>
+          </a:fontRef>
+        </p:style>
+      </p:cxnSp>
+      <p:cxnSp>
+        <p:nvCxnSpPr>
+          <p:cNvPr id="11" name="Connector 10"/>
+          <p:cNvCxnSpPr/>
+          <p:nvPr/>
+        </p:nvCxnSpPr>
+        <p:spPr>
+          <a:xfrm>
+            <a:off x="1554480" y="6446520"/>
+            <a:ext cx="9052560" cy="0"/>
+          </a:xfrm>
+          <a:prstGeom prst="line">
+            <a:avLst/>
+          </a:prstGeom>
+          <a:ln w="13970">
+            <a:solidFill>
+              <a:srgbClr val="D8B87A"/>
+            </a:solidFill>
+          </a:ln>
+        </p:spPr>
+        <p:style>
+          <a:lnRef idx="2">
+            <a:schemeClr val="accent1"/>
+          </a:lnRef>
+          <a:fillRef idx="0">
+            <a:schemeClr val="accent1"/>
+          </a:fillRef>
+          <a:effectRef idx="1">
+            <a:schemeClr val="accent1"/>
+          </a:effectRef>
+          <a:fontRef idx="minor">
+            <a:schemeClr val="tx1"/>
+          </a:fontRef>
+        </p:style>
+      </p:cxnSp>
+      <p:sp>
+        <p:nvSpPr>
+          <p:cNvPr id="12" name="Rectangle 11"/>
+          <p:cNvSpPr/>
+          <p:nvPr/>
+        </p:nvSpPr>
+        <p:spPr>
+          <a:xfrm>
+            <a:off x="237744" y="6565392"/>
+            <a:ext cx="11951208" cy="292608"/>
+          </a:xfrm>
+          <a:prstGeom prst="rect">
+            <a:avLst/>
+          </a:prstGeom>
+          <a:solidFill>
+            <a:srgbClr val="0A0D12"/>
+          </a:solidFill>
+          <a:ln>
+            <a:noFill/>
+          </a:ln>
+        </p:spPr>
+        <p:style>
+          <a:lnRef idx="1">
+            <a:schemeClr val="accent1"/>
+          </a:lnRef>
+          <a:fillRef idx="3">
+            <a:schemeClr val="accent1"/>
+          </a:fillRef>
+          <a:effectRef idx="2">
+            <a:schemeClr val="accent1"/>
+          </a:effectRef>
+          <a:fontRef idx="minor">
+            <a:schemeClr val="lt1"/>
+          </a:fontRef>
+        </p:style>
+        <p:txBody>
+          <a:bodyPr rtlCol="0" anchor="ctr"/>
+          <a:lstStyle/>
+          <a:p>
+            <a:pPr algn="ctr"/>
+          </a:p>
+        </p:txBody>
+      </p:sp>
+      <p:sp>
+        <p:nvSpPr>
+          <p:cNvPr id="13" name="Oval 12"/>
+          <p:cNvSpPr/>
+          <p:nvPr/>
+        </p:nvSpPr>
+        <p:spPr>
+          <a:xfrm>
+            <a:off x="654939" y="5891251"/>
+            <a:ext cx="116586" cy="116586"/>
+          </a:xfrm>
+          <a:prstGeom prst="ellipse">
+            <a:avLst/>
+          </a:prstGeom>
+          <a:solidFill>
+            <a:srgbClr val="D6A4AC"/>
+          </a:solidFill>
+          <a:ln>
+            <a:noFill/>
+          </a:ln>
+        </p:spPr>
+        <p:style>
+          <a:lnRef idx="1">
+            <a:schemeClr val="accent1"/>
+          </a:lnRef>
+          <a:fillRef idx="3">
+            <a:schemeClr val="accent1"/>
+          </a:fillRef>
+          <a:effectRef idx="2">
+            <a:schemeClr val="accent1"/>
+          </a:effectRef>
+          <a:fontRef idx="minor">
+            <a:schemeClr val="lt1"/>
+          </a:fontRef>
+        </p:style>
+        <p:txBody>
+          <a:bodyPr rtlCol="0" anchor="ctr"/>
+          <a:lstStyle/>
+          <a:p>
+            <a:pPr algn="ctr"/>
+          </a:p>
+        </p:txBody>
+      </p:sp>
+      <p:sp>
+        <p:nvSpPr>
+          <p:cNvPr id="14" name="Oval 13"/>
+          <p:cNvSpPr/>
+          <p:nvPr/>
+        </p:nvSpPr>
+        <p:spPr>
+          <a:xfrm>
+            <a:off x="732663" y="5953430"/>
+            <a:ext cx="116586" cy="116586"/>
+          </a:xfrm>
+          <a:prstGeom prst="ellipse">
+            <a:avLst/>
+          </a:prstGeom>
+          <a:solidFill>
+            <a:srgbClr val="D6A4AC"/>
+          </a:solidFill>
+          <a:ln>
+            <a:noFill/>
+          </a:ln>
+        </p:spPr>
+        <p:style>
+          <a:lnRef idx="1">
+            <a:schemeClr val="accent1"/>
+          </a:lnRef>
+          <a:fillRef idx="3">
+            <a:schemeClr val="accent1"/>
+          </a:fillRef>
+          <a:effectRef idx="2">
+            <a:schemeClr val="accent1"/>
+          </a:effectRef>
+          <a:fontRef idx="minor">
+            <a:schemeClr val="lt1"/>
+          </a:fontRef>
+        </p:style>
+        <p:txBody>
+          <a:bodyPr rtlCol="0" anchor="ctr"/>
+          <a:lstStyle/>
+          <a:p>
+            <a:pPr algn="ctr"/>
+          </a:p>
+        </p:txBody>
+      </p:sp>
+      <p:sp>
+        <p:nvSpPr>
+          <p:cNvPr id="15" name="Oval 14"/>
+          <p:cNvSpPr/>
+          <p:nvPr/>
+        </p:nvSpPr>
+        <p:spPr>
+          <a:xfrm>
+            <a:off x="709345" y="6046698"/>
+            <a:ext cx="116586" cy="116586"/>
+          </a:xfrm>
+          <a:prstGeom prst="ellipse">
+            <a:avLst/>
+          </a:prstGeom>
+          <a:solidFill>
+            <a:srgbClr val="D6A4AC"/>
+          </a:solidFill>
+          <a:ln>
+            <a:noFill/>
+          </a:ln>
+        </p:spPr>
+        <p:style>
+          <a:lnRef idx="1">
+            <a:schemeClr val="accent1"/>
+          </a:lnRef>
+          <a:fillRef idx="3">
+            <a:schemeClr val="accent1"/>
+          </a:fillRef>
+          <a:effectRef idx="2">
+            <a:schemeClr val="accent1"/>
+          </a:effectRef>
+          <a:fontRef idx="minor">
+            <a:schemeClr val="lt1"/>
+          </a:fontRef>
+        </p:style>
+        <p:txBody>
+          <a:bodyPr rtlCol="0" anchor="ctr"/>
+          <a:lstStyle/>
+          <a:p>
+            <a:pPr algn="ctr"/>
+          </a:p>
+        </p:txBody>
+      </p:sp>
+      <p:sp>
+        <p:nvSpPr>
+          <p:cNvPr id="16" name="Oval 15"/>
+          <p:cNvSpPr/>
+          <p:nvPr/>
+        </p:nvSpPr>
+        <p:spPr>
+          <a:xfrm>
+            <a:off x="600533" y="6046698"/>
+            <a:ext cx="116586" cy="116586"/>
+          </a:xfrm>
+          <a:prstGeom prst="ellipse">
+            <a:avLst/>
+          </a:prstGeom>
+          <a:solidFill>
+            <a:srgbClr val="D6A4AC"/>
+          </a:solidFill>
+          <a:ln>
+            <a:noFill/>
+          </a:ln>
+        </p:spPr>
+        <p:style>
+          <a:lnRef idx="1">
+            <a:schemeClr val="accent1"/>
+          </a:lnRef>
+          <a:fillRef idx="3">
+            <a:schemeClr val="accent1"/>
+          </a:fillRef>
+          <a:effectRef idx="2">
+            <a:schemeClr val="accent1"/>
+          </a:effectRef>
+          <a:fontRef idx="minor">
+            <a:schemeClr val="lt1"/>
+          </a:fontRef>
+        </p:style>
+        <p:txBody>
+          <a:bodyPr rtlCol="0" anchor="ctr"/>
+          <a:lstStyle/>
+          <a:p>
+            <a:pPr algn="ctr"/>
+          </a:p>
+        </p:txBody>
+      </p:sp>
+      <p:sp>
+        <p:nvSpPr>
+          <p:cNvPr id="17" name="Oval 16"/>
+          <p:cNvSpPr/>
+          <p:nvPr/>
+        </p:nvSpPr>
+        <p:spPr>
+          <a:xfrm>
+            <a:off x="577215" y="5953430"/>
+            <a:ext cx="116586" cy="116586"/>
+          </a:xfrm>
+          <a:prstGeom prst="ellipse">
+            <a:avLst/>
+          </a:prstGeom>
+          <a:solidFill>
+            <a:srgbClr val="D6A4AC"/>
+          </a:solidFill>
+          <a:ln>
+            <a:noFill/>
+          </a:ln>
+        </p:spPr>
+        <p:style>
+          <a:lnRef idx="1">
+            <a:schemeClr val="accent1"/>
+          </a:lnRef>
+          <a:fillRef idx="3">
+            <a:schemeClr val="accent1"/>
+          </a:fillRef>
+          <a:effectRef idx="2">
+            <a:schemeClr val="accent1"/>
+          </a:effectRef>
+          <a:fontRef idx="minor">
+            <a:schemeClr val="lt1"/>
+          </a:fontRef>
+        </p:style>
+        <p:txBody>
+          <a:bodyPr rtlCol="0" anchor="ctr"/>
+          <a:lstStyle/>
+          <a:p>
+            <a:pPr algn="ctr"/>
+          </a:p>
+        </p:txBody>
+      </p:sp>
+      <p:sp>
+        <p:nvSpPr>
+          <p:cNvPr id="18" name="Oval 17"/>
+          <p:cNvSpPr/>
+          <p:nvPr/>
+        </p:nvSpPr>
+        <p:spPr>
+          <a:xfrm>
+            <a:off x="670484" y="5992292"/>
+            <a:ext cx="85496" cy="85496"/>
+          </a:xfrm>
+          <a:prstGeom prst="ellipse">
+            <a:avLst/>
+          </a:prstGeom>
+          <a:solidFill>
+            <a:srgbClr val="C48A94"/>
+          </a:solidFill>
+          <a:ln>
+            <a:noFill/>
+          </a:ln>
+        </p:spPr>
+        <p:style>
+          <a:lnRef idx="1">
+            <a:schemeClr val="accent1"/>
+          </a:lnRef>
+          <a:fillRef idx="3">
+            <a:schemeClr val="accent1"/>
+          </a:fillRef>
+          <a:effectRef idx="2">
+            <a:schemeClr val="accent1"/>
+          </a:effectRef>
+          <a:fontRef idx="minor">
+            <a:schemeClr val="lt1"/>
+          </a:fontRef>
+        </p:style>
+        <p:txBody>
+          <a:bodyPr rtlCol="0" anchor="ctr"/>
+          <a:lstStyle/>
+          <a:p>
+            <a:pPr algn="ctr"/>
+          </a:p>
+        </p:txBody>
+      </p:sp>
+      <p:sp>
+        <p:nvSpPr>
+          <p:cNvPr id="19" name="Oval 18"/>
+          <p:cNvSpPr/>
+          <p:nvPr/>
+        </p:nvSpPr>
+        <p:spPr>
+          <a:xfrm>
+            <a:off x="798728" y="6073902"/>
+            <a:ext cx="108813" cy="54406"/>
+          </a:xfrm>
+          <a:prstGeom prst="ellipse">
+            <a:avLst/>
+          </a:prstGeom>
+          <a:solidFill>
+            <a:srgbClr val="7E9E90"/>
+          </a:solidFill>
+          <a:ln>
+            <a:noFill/>
+          </a:ln>
+        </p:spPr>
+        <p:style>
+          <a:lnRef idx="1">
+            <a:schemeClr val="accent1"/>
+          </a:lnRef>
+          <a:fillRef idx="3">
+            <a:schemeClr val="accent1"/>
+          </a:fillRef>
+          <a:effectRef idx="2">
+            <a:schemeClr val="accent1"/>
+          </a:effectRef>
+          <a:fontRef idx="minor">
+            <a:schemeClr val="lt1"/>
+          </a:fontRef>
+        </p:style>
+        <p:txBody>
+          <a:bodyPr rtlCol="0" anchor="ctr"/>
+          <a:lstStyle/>
+          <a:p>
+            <a:pPr algn="ctr"/>
+          </a:p>
+        </p:txBody>
+      </p:sp>
+      <p:sp>
+        <p:nvSpPr>
+          <p:cNvPr id="20" name="Oval 19"/>
+          <p:cNvSpPr/>
+          <p:nvPr/>
+        </p:nvSpPr>
+        <p:spPr>
+          <a:xfrm>
+            <a:off x="11389995" y="5891251"/>
+            <a:ext cx="116586" cy="116586"/>
+          </a:xfrm>
+          <a:prstGeom prst="ellipse">
+            <a:avLst/>
+          </a:prstGeom>
+          <a:solidFill>
+            <a:srgbClr val="D6A4AC"/>
+          </a:solidFill>
+          <a:ln>
+            <a:noFill/>
+          </a:ln>
+        </p:spPr>
+        <p:style>
+          <a:lnRef idx="1">
+            <a:schemeClr val="accent1"/>
+          </a:lnRef>
+          <a:fillRef idx="3">
+            <a:schemeClr val="accent1"/>
+          </a:fillRef>
+          <a:effectRef idx="2">
+            <a:schemeClr val="accent1"/>
+          </a:effectRef>
+          <a:fontRef idx="minor">
+            <a:schemeClr val="lt1"/>
+          </a:fontRef>
+        </p:style>
+        <p:txBody>
+          <a:bodyPr rtlCol="0" anchor="ctr"/>
+          <a:lstStyle/>
+          <a:p>
+            <a:pPr algn="ctr"/>
+          </a:p>
+        </p:txBody>
+      </p:sp>
+      <p:sp>
+        <p:nvSpPr>
+          <p:cNvPr id="21" name="Oval 20"/>
+          <p:cNvSpPr/>
+          <p:nvPr/>
+        </p:nvSpPr>
+        <p:spPr>
+          <a:xfrm>
+            <a:off x="11467719" y="5953430"/>
+            <a:ext cx="116586" cy="116586"/>
+          </a:xfrm>
+          <a:prstGeom prst="ellipse">
+            <a:avLst/>
+          </a:prstGeom>
+          <a:solidFill>
+            <a:srgbClr val="D6A4AC"/>
+          </a:solidFill>
+          <a:ln>
+            <a:noFill/>
+          </a:ln>
+        </p:spPr>
+        <p:style>
+          <a:lnRef idx="1">
+            <a:schemeClr val="accent1"/>
+          </a:lnRef>
+          <a:fillRef idx="3">
+            <a:schemeClr val="accent1"/>
+          </a:fillRef>
+          <a:effectRef idx="2">
+            <a:schemeClr val="accent1"/>
+          </a:effectRef>
+          <a:fontRef idx="minor">
+            <a:schemeClr val="lt1"/>
+          </a:fontRef>
+        </p:style>
+        <p:txBody>
+          <a:bodyPr rtlCol="0" anchor="ctr"/>
+          <a:lstStyle/>
+          <a:p>
+            <a:pPr algn="ctr"/>
+          </a:p>
+        </p:txBody>
+      </p:sp>
+      <p:sp>
+        <p:nvSpPr>
+          <p:cNvPr id="22" name="Oval 21"/>
+          <p:cNvSpPr/>
+          <p:nvPr/>
+        </p:nvSpPr>
+        <p:spPr>
+          <a:xfrm>
+            <a:off x="11444401" y="6046698"/>
+            <a:ext cx="116586" cy="116586"/>
+          </a:xfrm>
+          <a:prstGeom prst="ellipse">
+            <a:avLst/>
+          </a:prstGeom>
+          <a:solidFill>
+            <a:srgbClr val="D6A4AC"/>
+          </a:solidFill>
+          <a:ln>
+            <a:noFill/>
+          </a:ln>
+        </p:spPr>
+        <p:style>
+          <a:lnRef idx="1">
+            <a:schemeClr val="accent1"/>
+          </a:lnRef>
+          <a:fillRef idx="3">
+            <a:schemeClr val="accent1"/>
+          </a:fillRef>
+          <a:effectRef idx="2">
+            <a:schemeClr val="accent1"/>
+          </a:effectRef>
+          <a:fontRef idx="minor">
+            <a:schemeClr val="lt1"/>
+          </a:fontRef>
+        </p:style>
+        <p:txBody>
+          <a:bodyPr rtlCol="0" anchor="ctr"/>
+          <a:lstStyle/>
+          <a:p>
+            <a:pPr algn="ctr"/>
+          </a:p>
+        </p:txBody>
+      </p:sp>
+      <p:sp>
+        <p:nvSpPr>
+          <p:cNvPr id="23" name="Oval 22"/>
+          <p:cNvSpPr/>
+          <p:nvPr/>
+        </p:nvSpPr>
+        <p:spPr>
+          <a:xfrm>
+            <a:off x="11335589" y="6046698"/>
+            <a:ext cx="116586" cy="116586"/>
+          </a:xfrm>
+          <a:prstGeom prst="ellipse">
+            <a:avLst/>
+          </a:prstGeom>
+          <a:solidFill>
+            <a:srgbClr val="D6A4AC"/>
+          </a:solidFill>
+          <a:ln>
+            <a:noFill/>
+          </a:ln>
+        </p:spPr>
+        <p:style>
+          <a:lnRef idx="1">
+            <a:schemeClr val="accent1"/>
+          </a:lnRef>
+          <a:fillRef idx="3">
+            <a:schemeClr val="accent1"/>
+          </a:fillRef>
+          <a:effectRef idx="2">
+            <a:schemeClr val="accent1"/>
+          </a:effectRef>
+          <a:fontRef idx="minor">
+            <a:schemeClr val="lt1"/>
+          </a:fontRef>
+        </p:style>
+        <p:txBody>
+          <a:bodyPr rtlCol="0" anchor="ctr"/>
+          <a:lstStyle/>
+          <a:p>
+            <a:pPr algn="ctr"/>
+          </a:p>
+        </p:txBody>
+      </p:sp>
+      <p:sp>
+        <p:nvSpPr>
+          <p:cNvPr id="24" name="Oval 23"/>
+          <p:cNvSpPr/>
+          <p:nvPr/>
+        </p:nvSpPr>
+        <p:spPr>
+          <a:xfrm>
+            <a:off x="11312271" y="5953430"/>
+            <a:ext cx="116586" cy="116586"/>
+          </a:xfrm>
+          <a:prstGeom prst="ellipse">
+            <a:avLst/>
+          </a:prstGeom>
+          <a:solidFill>
+            <a:srgbClr val="D6A4AC"/>
+          </a:solidFill>
+          <a:ln>
+            <a:noFill/>
+          </a:ln>
+        </p:spPr>
+        <p:style>
+          <a:lnRef idx="1">
+            <a:schemeClr val="accent1"/>
+          </a:lnRef>
+          <a:fillRef idx="3">
+            <a:schemeClr val="accent1"/>
+          </a:fillRef>
+          <a:effectRef idx="2">
+            <a:schemeClr val="accent1"/>
+          </a:effectRef>
+          <a:fontRef idx="minor">
+            <a:schemeClr val="lt1"/>
+          </a:fontRef>
+        </p:style>
+        <p:txBody>
+          <a:bodyPr rtlCol="0" anchor="ctr"/>
+          <a:lstStyle/>
+          <a:p>
+            <a:pPr algn="ctr"/>
+          </a:p>
+        </p:txBody>
+      </p:sp>
+      <p:sp>
+        <p:nvSpPr>
+          <p:cNvPr id="25" name="Oval 24"/>
+          <p:cNvSpPr/>
+          <p:nvPr/>
+        </p:nvSpPr>
+        <p:spPr>
+          <a:xfrm>
+            <a:off x="11405540" y="5992292"/>
+            <a:ext cx="85496" cy="85496"/>
+          </a:xfrm>
+          <a:prstGeom prst="ellipse">
+            <a:avLst/>
+          </a:prstGeom>
+          <a:solidFill>
+            <a:srgbClr val="C48A94"/>
+          </a:solidFill>
+          <a:ln>
+            <a:noFill/>
+          </a:ln>
+        </p:spPr>
+        <p:style>
+          <a:lnRef idx="1">
+            <a:schemeClr val="accent1"/>
+          </a:lnRef>
+          <a:fillRef idx="3">
+            <a:schemeClr val="accent1"/>
+          </a:fillRef>
+          <a:effectRef idx="2">
+            <a:schemeClr val="accent1"/>
+          </a:effectRef>
+          <a:fontRef idx="minor">
+            <a:schemeClr val="lt1"/>
+          </a:fontRef>
+        </p:style>
+        <p:txBody>
+          <a:bodyPr rtlCol="0" anchor="ctr"/>
+          <a:lstStyle/>
+          <a:p>
+            <a:pPr algn="ctr"/>
+          </a:p>
+        </p:txBody>
+      </p:sp>
+      <p:sp>
+        <p:nvSpPr>
+          <p:cNvPr id="26" name="Oval 25"/>
+          <p:cNvSpPr/>
+          <p:nvPr/>
+        </p:nvSpPr>
+        <p:spPr>
+          <a:xfrm>
+            <a:off x="11533784" y="6073902"/>
+            <a:ext cx="108813" cy="54406"/>
+          </a:xfrm>
+          <a:prstGeom prst="ellipse">
+            <a:avLst/>
+          </a:prstGeom>
+          <a:solidFill>
+            <a:srgbClr val="7E9E90"/>
+          </a:solidFill>
+          <a:ln>
+            <a:noFill/>
+          </a:ln>
+        </p:spPr>
+        <p:style>
+          <a:lnRef idx="1">
+            <a:schemeClr val="accent1"/>
+          </a:lnRef>
+          <a:fillRef idx="3">
+            <a:schemeClr val="accent1"/>
+          </a:fillRef>
+          <a:effectRef idx="2">
+            <a:schemeClr val="accent1"/>
+          </a:effectRef>
+          <a:fontRef idx="minor">
+            <a:schemeClr val="lt1"/>
+          </a:fontRef>
+        </p:style>
+        <p:txBody>
+          <a:bodyPr rtlCol="0" anchor="ctr"/>
+          <a:lstStyle/>
+          <a:p>
+            <a:pPr algn="ctr"/>
+          </a:p>
+        </p:txBody>
+      </p:sp>
+      <p:cxnSp>
+        <p:nvCxnSpPr>
+          <p:cNvPr id="27" name="Connector 26"/>
+          <p:cNvCxnSpPr/>
+          <p:nvPr/>
+        </p:nvCxnSpPr>
+        <p:spPr>
+          <a:xfrm>
+            <a:off x="1600200" y="365760"/>
+            <a:ext cx="274320" cy="0"/>
+          </a:xfrm>
+          <a:prstGeom prst="line">
+            <a:avLst/>
+          </a:prstGeom>
+          <a:ln w="14604">
+            <a:solidFill>
+              <a:srgbClr val="D8B87A"/>
+            </a:solidFill>
+          </a:ln>
+        </p:spPr>
+        <p:style>
+          <a:lnRef idx="2">
+            <a:schemeClr val="accent1"/>
+          </a:lnRef>
+          <a:fillRef idx="0">
+            <a:schemeClr val="accent1"/>
+          </a:fillRef>
+          <a:effectRef idx="1">
+            <a:schemeClr val="accent1"/>
+          </a:effectRef>
+          <a:fontRef idx="minor">
+            <a:schemeClr val="tx1"/>
+          </a:fontRef>
+        </p:style>
+      </p:cxnSp>
+      <p:cxnSp>
+        <p:nvCxnSpPr>
+          <p:cNvPr id="28" name="Connector 27"/>
+          <p:cNvCxnSpPr/>
+          <p:nvPr/>
+        </p:nvCxnSpPr>
+        <p:spPr>
+          <a:xfrm>
+            <a:off x="1600200" y="365760"/>
+            <a:ext cx="0" cy="274320"/>
+          </a:xfrm>
+          <a:prstGeom prst="line">
+            <a:avLst/>
+          </a:prstGeom>
+          <a:ln w="14604">
+            <a:solidFill>
+              <a:srgbClr val="D8B87A"/>
+            </a:solidFill>
+          </a:ln>
+        </p:spPr>
+        <p:style>
+          <a:lnRef idx="2">
+            <a:schemeClr val="accent1"/>
+          </a:lnRef>
+          <a:fillRef idx="0">
+            <a:schemeClr val="accent1"/>
+          </a:fillRef>
+          <a:effectRef idx="1">
+            <a:schemeClr val="accent1"/>
+          </a:effectRef>
+          <a:fontRef idx="minor">
+            <a:schemeClr val="tx1"/>
+          </a:fontRef>
+        </p:style>
+      </p:cxnSp>
+      <p:cxnSp>
+        <p:nvCxnSpPr>
+          <p:cNvPr id="29" name="Connector 28"/>
+          <p:cNvCxnSpPr/>
+          <p:nvPr/>
+        </p:nvCxnSpPr>
+        <p:spPr>
+          <a:xfrm>
+            <a:off x="10287000" y="365760"/>
+            <a:ext cx="274320" cy="0"/>
+          </a:xfrm>
+          <a:prstGeom prst="line">
+            <a:avLst/>
+          </a:prstGeom>
+          <a:ln w="14604">
+            <a:solidFill>
+              <a:srgbClr val="D8B87A"/>
+            </a:solidFill>
+          </a:ln>
+        </p:spPr>
+        <p:style>
+          <a:lnRef idx="2">
+            <a:schemeClr val="accent1"/>
+          </a:lnRef>
+          <a:fillRef idx="0">
+            <a:schemeClr val="accent1"/>
+          </a:fillRef>
+          <a:effectRef idx="1">
+            <a:schemeClr val="accent1"/>
+          </a:effectRef>
+          <a:fontRef idx="minor">
+            <a:schemeClr val="tx1"/>
+          </a:fontRef>
+        </p:style>
+      </p:cxnSp>
+      <p:cxnSp>
+        <p:nvCxnSpPr>
+          <p:cNvPr id="30" name="Connector 29"/>
+          <p:cNvCxnSpPr/>
+          <p:nvPr/>
+        </p:nvCxnSpPr>
+        <p:spPr>
+          <a:xfrm>
+            <a:off x="10561320" y="365760"/>
+            <a:ext cx="0" cy="274320"/>
+          </a:xfrm>
+          <a:prstGeom prst="line">
+            <a:avLst/>
+          </a:prstGeom>
+          <a:ln w="14604">
+            <a:solidFill>
+              <a:srgbClr val="D8B87A"/>
+            </a:solidFill>
+          </a:ln>
+        </p:spPr>
+        <p:style>
+          <a:lnRef idx="2">
+            <a:schemeClr val="accent1"/>
+          </a:lnRef>
+          <a:fillRef idx="0">
+            <a:schemeClr val="accent1"/>
+          </a:fillRef>
+          <a:effectRef idx="1">
+            <a:schemeClr val="accent1"/>
+          </a:effectRef>
+          <a:fontRef idx="minor">
+            <a:schemeClr val="tx1"/>
+          </a:fontRef>
+        </p:style>
+      </p:cxnSp>
+      <p:sp>
+        <p:nvSpPr>
+          <p:cNvPr id="31" name="Diamond 30"/>
+          <p:cNvSpPr/>
+          <p:nvPr/>
+        </p:nvSpPr>
+        <p:spPr>
+          <a:xfrm>
+            <a:off x="1193292" y="3296412"/>
+            <a:ext cx="82296" cy="82296"/>
+          </a:xfrm>
+          <a:prstGeom prst="diamond">
+            <a:avLst/>
+          </a:prstGeom>
+          <a:solidFill>
+            <a:srgbClr val="D8B87A"/>
+          </a:solidFill>
+          <a:ln>
+            <a:noFill/>
+          </a:ln>
+        </p:spPr>
+        <p:style>
+          <a:lnRef idx="1">
+            <a:schemeClr val="accent1"/>
+          </a:lnRef>
+          <a:fillRef idx="3">
+            <a:schemeClr val="accent1"/>
+          </a:fillRef>
+          <a:effectRef idx="2">
+            <a:schemeClr val="accent1"/>
+          </a:effectRef>
+          <a:fontRef idx="minor">
+            <a:schemeClr val="lt1"/>
+          </a:fontRef>
+        </p:style>
+        <p:txBody>
+          <a:bodyPr rtlCol="0" anchor="ctr"/>
+          <a:lstStyle/>
+          <a:p>
+            <a:pPr algn="ctr"/>
+          </a:p>
+        </p:txBody>
+      </p:sp>
+      <p:sp>
+        <p:nvSpPr>
+          <p:cNvPr id="32" name="Diamond 31"/>
+          <p:cNvSpPr/>
+          <p:nvPr/>
+        </p:nvSpPr>
+        <p:spPr>
+          <a:xfrm>
+            <a:off x="10885932" y="3296412"/>
+            <a:ext cx="82296" cy="82296"/>
+          </a:xfrm>
+          <a:prstGeom prst="diamond">
+            <a:avLst/>
+          </a:prstGeom>
+          <a:solidFill>
+            <a:srgbClr val="D8B87A"/>
+          </a:solidFill>
+          <a:ln>
+            <a:noFill/>
+          </a:ln>
+        </p:spPr>
+        <p:style>
+          <a:lnRef idx="1">
+            <a:schemeClr val="accent1"/>
+          </a:lnRef>
+          <a:fillRef idx="3">
+            <a:schemeClr val="accent1"/>
+          </a:fillRef>
+          <a:effectRef idx="2">
+            <a:schemeClr val="accent1"/>
+          </a:effectRef>
+          <a:fontRef idx="minor">
+            <a:schemeClr val="lt1"/>
+          </a:fontRef>
+        </p:style>
+        <p:txBody>
+          <a:bodyPr rtlCol="0" anchor="ctr"/>
+          <a:lstStyle/>
+          <a:p>
+            <a:pPr algn="ctr"/>
+          </a:p>
+        </p:txBody>
+      </p:sp>
+      <p:sp>
+        <p:nvSpPr>
+          <p:cNvPr id="33" name="Rectangle 32"/>
+          <p:cNvSpPr/>
+          <p:nvPr/>
+        </p:nvSpPr>
+        <p:spPr>
+          <a:xfrm>
+            <a:off x="1691640" y="1572768"/>
+            <a:ext cx="8778240" cy="36576"/>
+          </a:xfrm>
+          <a:prstGeom prst="rect">
+            <a:avLst/>
+          </a:prstGeom>
+          <a:solidFill>
+            <a:srgbClr val="D8B87A"/>
+          </a:solidFill>
+          <a:ln>
+            <a:noFill/>
+          </a:ln>
+        </p:spPr>
+        <p:style>
+          <a:lnRef idx="1">
+            <a:schemeClr val="accent1"/>
+          </a:lnRef>
+          <a:fillRef idx="3">
+            <a:schemeClr val="accent1"/>
+          </a:fillRef>
+          <a:effectRef idx="2">
+            <a:schemeClr val="accent1"/>
+          </a:effectRef>
+          <a:fontRef idx="minor">
+            <a:schemeClr val="lt1"/>
+          </a:fontRef>
+        </p:style>
+        <p:txBody>
+          <a:bodyPr rtlCol="0" anchor="ctr"/>
+          <a:lstStyle/>
+          <a:p>
+            <a:pPr algn="ctr"/>
+          </a:p>
+        </p:txBody>
+      </p:sp>
+      <p:sp>
+        <p:nvSpPr>
+          <p:cNvPr id="34" name="TextBox 33"/>
+          <p:cNvSpPr txBox="1"/>
+          <p:nvPr/>
+        </p:nvSpPr>
+        <p:spPr>
+          <a:xfrm>
+            <a:off x="1691640" y="384048"/>
+            <a:ext cx="8778240" cy="292608"/>
+          </a:xfrm>
+          <a:prstGeom prst="rect">
+            <a:avLst/>
+          </a:prstGeom>
+          <a:noFill/>
+        </p:spPr>
+        <p:txBody>
+          <a:bodyPr wrap="square" anchor="ctr" lIns="18288" rIns="73152" tIns="18288" bIns="18288"/>
+          <a:lstStyle/>
+          <a:p>
+            <a:pPr algn="ctr">
+              <a:lnSpc>
+                <a:spcPct val="100000"/>
+              </a:lnSpc>
+              <a:spcAft>
+                <a:spcPts val="0"/>
+              </a:spcAft>
+            </a:pPr>
+            <a:r>
+              <a:rPr sz="1600" b="0">
+                <a:solidFill>
+                  <a:srgbClr val="D8B87A"/>
+                </a:solidFill>
+                <a:latin typeface="Malgun Gothic"/>
+              </a:rPr>
+              <a:t>11. 안내 및 광고</a:t>
+            </a:r>
+          </a:p>
+        </p:txBody>
+      </p:sp>
+      <p:cxnSp>
+        <p:nvCxnSpPr>
+          <p:cNvPr id="35" name="Connector 34"/>
+          <p:cNvCxnSpPr/>
+          <p:nvPr/>
+        </p:nvCxnSpPr>
+        <p:spPr>
+          <a:xfrm>
+            <a:off x="5257800.0" y="749808"/>
+            <a:ext cx="1645920.0" cy="0"/>
+          </a:xfrm>
+          <a:prstGeom prst="line">
+            <a:avLst/>
+          </a:prstGeom>
+          <a:ln w="17145">
+            <a:solidFill>
+              <a:srgbClr val="D8B87A"/>
+            </a:solidFill>
+          </a:ln>
+        </p:spPr>
+        <p:style>
+          <a:lnRef idx="2">
+            <a:schemeClr val="accent1"/>
+          </a:lnRef>
+          <a:fillRef idx="0">
+            <a:schemeClr val="accent1"/>
+          </a:fillRef>
+          <a:effectRef idx="1">
+            <a:schemeClr val="accent1"/>
+          </a:effectRef>
+          <a:fontRef idx="minor">
+            <a:schemeClr val="tx1"/>
+          </a:fontRef>
+        </p:style>
+      </p:cxnSp>
+      <p:sp>
+        <p:nvSpPr>
+          <p:cNvPr id="36" name="TextBox 35"/>
+          <p:cNvSpPr txBox="1"/>
+          <p:nvPr/>
+        </p:nvSpPr>
+        <p:spPr>
+          <a:xfrm>
+            <a:off x="1691640" y="960120"/>
+            <a:ext cx="8778240" cy="777240"/>
+          </a:xfrm>
+          <a:prstGeom prst="rect">
+            <a:avLst/>
+          </a:prstGeom>
+          <a:noFill/>
+        </p:spPr>
+        <p:txBody>
+          <a:bodyPr wrap="square" anchor="ctr" lIns="18288" rIns="73152" tIns="18288" bIns="18288"/>
+          <a:lstStyle/>
+          <a:p>
+            <a:pPr algn="ctr">
+              <a:lnSpc>
+                <a:spcPct val="115000"/>
+              </a:lnSpc>
+              <a:spcAft>
+                <a:spcPts val="0"/>
+              </a:spcAft>
+            </a:pPr>
+            <a:r>
+              <a:rPr sz="3600" b="1">
+                <a:solidFill>
+                  <a:srgbClr val="FFF8F0"/>
+                </a:solidFill>
+                <a:latin typeface="Malgun Gothic"/>
+              </a:rPr>
+              <a:t>안내 및 광고</a:t>
             </a:r>
           </a:p>
         </p:txBody>
@@ -11908,7 +15213,7 @@
                 </a:solidFill>
                 <a:latin typeface="Malgun Gothic"/>
               </a:rPr>
-              <a:t>1. 찬양과 기도</a:t>
+              <a:t>1. 예배 준비의 시간</a:t>
             </a:r>
           </a:p>
         </p:txBody>
@@ -11950,7 +15255,7 @@
       </p:cxnSp>
       <p:sp>
         <p:nvSpPr>
-          <p:cNvPr id="37" name="HYMN_1"/>
+          <p:cNvPr id="37" name="HYMN_PREP_1"/>
           <p:cNvSpPr txBox="1"/>
           <p:nvPr/>
         </p:nvSpPr>
@@ -11983,7 +15288,7 @@
                 </a:solidFill>
                 <a:latin typeface="Malgun Gothic"/>
               </a:rPr>
-              <a:t>{{HYMN_1}}</a:t>
+              <a:t>{{HYMN_PREP_1}}</a:t>
             </a:r>
           </a:p>
         </p:txBody>
@@ -13334,149 +16639,95 @@
           </a:p>
         </p:txBody>
       </p:sp>
-      <p:cxnSp>
-        <p:nvCxnSpPr>
-          <p:cNvPr id="33" name="Connector 32"/>
-          <p:cNvCxnSpPr/>
-          <p:nvPr/>
-        </p:nvCxnSpPr>
-        <p:spPr>
-          <a:xfrm>
-            <a:off x="4517136.0" y="1627632"/>
-            <a:ext cx="292608.0" cy="0"/>
-          </a:xfrm>
-          <a:prstGeom prst="line">
-            <a:avLst/>
-          </a:prstGeom>
-          <a:ln w="15240">
-            <a:solidFill>
-              <a:srgbClr val="D8B87A"/>
-            </a:solidFill>
-          </a:ln>
-        </p:spPr>
-        <p:style>
-          <a:lnRef idx="2">
-            <a:schemeClr val="accent1"/>
-          </a:lnRef>
-          <a:fillRef idx="0">
-            <a:schemeClr val="accent1"/>
-          </a:fillRef>
-          <a:effectRef idx="1">
-            <a:schemeClr val="accent1"/>
-          </a:effectRef>
-          <a:fontRef idx="minor">
-            <a:schemeClr val="tx1"/>
-          </a:fontRef>
-        </p:style>
-      </p:cxnSp>
-      <p:cxnSp>
-        <p:nvCxnSpPr>
-          <p:cNvPr id="34" name="Connector 33"/>
-          <p:cNvCxnSpPr/>
-          <p:nvPr/>
-        </p:nvCxnSpPr>
-        <p:spPr>
-          <a:xfrm>
-            <a:off x="4663440.0" y="1481328"/>
-            <a:ext cx="0.0" cy="292608"/>
-          </a:xfrm>
-          <a:prstGeom prst="line">
-            <a:avLst/>
-          </a:prstGeom>
-          <a:ln w="15240">
-            <a:solidFill>
-              <a:srgbClr val="D8B87A"/>
-            </a:solidFill>
-          </a:ln>
-        </p:spPr>
-        <p:style>
-          <a:lnRef idx="2">
-            <a:schemeClr val="accent1"/>
-          </a:lnRef>
-          <a:fillRef idx="0">
-            <a:schemeClr val="accent1"/>
-          </a:fillRef>
-          <a:effectRef idx="1">
-            <a:schemeClr val="accent1"/>
-          </a:effectRef>
-          <a:fontRef idx="minor">
-            <a:schemeClr val="tx1"/>
-          </a:fontRef>
-        </p:style>
-      </p:cxnSp>
-      <p:cxnSp>
-        <p:nvCxnSpPr>
-          <p:cNvPr id="35" name="Connector 34"/>
-          <p:cNvCxnSpPr/>
-          <p:nvPr/>
-        </p:nvCxnSpPr>
-        <p:spPr>
-          <a:xfrm>
-            <a:off x="7351776.0" y="1627632"/>
-            <a:ext cx="292608.0" cy="0"/>
-          </a:xfrm>
-          <a:prstGeom prst="line">
-            <a:avLst/>
-          </a:prstGeom>
-          <a:ln w="15240">
-            <a:solidFill>
-              <a:srgbClr val="D8B87A"/>
-            </a:solidFill>
-          </a:ln>
-        </p:spPr>
-        <p:style>
-          <a:lnRef idx="2">
-            <a:schemeClr val="accent1"/>
-          </a:lnRef>
-          <a:fillRef idx="0">
-            <a:schemeClr val="accent1"/>
-          </a:fillRef>
-          <a:effectRef idx="1">
-            <a:schemeClr val="accent1"/>
-          </a:effectRef>
-          <a:fontRef idx="minor">
-            <a:schemeClr val="tx1"/>
-          </a:fontRef>
-        </p:style>
-      </p:cxnSp>
-      <p:cxnSp>
-        <p:nvCxnSpPr>
-          <p:cNvPr id="36" name="Connector 35"/>
-          <p:cNvCxnSpPr/>
-          <p:nvPr/>
-        </p:nvCxnSpPr>
-        <p:spPr>
-          <a:xfrm>
-            <a:off x="7498080.0" y="1481328"/>
-            <a:ext cx="0.0" cy="292608"/>
-          </a:xfrm>
-          <a:prstGeom prst="line">
-            <a:avLst/>
-          </a:prstGeom>
-          <a:ln w="15240">
-            <a:solidFill>
-              <a:srgbClr val="D8B87A"/>
-            </a:solidFill>
-          </a:ln>
-        </p:spPr>
-        <p:style>
-          <a:lnRef idx="2">
-            <a:schemeClr val="accent1"/>
-          </a:lnRef>
-          <a:fillRef idx="0">
-            <a:schemeClr val="accent1"/>
-          </a:fillRef>
-          <a:effectRef idx="1">
-            <a:schemeClr val="accent1"/>
-          </a:effectRef>
-          <a:fontRef idx="minor">
-            <a:schemeClr val="tx1"/>
-          </a:fontRef>
-        </p:style>
-      </p:cxnSp>
-      <p:sp>
-        <p:nvSpPr>
-          <p:cNvPr id="37" name="TextBox 36"/>
+      <p:sp>
+        <p:nvSpPr>
+          <p:cNvPr id="33" name="Diamond 32"/>
+          <p:cNvSpPr/>
+          <p:nvPr/>
+        </p:nvSpPr>
+        <p:spPr>
+          <a:xfrm>
+            <a:off x="4933188" y="2281428"/>
+            <a:ext cx="100584" cy="100584"/>
+          </a:xfrm>
+          <a:prstGeom prst="diamond">
+            <a:avLst/>
+          </a:prstGeom>
+          <a:solidFill>
+            <a:srgbClr val="D8B87A"/>
+          </a:solidFill>
+          <a:ln>
+            <a:noFill/>
+          </a:ln>
+        </p:spPr>
+        <p:style>
+          <a:lnRef idx="1">
+            <a:schemeClr val="accent1"/>
+          </a:lnRef>
+          <a:fillRef idx="3">
+            <a:schemeClr val="accent1"/>
+          </a:fillRef>
+          <a:effectRef idx="2">
+            <a:schemeClr val="accent1"/>
+          </a:effectRef>
+          <a:fontRef idx="minor">
+            <a:schemeClr val="lt1"/>
+          </a:fontRef>
+        </p:style>
+        <p:txBody>
+          <a:bodyPr rtlCol="0" anchor="ctr"/>
+          <a:lstStyle/>
+          <a:p>
+            <a:pPr algn="ctr"/>
+          </a:p>
+        </p:txBody>
+      </p:sp>
+      <p:sp>
+        <p:nvSpPr>
+          <p:cNvPr id="34" name="Diamond 33"/>
+          <p:cNvSpPr/>
+          <p:nvPr/>
+        </p:nvSpPr>
+        <p:spPr>
+          <a:xfrm>
+            <a:off x="7127748" y="2281428"/>
+            <a:ext cx="100584" cy="100584"/>
+          </a:xfrm>
+          <a:prstGeom prst="diamond">
+            <a:avLst/>
+          </a:prstGeom>
+          <a:solidFill>
+            <a:srgbClr val="D8B87A"/>
+          </a:solidFill>
+          <a:ln>
+            <a:noFill/>
+          </a:ln>
+        </p:spPr>
+        <p:style>
+          <a:lnRef idx="1">
+            <a:schemeClr val="accent1"/>
+          </a:lnRef>
+          <a:fillRef idx="3">
+            <a:schemeClr val="accent1"/>
+          </a:fillRef>
+          <a:effectRef idx="2">
+            <a:schemeClr val="accent1"/>
+          </a:effectRef>
+          <a:fontRef idx="minor">
+            <a:schemeClr val="lt1"/>
+          </a:fontRef>
+        </p:style>
+        <p:txBody>
+          <a:bodyPr rtlCol="0" anchor="ctr"/>
+          <a:lstStyle/>
+          <a:p>
+            <a:pPr algn="ctr"/>
+          </a:p>
+        </p:txBody>
+      </p:sp>
+      <p:sp>
+        <p:nvSpPr>
+          <p:cNvPr id="35" name="TextBox 34"/>
           <p:cNvSpPr txBox="1"/>
           <p:nvPr/>
         </p:nvSpPr>
@@ -13509,14 +16760,14 @@
                 </a:solidFill>
                 <a:latin typeface="Malgun Gothic"/>
               </a:rPr>
-              <a:t>2. 사도신경</a:t>
+              <a:t>1. 예배 준비의 시간</a:t>
             </a:r>
           </a:p>
         </p:txBody>
       </p:sp>
       <p:cxnSp>
         <p:nvCxnSpPr>
-          <p:cNvPr id="38" name="Connector 37"/>
+          <p:cNvPr id="36" name="Connector 35"/>
           <p:cNvCxnSpPr/>
           <p:nvPr/>
         </p:nvCxnSpPr>
@@ -13551,14 +16802,14 @@
       </p:cxnSp>
       <p:sp>
         <p:nvSpPr>
-          <p:cNvPr id="39" name="TextBox 38"/>
+          <p:cNvPr id="37" name="HYMN_PREP_2"/>
           <p:cNvSpPr txBox="1"/>
           <p:nvPr/>
         </p:nvSpPr>
         <p:spPr>
           <a:xfrm>
-            <a:off x="1691640" y="960120"/>
-            <a:ext cx="8778240" cy="777240"/>
+            <a:off x="1691640" y="2331720"/>
+            <a:ext cx="8778240" cy="1554480"/>
           </a:xfrm>
           <a:prstGeom prst="rect">
             <a:avLst/>
@@ -13578,57 +16829,52 @@
               </a:spcAft>
             </a:pPr>
             <a:r>
-              <a:rPr sz="3600" b="1">
+              <a:rPr sz="4400" b="1">
                 <a:solidFill>
                   <a:srgbClr val="FFF8F0"/>
                 </a:solidFill>
                 <a:latin typeface="Malgun Gothic"/>
               </a:rPr>
-              <a:t>{{APOSTLES_CREED_HEADING}}</a:t>
+              <a:t>{{HYMN_PREP_2}}</a:t>
             </a:r>
           </a:p>
         </p:txBody>
       </p:sp>
-      <p:sp>
-        <p:nvSpPr>
-          <p:cNvPr id="40" name="APOSTLES_CREED_1"/>
-          <p:cNvSpPr txBox="1"/>
-          <p:nvPr/>
-        </p:nvSpPr>
-        <p:spPr>
-          <a:xfrm>
-            <a:off x="1691640" y="1828800"/>
-            <a:ext cx="8778240" cy="4297680"/>
-          </a:xfrm>
-          <a:prstGeom prst="rect">
-            <a:avLst/>
-          </a:prstGeom>
-          <a:noFill/>
-        </p:spPr>
-        <p:txBody>
-          <a:bodyPr wrap="square" anchor="t" lIns="18288" rIns="73152" tIns="18288" bIns="18288"/>
-          <a:lstStyle/>
-          <a:p>
-            <a:pPr algn="ctr">
-              <a:lnSpc>
-                <a:spcPct val="130000"/>
-              </a:lnSpc>
-              <a:spcAft>
-                <a:spcPts val="600"/>
-              </a:spcAft>
-            </a:pPr>
-            <a:r>
-              <a:rPr sz="2800" b="0">
-                <a:solidFill>
-                  <a:srgbClr val="FFF8F0"/>
-                </a:solidFill>
-                <a:latin typeface="Malgun Gothic"/>
-              </a:rPr>
-              <a:t>{{APOSTLES_CREED_1}}</a:t>
-            </a:r>
-          </a:p>
-        </p:txBody>
-      </p:sp>
+      <p:cxnSp>
+        <p:nvCxnSpPr>
+          <p:cNvPr id="38" name="Connector 37"/>
+          <p:cNvCxnSpPr/>
+          <p:nvPr/>
+        </p:nvCxnSpPr>
+        <p:spPr>
+          <a:xfrm>
+            <a:off x="5394960.0" y="4160520"/>
+            <a:ext cx="1371600.0" cy="0"/>
+          </a:xfrm>
+          <a:prstGeom prst="line">
+            <a:avLst/>
+          </a:prstGeom>
+          <a:ln w="15240">
+            <a:solidFill>
+              <a:srgbClr val="D8B87A"/>
+            </a:solidFill>
+          </a:ln>
+        </p:spPr>
+        <p:style>
+          <a:lnRef idx="2">
+            <a:schemeClr val="accent1"/>
+          </a:lnRef>
+          <a:fillRef idx="0">
+            <a:schemeClr val="accent1"/>
+          </a:fillRef>
+          <a:effectRef idx="1">
+            <a:schemeClr val="accent1"/>
+          </a:effectRef>
+          <a:fontRef idx="minor">
+            <a:schemeClr val="tx1"/>
+          </a:fontRef>
+        </p:style>
+      </p:cxnSp>
     </p:spTree>
   </p:cSld>
   <p:clrMapOvr>
@@ -14942,163 +18188,93 @@
       </p:sp>
       <p:sp>
         <p:nvSpPr>
-          <p:cNvPr id="33" name="Rectangle 32"/>
-          <p:cNvSpPr/>
-          <p:nvPr/>
-        </p:nvSpPr>
-        <p:spPr>
-          <a:xfrm>
-            <a:off x="5029200" y="1627632"/>
-            <a:ext cx="256032" cy="109728"/>
-          </a:xfrm>
-          <a:prstGeom prst="rect">
-            <a:avLst/>
-          </a:prstGeom>
-          <a:solidFill>
-            <a:srgbClr val="FF5C5C"/>
-          </a:solidFill>
-          <a:ln>
-            <a:noFill/>
-          </a:ln>
-        </p:spPr>
-        <p:style>
-          <a:lnRef idx="1">
-            <a:schemeClr val="accent1"/>
-          </a:lnRef>
-          <a:fillRef idx="3">
-            <a:schemeClr val="accent1"/>
-          </a:fillRef>
-          <a:effectRef idx="2">
-            <a:schemeClr val="accent1"/>
-          </a:effectRef>
-          <a:fontRef idx="minor">
-            <a:schemeClr val="lt1"/>
-          </a:fontRef>
-        </p:style>
-        <p:txBody>
-          <a:bodyPr rtlCol="0" anchor="ctr"/>
-          <a:lstStyle/>
-          <a:p>
-            <a:pPr algn="ctr"/>
-          </a:p>
-        </p:txBody>
-      </p:sp>
-      <p:sp>
-        <p:nvSpPr>
-          <p:cNvPr id="34" name="Rectangle 33"/>
-          <p:cNvSpPr/>
-          <p:nvPr/>
-        </p:nvSpPr>
-        <p:spPr>
-          <a:xfrm>
-            <a:off x="6876288" y="1627632"/>
-            <a:ext cx="256032" cy="109728"/>
-          </a:xfrm>
-          <a:prstGeom prst="rect">
-            <a:avLst/>
-          </a:prstGeom>
-          <a:solidFill>
-            <a:srgbClr val="FFE066"/>
-          </a:solidFill>
-          <a:ln>
-            <a:noFill/>
-          </a:ln>
-        </p:spPr>
-        <p:style>
-          <a:lnRef idx="1">
-            <a:schemeClr val="accent1"/>
-          </a:lnRef>
-          <a:fillRef idx="3">
-            <a:schemeClr val="accent1"/>
-          </a:fillRef>
-          <a:effectRef idx="2">
-            <a:schemeClr val="accent1"/>
-          </a:effectRef>
-          <a:fontRef idx="minor">
-            <a:schemeClr val="lt1"/>
-          </a:fontRef>
-        </p:style>
-        <p:txBody>
-          <a:bodyPr rtlCol="0" anchor="ctr"/>
-          <a:lstStyle/>
-          <a:p>
-            <a:pPr algn="ctr"/>
-          </a:p>
-        </p:txBody>
-      </p:sp>
-      <p:cxnSp>
-        <p:nvCxnSpPr>
-          <p:cNvPr id="35" name="Connector 34"/>
-          <p:cNvCxnSpPr/>
-          <p:nvPr/>
-        </p:nvCxnSpPr>
-        <p:spPr>
-          <a:xfrm>
-            <a:off x="1527048" y="1828800"/>
-            <a:ext cx="0" cy="3931920"/>
-          </a:xfrm>
-          <a:prstGeom prst="line">
-            <a:avLst/>
-          </a:prstGeom>
-          <a:ln w="20320">
-            <a:solidFill>
-              <a:srgbClr val="D8B87A"/>
-            </a:solidFill>
-          </a:ln>
-        </p:spPr>
-        <p:style>
-          <a:lnRef idx="2">
-            <a:schemeClr val="accent1"/>
-          </a:lnRef>
-          <a:fillRef idx="0">
-            <a:schemeClr val="accent1"/>
-          </a:fillRef>
-          <a:effectRef idx="1">
-            <a:schemeClr val="accent1"/>
-          </a:effectRef>
-          <a:fontRef idx="minor">
-            <a:schemeClr val="tx1"/>
-          </a:fontRef>
-        </p:style>
-      </p:cxnSp>
-      <p:cxnSp>
-        <p:nvCxnSpPr>
-          <p:cNvPr id="36" name="Connector 35"/>
-          <p:cNvCxnSpPr/>
-          <p:nvPr/>
-        </p:nvCxnSpPr>
-        <p:spPr>
-          <a:xfrm>
-            <a:off x="10634472" y="1828800"/>
-            <a:ext cx="0" cy="3931920"/>
-          </a:xfrm>
-          <a:prstGeom prst="line">
-            <a:avLst/>
-          </a:prstGeom>
-          <a:ln w="20320">
-            <a:solidFill>
-              <a:srgbClr val="D8B87A"/>
-            </a:solidFill>
-          </a:ln>
-        </p:spPr>
-        <p:style>
-          <a:lnRef idx="2">
-            <a:schemeClr val="accent1"/>
-          </a:lnRef>
-          <a:fillRef idx="0">
-            <a:schemeClr val="accent1"/>
-          </a:fillRef>
-          <a:effectRef idx="1">
-            <a:schemeClr val="accent1"/>
-          </a:effectRef>
-          <a:fontRef idx="minor">
-            <a:schemeClr val="tx1"/>
-          </a:fontRef>
-        </p:style>
-      </p:cxnSp>
-      <p:sp>
-        <p:nvSpPr>
-          <p:cNvPr id="37" name="TextBox 36"/>
+          <p:cNvPr id="33" name="Diamond 32"/>
+          <p:cNvSpPr/>
+          <p:nvPr/>
+        </p:nvSpPr>
+        <p:spPr>
+          <a:xfrm>
+            <a:off x="4933188" y="2281428"/>
+            <a:ext cx="100584" cy="100584"/>
+          </a:xfrm>
+          <a:prstGeom prst="diamond">
+            <a:avLst/>
+          </a:prstGeom>
+          <a:solidFill>
+            <a:srgbClr val="D8B87A"/>
+          </a:solidFill>
+          <a:ln>
+            <a:noFill/>
+          </a:ln>
+        </p:spPr>
+        <p:style>
+          <a:lnRef idx="1">
+            <a:schemeClr val="accent1"/>
+          </a:lnRef>
+          <a:fillRef idx="3">
+            <a:schemeClr val="accent1"/>
+          </a:fillRef>
+          <a:effectRef idx="2">
+            <a:schemeClr val="accent1"/>
+          </a:effectRef>
+          <a:fontRef idx="minor">
+            <a:schemeClr val="lt1"/>
+          </a:fontRef>
+        </p:style>
+        <p:txBody>
+          <a:bodyPr rtlCol="0" anchor="ctr"/>
+          <a:lstStyle/>
+          <a:p>
+            <a:pPr algn="ctr"/>
+          </a:p>
+        </p:txBody>
+      </p:sp>
+      <p:sp>
+        <p:nvSpPr>
+          <p:cNvPr id="34" name="Diamond 33"/>
+          <p:cNvSpPr/>
+          <p:nvPr/>
+        </p:nvSpPr>
+        <p:spPr>
+          <a:xfrm>
+            <a:off x="7127748" y="2281428"/>
+            <a:ext cx="100584" cy="100584"/>
+          </a:xfrm>
+          <a:prstGeom prst="diamond">
+            <a:avLst/>
+          </a:prstGeom>
+          <a:solidFill>
+            <a:srgbClr val="D8B87A"/>
+          </a:solidFill>
+          <a:ln>
+            <a:noFill/>
+          </a:ln>
+        </p:spPr>
+        <p:style>
+          <a:lnRef idx="1">
+            <a:schemeClr val="accent1"/>
+          </a:lnRef>
+          <a:fillRef idx="3">
+            <a:schemeClr val="accent1"/>
+          </a:fillRef>
+          <a:effectRef idx="2">
+            <a:schemeClr val="accent1"/>
+          </a:effectRef>
+          <a:fontRef idx="minor">
+            <a:schemeClr val="lt1"/>
+          </a:fontRef>
+        </p:style>
+        <p:txBody>
+          <a:bodyPr rtlCol="0" anchor="ctr"/>
+          <a:lstStyle/>
+          <a:p>
+            <a:pPr algn="ctr"/>
+          </a:p>
+        </p:txBody>
+      </p:sp>
+      <p:sp>
+        <p:nvSpPr>
+          <p:cNvPr id="35" name="TextBox 34"/>
           <p:cNvSpPr txBox="1"/>
           <p:nvPr/>
         </p:nvSpPr>
@@ -15131,14 +18307,14 @@
                 </a:solidFill>
                 <a:latin typeface="Malgun Gothic"/>
               </a:rPr>
-              <a:t>3. 교독문</a:t>
+              <a:t>2. 찬양과 기도</a:t>
             </a:r>
           </a:p>
         </p:txBody>
       </p:sp>
       <p:cxnSp>
         <p:nvCxnSpPr>
-          <p:cNvPr id="38" name="Connector 37"/>
+          <p:cNvPr id="36" name="Connector 35"/>
           <p:cNvCxnSpPr/>
           <p:nvPr/>
         </p:nvCxnSpPr>
@@ -15173,14 +18349,14 @@
       </p:cxnSp>
       <p:sp>
         <p:nvSpPr>
-          <p:cNvPr id="39" name="TextBox 38"/>
+          <p:cNvPr id="37" name="HYMN_1"/>
           <p:cNvSpPr txBox="1"/>
           <p:nvPr/>
         </p:nvSpPr>
         <p:spPr>
           <a:xfrm>
-            <a:off x="1691640" y="960120"/>
-            <a:ext cx="8778240" cy="777240"/>
+            <a:off x="1691640" y="2331720"/>
+            <a:ext cx="8778240" cy="1554480"/>
           </a:xfrm>
           <a:prstGeom prst="rect">
             <a:avLst/>
@@ -15200,57 +18376,52 @@
               </a:spcAft>
             </a:pPr>
             <a:r>
-              <a:rPr sz="3600" b="1">
+              <a:rPr sz="4400" b="1">
                 <a:solidFill>
                   <a:srgbClr val="FFF8F0"/>
                 </a:solidFill>
                 <a:latin typeface="Malgun Gothic"/>
               </a:rPr>
-              <a:t>{{RESPONSIVE_TITLE}}</a:t>
+              <a:t>{{HYMN_1}}</a:t>
             </a:r>
           </a:p>
         </p:txBody>
       </p:sp>
-      <p:sp>
-        <p:nvSpPr>
-          <p:cNvPr id="40" name="RESPONSIVE_1"/>
-          <p:cNvSpPr txBox="1"/>
-          <p:nvPr/>
-        </p:nvSpPr>
-        <p:spPr>
-          <a:xfrm>
-            <a:off x="1691640" y="1828800"/>
-            <a:ext cx="8778240" cy="4297680"/>
-          </a:xfrm>
-          <a:prstGeom prst="rect">
-            <a:avLst/>
-          </a:prstGeom>
-          <a:noFill/>
-        </p:spPr>
-        <p:txBody>
-          <a:bodyPr wrap="square" anchor="t" lIns="18288" rIns="73152" tIns="18288" bIns="18288"/>
-          <a:lstStyle/>
-          <a:p>
-            <a:pPr algn="l">
-              <a:lnSpc>
-                <a:spcPct val="130000"/>
-              </a:lnSpc>
-              <a:spcAft>
-                <a:spcPts val="600"/>
-              </a:spcAft>
-            </a:pPr>
-            <a:r>
-              <a:rPr sz="2800" b="0">
-                <a:solidFill>
-                  <a:srgbClr val="FFF8F0"/>
-                </a:solidFill>
-                <a:latin typeface="Malgun Gothic"/>
-              </a:rPr>
-              <a:t>{{RESPONSIVE_1}}</a:t>
-            </a:r>
-          </a:p>
-        </p:txBody>
-      </p:sp>
+      <p:cxnSp>
+        <p:nvCxnSpPr>
+          <p:cNvPr id="38" name="Connector 37"/>
+          <p:cNvCxnSpPr/>
+          <p:nvPr/>
+        </p:nvCxnSpPr>
+        <p:spPr>
+          <a:xfrm>
+            <a:off x="5394960.0" y="4160520"/>
+            <a:ext cx="1371600.0" cy="0"/>
+          </a:xfrm>
+          <a:prstGeom prst="line">
+            <a:avLst/>
+          </a:prstGeom>
+          <a:ln w="15240">
+            <a:solidFill>
+              <a:srgbClr val="D8B87A"/>
+            </a:solidFill>
+          </a:ln>
+        </p:spPr>
+        <p:style>
+          <a:lnRef idx="2">
+            <a:schemeClr val="accent1"/>
+          </a:lnRef>
+          <a:fillRef idx="0">
+            <a:schemeClr val="accent1"/>
+          </a:fillRef>
+          <a:effectRef idx="1">
+            <a:schemeClr val="accent1"/>
+          </a:effectRef>
+          <a:fontRef idx="minor">
+            <a:schemeClr val="tx1"/>
+          </a:fontRef>
+        </p:style>
+      </p:cxnSp>
     </p:spTree>
   </p:cSld>
   <p:clrMapOvr>
@@ -16562,95 +19733,149 @@
           </a:p>
         </p:txBody>
       </p:sp>
-      <p:sp>
-        <p:nvSpPr>
-          <p:cNvPr id="33" name="Diamond 32"/>
-          <p:cNvSpPr/>
-          <p:nvPr/>
-        </p:nvSpPr>
-        <p:spPr>
-          <a:xfrm>
-            <a:off x="4933188" y="2281428"/>
-            <a:ext cx="100584" cy="100584"/>
-          </a:xfrm>
-          <a:prstGeom prst="diamond">
-            <a:avLst/>
-          </a:prstGeom>
-          <a:solidFill>
-            <a:srgbClr val="D8B87A"/>
-          </a:solidFill>
-          <a:ln>
-            <a:noFill/>
-          </a:ln>
-        </p:spPr>
-        <p:style>
-          <a:lnRef idx="1">
-            <a:schemeClr val="accent1"/>
-          </a:lnRef>
-          <a:fillRef idx="3">
-            <a:schemeClr val="accent1"/>
-          </a:fillRef>
-          <a:effectRef idx="2">
-            <a:schemeClr val="accent1"/>
-          </a:effectRef>
-          <a:fontRef idx="minor">
-            <a:schemeClr val="lt1"/>
-          </a:fontRef>
-        </p:style>
-        <p:txBody>
-          <a:bodyPr rtlCol="0" anchor="ctr"/>
-          <a:lstStyle/>
-          <a:p>
-            <a:pPr algn="ctr"/>
-          </a:p>
-        </p:txBody>
-      </p:sp>
-      <p:sp>
-        <p:nvSpPr>
-          <p:cNvPr id="34" name="Diamond 33"/>
-          <p:cNvSpPr/>
-          <p:nvPr/>
-        </p:nvSpPr>
-        <p:spPr>
-          <a:xfrm>
-            <a:off x="7127748" y="2281428"/>
-            <a:ext cx="100584" cy="100584"/>
-          </a:xfrm>
-          <a:prstGeom prst="diamond">
-            <a:avLst/>
-          </a:prstGeom>
-          <a:solidFill>
-            <a:srgbClr val="D8B87A"/>
-          </a:solidFill>
-          <a:ln>
-            <a:noFill/>
-          </a:ln>
-        </p:spPr>
-        <p:style>
-          <a:lnRef idx="1">
-            <a:schemeClr val="accent1"/>
-          </a:lnRef>
-          <a:fillRef idx="3">
-            <a:schemeClr val="accent1"/>
-          </a:fillRef>
-          <a:effectRef idx="2">
-            <a:schemeClr val="accent1"/>
-          </a:effectRef>
-          <a:fontRef idx="minor">
-            <a:schemeClr val="lt1"/>
-          </a:fontRef>
-        </p:style>
-        <p:txBody>
-          <a:bodyPr rtlCol="0" anchor="ctr"/>
-          <a:lstStyle/>
-          <a:p>
-            <a:pPr algn="ctr"/>
-          </a:p>
-        </p:txBody>
-      </p:sp>
-      <p:sp>
-        <p:nvSpPr>
-          <p:cNvPr id="35" name="TextBox 34"/>
+      <p:cxnSp>
+        <p:nvCxnSpPr>
+          <p:cNvPr id="33" name="Connector 32"/>
+          <p:cNvCxnSpPr/>
+          <p:nvPr/>
+        </p:nvCxnSpPr>
+        <p:spPr>
+          <a:xfrm>
+            <a:off x="4517136.0" y="1627632"/>
+            <a:ext cx="292608.0" cy="0"/>
+          </a:xfrm>
+          <a:prstGeom prst="line">
+            <a:avLst/>
+          </a:prstGeom>
+          <a:ln w="15240">
+            <a:solidFill>
+              <a:srgbClr val="D8B87A"/>
+            </a:solidFill>
+          </a:ln>
+        </p:spPr>
+        <p:style>
+          <a:lnRef idx="2">
+            <a:schemeClr val="accent1"/>
+          </a:lnRef>
+          <a:fillRef idx="0">
+            <a:schemeClr val="accent1"/>
+          </a:fillRef>
+          <a:effectRef idx="1">
+            <a:schemeClr val="accent1"/>
+          </a:effectRef>
+          <a:fontRef idx="minor">
+            <a:schemeClr val="tx1"/>
+          </a:fontRef>
+        </p:style>
+      </p:cxnSp>
+      <p:cxnSp>
+        <p:nvCxnSpPr>
+          <p:cNvPr id="34" name="Connector 33"/>
+          <p:cNvCxnSpPr/>
+          <p:nvPr/>
+        </p:nvCxnSpPr>
+        <p:spPr>
+          <a:xfrm>
+            <a:off x="4663440.0" y="1481328"/>
+            <a:ext cx="0.0" cy="292608"/>
+          </a:xfrm>
+          <a:prstGeom prst="line">
+            <a:avLst/>
+          </a:prstGeom>
+          <a:ln w="15240">
+            <a:solidFill>
+              <a:srgbClr val="D8B87A"/>
+            </a:solidFill>
+          </a:ln>
+        </p:spPr>
+        <p:style>
+          <a:lnRef idx="2">
+            <a:schemeClr val="accent1"/>
+          </a:lnRef>
+          <a:fillRef idx="0">
+            <a:schemeClr val="accent1"/>
+          </a:fillRef>
+          <a:effectRef idx="1">
+            <a:schemeClr val="accent1"/>
+          </a:effectRef>
+          <a:fontRef idx="minor">
+            <a:schemeClr val="tx1"/>
+          </a:fontRef>
+        </p:style>
+      </p:cxnSp>
+      <p:cxnSp>
+        <p:nvCxnSpPr>
+          <p:cNvPr id="35" name="Connector 34"/>
+          <p:cNvCxnSpPr/>
+          <p:nvPr/>
+        </p:nvCxnSpPr>
+        <p:spPr>
+          <a:xfrm>
+            <a:off x="7351776.0" y="1627632"/>
+            <a:ext cx="292608.0" cy="0"/>
+          </a:xfrm>
+          <a:prstGeom prst="line">
+            <a:avLst/>
+          </a:prstGeom>
+          <a:ln w="15240">
+            <a:solidFill>
+              <a:srgbClr val="D8B87A"/>
+            </a:solidFill>
+          </a:ln>
+        </p:spPr>
+        <p:style>
+          <a:lnRef idx="2">
+            <a:schemeClr val="accent1"/>
+          </a:lnRef>
+          <a:fillRef idx="0">
+            <a:schemeClr val="accent1"/>
+          </a:fillRef>
+          <a:effectRef idx="1">
+            <a:schemeClr val="accent1"/>
+          </a:effectRef>
+          <a:fontRef idx="minor">
+            <a:schemeClr val="tx1"/>
+          </a:fontRef>
+        </p:style>
+      </p:cxnSp>
+      <p:cxnSp>
+        <p:nvCxnSpPr>
+          <p:cNvPr id="36" name="Connector 35"/>
+          <p:cNvCxnSpPr/>
+          <p:nvPr/>
+        </p:nvCxnSpPr>
+        <p:spPr>
+          <a:xfrm>
+            <a:off x="7498080.0" y="1481328"/>
+            <a:ext cx="0.0" cy="292608"/>
+          </a:xfrm>
+          <a:prstGeom prst="line">
+            <a:avLst/>
+          </a:prstGeom>
+          <a:ln w="15240">
+            <a:solidFill>
+              <a:srgbClr val="D8B87A"/>
+            </a:solidFill>
+          </a:ln>
+        </p:spPr>
+        <p:style>
+          <a:lnRef idx="2">
+            <a:schemeClr val="accent1"/>
+          </a:lnRef>
+          <a:fillRef idx="0">
+            <a:schemeClr val="accent1"/>
+          </a:fillRef>
+          <a:effectRef idx="1">
+            <a:schemeClr val="accent1"/>
+          </a:effectRef>
+          <a:fontRef idx="minor">
+            <a:schemeClr val="tx1"/>
+          </a:fontRef>
+        </p:style>
+      </p:cxnSp>
+      <p:sp>
+        <p:nvSpPr>
+          <p:cNvPr id="37" name="TextBox 36"/>
           <p:cNvSpPr txBox="1"/>
           <p:nvPr/>
         </p:nvSpPr>
@@ -16683,14 +19908,14 @@
                 </a:solidFill>
                 <a:latin typeface="Malgun Gothic"/>
               </a:rPr>
-              <a:t>4. 찬송가</a:t>
+              <a:t>3. 사도신경</a:t>
             </a:r>
           </a:p>
         </p:txBody>
       </p:sp>
       <p:cxnSp>
         <p:nvCxnSpPr>
-          <p:cNvPr id="36" name="Connector 35"/>
+          <p:cNvPr id="38" name="Connector 37"/>
           <p:cNvCxnSpPr/>
           <p:nvPr/>
         </p:nvCxnSpPr>
@@ -16725,14 +19950,14 @@
       </p:cxnSp>
       <p:sp>
         <p:nvSpPr>
-          <p:cNvPr id="37" name="HYMN_2"/>
+          <p:cNvPr id="39" name="TextBox 38"/>
           <p:cNvSpPr txBox="1"/>
           <p:nvPr/>
         </p:nvSpPr>
         <p:spPr>
           <a:xfrm>
-            <a:off x="1691640" y="2331720"/>
-            <a:ext cx="8778240" cy="1554480"/>
+            <a:off x="1691640" y="960120"/>
+            <a:ext cx="8778240" cy="777240"/>
           </a:xfrm>
           <a:prstGeom prst="rect">
             <a:avLst/>
@@ -16752,52 +19977,57 @@
               </a:spcAft>
             </a:pPr>
             <a:r>
-              <a:rPr sz="4400" b="1">
+              <a:rPr sz="3600" b="1">
                 <a:solidFill>
                   <a:srgbClr val="FFF8F0"/>
                 </a:solidFill>
                 <a:latin typeface="Malgun Gothic"/>
               </a:rPr>
-              <a:t>{{HYMN_2}}</a:t>
+              <a:t>{{APOSTLES_CREED_HEADING}}</a:t>
             </a:r>
           </a:p>
         </p:txBody>
       </p:sp>
-      <p:cxnSp>
-        <p:nvCxnSpPr>
-          <p:cNvPr id="38" name="Connector 37"/>
-          <p:cNvCxnSpPr/>
-          <p:nvPr/>
-        </p:nvCxnSpPr>
-        <p:spPr>
-          <a:xfrm>
-            <a:off x="5394960.0" y="4160520"/>
-            <a:ext cx="1371600.0" cy="0"/>
-          </a:xfrm>
-          <a:prstGeom prst="line">
-            <a:avLst/>
-          </a:prstGeom>
-          <a:ln w="15240">
-            <a:solidFill>
-              <a:srgbClr val="D8B87A"/>
-            </a:solidFill>
-          </a:ln>
-        </p:spPr>
-        <p:style>
-          <a:lnRef idx="2">
-            <a:schemeClr val="accent1"/>
-          </a:lnRef>
-          <a:fillRef idx="0">
-            <a:schemeClr val="accent1"/>
-          </a:fillRef>
-          <a:effectRef idx="1">
-            <a:schemeClr val="accent1"/>
-          </a:effectRef>
-          <a:fontRef idx="minor">
-            <a:schemeClr val="tx1"/>
-          </a:fontRef>
-        </p:style>
-      </p:cxnSp>
+      <p:sp>
+        <p:nvSpPr>
+          <p:cNvPr id="40" name="APOSTLES_CREED_1"/>
+          <p:cNvSpPr txBox="1"/>
+          <p:nvPr/>
+        </p:nvSpPr>
+        <p:spPr>
+          <a:xfrm>
+            <a:off x="1691640" y="1828800"/>
+            <a:ext cx="8778240" cy="4297680"/>
+          </a:xfrm>
+          <a:prstGeom prst="rect">
+            <a:avLst/>
+          </a:prstGeom>
+          <a:noFill/>
+        </p:spPr>
+        <p:txBody>
+          <a:bodyPr wrap="square" anchor="t" lIns="18288" rIns="73152" tIns="18288" bIns="18288"/>
+          <a:lstStyle/>
+          <a:p>
+            <a:pPr algn="ctr">
+              <a:lnSpc>
+                <a:spcPct val="130000"/>
+              </a:lnSpc>
+              <a:spcAft>
+                <a:spcPts val="600"/>
+              </a:spcAft>
+            </a:pPr>
+            <a:r>
+              <a:rPr sz="2800" b="0">
+                <a:solidFill>
+                  <a:srgbClr val="FFF8F0"/>
+                </a:solidFill>
+                <a:latin typeface="Malgun Gothic"/>
+              </a:rPr>
+              <a:t>{{APOSTLES_CREED_1}}</a:t>
+            </a:r>
+          </a:p>
+        </p:txBody>
+      </p:sp>
     </p:spTree>
   </p:cSld>
   <p:clrMapOvr>
@@ -18111,176 +21341,160 @@
       </p:sp>
       <p:sp>
         <p:nvSpPr>
-          <p:cNvPr id="33" name="Diamond 32"/>
-          <p:cNvSpPr/>
-          <p:nvPr/>
-        </p:nvSpPr>
-        <p:spPr>
-          <a:xfrm>
-            <a:off x="5536692" y="1586484"/>
-            <a:ext cx="82296" cy="82296"/>
-          </a:xfrm>
-          <a:prstGeom prst="diamond">
-            <a:avLst/>
-          </a:prstGeom>
-          <a:solidFill>
-            <a:srgbClr val="D8B87A"/>
-          </a:solidFill>
-          <a:ln>
-            <a:noFill/>
-          </a:ln>
-        </p:spPr>
-        <p:style>
-          <a:lnRef idx="1">
-            <a:schemeClr val="accent1"/>
-          </a:lnRef>
-          <a:fillRef idx="3">
-            <a:schemeClr val="accent1"/>
-          </a:fillRef>
-          <a:effectRef idx="2">
-            <a:schemeClr val="accent1"/>
-          </a:effectRef>
-          <a:fontRef idx="minor">
-            <a:schemeClr val="lt1"/>
-          </a:fontRef>
-        </p:style>
-        <p:txBody>
-          <a:bodyPr rtlCol="0" anchor="ctr"/>
-          <a:lstStyle/>
-          <a:p>
-            <a:pPr algn="ctr"/>
-          </a:p>
-        </p:txBody>
-      </p:sp>
-      <p:sp>
-        <p:nvSpPr>
-          <p:cNvPr id="34" name="Diamond 33"/>
-          <p:cNvSpPr/>
-          <p:nvPr/>
-        </p:nvSpPr>
-        <p:spPr>
-          <a:xfrm>
-            <a:off x="5783580" y="1586484"/>
-            <a:ext cx="82296" cy="82296"/>
-          </a:xfrm>
-          <a:prstGeom prst="diamond">
-            <a:avLst/>
-          </a:prstGeom>
-          <a:solidFill>
-            <a:srgbClr val="D8B87A"/>
-          </a:solidFill>
-          <a:ln>
-            <a:noFill/>
-          </a:ln>
-        </p:spPr>
-        <p:style>
-          <a:lnRef idx="1">
-            <a:schemeClr val="accent1"/>
-          </a:lnRef>
-          <a:fillRef idx="3">
-            <a:schemeClr val="accent1"/>
-          </a:fillRef>
-          <a:effectRef idx="2">
-            <a:schemeClr val="accent1"/>
-          </a:effectRef>
-          <a:fontRef idx="minor">
-            <a:schemeClr val="lt1"/>
-          </a:fontRef>
-        </p:style>
-        <p:txBody>
-          <a:bodyPr rtlCol="0" anchor="ctr"/>
-          <a:lstStyle/>
-          <a:p>
-            <a:pPr algn="ctr"/>
-          </a:p>
-        </p:txBody>
-      </p:sp>
-      <p:sp>
-        <p:nvSpPr>
-          <p:cNvPr id="35" name="Diamond 34"/>
-          <p:cNvSpPr/>
-          <p:nvPr/>
-        </p:nvSpPr>
-        <p:spPr>
-          <a:xfrm>
-            <a:off x="6295644" y="1586484"/>
-            <a:ext cx="82296" cy="82296"/>
-          </a:xfrm>
-          <a:prstGeom prst="diamond">
-            <a:avLst/>
-          </a:prstGeom>
-          <a:solidFill>
-            <a:srgbClr val="D8B87A"/>
-          </a:solidFill>
-          <a:ln>
-            <a:noFill/>
-          </a:ln>
-        </p:spPr>
-        <p:style>
-          <a:lnRef idx="1">
-            <a:schemeClr val="accent1"/>
-          </a:lnRef>
-          <a:fillRef idx="3">
-            <a:schemeClr val="accent1"/>
-          </a:fillRef>
-          <a:effectRef idx="2">
-            <a:schemeClr val="accent1"/>
-          </a:effectRef>
-          <a:fontRef idx="minor">
-            <a:schemeClr val="lt1"/>
-          </a:fontRef>
-        </p:style>
-        <p:txBody>
-          <a:bodyPr rtlCol="0" anchor="ctr"/>
-          <a:lstStyle/>
-          <a:p>
-            <a:pPr algn="ctr"/>
-          </a:p>
-        </p:txBody>
-      </p:sp>
-      <p:sp>
-        <p:nvSpPr>
-          <p:cNvPr id="36" name="Diamond 35"/>
-          <p:cNvSpPr/>
-          <p:nvPr/>
-        </p:nvSpPr>
-        <p:spPr>
-          <a:xfrm>
-            <a:off x="6542532" y="1586484"/>
-            <a:ext cx="82296" cy="82296"/>
-          </a:xfrm>
-          <a:prstGeom prst="diamond">
-            <a:avLst/>
-          </a:prstGeom>
-          <a:solidFill>
-            <a:srgbClr val="D8B87A"/>
-          </a:solidFill>
-          <a:ln>
-            <a:noFill/>
-          </a:ln>
-        </p:spPr>
-        <p:style>
-          <a:lnRef idx="1">
-            <a:schemeClr val="accent1"/>
-          </a:lnRef>
-          <a:fillRef idx="3">
-            <a:schemeClr val="accent1"/>
-          </a:fillRef>
-          <a:effectRef idx="2">
-            <a:schemeClr val="accent1"/>
-          </a:effectRef>
-          <a:fontRef idx="minor">
-            <a:schemeClr val="lt1"/>
-          </a:fontRef>
-        </p:style>
-        <p:txBody>
-          <a:bodyPr rtlCol="0" anchor="ctr"/>
-          <a:lstStyle/>
-          <a:p>
-            <a:pPr algn="ctr"/>
-          </a:p>
-        </p:txBody>
-      </p:sp>
+          <p:cNvPr id="33" name="Rectangle 32"/>
+          <p:cNvSpPr/>
+          <p:nvPr/>
+        </p:nvSpPr>
+        <p:spPr>
+          <a:xfrm>
+            <a:off x="5029200" y="1627632"/>
+            <a:ext cx="256032" cy="109728"/>
+          </a:xfrm>
+          <a:prstGeom prst="rect">
+            <a:avLst/>
+          </a:prstGeom>
+          <a:solidFill>
+            <a:srgbClr val="FF5C5C"/>
+          </a:solidFill>
+          <a:ln>
+            <a:noFill/>
+          </a:ln>
+        </p:spPr>
+        <p:style>
+          <a:lnRef idx="1">
+            <a:schemeClr val="accent1"/>
+          </a:lnRef>
+          <a:fillRef idx="3">
+            <a:schemeClr val="accent1"/>
+          </a:fillRef>
+          <a:effectRef idx="2">
+            <a:schemeClr val="accent1"/>
+          </a:effectRef>
+          <a:fontRef idx="minor">
+            <a:schemeClr val="lt1"/>
+          </a:fontRef>
+        </p:style>
+        <p:txBody>
+          <a:bodyPr rtlCol="0" anchor="ctr"/>
+          <a:lstStyle/>
+          <a:p>
+            <a:pPr algn="ctr"/>
+          </a:p>
+        </p:txBody>
+      </p:sp>
+      <p:sp>
+        <p:nvSpPr>
+          <p:cNvPr id="34" name="Rectangle 33"/>
+          <p:cNvSpPr/>
+          <p:nvPr/>
+        </p:nvSpPr>
+        <p:spPr>
+          <a:xfrm>
+            <a:off x="6876288" y="1627632"/>
+            <a:ext cx="256032" cy="109728"/>
+          </a:xfrm>
+          <a:prstGeom prst="rect">
+            <a:avLst/>
+          </a:prstGeom>
+          <a:solidFill>
+            <a:srgbClr val="FFE066"/>
+          </a:solidFill>
+          <a:ln>
+            <a:noFill/>
+          </a:ln>
+        </p:spPr>
+        <p:style>
+          <a:lnRef idx="1">
+            <a:schemeClr val="accent1"/>
+          </a:lnRef>
+          <a:fillRef idx="3">
+            <a:schemeClr val="accent1"/>
+          </a:fillRef>
+          <a:effectRef idx="2">
+            <a:schemeClr val="accent1"/>
+          </a:effectRef>
+          <a:fontRef idx="minor">
+            <a:schemeClr val="lt1"/>
+          </a:fontRef>
+        </p:style>
+        <p:txBody>
+          <a:bodyPr rtlCol="0" anchor="ctr"/>
+          <a:lstStyle/>
+          <a:p>
+            <a:pPr algn="ctr"/>
+          </a:p>
+        </p:txBody>
+      </p:sp>
+      <p:cxnSp>
+        <p:nvCxnSpPr>
+          <p:cNvPr id="35" name="Connector 34"/>
+          <p:cNvCxnSpPr/>
+          <p:nvPr/>
+        </p:nvCxnSpPr>
+        <p:spPr>
+          <a:xfrm>
+            <a:off x="1527048" y="1828800"/>
+            <a:ext cx="0" cy="3931920"/>
+          </a:xfrm>
+          <a:prstGeom prst="line">
+            <a:avLst/>
+          </a:prstGeom>
+          <a:ln w="20320">
+            <a:solidFill>
+              <a:srgbClr val="D8B87A"/>
+            </a:solidFill>
+          </a:ln>
+        </p:spPr>
+        <p:style>
+          <a:lnRef idx="2">
+            <a:schemeClr val="accent1"/>
+          </a:lnRef>
+          <a:fillRef idx="0">
+            <a:schemeClr val="accent1"/>
+          </a:fillRef>
+          <a:effectRef idx="1">
+            <a:schemeClr val="accent1"/>
+          </a:effectRef>
+          <a:fontRef idx="minor">
+            <a:schemeClr val="tx1"/>
+          </a:fontRef>
+        </p:style>
+      </p:cxnSp>
+      <p:cxnSp>
+        <p:nvCxnSpPr>
+          <p:cNvPr id="36" name="Connector 35"/>
+          <p:cNvCxnSpPr/>
+          <p:nvPr/>
+        </p:nvCxnSpPr>
+        <p:spPr>
+          <a:xfrm>
+            <a:off x="10634472" y="1828800"/>
+            <a:ext cx="0" cy="3931920"/>
+          </a:xfrm>
+          <a:prstGeom prst="line">
+            <a:avLst/>
+          </a:prstGeom>
+          <a:ln w="20320">
+            <a:solidFill>
+              <a:srgbClr val="D8B87A"/>
+            </a:solidFill>
+          </a:ln>
+        </p:spPr>
+        <p:style>
+          <a:lnRef idx="2">
+            <a:schemeClr val="accent1"/>
+          </a:lnRef>
+          <a:fillRef idx="0">
+            <a:schemeClr val="accent1"/>
+          </a:fillRef>
+          <a:effectRef idx="1">
+            <a:schemeClr val="accent1"/>
+          </a:effectRef>
+          <a:fontRef idx="minor">
+            <a:schemeClr val="tx1"/>
+          </a:fontRef>
+        </p:style>
+      </p:cxnSp>
       <p:sp>
         <p:nvSpPr>
           <p:cNvPr id="37" name="TextBox 36"/>
@@ -18316,7 +21530,7 @@
                 </a:solidFill>
                 <a:latin typeface="Malgun Gothic"/>
               </a:rPr>
-              <a:t>5. 예배의 기도</a:t>
+              <a:t>4. 교독문</a:t>
             </a:r>
           </a:p>
         </p:txBody>
@@ -18391,14 +21605,14 @@
                 </a:solidFill>
                 <a:latin typeface="Malgun Gothic"/>
               </a:rPr>
-              <a:t>{{PRAYER_LEADER}}</a:t>
+              <a:t>{{RESPONSIVE_TITLE}}</a:t>
             </a:r>
           </a:p>
         </p:txBody>
       </p:sp>
       <p:sp>
         <p:nvSpPr>
-          <p:cNvPr id="40" name="TextBox 39"/>
+          <p:cNvPr id="40" name="RESPONSIVE_1"/>
           <p:cNvSpPr txBox="1"/>
           <p:nvPr/>
         </p:nvSpPr>
@@ -18416,7 +21630,7 @@
           <a:bodyPr wrap="square" anchor="t" lIns="18288" rIns="73152" tIns="18288" bIns="18288"/>
           <a:lstStyle/>
           <a:p>
-            <a:pPr algn="ctr">
+            <a:pPr algn="l">
               <a:lnSpc>
                 <a:spcPct val="130000"/>
               </a:lnSpc>
@@ -18431,7 +21645,7 @@
                 </a:solidFill>
                 <a:latin typeface="Malgun Gothic"/>
               </a:rPr>
-              <a:t>{{PRAYER_TEXT}}</a:t>
+              <a:t>{{RESPONSIVE_1}}</a:t>
             </a:r>
           </a:p>
         </p:txBody>
@@ -19747,149 +22961,95 @@
           </a:p>
         </p:txBody>
       </p:sp>
-      <p:cxnSp>
-        <p:nvCxnSpPr>
-          <p:cNvPr id="33" name="Connector 32"/>
-          <p:cNvCxnSpPr/>
-          <p:nvPr/>
-        </p:nvCxnSpPr>
-        <p:spPr>
-          <a:xfrm>
-            <a:off x="1618488" y="1719072"/>
-            <a:ext cx="320040" cy="0"/>
-          </a:xfrm>
-          <a:prstGeom prst="line">
-            <a:avLst/>
-          </a:prstGeom>
-          <a:ln w="14604">
-            <a:solidFill>
-              <a:srgbClr val="D8B87A"/>
-            </a:solidFill>
-          </a:ln>
-        </p:spPr>
-        <p:style>
-          <a:lnRef idx="2">
-            <a:schemeClr val="accent1"/>
-          </a:lnRef>
-          <a:fillRef idx="0">
-            <a:schemeClr val="accent1"/>
-          </a:fillRef>
-          <a:effectRef idx="1">
-            <a:schemeClr val="accent1"/>
-          </a:effectRef>
-          <a:fontRef idx="minor">
-            <a:schemeClr val="tx1"/>
-          </a:fontRef>
-        </p:style>
-      </p:cxnSp>
-      <p:cxnSp>
-        <p:nvCxnSpPr>
-          <p:cNvPr id="34" name="Connector 33"/>
-          <p:cNvCxnSpPr/>
-          <p:nvPr/>
-        </p:nvCxnSpPr>
-        <p:spPr>
-          <a:xfrm>
-            <a:off x="1618488" y="1719072"/>
-            <a:ext cx="0" cy="320040"/>
-          </a:xfrm>
-          <a:prstGeom prst="line">
-            <a:avLst/>
-          </a:prstGeom>
-          <a:ln w="14604">
-            <a:solidFill>
-              <a:srgbClr val="D8B87A"/>
-            </a:solidFill>
-          </a:ln>
-        </p:spPr>
-        <p:style>
-          <a:lnRef idx="2">
-            <a:schemeClr val="accent1"/>
-          </a:lnRef>
-          <a:fillRef idx="0">
-            <a:schemeClr val="accent1"/>
-          </a:fillRef>
-          <a:effectRef idx="1">
-            <a:schemeClr val="accent1"/>
-          </a:effectRef>
-          <a:fontRef idx="minor">
-            <a:schemeClr val="tx1"/>
-          </a:fontRef>
-        </p:style>
-      </p:cxnSp>
-      <p:cxnSp>
-        <p:nvCxnSpPr>
-          <p:cNvPr id="35" name="Connector 34"/>
-          <p:cNvCxnSpPr/>
-          <p:nvPr/>
-        </p:nvCxnSpPr>
-        <p:spPr>
-          <a:xfrm>
-            <a:off x="10222992" y="1719072"/>
-            <a:ext cx="320040" cy="0"/>
-          </a:xfrm>
-          <a:prstGeom prst="line">
-            <a:avLst/>
-          </a:prstGeom>
-          <a:ln w="14604">
-            <a:solidFill>
-              <a:srgbClr val="D8B87A"/>
-            </a:solidFill>
-          </a:ln>
-        </p:spPr>
-        <p:style>
-          <a:lnRef idx="2">
-            <a:schemeClr val="accent1"/>
-          </a:lnRef>
-          <a:fillRef idx="0">
-            <a:schemeClr val="accent1"/>
-          </a:fillRef>
-          <a:effectRef idx="1">
-            <a:schemeClr val="accent1"/>
-          </a:effectRef>
-          <a:fontRef idx="minor">
-            <a:schemeClr val="tx1"/>
-          </a:fontRef>
-        </p:style>
-      </p:cxnSp>
-      <p:cxnSp>
-        <p:nvCxnSpPr>
-          <p:cNvPr id="36" name="Connector 35"/>
-          <p:cNvCxnSpPr/>
-          <p:nvPr/>
-        </p:nvCxnSpPr>
-        <p:spPr>
-          <a:xfrm>
-            <a:off x="10543032" y="1719072"/>
-            <a:ext cx="0" cy="320040"/>
-          </a:xfrm>
-          <a:prstGeom prst="line">
-            <a:avLst/>
-          </a:prstGeom>
-          <a:ln w="14604">
-            <a:solidFill>
-              <a:srgbClr val="D8B87A"/>
-            </a:solidFill>
-          </a:ln>
-        </p:spPr>
-        <p:style>
-          <a:lnRef idx="2">
-            <a:schemeClr val="accent1"/>
-          </a:lnRef>
-          <a:fillRef idx="0">
-            <a:schemeClr val="accent1"/>
-          </a:fillRef>
-          <a:effectRef idx="1">
-            <a:schemeClr val="accent1"/>
-          </a:effectRef>
-          <a:fontRef idx="minor">
-            <a:schemeClr val="tx1"/>
-          </a:fontRef>
-        </p:style>
-      </p:cxnSp>
-      <p:sp>
-        <p:nvSpPr>
-          <p:cNvPr id="37" name="TextBox 36"/>
+      <p:sp>
+        <p:nvSpPr>
+          <p:cNvPr id="33" name="Diamond 32"/>
+          <p:cNvSpPr/>
+          <p:nvPr/>
+        </p:nvSpPr>
+        <p:spPr>
+          <a:xfrm>
+            <a:off x="4933188" y="2281428"/>
+            <a:ext cx="100584" cy="100584"/>
+          </a:xfrm>
+          <a:prstGeom prst="diamond">
+            <a:avLst/>
+          </a:prstGeom>
+          <a:solidFill>
+            <a:srgbClr val="D8B87A"/>
+          </a:solidFill>
+          <a:ln>
+            <a:noFill/>
+          </a:ln>
+        </p:spPr>
+        <p:style>
+          <a:lnRef idx="1">
+            <a:schemeClr val="accent1"/>
+          </a:lnRef>
+          <a:fillRef idx="3">
+            <a:schemeClr val="accent1"/>
+          </a:fillRef>
+          <a:effectRef idx="2">
+            <a:schemeClr val="accent1"/>
+          </a:effectRef>
+          <a:fontRef idx="minor">
+            <a:schemeClr val="lt1"/>
+          </a:fontRef>
+        </p:style>
+        <p:txBody>
+          <a:bodyPr rtlCol="0" anchor="ctr"/>
+          <a:lstStyle/>
+          <a:p>
+            <a:pPr algn="ctr"/>
+          </a:p>
+        </p:txBody>
+      </p:sp>
+      <p:sp>
+        <p:nvSpPr>
+          <p:cNvPr id="34" name="Diamond 33"/>
+          <p:cNvSpPr/>
+          <p:nvPr/>
+        </p:nvSpPr>
+        <p:spPr>
+          <a:xfrm>
+            <a:off x="7127748" y="2281428"/>
+            <a:ext cx="100584" cy="100584"/>
+          </a:xfrm>
+          <a:prstGeom prst="diamond">
+            <a:avLst/>
+          </a:prstGeom>
+          <a:solidFill>
+            <a:srgbClr val="D8B87A"/>
+          </a:solidFill>
+          <a:ln>
+            <a:noFill/>
+          </a:ln>
+        </p:spPr>
+        <p:style>
+          <a:lnRef idx="1">
+            <a:schemeClr val="accent1"/>
+          </a:lnRef>
+          <a:fillRef idx="3">
+            <a:schemeClr val="accent1"/>
+          </a:fillRef>
+          <a:effectRef idx="2">
+            <a:schemeClr val="accent1"/>
+          </a:effectRef>
+          <a:fontRef idx="minor">
+            <a:schemeClr val="lt1"/>
+          </a:fontRef>
+        </p:style>
+        <p:txBody>
+          <a:bodyPr rtlCol="0" anchor="ctr"/>
+          <a:lstStyle/>
+          <a:p>
+            <a:pPr algn="ctr"/>
+          </a:p>
+        </p:txBody>
+      </p:sp>
+      <p:sp>
+        <p:nvSpPr>
+          <p:cNvPr id="35" name="TextBox 34"/>
           <p:cNvSpPr txBox="1"/>
           <p:nvPr/>
         </p:nvSpPr>
@@ -19922,14 +23082,14 @@
                 </a:solidFill>
                 <a:latin typeface="Malgun Gothic"/>
               </a:rPr>
-              <a:t>6. 오늘의 말씀</a:t>
+              <a:t>5. 찬송가</a:t>
             </a:r>
           </a:p>
         </p:txBody>
       </p:sp>
       <p:cxnSp>
         <p:nvCxnSpPr>
-          <p:cNvPr id="38" name="Connector 37"/>
+          <p:cNvPr id="36" name="Connector 35"/>
           <p:cNvCxnSpPr/>
           <p:nvPr/>
         </p:nvCxnSpPr>
@@ -19964,14 +23124,14 @@
       </p:cxnSp>
       <p:sp>
         <p:nvSpPr>
-          <p:cNvPr id="39" name="TextBox 38"/>
+          <p:cNvPr id="37" name="HYMN_2"/>
           <p:cNvSpPr txBox="1"/>
           <p:nvPr/>
         </p:nvSpPr>
         <p:spPr>
           <a:xfrm>
-            <a:off x="1691640" y="960120"/>
-            <a:ext cx="8778240" cy="777240"/>
+            <a:off x="1691640" y="2331720"/>
+            <a:ext cx="8778240" cy="1554480"/>
           </a:xfrm>
           <a:prstGeom prst="rect">
             <a:avLst/>
@@ -19991,57 +23151,52 @@
               </a:spcAft>
             </a:pPr>
             <a:r>
-              <a:rPr sz="3600" b="1">
+              <a:rPr sz="4400" b="1">
                 <a:solidFill>
                   <a:srgbClr val="FFF8F0"/>
                 </a:solidFill>
                 <a:latin typeface="Malgun Gothic"/>
               </a:rPr>
-              <a:t>{{SCRIPTURE_REF}}</a:t>
+              <a:t>{{HYMN_2}}</a:t>
             </a:r>
           </a:p>
         </p:txBody>
       </p:sp>
-      <p:sp>
-        <p:nvSpPr>
-          <p:cNvPr id="40" name="BIBLE_TEXT_1"/>
-          <p:cNvSpPr txBox="1"/>
-          <p:nvPr/>
-        </p:nvSpPr>
-        <p:spPr>
-          <a:xfrm>
-            <a:off x="1691640" y="1828800"/>
-            <a:ext cx="8778240" cy="4297680"/>
-          </a:xfrm>
-          <a:prstGeom prst="rect">
-            <a:avLst/>
-          </a:prstGeom>
-          <a:noFill/>
-        </p:spPr>
-        <p:txBody>
-          <a:bodyPr wrap="square" anchor="t" lIns="18288" rIns="73152" tIns="18288" bIns="18288"/>
-          <a:lstStyle/>
-          <a:p>
-            <a:pPr algn="ctr">
-              <a:lnSpc>
-                <a:spcPct val="130000"/>
-              </a:lnSpc>
-              <a:spcAft>
-                <a:spcPts val="600"/>
-              </a:spcAft>
-            </a:pPr>
-            <a:r>
-              <a:rPr sz="2800" b="0">
-                <a:solidFill>
-                  <a:srgbClr val="FFF8F0"/>
-                </a:solidFill>
-                <a:latin typeface="Malgun Gothic"/>
-              </a:rPr>
-              <a:t>{{BIBLE_TEXT_1}}</a:t>
-            </a:r>
-          </a:p>
-        </p:txBody>
-      </p:sp>
+      <p:cxnSp>
+        <p:nvCxnSpPr>
+          <p:cNvPr id="38" name="Connector 37"/>
+          <p:cNvCxnSpPr/>
+          <p:nvPr/>
+        </p:nvCxnSpPr>
+        <p:spPr>
+          <a:xfrm>
+            <a:off x="5394960.0" y="4160520"/>
+            <a:ext cx="1371600.0" cy="0"/>
+          </a:xfrm>
+          <a:prstGeom prst="line">
+            <a:avLst/>
+          </a:prstGeom>
+          <a:ln w="15240">
+            <a:solidFill>
+              <a:srgbClr val="D8B87A"/>
+            </a:solidFill>
+          </a:ln>
+        </p:spPr>
+        <p:style>
+          <a:lnRef idx="2">
+            <a:schemeClr val="accent1"/>
+          </a:lnRef>
+          <a:fillRef idx="0">
+            <a:schemeClr val="accent1"/>
+          </a:fillRef>
+          <a:effectRef idx="1">
+            <a:schemeClr val="accent1"/>
+          </a:effectRef>
+          <a:fontRef idx="minor">
+            <a:schemeClr val="tx1"/>
+          </a:fontRef>
+        </p:style>
+      </p:cxnSp>
     </p:spTree>
   </p:cSld>
   <p:clrMapOvr>
@@ -21353,76 +24508,92 @@
           </a:p>
         </p:txBody>
       </p:sp>
-      <p:cxnSp>
-        <p:nvCxnSpPr>
-          <p:cNvPr id="33" name="Connector 32"/>
-          <p:cNvCxnSpPr/>
-          <p:nvPr/>
-        </p:nvCxnSpPr>
-        <p:spPr>
-          <a:xfrm>
-            <a:off x="4800600.0" y="1874519"/>
-            <a:ext cx="914400.0" cy="0"/>
-          </a:xfrm>
-          <a:prstGeom prst="line">
-            <a:avLst/>
-          </a:prstGeom>
-          <a:ln w="13970">
-            <a:solidFill>
-              <a:srgbClr val="D8B87A"/>
-            </a:solidFill>
-          </a:ln>
-        </p:spPr>
-        <p:style>
-          <a:lnRef idx="2">
-            <a:schemeClr val="accent1"/>
-          </a:lnRef>
-          <a:fillRef idx="0">
-            <a:schemeClr val="accent1"/>
-          </a:fillRef>
-          <a:effectRef idx="1">
-            <a:schemeClr val="accent1"/>
-          </a:effectRef>
-          <a:fontRef idx="minor">
-            <a:schemeClr val="tx1"/>
-          </a:fontRef>
-        </p:style>
-      </p:cxnSp>
-      <p:cxnSp>
-        <p:nvCxnSpPr>
-          <p:cNvPr id="34" name="Connector 33"/>
-          <p:cNvCxnSpPr/>
-          <p:nvPr/>
-        </p:nvCxnSpPr>
-        <p:spPr>
-          <a:xfrm>
-            <a:off x="6446520.0" y="1874519"/>
-            <a:ext cx="914400.0" cy="0"/>
-          </a:xfrm>
-          <a:prstGeom prst="line">
-            <a:avLst/>
-          </a:prstGeom>
-          <a:ln w="13970">
-            <a:solidFill>
-              <a:srgbClr val="D8B87A"/>
-            </a:solidFill>
-          </a:ln>
-        </p:spPr>
-        <p:style>
-          <a:lnRef idx="2">
-            <a:schemeClr val="accent1"/>
-          </a:lnRef>
-          <a:fillRef idx="0">
-            <a:schemeClr val="accent1"/>
-          </a:fillRef>
-          <a:effectRef idx="1">
-            <a:schemeClr val="accent1"/>
-          </a:effectRef>
-          <a:fontRef idx="minor">
-            <a:schemeClr val="tx1"/>
-          </a:fontRef>
-        </p:style>
-      </p:cxnSp>
+      <p:sp>
+        <p:nvSpPr>
+          <p:cNvPr id="33" name="Diamond 32"/>
+          <p:cNvSpPr/>
+          <p:nvPr/>
+        </p:nvSpPr>
+        <p:spPr>
+          <a:xfrm>
+            <a:off x="5536692" y="1586484"/>
+            <a:ext cx="82296" cy="82296"/>
+          </a:xfrm>
+          <a:prstGeom prst="diamond">
+            <a:avLst/>
+          </a:prstGeom>
+          <a:solidFill>
+            <a:srgbClr val="D8B87A"/>
+          </a:solidFill>
+          <a:ln>
+            <a:noFill/>
+          </a:ln>
+        </p:spPr>
+        <p:style>
+          <a:lnRef idx="1">
+            <a:schemeClr val="accent1"/>
+          </a:lnRef>
+          <a:fillRef idx="3">
+            <a:schemeClr val="accent1"/>
+          </a:fillRef>
+          <a:effectRef idx="2">
+            <a:schemeClr val="accent1"/>
+          </a:effectRef>
+          <a:fontRef idx="minor">
+            <a:schemeClr val="lt1"/>
+          </a:fontRef>
+        </p:style>
+        <p:txBody>
+          <a:bodyPr rtlCol="0" anchor="ctr"/>
+          <a:lstStyle/>
+          <a:p>
+            <a:pPr algn="ctr"/>
+          </a:p>
+        </p:txBody>
+      </p:sp>
+      <p:sp>
+        <p:nvSpPr>
+          <p:cNvPr id="34" name="Diamond 33"/>
+          <p:cNvSpPr/>
+          <p:nvPr/>
+        </p:nvSpPr>
+        <p:spPr>
+          <a:xfrm>
+            <a:off x="5783580" y="1586484"/>
+            <a:ext cx="82296" cy="82296"/>
+          </a:xfrm>
+          <a:prstGeom prst="diamond">
+            <a:avLst/>
+          </a:prstGeom>
+          <a:solidFill>
+            <a:srgbClr val="D8B87A"/>
+          </a:solidFill>
+          <a:ln>
+            <a:noFill/>
+          </a:ln>
+        </p:spPr>
+        <p:style>
+          <a:lnRef idx="1">
+            <a:schemeClr val="accent1"/>
+          </a:lnRef>
+          <a:fillRef idx="3">
+            <a:schemeClr val="accent1"/>
+          </a:fillRef>
+          <a:effectRef idx="2">
+            <a:schemeClr val="accent1"/>
+          </a:effectRef>
+          <a:fontRef idx="minor">
+            <a:schemeClr val="lt1"/>
+          </a:fontRef>
+        </p:style>
+        <p:txBody>
+          <a:bodyPr rtlCol="0" anchor="ctr"/>
+          <a:lstStyle/>
+          <a:p>
+            <a:pPr algn="ctr"/>
+          </a:p>
+        </p:txBody>
+      </p:sp>
       <p:sp>
         <p:nvSpPr>
           <p:cNvPr id="35" name="Diamond 34"/>
@@ -21431,8 +24602,8 @@
         </p:nvSpPr>
         <p:spPr>
           <a:xfrm>
-            <a:off x="4613148" y="1824227"/>
-            <a:ext cx="100584" cy="100584"/>
+            <a:off x="6295644" y="1586484"/>
+            <a:ext cx="82296" cy="82296"/>
           </a:xfrm>
           <a:prstGeom prst="diamond">
             <a:avLst/>
@@ -21474,8 +24645,8 @@
         </p:nvSpPr>
         <p:spPr>
           <a:xfrm>
-            <a:off x="7447788" y="1824227"/>
-            <a:ext cx="100584" cy="100584"/>
+            <a:off x="6542532" y="1586484"/>
+            <a:ext cx="82296" cy="82296"/>
           </a:xfrm>
           <a:prstGeom prst="diamond">
             <a:avLst/>
@@ -21544,7 +24715,7 @@
                 </a:solidFill>
                 <a:latin typeface="Malgun Gothic"/>
               </a:rPr>
-              <a:t>설교제목</a:t>
+              <a:t>6. 예배의 기도</a:t>
             </a:r>
           </a:p>
         </p:txBody>
@@ -21586,14 +24757,14 @@
       </p:cxnSp>
       <p:sp>
         <p:nvSpPr>
-          <p:cNvPr id="39" name="SERMON_TITLE"/>
+          <p:cNvPr id="39" name="TextBox 38"/>
           <p:cNvSpPr txBox="1"/>
           <p:nvPr/>
         </p:nvSpPr>
         <p:spPr>
           <a:xfrm>
-            <a:off x="1691640" y="2240280"/>
-            <a:ext cx="8778240" cy="2011680"/>
+            <a:off x="1691640" y="960120"/>
+            <a:ext cx="8778240" cy="777240"/>
           </a:xfrm>
           <a:prstGeom prst="rect">
             <a:avLst/>
@@ -21613,27 +24784,27 @@
               </a:spcAft>
             </a:pPr>
             <a:r>
-              <a:rPr sz="5200" b="1">
+              <a:rPr sz="3600" b="1">
                 <a:solidFill>
                   <a:srgbClr val="FFF8F0"/>
                 </a:solidFill>
                 <a:latin typeface="Malgun Gothic"/>
               </a:rPr>
-              <a:t>{{SERMON_TITLE}}</a:t>
+              <a:t>{{PRAYER_LEADER}}</a:t>
             </a:r>
           </a:p>
         </p:txBody>
       </p:sp>
       <p:sp>
         <p:nvSpPr>
-          <p:cNvPr id="40" name="SERMON_SUBTITLE"/>
+          <p:cNvPr id="40" name="TextBox 39"/>
           <p:cNvSpPr txBox="1"/>
           <p:nvPr/>
         </p:nvSpPr>
         <p:spPr>
           <a:xfrm>
-            <a:off x="1691640" y="4572000"/>
-            <a:ext cx="8778240" cy="365760"/>
+            <a:off x="1691640" y="1828800"/>
+            <a:ext cx="8778240" cy="4297680"/>
           </a:xfrm>
           <a:prstGeom prst="rect">
             <a:avLst/>
@@ -21646,95 +24817,20 @@
           <a:p>
             <a:pPr algn="ctr">
               <a:lnSpc>
-                <a:spcPct val="115000"/>
+                <a:spcPct val="130000"/>
               </a:lnSpc>
               <a:spcAft>
-                <a:spcPts val="0"/>
+                <a:spcPts val="600"/>
               </a:spcAft>
             </a:pPr>
             <a:r>
-              <a:rPr sz="2200" b="0">
+              <a:rPr sz="2800" b="0">
                 <a:solidFill>
-                  <a:srgbClr val="B6C0CA"/>
+                  <a:srgbClr val="FFF8F0"/>
                 </a:solidFill>
                 <a:latin typeface="Malgun Gothic"/>
               </a:rPr>
-              <a:t>{{SERMON_SUBTITLE}}</a:t>
-            </a:r>
-          </a:p>
-        </p:txBody>
-      </p:sp>
-      <p:cxnSp>
-        <p:nvCxnSpPr>
-          <p:cNvPr id="41" name="Connector 40"/>
-          <p:cNvCxnSpPr/>
-          <p:nvPr/>
-        </p:nvCxnSpPr>
-        <p:spPr>
-          <a:xfrm>
-            <a:off x="5349240.0" y="5074920"/>
-            <a:ext cx="1463040.0" cy="0"/>
-          </a:xfrm>
-          <a:prstGeom prst="line">
-            <a:avLst/>
-          </a:prstGeom>
-          <a:ln w="15240">
-            <a:solidFill>
-              <a:srgbClr val="D8B87A"/>
-            </a:solidFill>
-          </a:ln>
-        </p:spPr>
-        <p:style>
-          <a:lnRef idx="2">
-            <a:schemeClr val="accent1"/>
-          </a:lnRef>
-          <a:fillRef idx="0">
-            <a:schemeClr val="accent1"/>
-          </a:fillRef>
-          <a:effectRef idx="1">
-            <a:schemeClr val="accent1"/>
-          </a:effectRef>
-          <a:fontRef idx="minor">
-            <a:schemeClr val="tx1"/>
-          </a:fontRef>
-        </p:style>
-      </p:cxnSp>
-      <p:sp>
-        <p:nvSpPr>
-          <p:cNvPr id="42" name="PREACHER"/>
-          <p:cNvSpPr txBox="1"/>
-          <p:nvPr/>
-        </p:nvSpPr>
-        <p:spPr>
-          <a:xfrm>
-            <a:off x="1691640" y="5303520"/>
-            <a:ext cx="8778240" cy="365760"/>
-          </a:xfrm>
-          <a:prstGeom prst="rect">
-            <a:avLst/>
-          </a:prstGeom>
-          <a:noFill/>
-        </p:spPr>
-        <p:txBody>
-          <a:bodyPr wrap="square" anchor="t" lIns="18288" rIns="73152" tIns="18288" bIns="18288"/>
-          <a:lstStyle/>
-          <a:p>
-            <a:pPr algn="ctr">
-              <a:lnSpc>
-                <a:spcPct val="110000"/>
-              </a:lnSpc>
-              <a:spcAft>
-                <a:spcPts val="0"/>
-              </a:spcAft>
-            </a:pPr>
-            <a:r>
-              <a:rPr sz="2200" b="0">
-                <a:solidFill>
-                  <a:srgbClr val="B6C0CA"/>
-                </a:solidFill>
-                <a:latin typeface="Malgun Gothic"/>
-              </a:rPr>
-              <a:t>{{PREACHER}}</a:t>
+              <a:t>{{PRAYER_TEXT}}</a:t>
             </a:r>
           </a:p>
         </p:txBody>

--- a/templates/master_worship.pptx
+++ b/templates/master_worship.pptx
@@ -19,6 +19,9 @@
     <p:sldId id="267" r:id="rId18"/>
     <p:sldId id="268" r:id="rId19"/>
     <p:sldId id="269" r:id="rId20"/>
+    <p:sldId id="270" r:id="rId21"/>
+    <p:sldId id="271" r:id="rId22"/>
+    <p:sldId id="272" r:id="rId23"/>
   </p:sldIdLst>
   <p:sldSz cx="12191695" cy="6858000" type="screen4x3"/>
   <p:notesSz cx="6858000" cy="9144000"/>
@@ -5241,76 +5244,92 @@
           </a:p>
         </p:txBody>
       </p:sp>
-      <p:cxnSp>
-        <p:nvCxnSpPr>
-          <p:cNvPr id="33" name="Connector 32"/>
-          <p:cNvCxnSpPr/>
-          <p:nvPr/>
-        </p:nvCxnSpPr>
-        <p:spPr>
-          <a:xfrm>
-            <a:off x="1618488" y="1719072"/>
-            <a:ext cx="320040" cy="0"/>
-          </a:xfrm>
-          <a:prstGeom prst="line">
-            <a:avLst/>
-          </a:prstGeom>
-          <a:ln w="14604">
-            <a:solidFill>
-              <a:srgbClr val="D8B87A"/>
-            </a:solidFill>
-          </a:ln>
-        </p:spPr>
-        <p:style>
-          <a:lnRef idx="2">
-            <a:schemeClr val="accent1"/>
-          </a:lnRef>
-          <a:fillRef idx="0">
-            <a:schemeClr val="accent1"/>
-          </a:fillRef>
-          <a:effectRef idx="1">
-            <a:schemeClr val="accent1"/>
-          </a:effectRef>
-          <a:fontRef idx="minor">
-            <a:schemeClr val="tx1"/>
-          </a:fontRef>
-        </p:style>
-      </p:cxnSp>
-      <p:cxnSp>
-        <p:nvCxnSpPr>
-          <p:cNvPr id="34" name="Connector 33"/>
-          <p:cNvCxnSpPr/>
-          <p:nvPr/>
-        </p:nvCxnSpPr>
-        <p:spPr>
-          <a:xfrm>
-            <a:off x="1618488" y="1719072"/>
-            <a:ext cx="0" cy="320040"/>
-          </a:xfrm>
-          <a:prstGeom prst="line">
-            <a:avLst/>
-          </a:prstGeom>
-          <a:ln w="14604">
-            <a:solidFill>
-              <a:srgbClr val="D8B87A"/>
-            </a:solidFill>
-          </a:ln>
-        </p:spPr>
-        <p:style>
-          <a:lnRef idx="2">
-            <a:schemeClr val="accent1"/>
-          </a:lnRef>
-          <a:fillRef idx="0">
-            <a:schemeClr val="accent1"/>
-          </a:fillRef>
-          <a:effectRef idx="1">
-            <a:schemeClr val="accent1"/>
-          </a:effectRef>
-          <a:fontRef idx="minor">
-            <a:schemeClr val="tx1"/>
-          </a:fontRef>
-        </p:style>
-      </p:cxnSp>
+      <p:sp>
+        <p:nvSpPr>
+          <p:cNvPr id="33" name="Rectangle 32"/>
+          <p:cNvSpPr/>
+          <p:nvPr/>
+        </p:nvSpPr>
+        <p:spPr>
+          <a:xfrm>
+            <a:off x="5029200" y="1627632"/>
+            <a:ext cx="256032" cy="109728"/>
+          </a:xfrm>
+          <a:prstGeom prst="rect">
+            <a:avLst/>
+          </a:prstGeom>
+          <a:solidFill>
+            <a:srgbClr val="FF5C5C"/>
+          </a:solidFill>
+          <a:ln>
+            <a:noFill/>
+          </a:ln>
+        </p:spPr>
+        <p:style>
+          <a:lnRef idx="1">
+            <a:schemeClr val="accent1"/>
+          </a:lnRef>
+          <a:fillRef idx="3">
+            <a:schemeClr val="accent1"/>
+          </a:fillRef>
+          <a:effectRef idx="2">
+            <a:schemeClr val="accent1"/>
+          </a:effectRef>
+          <a:fontRef idx="minor">
+            <a:schemeClr val="lt1"/>
+          </a:fontRef>
+        </p:style>
+        <p:txBody>
+          <a:bodyPr rtlCol="0" anchor="ctr"/>
+          <a:lstStyle/>
+          <a:p>
+            <a:pPr algn="ctr"/>
+          </a:p>
+        </p:txBody>
+      </p:sp>
+      <p:sp>
+        <p:nvSpPr>
+          <p:cNvPr id="34" name="Rectangle 33"/>
+          <p:cNvSpPr/>
+          <p:nvPr/>
+        </p:nvSpPr>
+        <p:spPr>
+          <a:xfrm>
+            <a:off x="6876288" y="1627632"/>
+            <a:ext cx="256032" cy="109728"/>
+          </a:xfrm>
+          <a:prstGeom prst="rect">
+            <a:avLst/>
+          </a:prstGeom>
+          <a:solidFill>
+            <a:srgbClr val="FFE066"/>
+          </a:solidFill>
+          <a:ln>
+            <a:noFill/>
+          </a:ln>
+        </p:spPr>
+        <p:style>
+          <a:lnRef idx="1">
+            <a:schemeClr val="accent1"/>
+          </a:lnRef>
+          <a:fillRef idx="3">
+            <a:schemeClr val="accent1"/>
+          </a:fillRef>
+          <a:effectRef idx="2">
+            <a:schemeClr val="accent1"/>
+          </a:effectRef>
+          <a:fontRef idx="minor">
+            <a:schemeClr val="lt1"/>
+          </a:fontRef>
+        </p:style>
+        <p:txBody>
+          <a:bodyPr rtlCol="0" anchor="ctr"/>
+          <a:lstStyle/>
+          <a:p>
+            <a:pPr algn="ctr"/>
+          </a:p>
+        </p:txBody>
+      </p:sp>
       <p:cxnSp>
         <p:nvCxnSpPr>
           <p:cNvPr id="35" name="Connector 34"/>
@@ -5319,13 +5338,13 @@
         </p:nvCxnSpPr>
         <p:spPr>
           <a:xfrm>
-            <a:off x="10222992" y="1719072"/>
-            <a:ext cx="320040" cy="0"/>
+            <a:off x="1527048" y="1828800"/>
+            <a:ext cx="0" cy="3931920"/>
           </a:xfrm>
           <a:prstGeom prst="line">
             <a:avLst/>
           </a:prstGeom>
-          <a:ln w="14604">
+          <a:ln w="20320">
             <a:solidFill>
               <a:srgbClr val="D8B87A"/>
             </a:solidFill>
@@ -5354,13 +5373,13 @@
         </p:nvCxnSpPr>
         <p:spPr>
           <a:xfrm>
-            <a:off x="10543032" y="1719072"/>
-            <a:ext cx="0" cy="320040"/>
+            <a:off x="10634472" y="1828800"/>
+            <a:ext cx="0" cy="3931920"/>
           </a:xfrm>
           <a:prstGeom prst="line">
             <a:avLst/>
           </a:prstGeom>
-          <a:ln w="14604">
+          <a:ln w="20320">
             <a:solidFill>
               <a:srgbClr val="D8B87A"/>
             </a:solidFill>
@@ -5416,7 +5435,7 @@
                 </a:solidFill>
                 <a:latin typeface="Malgun Gothic"/>
               </a:rPr>
-              <a:t>7. 오늘의 말씀</a:t>
+              <a:t>4. 교독문</a:t>
             </a:r>
           </a:p>
         </p:txBody>
@@ -5491,14 +5510,14 @@
                 </a:solidFill>
                 <a:latin typeface="Malgun Gothic"/>
               </a:rPr>
-              <a:t>{{SCRIPTURE_REF}}</a:t>
+              <a:t>{{RESPONSIVE_TITLE}}</a:t>
             </a:r>
           </a:p>
         </p:txBody>
       </p:sp>
       <p:sp>
         <p:nvSpPr>
-          <p:cNvPr id="40" name="BIBLE_TEXT_1"/>
+          <p:cNvPr id="40" name="RESPONSIVE_1"/>
           <p:cNvSpPr txBox="1"/>
           <p:nvPr/>
         </p:nvSpPr>
@@ -5516,7 +5535,7 @@
           <a:bodyPr wrap="square" anchor="t" lIns="18288" rIns="73152" tIns="18288" bIns="18288"/>
           <a:lstStyle/>
           <a:p>
-            <a:pPr algn="ctr">
+            <a:pPr algn="l">
               <a:lnSpc>
                 <a:spcPct val="130000"/>
               </a:lnSpc>
@@ -5531,7 +5550,7 @@
                 </a:solidFill>
                 <a:latin typeface="Malgun Gothic"/>
               </a:rPr>
-              <a:t>{{BIBLE_TEXT_1}}</a:t>
+              <a:t>{{RESPONSIVE_1}}</a:t>
             </a:r>
           </a:p>
         </p:txBody>
@@ -6847,85 +6866,15 @@
           </a:p>
         </p:txBody>
       </p:sp>
-      <p:cxnSp>
-        <p:nvCxnSpPr>
-          <p:cNvPr id="33" name="Connector 32"/>
-          <p:cNvCxnSpPr/>
-          <p:nvPr/>
-        </p:nvCxnSpPr>
-        <p:spPr>
-          <a:xfrm>
-            <a:off x="4800600.0" y="1874519"/>
-            <a:ext cx="914400.0" cy="0"/>
-          </a:xfrm>
-          <a:prstGeom prst="line">
-            <a:avLst/>
-          </a:prstGeom>
-          <a:ln w="13970">
-            <a:solidFill>
-              <a:srgbClr val="D8B87A"/>
-            </a:solidFill>
-          </a:ln>
-        </p:spPr>
-        <p:style>
-          <a:lnRef idx="2">
-            <a:schemeClr val="accent1"/>
-          </a:lnRef>
-          <a:fillRef idx="0">
-            <a:schemeClr val="accent1"/>
-          </a:fillRef>
-          <a:effectRef idx="1">
-            <a:schemeClr val="accent1"/>
-          </a:effectRef>
-          <a:fontRef idx="minor">
-            <a:schemeClr val="tx1"/>
-          </a:fontRef>
-        </p:style>
-      </p:cxnSp>
-      <p:cxnSp>
-        <p:nvCxnSpPr>
-          <p:cNvPr id="34" name="Connector 33"/>
-          <p:cNvCxnSpPr/>
-          <p:nvPr/>
-        </p:nvCxnSpPr>
-        <p:spPr>
-          <a:xfrm>
-            <a:off x="6446520.0" y="1874519"/>
-            <a:ext cx="914400.0" cy="0"/>
-          </a:xfrm>
-          <a:prstGeom prst="line">
-            <a:avLst/>
-          </a:prstGeom>
-          <a:ln w="13970">
-            <a:solidFill>
-              <a:srgbClr val="D8B87A"/>
-            </a:solidFill>
-          </a:ln>
-        </p:spPr>
-        <p:style>
-          <a:lnRef idx="2">
-            <a:schemeClr val="accent1"/>
-          </a:lnRef>
-          <a:fillRef idx="0">
-            <a:schemeClr val="accent1"/>
-          </a:fillRef>
-          <a:effectRef idx="1">
-            <a:schemeClr val="accent1"/>
-          </a:effectRef>
-          <a:fontRef idx="minor">
-            <a:schemeClr val="tx1"/>
-          </a:fontRef>
-        </p:style>
-      </p:cxnSp>
-      <p:sp>
-        <p:nvSpPr>
-          <p:cNvPr id="35" name="Diamond 34"/>
-          <p:cNvSpPr/>
-          <p:nvPr/>
-        </p:nvSpPr>
-        <p:spPr>
-          <a:xfrm>
-            <a:off x="4613148" y="1824227"/>
+      <p:sp>
+        <p:nvSpPr>
+          <p:cNvPr id="33" name="Diamond 32"/>
+          <p:cNvSpPr/>
+          <p:nvPr/>
+        </p:nvSpPr>
+        <p:spPr>
+          <a:xfrm>
+            <a:off x="4933188" y="2281428"/>
             <a:ext cx="100584" cy="100584"/>
           </a:xfrm>
           <a:prstGeom prst="diamond">
@@ -6962,13 +6911,13 @@
       </p:sp>
       <p:sp>
         <p:nvSpPr>
-          <p:cNvPr id="36" name="Diamond 35"/>
-          <p:cNvSpPr/>
-          <p:nvPr/>
-        </p:nvSpPr>
-        <p:spPr>
-          <a:xfrm>
-            <a:off x="7447788" y="1824227"/>
+          <p:cNvPr id="34" name="Diamond 33"/>
+          <p:cNvSpPr/>
+          <p:nvPr/>
+        </p:nvSpPr>
+        <p:spPr>
+          <a:xfrm>
+            <a:off x="7127748" y="2281428"/>
             <a:ext cx="100584" cy="100584"/>
           </a:xfrm>
           <a:prstGeom prst="diamond">
@@ -7005,7 +6954,7 @@
       </p:sp>
       <p:sp>
         <p:nvSpPr>
-          <p:cNvPr id="37" name="TextBox 36"/>
+          <p:cNvPr id="35" name="TextBox 34"/>
           <p:cNvSpPr txBox="1"/>
           <p:nvPr/>
         </p:nvSpPr>
@@ -7038,14 +6987,14 @@
                 </a:solidFill>
                 <a:latin typeface="Malgun Gothic"/>
               </a:rPr>
-              <a:t>설교제목</a:t>
+              <a:t>5. 찬송가</a:t>
             </a:r>
           </a:p>
         </p:txBody>
       </p:sp>
       <p:cxnSp>
         <p:nvCxnSpPr>
-          <p:cNvPr id="38" name="Connector 37"/>
+          <p:cNvPr id="36" name="Connector 35"/>
           <p:cNvCxnSpPr/>
           <p:nvPr/>
         </p:nvCxnSpPr>
@@ -7080,14 +7029,14 @@
       </p:cxnSp>
       <p:sp>
         <p:nvSpPr>
-          <p:cNvPr id="39" name="SERMON_TITLE"/>
+          <p:cNvPr id="37" name="HYMN_2"/>
           <p:cNvSpPr txBox="1"/>
           <p:nvPr/>
         </p:nvSpPr>
         <p:spPr>
           <a:xfrm>
-            <a:off x="1691640" y="2240280"/>
-            <a:ext cx="8778240" cy="2011680"/>
+            <a:off x="1691640" y="2331720"/>
+            <a:ext cx="8778240" cy="1554480"/>
           </a:xfrm>
           <a:prstGeom prst="rect">
             <a:avLst/>
@@ -7107,67 +7056,27 @@
               </a:spcAft>
             </a:pPr>
             <a:r>
-              <a:rPr sz="5200" b="1">
+              <a:rPr sz="4400" b="1">
                 <a:solidFill>
                   <a:srgbClr val="FFF8F0"/>
                 </a:solidFill>
                 <a:latin typeface="Malgun Gothic"/>
               </a:rPr>
-              <a:t>{{SERMON_TITLE}}</a:t>
-            </a:r>
-          </a:p>
-        </p:txBody>
-      </p:sp>
-      <p:sp>
-        <p:nvSpPr>
-          <p:cNvPr id="40" name="SERMON_SUBTITLE"/>
-          <p:cNvSpPr txBox="1"/>
-          <p:nvPr/>
-        </p:nvSpPr>
-        <p:spPr>
-          <a:xfrm>
-            <a:off x="1691640" y="4572000"/>
-            <a:ext cx="8778240" cy="365760"/>
-          </a:xfrm>
-          <a:prstGeom prst="rect">
-            <a:avLst/>
-          </a:prstGeom>
-          <a:noFill/>
-        </p:spPr>
-        <p:txBody>
-          <a:bodyPr wrap="square" anchor="t" lIns="18288" rIns="73152" tIns="18288" bIns="18288"/>
-          <a:lstStyle/>
-          <a:p>
-            <a:pPr algn="ctr">
-              <a:lnSpc>
-                <a:spcPct val="115000"/>
-              </a:lnSpc>
-              <a:spcAft>
-                <a:spcPts val="0"/>
-              </a:spcAft>
-            </a:pPr>
-            <a:r>
-              <a:rPr sz="2200" b="0">
-                <a:solidFill>
-                  <a:srgbClr val="B6C0CA"/>
-                </a:solidFill>
-                <a:latin typeface="Malgun Gothic"/>
-              </a:rPr>
-              <a:t>{{SERMON_SUBTITLE}}</a:t>
+              <a:t>{{HYMN_2}}</a:t>
             </a:r>
           </a:p>
         </p:txBody>
       </p:sp>
       <p:cxnSp>
         <p:nvCxnSpPr>
-          <p:cNvPr id="41" name="Connector 40"/>
+          <p:cNvPr id="38" name="Connector 37"/>
           <p:cNvCxnSpPr/>
           <p:nvPr/>
         </p:nvCxnSpPr>
         <p:spPr>
           <a:xfrm>
-            <a:off x="5349240.0" y="5074920"/>
-            <a:ext cx="1463040.0" cy="0"/>
+            <a:off x="5394960.0" y="4160520"/>
+            <a:ext cx="1371600.0" cy="0"/>
           </a:xfrm>
           <a:prstGeom prst="line">
             <a:avLst/>
@@ -7193,46 +7102,6 @@
           </a:fontRef>
         </p:style>
       </p:cxnSp>
-      <p:sp>
-        <p:nvSpPr>
-          <p:cNvPr id="42" name="PREACHER"/>
-          <p:cNvSpPr txBox="1"/>
-          <p:nvPr/>
-        </p:nvSpPr>
-        <p:spPr>
-          <a:xfrm>
-            <a:off x="1691640" y="5303520"/>
-            <a:ext cx="8778240" cy="365760"/>
-          </a:xfrm>
-          <a:prstGeom prst="rect">
-            <a:avLst/>
-          </a:prstGeom>
-          <a:noFill/>
-        </p:spPr>
-        <p:txBody>
-          <a:bodyPr wrap="square" anchor="t" lIns="18288" rIns="73152" tIns="18288" bIns="18288"/>
-          <a:lstStyle/>
-          <a:p>
-            <a:pPr algn="ctr">
-              <a:lnSpc>
-                <a:spcPct val="110000"/>
-              </a:lnSpc>
-              <a:spcAft>
-                <a:spcPts val="0"/>
-              </a:spcAft>
-            </a:pPr>
-            <a:r>
-              <a:rPr sz="2200" b="0">
-                <a:solidFill>
-                  <a:srgbClr val="B6C0CA"/>
-                </a:solidFill>
-                <a:latin typeface="Malgun Gothic"/>
-              </a:rPr>
-              <a:t>{{PREACHER}}</a:t>
-            </a:r>
-          </a:p>
-        </p:txBody>
-      </p:sp>
     </p:spTree>
   </p:cSld>
   <p:clrMapOvr>
@@ -8544,76 +8413,92 @@
           </a:p>
         </p:txBody>
       </p:sp>
-      <p:cxnSp>
-        <p:nvCxnSpPr>
-          <p:cNvPr id="33" name="Connector 32"/>
-          <p:cNvCxnSpPr/>
-          <p:nvPr/>
-        </p:nvCxnSpPr>
-        <p:spPr>
-          <a:xfrm>
-            <a:off x="4983480.0" y="1627632"/>
-            <a:ext cx="822960.0" cy="0"/>
-          </a:xfrm>
-          <a:prstGeom prst="line">
-            <a:avLst/>
-          </a:prstGeom>
-          <a:ln w="15240">
-            <a:solidFill>
-              <a:srgbClr val="D8B87A"/>
-            </a:solidFill>
-          </a:ln>
-        </p:spPr>
-        <p:style>
-          <a:lnRef idx="2">
-            <a:schemeClr val="accent1"/>
-          </a:lnRef>
-          <a:fillRef idx="0">
-            <a:schemeClr val="accent1"/>
-          </a:fillRef>
-          <a:effectRef idx="1">
-            <a:schemeClr val="accent1"/>
-          </a:effectRef>
-          <a:fontRef idx="minor">
-            <a:schemeClr val="tx1"/>
-          </a:fontRef>
-        </p:style>
-      </p:cxnSp>
-      <p:cxnSp>
-        <p:nvCxnSpPr>
-          <p:cNvPr id="34" name="Connector 33"/>
-          <p:cNvCxnSpPr/>
-          <p:nvPr/>
-        </p:nvCxnSpPr>
-        <p:spPr>
-          <a:xfrm>
-            <a:off x="6355080.0" y="1627632"/>
-            <a:ext cx="822960.0" cy="0"/>
-          </a:xfrm>
-          <a:prstGeom prst="line">
-            <a:avLst/>
-          </a:prstGeom>
-          <a:ln w="15240">
-            <a:solidFill>
-              <a:srgbClr val="D8B87A"/>
-            </a:solidFill>
-          </a:ln>
-        </p:spPr>
-        <p:style>
-          <a:lnRef idx="2">
-            <a:schemeClr val="accent1"/>
-          </a:lnRef>
-          <a:fillRef idx="0">
-            <a:schemeClr val="accent1"/>
-          </a:fillRef>
-          <a:effectRef idx="1">
-            <a:schemeClr val="accent1"/>
-          </a:effectRef>
-          <a:fontRef idx="minor">
-            <a:schemeClr val="tx1"/>
-          </a:fontRef>
-        </p:style>
-      </p:cxnSp>
+      <p:sp>
+        <p:nvSpPr>
+          <p:cNvPr id="33" name="Diamond 32"/>
+          <p:cNvSpPr/>
+          <p:nvPr/>
+        </p:nvSpPr>
+        <p:spPr>
+          <a:xfrm>
+            <a:off x="5536692" y="1586484"/>
+            <a:ext cx="82296" cy="82296"/>
+          </a:xfrm>
+          <a:prstGeom prst="diamond">
+            <a:avLst/>
+          </a:prstGeom>
+          <a:solidFill>
+            <a:srgbClr val="D8B87A"/>
+          </a:solidFill>
+          <a:ln>
+            <a:noFill/>
+          </a:ln>
+        </p:spPr>
+        <p:style>
+          <a:lnRef idx="1">
+            <a:schemeClr val="accent1"/>
+          </a:lnRef>
+          <a:fillRef idx="3">
+            <a:schemeClr val="accent1"/>
+          </a:fillRef>
+          <a:effectRef idx="2">
+            <a:schemeClr val="accent1"/>
+          </a:effectRef>
+          <a:fontRef idx="minor">
+            <a:schemeClr val="lt1"/>
+          </a:fontRef>
+        </p:style>
+        <p:txBody>
+          <a:bodyPr rtlCol="0" anchor="ctr"/>
+          <a:lstStyle/>
+          <a:p>
+            <a:pPr algn="ctr"/>
+          </a:p>
+        </p:txBody>
+      </p:sp>
+      <p:sp>
+        <p:nvSpPr>
+          <p:cNvPr id="34" name="Diamond 33"/>
+          <p:cNvSpPr/>
+          <p:nvPr/>
+        </p:nvSpPr>
+        <p:spPr>
+          <a:xfrm>
+            <a:off x="5783580" y="1586484"/>
+            <a:ext cx="82296" cy="82296"/>
+          </a:xfrm>
+          <a:prstGeom prst="diamond">
+            <a:avLst/>
+          </a:prstGeom>
+          <a:solidFill>
+            <a:srgbClr val="D8B87A"/>
+          </a:solidFill>
+          <a:ln>
+            <a:noFill/>
+          </a:ln>
+        </p:spPr>
+        <p:style>
+          <a:lnRef idx="1">
+            <a:schemeClr val="accent1"/>
+          </a:lnRef>
+          <a:fillRef idx="3">
+            <a:schemeClr val="accent1"/>
+          </a:fillRef>
+          <a:effectRef idx="2">
+            <a:schemeClr val="accent1"/>
+          </a:effectRef>
+          <a:fontRef idx="minor">
+            <a:schemeClr val="lt1"/>
+          </a:fontRef>
+        </p:style>
+        <p:txBody>
+          <a:bodyPr rtlCol="0" anchor="ctr"/>
+          <a:lstStyle/>
+          <a:p>
+            <a:pPr algn="ctr"/>
+          </a:p>
+        </p:txBody>
+      </p:sp>
       <p:sp>
         <p:nvSpPr>
           <p:cNvPr id="35" name="Diamond 34"/>
@@ -8622,8 +8507,8 @@
         </p:nvSpPr>
         <p:spPr>
           <a:xfrm>
-            <a:off x="4800600" y="1581912"/>
-            <a:ext cx="91440" cy="91440"/>
+            <a:off x="6295644" y="1586484"/>
+            <a:ext cx="82296" cy="82296"/>
           </a:xfrm>
           <a:prstGeom prst="diamond">
             <a:avLst/>
@@ -8665,8 +8550,8 @@
         </p:nvSpPr>
         <p:spPr>
           <a:xfrm>
-            <a:off x="7269480" y="1581912"/>
-            <a:ext cx="91440" cy="91440"/>
+            <a:off x="6542532" y="1586484"/>
+            <a:ext cx="82296" cy="82296"/>
           </a:xfrm>
           <a:prstGeom prst="diamond">
             <a:avLst/>
@@ -8735,7 +8620,7 @@
                 </a:solidFill>
                 <a:latin typeface="Malgun Gothic"/>
               </a:rPr>
-              <a:t>9. 감사와 봉헌</a:t>
+              <a:t>6. 예배의 기도</a:t>
             </a:r>
           </a:p>
         </p:txBody>
@@ -8777,14 +8662,14 @@
       </p:cxnSp>
       <p:sp>
         <p:nvSpPr>
-          <p:cNvPr id="39" name="HYMN_3"/>
+          <p:cNvPr id="39" name="TextBox 38"/>
           <p:cNvSpPr txBox="1"/>
           <p:nvPr/>
         </p:nvSpPr>
         <p:spPr>
           <a:xfrm>
-            <a:off x="1691640" y="2331720"/>
-            <a:ext cx="8778240" cy="1554480"/>
+            <a:off x="1691640" y="960120"/>
+            <a:ext cx="8778240" cy="777240"/>
           </a:xfrm>
           <a:prstGeom prst="rect">
             <a:avLst/>
@@ -8804,52 +8689,57 @@
               </a:spcAft>
             </a:pPr>
             <a:r>
-              <a:rPr sz="4400" b="1">
+              <a:rPr sz="3600" b="1">
                 <a:solidFill>
                   <a:srgbClr val="FFF8F0"/>
                 </a:solidFill>
                 <a:latin typeface="Malgun Gothic"/>
               </a:rPr>
-              <a:t>{{HYMN_3}}</a:t>
+              <a:t>{{PRAYER_LEADER}}</a:t>
             </a:r>
           </a:p>
         </p:txBody>
       </p:sp>
-      <p:cxnSp>
-        <p:nvCxnSpPr>
-          <p:cNvPr id="40" name="Connector 39"/>
-          <p:cNvCxnSpPr/>
-          <p:nvPr/>
-        </p:nvCxnSpPr>
-        <p:spPr>
-          <a:xfrm>
-            <a:off x="5394960.0" y="4160520"/>
-            <a:ext cx="1371600.0" cy="0"/>
-          </a:xfrm>
-          <a:prstGeom prst="line">
-            <a:avLst/>
-          </a:prstGeom>
-          <a:ln w="15240">
-            <a:solidFill>
-              <a:srgbClr val="D8B87A"/>
-            </a:solidFill>
-          </a:ln>
-        </p:spPr>
-        <p:style>
-          <a:lnRef idx="2">
-            <a:schemeClr val="accent1"/>
-          </a:lnRef>
-          <a:fillRef idx="0">
-            <a:schemeClr val="accent1"/>
-          </a:fillRef>
-          <a:effectRef idx="1">
-            <a:schemeClr val="accent1"/>
-          </a:effectRef>
-          <a:fontRef idx="minor">
-            <a:schemeClr val="tx1"/>
-          </a:fontRef>
-        </p:style>
-      </p:cxnSp>
+      <p:sp>
+        <p:nvSpPr>
+          <p:cNvPr id="40" name="TextBox 39"/>
+          <p:cNvSpPr txBox="1"/>
+          <p:nvPr/>
+        </p:nvSpPr>
+        <p:spPr>
+          <a:xfrm>
+            <a:off x="1691640" y="1828800"/>
+            <a:ext cx="8778240" cy="4297680"/>
+          </a:xfrm>
+          <a:prstGeom prst="rect">
+            <a:avLst/>
+          </a:prstGeom>
+          <a:noFill/>
+        </p:spPr>
+        <p:txBody>
+          <a:bodyPr wrap="square" anchor="t" lIns="18288" rIns="73152" tIns="18288" bIns="18288"/>
+          <a:lstStyle/>
+          <a:p>
+            <a:pPr algn="ctr">
+              <a:lnSpc>
+                <a:spcPct val="130000"/>
+              </a:lnSpc>
+              <a:spcAft>
+                <a:spcPts val="600"/>
+              </a:spcAft>
+            </a:pPr>
+            <a:r>
+              <a:rPr sz="2800" b="0">
+                <a:solidFill>
+                  <a:srgbClr val="FFF8F0"/>
+                </a:solidFill>
+                <a:latin typeface="Malgun Gothic"/>
+              </a:rPr>
+              <a:t>{{PRAYER_TEXT}}</a:t>
+            </a:r>
+          </a:p>
+        </p:txBody>
+      </p:sp>
     </p:spTree>
   </p:cSld>
   <p:clrMapOvr>
@@ -10169,6 +10059,4926 @@
         </p:nvCxnSpPr>
         <p:spPr>
           <a:xfrm>
+            <a:off x="1618488" y="1719072"/>
+            <a:ext cx="320040" cy="0"/>
+          </a:xfrm>
+          <a:prstGeom prst="line">
+            <a:avLst/>
+          </a:prstGeom>
+          <a:ln w="14604">
+            <a:solidFill>
+              <a:srgbClr val="D8B87A"/>
+            </a:solidFill>
+          </a:ln>
+        </p:spPr>
+        <p:style>
+          <a:lnRef idx="2">
+            <a:schemeClr val="accent1"/>
+          </a:lnRef>
+          <a:fillRef idx="0">
+            <a:schemeClr val="accent1"/>
+          </a:fillRef>
+          <a:effectRef idx="1">
+            <a:schemeClr val="accent1"/>
+          </a:effectRef>
+          <a:fontRef idx="minor">
+            <a:schemeClr val="tx1"/>
+          </a:fontRef>
+        </p:style>
+      </p:cxnSp>
+      <p:cxnSp>
+        <p:nvCxnSpPr>
+          <p:cNvPr id="34" name="Connector 33"/>
+          <p:cNvCxnSpPr/>
+          <p:nvPr/>
+        </p:nvCxnSpPr>
+        <p:spPr>
+          <a:xfrm>
+            <a:off x="1618488" y="1719072"/>
+            <a:ext cx="0" cy="320040"/>
+          </a:xfrm>
+          <a:prstGeom prst="line">
+            <a:avLst/>
+          </a:prstGeom>
+          <a:ln w="14604">
+            <a:solidFill>
+              <a:srgbClr val="D8B87A"/>
+            </a:solidFill>
+          </a:ln>
+        </p:spPr>
+        <p:style>
+          <a:lnRef idx="2">
+            <a:schemeClr val="accent1"/>
+          </a:lnRef>
+          <a:fillRef idx="0">
+            <a:schemeClr val="accent1"/>
+          </a:fillRef>
+          <a:effectRef idx="1">
+            <a:schemeClr val="accent1"/>
+          </a:effectRef>
+          <a:fontRef idx="minor">
+            <a:schemeClr val="tx1"/>
+          </a:fontRef>
+        </p:style>
+      </p:cxnSp>
+      <p:cxnSp>
+        <p:nvCxnSpPr>
+          <p:cNvPr id="35" name="Connector 34"/>
+          <p:cNvCxnSpPr/>
+          <p:nvPr/>
+        </p:nvCxnSpPr>
+        <p:spPr>
+          <a:xfrm>
+            <a:off x="10222992" y="1719072"/>
+            <a:ext cx="320040" cy="0"/>
+          </a:xfrm>
+          <a:prstGeom prst="line">
+            <a:avLst/>
+          </a:prstGeom>
+          <a:ln w="14604">
+            <a:solidFill>
+              <a:srgbClr val="D8B87A"/>
+            </a:solidFill>
+          </a:ln>
+        </p:spPr>
+        <p:style>
+          <a:lnRef idx="2">
+            <a:schemeClr val="accent1"/>
+          </a:lnRef>
+          <a:fillRef idx="0">
+            <a:schemeClr val="accent1"/>
+          </a:fillRef>
+          <a:effectRef idx="1">
+            <a:schemeClr val="accent1"/>
+          </a:effectRef>
+          <a:fontRef idx="minor">
+            <a:schemeClr val="tx1"/>
+          </a:fontRef>
+        </p:style>
+      </p:cxnSp>
+      <p:cxnSp>
+        <p:nvCxnSpPr>
+          <p:cNvPr id="36" name="Connector 35"/>
+          <p:cNvCxnSpPr/>
+          <p:nvPr/>
+        </p:nvCxnSpPr>
+        <p:spPr>
+          <a:xfrm>
+            <a:off x="10543032" y="1719072"/>
+            <a:ext cx="0" cy="320040"/>
+          </a:xfrm>
+          <a:prstGeom prst="line">
+            <a:avLst/>
+          </a:prstGeom>
+          <a:ln w="14604">
+            <a:solidFill>
+              <a:srgbClr val="D8B87A"/>
+            </a:solidFill>
+          </a:ln>
+        </p:spPr>
+        <p:style>
+          <a:lnRef idx="2">
+            <a:schemeClr val="accent1"/>
+          </a:lnRef>
+          <a:fillRef idx="0">
+            <a:schemeClr val="accent1"/>
+          </a:fillRef>
+          <a:effectRef idx="1">
+            <a:schemeClr val="accent1"/>
+          </a:effectRef>
+          <a:fontRef idx="minor">
+            <a:schemeClr val="tx1"/>
+          </a:fontRef>
+        </p:style>
+      </p:cxnSp>
+      <p:sp>
+        <p:nvSpPr>
+          <p:cNvPr id="37" name="TextBox 36"/>
+          <p:cNvSpPr txBox="1"/>
+          <p:nvPr/>
+        </p:nvSpPr>
+        <p:spPr>
+          <a:xfrm>
+            <a:off x="1691640" y="384048"/>
+            <a:ext cx="8778240" cy="292608"/>
+          </a:xfrm>
+          <a:prstGeom prst="rect">
+            <a:avLst/>
+          </a:prstGeom>
+          <a:noFill/>
+        </p:spPr>
+        <p:txBody>
+          <a:bodyPr wrap="square" anchor="ctr" lIns="18288" rIns="73152" tIns="18288" bIns="18288"/>
+          <a:lstStyle/>
+          <a:p>
+            <a:pPr algn="ctr">
+              <a:lnSpc>
+                <a:spcPct val="100000"/>
+              </a:lnSpc>
+              <a:spcAft>
+                <a:spcPts val="0"/>
+              </a:spcAft>
+            </a:pPr>
+            <a:r>
+              <a:rPr sz="1600" b="0">
+                <a:solidFill>
+                  <a:srgbClr val="D8B87A"/>
+                </a:solidFill>
+                <a:latin typeface="Malgun Gothic"/>
+              </a:rPr>
+              <a:t>7. 오늘의 말씀</a:t>
+            </a:r>
+          </a:p>
+        </p:txBody>
+      </p:sp>
+      <p:cxnSp>
+        <p:nvCxnSpPr>
+          <p:cNvPr id="38" name="Connector 37"/>
+          <p:cNvCxnSpPr/>
+          <p:nvPr/>
+        </p:nvCxnSpPr>
+        <p:spPr>
+          <a:xfrm>
+            <a:off x="5257800.0" y="749808"/>
+            <a:ext cx="1645920.0" cy="0"/>
+          </a:xfrm>
+          <a:prstGeom prst="line">
+            <a:avLst/>
+          </a:prstGeom>
+          <a:ln w="17145">
+            <a:solidFill>
+              <a:srgbClr val="D8B87A"/>
+            </a:solidFill>
+          </a:ln>
+        </p:spPr>
+        <p:style>
+          <a:lnRef idx="2">
+            <a:schemeClr val="accent1"/>
+          </a:lnRef>
+          <a:fillRef idx="0">
+            <a:schemeClr val="accent1"/>
+          </a:fillRef>
+          <a:effectRef idx="1">
+            <a:schemeClr val="accent1"/>
+          </a:effectRef>
+          <a:fontRef idx="minor">
+            <a:schemeClr val="tx1"/>
+          </a:fontRef>
+        </p:style>
+      </p:cxnSp>
+      <p:sp>
+        <p:nvSpPr>
+          <p:cNvPr id="39" name="TextBox 38"/>
+          <p:cNvSpPr txBox="1"/>
+          <p:nvPr/>
+        </p:nvSpPr>
+        <p:spPr>
+          <a:xfrm>
+            <a:off x="1691640" y="960120"/>
+            <a:ext cx="8778240" cy="777240"/>
+          </a:xfrm>
+          <a:prstGeom prst="rect">
+            <a:avLst/>
+          </a:prstGeom>
+          <a:noFill/>
+        </p:spPr>
+        <p:txBody>
+          <a:bodyPr wrap="square" anchor="ctr" lIns="18288" rIns="73152" tIns="18288" bIns="18288"/>
+          <a:lstStyle/>
+          <a:p>
+            <a:pPr algn="ctr">
+              <a:lnSpc>
+                <a:spcPct val="115000"/>
+              </a:lnSpc>
+              <a:spcAft>
+                <a:spcPts val="0"/>
+              </a:spcAft>
+            </a:pPr>
+            <a:r>
+              <a:rPr sz="3600" b="1">
+                <a:solidFill>
+                  <a:srgbClr val="FFF8F0"/>
+                </a:solidFill>
+                <a:latin typeface="Malgun Gothic"/>
+              </a:rPr>
+              <a:t>{{SCRIPTURE_REF}}</a:t>
+            </a:r>
+          </a:p>
+        </p:txBody>
+      </p:sp>
+      <p:sp>
+        <p:nvSpPr>
+          <p:cNvPr id="40" name="BIBLE_TEXT_1"/>
+          <p:cNvSpPr txBox="1"/>
+          <p:nvPr/>
+        </p:nvSpPr>
+        <p:spPr>
+          <a:xfrm>
+            <a:off x="1691640" y="1828800"/>
+            <a:ext cx="8778240" cy="4297680"/>
+          </a:xfrm>
+          <a:prstGeom prst="rect">
+            <a:avLst/>
+          </a:prstGeom>
+          <a:noFill/>
+        </p:spPr>
+        <p:txBody>
+          <a:bodyPr wrap="square" anchor="t" lIns="18288" rIns="73152" tIns="18288" bIns="18288"/>
+          <a:lstStyle/>
+          <a:p>
+            <a:pPr algn="ctr">
+              <a:lnSpc>
+                <a:spcPct val="130000"/>
+              </a:lnSpc>
+              <a:spcAft>
+                <a:spcPts val="600"/>
+              </a:spcAft>
+            </a:pPr>
+            <a:r>
+              <a:rPr sz="2800" b="0">
+                <a:solidFill>
+                  <a:srgbClr val="FFF8F0"/>
+                </a:solidFill>
+                <a:latin typeface="Malgun Gothic"/>
+              </a:rPr>
+              <a:t>{{BIBLE_TEXT_1}}</a:t>
+            </a:r>
+          </a:p>
+        </p:txBody>
+      </p:sp>
+    </p:spTree>
+  </p:cSld>
+  <p:clrMapOvr>
+    <a:masterClrMapping/>
+  </p:clrMapOvr>
+</p:sld>
+</file>
+
+<file path=ppt/slides/slide14.xml><?xml version="1.0" encoding="utf-8"?>
+<p:sld xmlns:a="http://schemas.openxmlformats.org/drawingml/2006/main" xmlns:p="http://schemas.openxmlformats.org/presentationml/2006/main" xmlns:r="http://schemas.openxmlformats.org/officeDocument/2006/relationships">
+  <p:cSld>
+    <p:bg>
+      <p:bgPr>
+        <a:solidFill>
+          <a:srgbClr val="0E1218"/>
+        </a:solidFill>
+        <a:effectLst/>
+      </p:bgPr>
+    </p:bg>
+    <p:spTree>
+      <p:nvGrpSpPr>
+        <p:cNvPr id="1" name=""/>
+        <p:cNvGrpSpPr/>
+        <p:nvPr/>
+      </p:nvGrpSpPr>
+      <p:grpSpPr/>
+      <p:sp>
+        <p:nvSpPr>
+          <p:cNvPr id="2" name="Rectangle 1"/>
+          <p:cNvSpPr/>
+          <p:nvPr/>
+        </p:nvSpPr>
+        <p:spPr>
+          <a:xfrm>
+            <a:off x="0" y="0"/>
+            <a:ext cx="12191695" cy="2148840"/>
+          </a:xfrm>
+          <a:prstGeom prst="rect">
+            <a:avLst/>
+          </a:prstGeom>
+          <a:solidFill>
+            <a:srgbClr val="181F2A"/>
+          </a:solidFill>
+          <a:ln>
+            <a:noFill/>
+          </a:ln>
+        </p:spPr>
+        <p:style>
+          <a:lnRef idx="1">
+            <a:schemeClr val="accent1"/>
+          </a:lnRef>
+          <a:fillRef idx="3">
+            <a:schemeClr val="accent1"/>
+          </a:fillRef>
+          <a:effectRef idx="2">
+            <a:schemeClr val="accent1"/>
+          </a:effectRef>
+          <a:fontRef idx="minor">
+            <a:schemeClr val="lt1"/>
+          </a:fontRef>
+        </p:style>
+        <p:txBody>
+          <a:bodyPr rtlCol="0" anchor="ctr"/>
+          <a:lstStyle/>
+          <a:p>
+            <a:pPr algn="ctr"/>
+          </a:p>
+        </p:txBody>
+      </p:sp>
+      <p:sp>
+        <p:nvSpPr>
+          <p:cNvPr id="3" name="Rectangle 2"/>
+          <p:cNvSpPr/>
+          <p:nvPr/>
+        </p:nvSpPr>
+        <p:spPr>
+          <a:xfrm>
+            <a:off x="0" y="1965960"/>
+            <a:ext cx="12191695" cy="2651760"/>
+          </a:xfrm>
+          <a:prstGeom prst="rect">
+            <a:avLst/>
+          </a:prstGeom>
+          <a:solidFill>
+            <a:srgbClr val="151C26"/>
+          </a:solidFill>
+          <a:ln>
+            <a:noFill/>
+          </a:ln>
+        </p:spPr>
+        <p:style>
+          <a:lnRef idx="1">
+            <a:schemeClr val="accent1"/>
+          </a:lnRef>
+          <a:fillRef idx="3">
+            <a:schemeClr val="accent1"/>
+          </a:fillRef>
+          <a:effectRef idx="2">
+            <a:schemeClr val="accent1"/>
+          </a:effectRef>
+          <a:fontRef idx="minor">
+            <a:schemeClr val="lt1"/>
+          </a:fontRef>
+        </p:style>
+        <p:txBody>
+          <a:bodyPr rtlCol="0" anchor="ctr"/>
+          <a:lstStyle/>
+          <a:p>
+            <a:pPr algn="ctr"/>
+          </a:p>
+        </p:txBody>
+      </p:sp>
+      <p:sp>
+        <p:nvSpPr>
+          <p:cNvPr id="4" name="Rectangle 3"/>
+          <p:cNvSpPr/>
+          <p:nvPr/>
+        </p:nvSpPr>
+        <p:spPr>
+          <a:xfrm>
+            <a:off x="0" y="5943600"/>
+            <a:ext cx="12191695" cy="914400"/>
+          </a:xfrm>
+          <a:prstGeom prst="rect">
+            <a:avLst/>
+          </a:prstGeom>
+          <a:solidFill>
+            <a:srgbClr val="0A0D12"/>
+          </a:solidFill>
+          <a:ln>
+            <a:noFill/>
+          </a:ln>
+        </p:spPr>
+        <p:style>
+          <a:lnRef idx="1">
+            <a:schemeClr val="accent1"/>
+          </a:lnRef>
+          <a:fillRef idx="3">
+            <a:schemeClr val="accent1"/>
+          </a:fillRef>
+          <a:effectRef idx="2">
+            <a:schemeClr val="accent1"/>
+          </a:effectRef>
+          <a:fontRef idx="minor">
+            <a:schemeClr val="lt1"/>
+          </a:fontRef>
+        </p:style>
+        <p:txBody>
+          <a:bodyPr rtlCol="0" anchor="ctr"/>
+          <a:lstStyle/>
+          <a:p>
+            <a:pPr algn="ctr"/>
+          </a:p>
+        </p:txBody>
+      </p:sp>
+      <p:sp>
+        <p:nvSpPr>
+          <p:cNvPr id="5" name="Rectangle 4"/>
+          <p:cNvSpPr/>
+          <p:nvPr/>
+        </p:nvSpPr>
+        <p:spPr>
+          <a:xfrm>
+            <a:off x="1371600" y="256032"/>
+            <a:ext cx="9418320" cy="6263640"/>
+          </a:xfrm>
+          <a:prstGeom prst="rect">
+            <a:avLst/>
+          </a:prstGeom>
+          <a:solidFill>
+            <a:srgbClr val="1A232E"/>
+          </a:solidFill>
+          <a:ln>
+            <a:noFill/>
+          </a:ln>
+        </p:spPr>
+        <p:style>
+          <a:lnRef idx="1">
+            <a:schemeClr val="accent1"/>
+          </a:lnRef>
+          <a:fillRef idx="3">
+            <a:schemeClr val="accent1"/>
+          </a:fillRef>
+          <a:effectRef idx="2">
+            <a:schemeClr val="accent1"/>
+          </a:effectRef>
+          <a:fontRef idx="minor">
+            <a:schemeClr val="lt1"/>
+          </a:fontRef>
+        </p:style>
+        <p:txBody>
+          <a:bodyPr rtlCol="0" anchor="ctr"/>
+          <a:lstStyle/>
+          <a:p>
+            <a:pPr algn="ctr"/>
+          </a:p>
+        </p:txBody>
+      </p:sp>
+      <p:sp>
+        <p:nvSpPr>
+          <p:cNvPr id="6" name="Rectangle 5"/>
+          <p:cNvSpPr/>
+          <p:nvPr/>
+        </p:nvSpPr>
+        <p:spPr>
+          <a:xfrm>
+            <a:off x="0" y="0"/>
+            <a:ext cx="128016" cy="6858000"/>
+          </a:xfrm>
+          <a:prstGeom prst="rect">
+            <a:avLst/>
+          </a:prstGeom>
+          <a:solidFill>
+            <a:srgbClr val="D8B87A"/>
+          </a:solidFill>
+          <a:ln>
+            <a:noFill/>
+          </a:ln>
+        </p:spPr>
+        <p:style>
+          <a:lnRef idx="1">
+            <a:schemeClr val="accent1"/>
+          </a:lnRef>
+          <a:fillRef idx="3">
+            <a:schemeClr val="accent1"/>
+          </a:fillRef>
+          <a:effectRef idx="2">
+            <a:schemeClr val="accent1"/>
+          </a:effectRef>
+          <a:fontRef idx="minor">
+            <a:schemeClr val="lt1"/>
+          </a:fontRef>
+        </p:style>
+        <p:txBody>
+          <a:bodyPr rtlCol="0" anchor="ctr"/>
+          <a:lstStyle/>
+          <a:p>
+            <a:pPr algn="ctr"/>
+          </a:p>
+        </p:txBody>
+      </p:sp>
+      <p:sp>
+        <p:nvSpPr>
+          <p:cNvPr id="7" name="Rectangle 6"/>
+          <p:cNvSpPr/>
+          <p:nvPr/>
+        </p:nvSpPr>
+        <p:spPr>
+          <a:xfrm>
+            <a:off x="128016" y="0"/>
+            <a:ext cx="82296" cy="6858000"/>
+          </a:xfrm>
+          <a:prstGeom prst="rect">
+            <a:avLst/>
+          </a:prstGeom>
+          <a:solidFill>
+            <a:srgbClr val="7E9E90"/>
+          </a:solidFill>
+          <a:ln>
+            <a:noFill/>
+          </a:ln>
+        </p:spPr>
+        <p:style>
+          <a:lnRef idx="1">
+            <a:schemeClr val="accent1"/>
+          </a:lnRef>
+          <a:fillRef idx="3">
+            <a:schemeClr val="accent1"/>
+          </a:fillRef>
+          <a:effectRef idx="2">
+            <a:schemeClr val="accent1"/>
+          </a:effectRef>
+          <a:fontRef idx="minor">
+            <a:schemeClr val="lt1"/>
+          </a:fontRef>
+        </p:style>
+        <p:txBody>
+          <a:bodyPr rtlCol="0" anchor="ctr"/>
+          <a:lstStyle/>
+          <a:p>
+            <a:pPr algn="ctr"/>
+          </a:p>
+        </p:txBody>
+      </p:sp>
+      <p:sp>
+        <p:nvSpPr>
+          <p:cNvPr id="8" name="Rectangle 7"/>
+          <p:cNvSpPr/>
+          <p:nvPr/>
+        </p:nvSpPr>
+        <p:spPr>
+          <a:xfrm>
+            <a:off x="11978640" y="0"/>
+            <a:ext cx="91440" cy="6858000"/>
+          </a:xfrm>
+          <a:prstGeom prst="rect">
+            <a:avLst/>
+          </a:prstGeom>
+          <a:solidFill>
+            <a:srgbClr val="C48A94"/>
+          </a:solidFill>
+          <a:ln>
+            <a:noFill/>
+          </a:ln>
+        </p:spPr>
+        <p:style>
+          <a:lnRef idx="1">
+            <a:schemeClr val="accent1"/>
+          </a:lnRef>
+          <a:fillRef idx="3">
+            <a:schemeClr val="accent1"/>
+          </a:fillRef>
+          <a:effectRef idx="2">
+            <a:schemeClr val="accent1"/>
+          </a:effectRef>
+          <a:fontRef idx="minor">
+            <a:schemeClr val="lt1"/>
+          </a:fontRef>
+        </p:style>
+        <p:txBody>
+          <a:bodyPr rtlCol="0" anchor="ctr"/>
+          <a:lstStyle/>
+          <a:p>
+            <a:pPr algn="ctr"/>
+          </a:p>
+        </p:txBody>
+      </p:sp>
+      <p:sp>
+        <p:nvSpPr>
+          <p:cNvPr id="9" name="Rectangle 8"/>
+          <p:cNvSpPr/>
+          <p:nvPr/>
+        </p:nvSpPr>
+        <p:spPr>
+          <a:xfrm>
+            <a:off x="12070080" y="0"/>
+            <a:ext cx="118872" cy="6858000"/>
+          </a:xfrm>
+          <a:prstGeom prst="rect">
+            <a:avLst/>
+          </a:prstGeom>
+          <a:solidFill>
+            <a:srgbClr val="8E5E6A"/>
+          </a:solidFill>
+          <a:ln>
+            <a:noFill/>
+          </a:ln>
+        </p:spPr>
+        <p:style>
+          <a:lnRef idx="1">
+            <a:schemeClr val="accent1"/>
+          </a:lnRef>
+          <a:fillRef idx="3">
+            <a:schemeClr val="accent1"/>
+          </a:fillRef>
+          <a:effectRef idx="2">
+            <a:schemeClr val="accent1"/>
+          </a:effectRef>
+          <a:fontRef idx="minor">
+            <a:schemeClr val="lt1"/>
+          </a:fontRef>
+        </p:style>
+        <p:txBody>
+          <a:bodyPr rtlCol="0" anchor="ctr"/>
+          <a:lstStyle/>
+          <a:p>
+            <a:pPr algn="ctr"/>
+          </a:p>
+        </p:txBody>
+      </p:sp>
+      <p:cxnSp>
+        <p:nvCxnSpPr>
+          <p:cNvPr id="10" name="Connector 9"/>
+          <p:cNvCxnSpPr/>
+          <p:nvPr/>
+        </p:nvCxnSpPr>
+        <p:spPr>
+          <a:xfrm>
+            <a:off x="1554480" y="292608"/>
+            <a:ext cx="9052560" cy="0"/>
+          </a:xfrm>
+          <a:prstGeom prst="line">
+            <a:avLst/>
+          </a:prstGeom>
+          <a:ln w="13970">
+            <a:solidFill>
+              <a:srgbClr val="D8B87A"/>
+            </a:solidFill>
+          </a:ln>
+        </p:spPr>
+        <p:style>
+          <a:lnRef idx="2">
+            <a:schemeClr val="accent1"/>
+          </a:lnRef>
+          <a:fillRef idx="0">
+            <a:schemeClr val="accent1"/>
+          </a:fillRef>
+          <a:effectRef idx="1">
+            <a:schemeClr val="accent1"/>
+          </a:effectRef>
+          <a:fontRef idx="minor">
+            <a:schemeClr val="tx1"/>
+          </a:fontRef>
+        </p:style>
+      </p:cxnSp>
+      <p:cxnSp>
+        <p:nvCxnSpPr>
+          <p:cNvPr id="11" name="Connector 10"/>
+          <p:cNvCxnSpPr/>
+          <p:nvPr/>
+        </p:nvCxnSpPr>
+        <p:spPr>
+          <a:xfrm>
+            <a:off x="1554480" y="6446520"/>
+            <a:ext cx="9052560" cy="0"/>
+          </a:xfrm>
+          <a:prstGeom prst="line">
+            <a:avLst/>
+          </a:prstGeom>
+          <a:ln w="13970">
+            <a:solidFill>
+              <a:srgbClr val="D8B87A"/>
+            </a:solidFill>
+          </a:ln>
+        </p:spPr>
+        <p:style>
+          <a:lnRef idx="2">
+            <a:schemeClr val="accent1"/>
+          </a:lnRef>
+          <a:fillRef idx="0">
+            <a:schemeClr val="accent1"/>
+          </a:fillRef>
+          <a:effectRef idx="1">
+            <a:schemeClr val="accent1"/>
+          </a:effectRef>
+          <a:fontRef idx="minor">
+            <a:schemeClr val="tx1"/>
+          </a:fontRef>
+        </p:style>
+      </p:cxnSp>
+      <p:sp>
+        <p:nvSpPr>
+          <p:cNvPr id="12" name="Rectangle 11"/>
+          <p:cNvSpPr/>
+          <p:nvPr/>
+        </p:nvSpPr>
+        <p:spPr>
+          <a:xfrm>
+            <a:off x="237744" y="6565392"/>
+            <a:ext cx="11951208" cy="292608"/>
+          </a:xfrm>
+          <a:prstGeom prst="rect">
+            <a:avLst/>
+          </a:prstGeom>
+          <a:solidFill>
+            <a:srgbClr val="0A0D12"/>
+          </a:solidFill>
+          <a:ln>
+            <a:noFill/>
+          </a:ln>
+        </p:spPr>
+        <p:style>
+          <a:lnRef idx="1">
+            <a:schemeClr val="accent1"/>
+          </a:lnRef>
+          <a:fillRef idx="3">
+            <a:schemeClr val="accent1"/>
+          </a:fillRef>
+          <a:effectRef idx="2">
+            <a:schemeClr val="accent1"/>
+          </a:effectRef>
+          <a:fontRef idx="minor">
+            <a:schemeClr val="lt1"/>
+          </a:fontRef>
+        </p:style>
+        <p:txBody>
+          <a:bodyPr rtlCol="0" anchor="ctr"/>
+          <a:lstStyle/>
+          <a:p>
+            <a:pPr algn="ctr"/>
+          </a:p>
+        </p:txBody>
+      </p:sp>
+      <p:sp>
+        <p:nvSpPr>
+          <p:cNvPr id="13" name="Oval 12"/>
+          <p:cNvSpPr/>
+          <p:nvPr/>
+        </p:nvSpPr>
+        <p:spPr>
+          <a:xfrm>
+            <a:off x="654939" y="5891251"/>
+            <a:ext cx="116586" cy="116586"/>
+          </a:xfrm>
+          <a:prstGeom prst="ellipse">
+            <a:avLst/>
+          </a:prstGeom>
+          <a:solidFill>
+            <a:srgbClr val="D6A4AC"/>
+          </a:solidFill>
+          <a:ln>
+            <a:noFill/>
+          </a:ln>
+        </p:spPr>
+        <p:style>
+          <a:lnRef idx="1">
+            <a:schemeClr val="accent1"/>
+          </a:lnRef>
+          <a:fillRef idx="3">
+            <a:schemeClr val="accent1"/>
+          </a:fillRef>
+          <a:effectRef idx="2">
+            <a:schemeClr val="accent1"/>
+          </a:effectRef>
+          <a:fontRef idx="minor">
+            <a:schemeClr val="lt1"/>
+          </a:fontRef>
+        </p:style>
+        <p:txBody>
+          <a:bodyPr rtlCol="0" anchor="ctr"/>
+          <a:lstStyle/>
+          <a:p>
+            <a:pPr algn="ctr"/>
+          </a:p>
+        </p:txBody>
+      </p:sp>
+      <p:sp>
+        <p:nvSpPr>
+          <p:cNvPr id="14" name="Oval 13"/>
+          <p:cNvSpPr/>
+          <p:nvPr/>
+        </p:nvSpPr>
+        <p:spPr>
+          <a:xfrm>
+            <a:off x="732663" y="5953430"/>
+            <a:ext cx="116586" cy="116586"/>
+          </a:xfrm>
+          <a:prstGeom prst="ellipse">
+            <a:avLst/>
+          </a:prstGeom>
+          <a:solidFill>
+            <a:srgbClr val="D6A4AC"/>
+          </a:solidFill>
+          <a:ln>
+            <a:noFill/>
+          </a:ln>
+        </p:spPr>
+        <p:style>
+          <a:lnRef idx="1">
+            <a:schemeClr val="accent1"/>
+          </a:lnRef>
+          <a:fillRef idx="3">
+            <a:schemeClr val="accent1"/>
+          </a:fillRef>
+          <a:effectRef idx="2">
+            <a:schemeClr val="accent1"/>
+          </a:effectRef>
+          <a:fontRef idx="minor">
+            <a:schemeClr val="lt1"/>
+          </a:fontRef>
+        </p:style>
+        <p:txBody>
+          <a:bodyPr rtlCol="0" anchor="ctr"/>
+          <a:lstStyle/>
+          <a:p>
+            <a:pPr algn="ctr"/>
+          </a:p>
+        </p:txBody>
+      </p:sp>
+      <p:sp>
+        <p:nvSpPr>
+          <p:cNvPr id="15" name="Oval 14"/>
+          <p:cNvSpPr/>
+          <p:nvPr/>
+        </p:nvSpPr>
+        <p:spPr>
+          <a:xfrm>
+            <a:off x="709345" y="6046698"/>
+            <a:ext cx="116586" cy="116586"/>
+          </a:xfrm>
+          <a:prstGeom prst="ellipse">
+            <a:avLst/>
+          </a:prstGeom>
+          <a:solidFill>
+            <a:srgbClr val="D6A4AC"/>
+          </a:solidFill>
+          <a:ln>
+            <a:noFill/>
+          </a:ln>
+        </p:spPr>
+        <p:style>
+          <a:lnRef idx="1">
+            <a:schemeClr val="accent1"/>
+          </a:lnRef>
+          <a:fillRef idx="3">
+            <a:schemeClr val="accent1"/>
+          </a:fillRef>
+          <a:effectRef idx="2">
+            <a:schemeClr val="accent1"/>
+          </a:effectRef>
+          <a:fontRef idx="minor">
+            <a:schemeClr val="lt1"/>
+          </a:fontRef>
+        </p:style>
+        <p:txBody>
+          <a:bodyPr rtlCol="0" anchor="ctr"/>
+          <a:lstStyle/>
+          <a:p>
+            <a:pPr algn="ctr"/>
+          </a:p>
+        </p:txBody>
+      </p:sp>
+      <p:sp>
+        <p:nvSpPr>
+          <p:cNvPr id="16" name="Oval 15"/>
+          <p:cNvSpPr/>
+          <p:nvPr/>
+        </p:nvSpPr>
+        <p:spPr>
+          <a:xfrm>
+            <a:off x="600533" y="6046698"/>
+            <a:ext cx="116586" cy="116586"/>
+          </a:xfrm>
+          <a:prstGeom prst="ellipse">
+            <a:avLst/>
+          </a:prstGeom>
+          <a:solidFill>
+            <a:srgbClr val="D6A4AC"/>
+          </a:solidFill>
+          <a:ln>
+            <a:noFill/>
+          </a:ln>
+        </p:spPr>
+        <p:style>
+          <a:lnRef idx="1">
+            <a:schemeClr val="accent1"/>
+          </a:lnRef>
+          <a:fillRef idx="3">
+            <a:schemeClr val="accent1"/>
+          </a:fillRef>
+          <a:effectRef idx="2">
+            <a:schemeClr val="accent1"/>
+          </a:effectRef>
+          <a:fontRef idx="minor">
+            <a:schemeClr val="lt1"/>
+          </a:fontRef>
+        </p:style>
+        <p:txBody>
+          <a:bodyPr rtlCol="0" anchor="ctr"/>
+          <a:lstStyle/>
+          <a:p>
+            <a:pPr algn="ctr"/>
+          </a:p>
+        </p:txBody>
+      </p:sp>
+      <p:sp>
+        <p:nvSpPr>
+          <p:cNvPr id="17" name="Oval 16"/>
+          <p:cNvSpPr/>
+          <p:nvPr/>
+        </p:nvSpPr>
+        <p:spPr>
+          <a:xfrm>
+            <a:off x="577215" y="5953430"/>
+            <a:ext cx="116586" cy="116586"/>
+          </a:xfrm>
+          <a:prstGeom prst="ellipse">
+            <a:avLst/>
+          </a:prstGeom>
+          <a:solidFill>
+            <a:srgbClr val="D6A4AC"/>
+          </a:solidFill>
+          <a:ln>
+            <a:noFill/>
+          </a:ln>
+        </p:spPr>
+        <p:style>
+          <a:lnRef idx="1">
+            <a:schemeClr val="accent1"/>
+          </a:lnRef>
+          <a:fillRef idx="3">
+            <a:schemeClr val="accent1"/>
+          </a:fillRef>
+          <a:effectRef idx="2">
+            <a:schemeClr val="accent1"/>
+          </a:effectRef>
+          <a:fontRef idx="minor">
+            <a:schemeClr val="lt1"/>
+          </a:fontRef>
+        </p:style>
+        <p:txBody>
+          <a:bodyPr rtlCol="0" anchor="ctr"/>
+          <a:lstStyle/>
+          <a:p>
+            <a:pPr algn="ctr"/>
+          </a:p>
+        </p:txBody>
+      </p:sp>
+      <p:sp>
+        <p:nvSpPr>
+          <p:cNvPr id="18" name="Oval 17"/>
+          <p:cNvSpPr/>
+          <p:nvPr/>
+        </p:nvSpPr>
+        <p:spPr>
+          <a:xfrm>
+            <a:off x="670484" y="5992292"/>
+            <a:ext cx="85496" cy="85496"/>
+          </a:xfrm>
+          <a:prstGeom prst="ellipse">
+            <a:avLst/>
+          </a:prstGeom>
+          <a:solidFill>
+            <a:srgbClr val="C48A94"/>
+          </a:solidFill>
+          <a:ln>
+            <a:noFill/>
+          </a:ln>
+        </p:spPr>
+        <p:style>
+          <a:lnRef idx="1">
+            <a:schemeClr val="accent1"/>
+          </a:lnRef>
+          <a:fillRef idx="3">
+            <a:schemeClr val="accent1"/>
+          </a:fillRef>
+          <a:effectRef idx="2">
+            <a:schemeClr val="accent1"/>
+          </a:effectRef>
+          <a:fontRef idx="minor">
+            <a:schemeClr val="lt1"/>
+          </a:fontRef>
+        </p:style>
+        <p:txBody>
+          <a:bodyPr rtlCol="0" anchor="ctr"/>
+          <a:lstStyle/>
+          <a:p>
+            <a:pPr algn="ctr"/>
+          </a:p>
+        </p:txBody>
+      </p:sp>
+      <p:sp>
+        <p:nvSpPr>
+          <p:cNvPr id="19" name="Oval 18"/>
+          <p:cNvSpPr/>
+          <p:nvPr/>
+        </p:nvSpPr>
+        <p:spPr>
+          <a:xfrm>
+            <a:off x="798728" y="6073902"/>
+            <a:ext cx="108813" cy="54406"/>
+          </a:xfrm>
+          <a:prstGeom prst="ellipse">
+            <a:avLst/>
+          </a:prstGeom>
+          <a:solidFill>
+            <a:srgbClr val="7E9E90"/>
+          </a:solidFill>
+          <a:ln>
+            <a:noFill/>
+          </a:ln>
+        </p:spPr>
+        <p:style>
+          <a:lnRef idx="1">
+            <a:schemeClr val="accent1"/>
+          </a:lnRef>
+          <a:fillRef idx="3">
+            <a:schemeClr val="accent1"/>
+          </a:fillRef>
+          <a:effectRef idx="2">
+            <a:schemeClr val="accent1"/>
+          </a:effectRef>
+          <a:fontRef idx="minor">
+            <a:schemeClr val="lt1"/>
+          </a:fontRef>
+        </p:style>
+        <p:txBody>
+          <a:bodyPr rtlCol="0" anchor="ctr"/>
+          <a:lstStyle/>
+          <a:p>
+            <a:pPr algn="ctr"/>
+          </a:p>
+        </p:txBody>
+      </p:sp>
+      <p:sp>
+        <p:nvSpPr>
+          <p:cNvPr id="20" name="Oval 19"/>
+          <p:cNvSpPr/>
+          <p:nvPr/>
+        </p:nvSpPr>
+        <p:spPr>
+          <a:xfrm>
+            <a:off x="11389995" y="5891251"/>
+            <a:ext cx="116586" cy="116586"/>
+          </a:xfrm>
+          <a:prstGeom prst="ellipse">
+            <a:avLst/>
+          </a:prstGeom>
+          <a:solidFill>
+            <a:srgbClr val="D6A4AC"/>
+          </a:solidFill>
+          <a:ln>
+            <a:noFill/>
+          </a:ln>
+        </p:spPr>
+        <p:style>
+          <a:lnRef idx="1">
+            <a:schemeClr val="accent1"/>
+          </a:lnRef>
+          <a:fillRef idx="3">
+            <a:schemeClr val="accent1"/>
+          </a:fillRef>
+          <a:effectRef idx="2">
+            <a:schemeClr val="accent1"/>
+          </a:effectRef>
+          <a:fontRef idx="minor">
+            <a:schemeClr val="lt1"/>
+          </a:fontRef>
+        </p:style>
+        <p:txBody>
+          <a:bodyPr rtlCol="0" anchor="ctr"/>
+          <a:lstStyle/>
+          <a:p>
+            <a:pPr algn="ctr"/>
+          </a:p>
+        </p:txBody>
+      </p:sp>
+      <p:sp>
+        <p:nvSpPr>
+          <p:cNvPr id="21" name="Oval 20"/>
+          <p:cNvSpPr/>
+          <p:nvPr/>
+        </p:nvSpPr>
+        <p:spPr>
+          <a:xfrm>
+            <a:off x="11467719" y="5953430"/>
+            <a:ext cx="116586" cy="116586"/>
+          </a:xfrm>
+          <a:prstGeom prst="ellipse">
+            <a:avLst/>
+          </a:prstGeom>
+          <a:solidFill>
+            <a:srgbClr val="D6A4AC"/>
+          </a:solidFill>
+          <a:ln>
+            <a:noFill/>
+          </a:ln>
+        </p:spPr>
+        <p:style>
+          <a:lnRef idx="1">
+            <a:schemeClr val="accent1"/>
+          </a:lnRef>
+          <a:fillRef idx="3">
+            <a:schemeClr val="accent1"/>
+          </a:fillRef>
+          <a:effectRef idx="2">
+            <a:schemeClr val="accent1"/>
+          </a:effectRef>
+          <a:fontRef idx="minor">
+            <a:schemeClr val="lt1"/>
+          </a:fontRef>
+        </p:style>
+        <p:txBody>
+          <a:bodyPr rtlCol="0" anchor="ctr"/>
+          <a:lstStyle/>
+          <a:p>
+            <a:pPr algn="ctr"/>
+          </a:p>
+        </p:txBody>
+      </p:sp>
+      <p:sp>
+        <p:nvSpPr>
+          <p:cNvPr id="22" name="Oval 21"/>
+          <p:cNvSpPr/>
+          <p:nvPr/>
+        </p:nvSpPr>
+        <p:spPr>
+          <a:xfrm>
+            <a:off x="11444401" y="6046698"/>
+            <a:ext cx="116586" cy="116586"/>
+          </a:xfrm>
+          <a:prstGeom prst="ellipse">
+            <a:avLst/>
+          </a:prstGeom>
+          <a:solidFill>
+            <a:srgbClr val="D6A4AC"/>
+          </a:solidFill>
+          <a:ln>
+            <a:noFill/>
+          </a:ln>
+        </p:spPr>
+        <p:style>
+          <a:lnRef idx="1">
+            <a:schemeClr val="accent1"/>
+          </a:lnRef>
+          <a:fillRef idx="3">
+            <a:schemeClr val="accent1"/>
+          </a:fillRef>
+          <a:effectRef idx="2">
+            <a:schemeClr val="accent1"/>
+          </a:effectRef>
+          <a:fontRef idx="minor">
+            <a:schemeClr val="lt1"/>
+          </a:fontRef>
+        </p:style>
+        <p:txBody>
+          <a:bodyPr rtlCol="0" anchor="ctr"/>
+          <a:lstStyle/>
+          <a:p>
+            <a:pPr algn="ctr"/>
+          </a:p>
+        </p:txBody>
+      </p:sp>
+      <p:sp>
+        <p:nvSpPr>
+          <p:cNvPr id="23" name="Oval 22"/>
+          <p:cNvSpPr/>
+          <p:nvPr/>
+        </p:nvSpPr>
+        <p:spPr>
+          <a:xfrm>
+            <a:off x="11335589" y="6046698"/>
+            <a:ext cx="116586" cy="116586"/>
+          </a:xfrm>
+          <a:prstGeom prst="ellipse">
+            <a:avLst/>
+          </a:prstGeom>
+          <a:solidFill>
+            <a:srgbClr val="D6A4AC"/>
+          </a:solidFill>
+          <a:ln>
+            <a:noFill/>
+          </a:ln>
+        </p:spPr>
+        <p:style>
+          <a:lnRef idx="1">
+            <a:schemeClr val="accent1"/>
+          </a:lnRef>
+          <a:fillRef idx="3">
+            <a:schemeClr val="accent1"/>
+          </a:fillRef>
+          <a:effectRef idx="2">
+            <a:schemeClr val="accent1"/>
+          </a:effectRef>
+          <a:fontRef idx="minor">
+            <a:schemeClr val="lt1"/>
+          </a:fontRef>
+        </p:style>
+        <p:txBody>
+          <a:bodyPr rtlCol="0" anchor="ctr"/>
+          <a:lstStyle/>
+          <a:p>
+            <a:pPr algn="ctr"/>
+          </a:p>
+        </p:txBody>
+      </p:sp>
+      <p:sp>
+        <p:nvSpPr>
+          <p:cNvPr id="24" name="Oval 23"/>
+          <p:cNvSpPr/>
+          <p:nvPr/>
+        </p:nvSpPr>
+        <p:spPr>
+          <a:xfrm>
+            <a:off x="11312271" y="5953430"/>
+            <a:ext cx="116586" cy="116586"/>
+          </a:xfrm>
+          <a:prstGeom prst="ellipse">
+            <a:avLst/>
+          </a:prstGeom>
+          <a:solidFill>
+            <a:srgbClr val="D6A4AC"/>
+          </a:solidFill>
+          <a:ln>
+            <a:noFill/>
+          </a:ln>
+        </p:spPr>
+        <p:style>
+          <a:lnRef idx="1">
+            <a:schemeClr val="accent1"/>
+          </a:lnRef>
+          <a:fillRef idx="3">
+            <a:schemeClr val="accent1"/>
+          </a:fillRef>
+          <a:effectRef idx="2">
+            <a:schemeClr val="accent1"/>
+          </a:effectRef>
+          <a:fontRef idx="minor">
+            <a:schemeClr val="lt1"/>
+          </a:fontRef>
+        </p:style>
+        <p:txBody>
+          <a:bodyPr rtlCol="0" anchor="ctr"/>
+          <a:lstStyle/>
+          <a:p>
+            <a:pPr algn="ctr"/>
+          </a:p>
+        </p:txBody>
+      </p:sp>
+      <p:sp>
+        <p:nvSpPr>
+          <p:cNvPr id="25" name="Oval 24"/>
+          <p:cNvSpPr/>
+          <p:nvPr/>
+        </p:nvSpPr>
+        <p:spPr>
+          <a:xfrm>
+            <a:off x="11405540" y="5992292"/>
+            <a:ext cx="85496" cy="85496"/>
+          </a:xfrm>
+          <a:prstGeom prst="ellipse">
+            <a:avLst/>
+          </a:prstGeom>
+          <a:solidFill>
+            <a:srgbClr val="C48A94"/>
+          </a:solidFill>
+          <a:ln>
+            <a:noFill/>
+          </a:ln>
+        </p:spPr>
+        <p:style>
+          <a:lnRef idx="1">
+            <a:schemeClr val="accent1"/>
+          </a:lnRef>
+          <a:fillRef idx="3">
+            <a:schemeClr val="accent1"/>
+          </a:fillRef>
+          <a:effectRef idx="2">
+            <a:schemeClr val="accent1"/>
+          </a:effectRef>
+          <a:fontRef idx="minor">
+            <a:schemeClr val="lt1"/>
+          </a:fontRef>
+        </p:style>
+        <p:txBody>
+          <a:bodyPr rtlCol="0" anchor="ctr"/>
+          <a:lstStyle/>
+          <a:p>
+            <a:pPr algn="ctr"/>
+          </a:p>
+        </p:txBody>
+      </p:sp>
+      <p:sp>
+        <p:nvSpPr>
+          <p:cNvPr id="26" name="Oval 25"/>
+          <p:cNvSpPr/>
+          <p:nvPr/>
+        </p:nvSpPr>
+        <p:spPr>
+          <a:xfrm>
+            <a:off x="11533784" y="6073902"/>
+            <a:ext cx="108813" cy="54406"/>
+          </a:xfrm>
+          <a:prstGeom prst="ellipse">
+            <a:avLst/>
+          </a:prstGeom>
+          <a:solidFill>
+            <a:srgbClr val="7E9E90"/>
+          </a:solidFill>
+          <a:ln>
+            <a:noFill/>
+          </a:ln>
+        </p:spPr>
+        <p:style>
+          <a:lnRef idx="1">
+            <a:schemeClr val="accent1"/>
+          </a:lnRef>
+          <a:fillRef idx="3">
+            <a:schemeClr val="accent1"/>
+          </a:fillRef>
+          <a:effectRef idx="2">
+            <a:schemeClr val="accent1"/>
+          </a:effectRef>
+          <a:fontRef idx="minor">
+            <a:schemeClr val="lt1"/>
+          </a:fontRef>
+        </p:style>
+        <p:txBody>
+          <a:bodyPr rtlCol="0" anchor="ctr"/>
+          <a:lstStyle/>
+          <a:p>
+            <a:pPr algn="ctr"/>
+          </a:p>
+        </p:txBody>
+      </p:sp>
+      <p:cxnSp>
+        <p:nvCxnSpPr>
+          <p:cNvPr id="27" name="Connector 26"/>
+          <p:cNvCxnSpPr/>
+          <p:nvPr/>
+        </p:nvCxnSpPr>
+        <p:spPr>
+          <a:xfrm>
+            <a:off x="1600200" y="365760"/>
+            <a:ext cx="274320" cy="0"/>
+          </a:xfrm>
+          <a:prstGeom prst="line">
+            <a:avLst/>
+          </a:prstGeom>
+          <a:ln w="14604">
+            <a:solidFill>
+              <a:srgbClr val="D8B87A"/>
+            </a:solidFill>
+          </a:ln>
+        </p:spPr>
+        <p:style>
+          <a:lnRef idx="2">
+            <a:schemeClr val="accent1"/>
+          </a:lnRef>
+          <a:fillRef idx="0">
+            <a:schemeClr val="accent1"/>
+          </a:fillRef>
+          <a:effectRef idx="1">
+            <a:schemeClr val="accent1"/>
+          </a:effectRef>
+          <a:fontRef idx="minor">
+            <a:schemeClr val="tx1"/>
+          </a:fontRef>
+        </p:style>
+      </p:cxnSp>
+      <p:cxnSp>
+        <p:nvCxnSpPr>
+          <p:cNvPr id="28" name="Connector 27"/>
+          <p:cNvCxnSpPr/>
+          <p:nvPr/>
+        </p:nvCxnSpPr>
+        <p:spPr>
+          <a:xfrm>
+            <a:off x="1600200" y="365760"/>
+            <a:ext cx="0" cy="274320"/>
+          </a:xfrm>
+          <a:prstGeom prst="line">
+            <a:avLst/>
+          </a:prstGeom>
+          <a:ln w="14604">
+            <a:solidFill>
+              <a:srgbClr val="D8B87A"/>
+            </a:solidFill>
+          </a:ln>
+        </p:spPr>
+        <p:style>
+          <a:lnRef idx="2">
+            <a:schemeClr val="accent1"/>
+          </a:lnRef>
+          <a:fillRef idx="0">
+            <a:schemeClr val="accent1"/>
+          </a:fillRef>
+          <a:effectRef idx="1">
+            <a:schemeClr val="accent1"/>
+          </a:effectRef>
+          <a:fontRef idx="minor">
+            <a:schemeClr val="tx1"/>
+          </a:fontRef>
+        </p:style>
+      </p:cxnSp>
+      <p:cxnSp>
+        <p:nvCxnSpPr>
+          <p:cNvPr id="29" name="Connector 28"/>
+          <p:cNvCxnSpPr/>
+          <p:nvPr/>
+        </p:nvCxnSpPr>
+        <p:spPr>
+          <a:xfrm>
+            <a:off x="10287000" y="365760"/>
+            <a:ext cx="274320" cy="0"/>
+          </a:xfrm>
+          <a:prstGeom prst="line">
+            <a:avLst/>
+          </a:prstGeom>
+          <a:ln w="14604">
+            <a:solidFill>
+              <a:srgbClr val="D8B87A"/>
+            </a:solidFill>
+          </a:ln>
+        </p:spPr>
+        <p:style>
+          <a:lnRef idx="2">
+            <a:schemeClr val="accent1"/>
+          </a:lnRef>
+          <a:fillRef idx="0">
+            <a:schemeClr val="accent1"/>
+          </a:fillRef>
+          <a:effectRef idx="1">
+            <a:schemeClr val="accent1"/>
+          </a:effectRef>
+          <a:fontRef idx="minor">
+            <a:schemeClr val="tx1"/>
+          </a:fontRef>
+        </p:style>
+      </p:cxnSp>
+      <p:cxnSp>
+        <p:nvCxnSpPr>
+          <p:cNvPr id="30" name="Connector 29"/>
+          <p:cNvCxnSpPr/>
+          <p:nvPr/>
+        </p:nvCxnSpPr>
+        <p:spPr>
+          <a:xfrm>
+            <a:off x="10561320" y="365760"/>
+            <a:ext cx="0" cy="274320"/>
+          </a:xfrm>
+          <a:prstGeom prst="line">
+            <a:avLst/>
+          </a:prstGeom>
+          <a:ln w="14604">
+            <a:solidFill>
+              <a:srgbClr val="D8B87A"/>
+            </a:solidFill>
+          </a:ln>
+        </p:spPr>
+        <p:style>
+          <a:lnRef idx="2">
+            <a:schemeClr val="accent1"/>
+          </a:lnRef>
+          <a:fillRef idx="0">
+            <a:schemeClr val="accent1"/>
+          </a:fillRef>
+          <a:effectRef idx="1">
+            <a:schemeClr val="accent1"/>
+          </a:effectRef>
+          <a:fontRef idx="minor">
+            <a:schemeClr val="tx1"/>
+          </a:fontRef>
+        </p:style>
+      </p:cxnSp>
+      <p:sp>
+        <p:nvSpPr>
+          <p:cNvPr id="31" name="Diamond 30"/>
+          <p:cNvSpPr/>
+          <p:nvPr/>
+        </p:nvSpPr>
+        <p:spPr>
+          <a:xfrm>
+            <a:off x="1193292" y="3296412"/>
+            <a:ext cx="82296" cy="82296"/>
+          </a:xfrm>
+          <a:prstGeom prst="diamond">
+            <a:avLst/>
+          </a:prstGeom>
+          <a:solidFill>
+            <a:srgbClr val="D8B87A"/>
+          </a:solidFill>
+          <a:ln>
+            <a:noFill/>
+          </a:ln>
+        </p:spPr>
+        <p:style>
+          <a:lnRef idx="1">
+            <a:schemeClr val="accent1"/>
+          </a:lnRef>
+          <a:fillRef idx="3">
+            <a:schemeClr val="accent1"/>
+          </a:fillRef>
+          <a:effectRef idx="2">
+            <a:schemeClr val="accent1"/>
+          </a:effectRef>
+          <a:fontRef idx="minor">
+            <a:schemeClr val="lt1"/>
+          </a:fontRef>
+        </p:style>
+        <p:txBody>
+          <a:bodyPr rtlCol="0" anchor="ctr"/>
+          <a:lstStyle/>
+          <a:p>
+            <a:pPr algn="ctr"/>
+          </a:p>
+        </p:txBody>
+      </p:sp>
+      <p:sp>
+        <p:nvSpPr>
+          <p:cNvPr id="32" name="Diamond 31"/>
+          <p:cNvSpPr/>
+          <p:nvPr/>
+        </p:nvSpPr>
+        <p:spPr>
+          <a:xfrm>
+            <a:off x="10885932" y="3296412"/>
+            <a:ext cx="82296" cy="82296"/>
+          </a:xfrm>
+          <a:prstGeom prst="diamond">
+            <a:avLst/>
+          </a:prstGeom>
+          <a:solidFill>
+            <a:srgbClr val="D8B87A"/>
+          </a:solidFill>
+          <a:ln>
+            <a:noFill/>
+          </a:ln>
+        </p:spPr>
+        <p:style>
+          <a:lnRef idx="1">
+            <a:schemeClr val="accent1"/>
+          </a:lnRef>
+          <a:fillRef idx="3">
+            <a:schemeClr val="accent1"/>
+          </a:fillRef>
+          <a:effectRef idx="2">
+            <a:schemeClr val="accent1"/>
+          </a:effectRef>
+          <a:fontRef idx="minor">
+            <a:schemeClr val="lt1"/>
+          </a:fontRef>
+        </p:style>
+        <p:txBody>
+          <a:bodyPr rtlCol="0" anchor="ctr"/>
+          <a:lstStyle/>
+          <a:p>
+            <a:pPr algn="ctr"/>
+          </a:p>
+        </p:txBody>
+      </p:sp>
+      <p:cxnSp>
+        <p:nvCxnSpPr>
+          <p:cNvPr id="33" name="Connector 32"/>
+          <p:cNvCxnSpPr/>
+          <p:nvPr/>
+        </p:nvCxnSpPr>
+        <p:spPr>
+          <a:xfrm>
+            <a:off x="4800600.0" y="1874519"/>
+            <a:ext cx="914400.0" cy="0"/>
+          </a:xfrm>
+          <a:prstGeom prst="line">
+            <a:avLst/>
+          </a:prstGeom>
+          <a:ln w="13970">
+            <a:solidFill>
+              <a:srgbClr val="D8B87A"/>
+            </a:solidFill>
+          </a:ln>
+        </p:spPr>
+        <p:style>
+          <a:lnRef idx="2">
+            <a:schemeClr val="accent1"/>
+          </a:lnRef>
+          <a:fillRef idx="0">
+            <a:schemeClr val="accent1"/>
+          </a:fillRef>
+          <a:effectRef idx="1">
+            <a:schemeClr val="accent1"/>
+          </a:effectRef>
+          <a:fontRef idx="minor">
+            <a:schemeClr val="tx1"/>
+          </a:fontRef>
+        </p:style>
+      </p:cxnSp>
+      <p:cxnSp>
+        <p:nvCxnSpPr>
+          <p:cNvPr id="34" name="Connector 33"/>
+          <p:cNvCxnSpPr/>
+          <p:nvPr/>
+        </p:nvCxnSpPr>
+        <p:spPr>
+          <a:xfrm>
+            <a:off x="6446520.0" y="1874519"/>
+            <a:ext cx="914400.0" cy="0"/>
+          </a:xfrm>
+          <a:prstGeom prst="line">
+            <a:avLst/>
+          </a:prstGeom>
+          <a:ln w="13970">
+            <a:solidFill>
+              <a:srgbClr val="D8B87A"/>
+            </a:solidFill>
+          </a:ln>
+        </p:spPr>
+        <p:style>
+          <a:lnRef idx="2">
+            <a:schemeClr val="accent1"/>
+          </a:lnRef>
+          <a:fillRef idx="0">
+            <a:schemeClr val="accent1"/>
+          </a:fillRef>
+          <a:effectRef idx="1">
+            <a:schemeClr val="accent1"/>
+          </a:effectRef>
+          <a:fontRef idx="minor">
+            <a:schemeClr val="tx1"/>
+          </a:fontRef>
+        </p:style>
+      </p:cxnSp>
+      <p:sp>
+        <p:nvSpPr>
+          <p:cNvPr id="35" name="Diamond 34"/>
+          <p:cNvSpPr/>
+          <p:nvPr/>
+        </p:nvSpPr>
+        <p:spPr>
+          <a:xfrm>
+            <a:off x="4613148" y="1824227"/>
+            <a:ext cx="100584" cy="100584"/>
+          </a:xfrm>
+          <a:prstGeom prst="diamond">
+            <a:avLst/>
+          </a:prstGeom>
+          <a:solidFill>
+            <a:srgbClr val="D8B87A"/>
+          </a:solidFill>
+          <a:ln>
+            <a:noFill/>
+          </a:ln>
+        </p:spPr>
+        <p:style>
+          <a:lnRef idx="1">
+            <a:schemeClr val="accent1"/>
+          </a:lnRef>
+          <a:fillRef idx="3">
+            <a:schemeClr val="accent1"/>
+          </a:fillRef>
+          <a:effectRef idx="2">
+            <a:schemeClr val="accent1"/>
+          </a:effectRef>
+          <a:fontRef idx="minor">
+            <a:schemeClr val="lt1"/>
+          </a:fontRef>
+        </p:style>
+        <p:txBody>
+          <a:bodyPr rtlCol="0" anchor="ctr"/>
+          <a:lstStyle/>
+          <a:p>
+            <a:pPr algn="ctr"/>
+          </a:p>
+        </p:txBody>
+      </p:sp>
+      <p:sp>
+        <p:nvSpPr>
+          <p:cNvPr id="36" name="Diamond 35"/>
+          <p:cNvSpPr/>
+          <p:nvPr/>
+        </p:nvSpPr>
+        <p:spPr>
+          <a:xfrm>
+            <a:off x="7447788" y="1824227"/>
+            <a:ext cx="100584" cy="100584"/>
+          </a:xfrm>
+          <a:prstGeom prst="diamond">
+            <a:avLst/>
+          </a:prstGeom>
+          <a:solidFill>
+            <a:srgbClr val="D8B87A"/>
+          </a:solidFill>
+          <a:ln>
+            <a:noFill/>
+          </a:ln>
+        </p:spPr>
+        <p:style>
+          <a:lnRef idx="1">
+            <a:schemeClr val="accent1"/>
+          </a:lnRef>
+          <a:fillRef idx="3">
+            <a:schemeClr val="accent1"/>
+          </a:fillRef>
+          <a:effectRef idx="2">
+            <a:schemeClr val="accent1"/>
+          </a:effectRef>
+          <a:fontRef idx="minor">
+            <a:schemeClr val="lt1"/>
+          </a:fontRef>
+        </p:style>
+        <p:txBody>
+          <a:bodyPr rtlCol="0" anchor="ctr"/>
+          <a:lstStyle/>
+          <a:p>
+            <a:pPr algn="ctr"/>
+          </a:p>
+        </p:txBody>
+      </p:sp>
+      <p:sp>
+        <p:nvSpPr>
+          <p:cNvPr id="37" name="TextBox 36"/>
+          <p:cNvSpPr txBox="1"/>
+          <p:nvPr/>
+        </p:nvSpPr>
+        <p:spPr>
+          <a:xfrm>
+            <a:off x="1691640" y="384048"/>
+            <a:ext cx="8778240" cy="292608"/>
+          </a:xfrm>
+          <a:prstGeom prst="rect">
+            <a:avLst/>
+          </a:prstGeom>
+          <a:noFill/>
+        </p:spPr>
+        <p:txBody>
+          <a:bodyPr wrap="square" anchor="ctr" lIns="18288" rIns="73152" tIns="18288" bIns="18288"/>
+          <a:lstStyle/>
+          <a:p>
+            <a:pPr algn="ctr">
+              <a:lnSpc>
+                <a:spcPct val="100000"/>
+              </a:lnSpc>
+              <a:spcAft>
+                <a:spcPts val="0"/>
+              </a:spcAft>
+            </a:pPr>
+            <a:r>
+              <a:rPr sz="1600" b="0">
+                <a:solidFill>
+                  <a:srgbClr val="D8B87A"/>
+                </a:solidFill>
+                <a:latin typeface="Malgun Gothic"/>
+              </a:rPr>
+              <a:t>설교제목</a:t>
+            </a:r>
+          </a:p>
+        </p:txBody>
+      </p:sp>
+      <p:cxnSp>
+        <p:nvCxnSpPr>
+          <p:cNvPr id="38" name="Connector 37"/>
+          <p:cNvCxnSpPr/>
+          <p:nvPr/>
+        </p:nvCxnSpPr>
+        <p:spPr>
+          <a:xfrm>
+            <a:off x="5257800.0" y="749808"/>
+            <a:ext cx="1645920.0" cy="0"/>
+          </a:xfrm>
+          <a:prstGeom prst="line">
+            <a:avLst/>
+          </a:prstGeom>
+          <a:ln w="17145">
+            <a:solidFill>
+              <a:srgbClr val="D8B87A"/>
+            </a:solidFill>
+          </a:ln>
+        </p:spPr>
+        <p:style>
+          <a:lnRef idx="2">
+            <a:schemeClr val="accent1"/>
+          </a:lnRef>
+          <a:fillRef idx="0">
+            <a:schemeClr val="accent1"/>
+          </a:fillRef>
+          <a:effectRef idx="1">
+            <a:schemeClr val="accent1"/>
+          </a:effectRef>
+          <a:fontRef idx="minor">
+            <a:schemeClr val="tx1"/>
+          </a:fontRef>
+        </p:style>
+      </p:cxnSp>
+      <p:sp>
+        <p:nvSpPr>
+          <p:cNvPr id="39" name="SERMON_TITLE"/>
+          <p:cNvSpPr txBox="1"/>
+          <p:nvPr/>
+        </p:nvSpPr>
+        <p:spPr>
+          <a:xfrm>
+            <a:off x="1691640" y="2240280"/>
+            <a:ext cx="8778240" cy="2011680"/>
+          </a:xfrm>
+          <a:prstGeom prst="rect">
+            <a:avLst/>
+          </a:prstGeom>
+          <a:noFill/>
+        </p:spPr>
+        <p:txBody>
+          <a:bodyPr wrap="square" anchor="ctr" lIns="18288" rIns="73152" tIns="18288" bIns="18288"/>
+          <a:lstStyle/>
+          <a:p>
+            <a:pPr algn="ctr">
+              <a:lnSpc>
+                <a:spcPct val="115000"/>
+              </a:lnSpc>
+              <a:spcAft>
+                <a:spcPts val="0"/>
+              </a:spcAft>
+            </a:pPr>
+            <a:r>
+              <a:rPr sz="5200" b="1">
+                <a:solidFill>
+                  <a:srgbClr val="FFF8F0"/>
+                </a:solidFill>
+                <a:latin typeface="Malgun Gothic"/>
+              </a:rPr>
+              <a:t>{{SERMON_TITLE}}</a:t>
+            </a:r>
+          </a:p>
+        </p:txBody>
+      </p:sp>
+      <p:sp>
+        <p:nvSpPr>
+          <p:cNvPr id="40" name="SERMON_SUBTITLE"/>
+          <p:cNvSpPr txBox="1"/>
+          <p:nvPr/>
+        </p:nvSpPr>
+        <p:spPr>
+          <a:xfrm>
+            <a:off x="1691640" y="4572000"/>
+            <a:ext cx="8778240" cy="365760"/>
+          </a:xfrm>
+          <a:prstGeom prst="rect">
+            <a:avLst/>
+          </a:prstGeom>
+          <a:noFill/>
+        </p:spPr>
+        <p:txBody>
+          <a:bodyPr wrap="square" anchor="t" lIns="18288" rIns="73152" tIns="18288" bIns="18288"/>
+          <a:lstStyle/>
+          <a:p>
+            <a:pPr algn="ctr">
+              <a:lnSpc>
+                <a:spcPct val="115000"/>
+              </a:lnSpc>
+              <a:spcAft>
+                <a:spcPts val="0"/>
+              </a:spcAft>
+            </a:pPr>
+            <a:r>
+              <a:rPr sz="2200" b="0">
+                <a:solidFill>
+                  <a:srgbClr val="B6C0CA"/>
+                </a:solidFill>
+                <a:latin typeface="Malgun Gothic"/>
+              </a:rPr>
+              <a:t>{{SERMON_SUBTITLE}}</a:t>
+            </a:r>
+          </a:p>
+        </p:txBody>
+      </p:sp>
+      <p:cxnSp>
+        <p:nvCxnSpPr>
+          <p:cNvPr id="41" name="Connector 40"/>
+          <p:cNvCxnSpPr/>
+          <p:nvPr/>
+        </p:nvCxnSpPr>
+        <p:spPr>
+          <a:xfrm>
+            <a:off x="5349240.0" y="5074920"/>
+            <a:ext cx="1463040.0" cy="0"/>
+          </a:xfrm>
+          <a:prstGeom prst="line">
+            <a:avLst/>
+          </a:prstGeom>
+          <a:ln w="15240">
+            <a:solidFill>
+              <a:srgbClr val="D8B87A"/>
+            </a:solidFill>
+          </a:ln>
+        </p:spPr>
+        <p:style>
+          <a:lnRef idx="2">
+            <a:schemeClr val="accent1"/>
+          </a:lnRef>
+          <a:fillRef idx="0">
+            <a:schemeClr val="accent1"/>
+          </a:fillRef>
+          <a:effectRef idx="1">
+            <a:schemeClr val="accent1"/>
+          </a:effectRef>
+          <a:fontRef idx="minor">
+            <a:schemeClr val="tx1"/>
+          </a:fontRef>
+        </p:style>
+      </p:cxnSp>
+      <p:sp>
+        <p:nvSpPr>
+          <p:cNvPr id="42" name="PREACHER"/>
+          <p:cNvSpPr txBox="1"/>
+          <p:nvPr/>
+        </p:nvSpPr>
+        <p:spPr>
+          <a:xfrm>
+            <a:off x="1691640" y="5303520"/>
+            <a:ext cx="8778240" cy="365760"/>
+          </a:xfrm>
+          <a:prstGeom prst="rect">
+            <a:avLst/>
+          </a:prstGeom>
+          <a:noFill/>
+        </p:spPr>
+        <p:txBody>
+          <a:bodyPr wrap="square" anchor="t" lIns="18288" rIns="73152" tIns="18288" bIns="18288"/>
+          <a:lstStyle/>
+          <a:p>
+            <a:pPr algn="ctr">
+              <a:lnSpc>
+                <a:spcPct val="110000"/>
+              </a:lnSpc>
+              <a:spcAft>
+                <a:spcPts val="0"/>
+              </a:spcAft>
+            </a:pPr>
+            <a:r>
+              <a:rPr sz="2200" b="0">
+                <a:solidFill>
+                  <a:srgbClr val="B6C0CA"/>
+                </a:solidFill>
+                <a:latin typeface="Malgun Gothic"/>
+              </a:rPr>
+              <a:t>{{PREACHER}}</a:t>
+            </a:r>
+          </a:p>
+        </p:txBody>
+      </p:sp>
+    </p:spTree>
+  </p:cSld>
+  <p:clrMapOvr>
+    <a:masterClrMapping/>
+  </p:clrMapOvr>
+</p:sld>
+</file>
+
+<file path=ppt/slides/slide15.xml><?xml version="1.0" encoding="utf-8"?>
+<p:sld xmlns:a="http://schemas.openxmlformats.org/drawingml/2006/main" xmlns:p="http://schemas.openxmlformats.org/presentationml/2006/main" xmlns:r="http://schemas.openxmlformats.org/officeDocument/2006/relationships">
+  <p:cSld>
+    <p:bg>
+      <p:bgPr>
+        <a:solidFill>
+          <a:srgbClr val="0E1218"/>
+        </a:solidFill>
+        <a:effectLst/>
+      </p:bgPr>
+    </p:bg>
+    <p:spTree>
+      <p:nvGrpSpPr>
+        <p:cNvPr id="1" name=""/>
+        <p:cNvGrpSpPr/>
+        <p:nvPr/>
+      </p:nvGrpSpPr>
+      <p:grpSpPr/>
+      <p:sp>
+        <p:nvSpPr>
+          <p:cNvPr id="2" name="Rectangle 1"/>
+          <p:cNvSpPr/>
+          <p:nvPr/>
+        </p:nvSpPr>
+        <p:spPr>
+          <a:xfrm>
+            <a:off x="0" y="0"/>
+            <a:ext cx="12191695" cy="2148840"/>
+          </a:xfrm>
+          <a:prstGeom prst="rect">
+            <a:avLst/>
+          </a:prstGeom>
+          <a:solidFill>
+            <a:srgbClr val="181F2A"/>
+          </a:solidFill>
+          <a:ln>
+            <a:noFill/>
+          </a:ln>
+        </p:spPr>
+        <p:style>
+          <a:lnRef idx="1">
+            <a:schemeClr val="accent1"/>
+          </a:lnRef>
+          <a:fillRef idx="3">
+            <a:schemeClr val="accent1"/>
+          </a:fillRef>
+          <a:effectRef idx="2">
+            <a:schemeClr val="accent1"/>
+          </a:effectRef>
+          <a:fontRef idx="minor">
+            <a:schemeClr val="lt1"/>
+          </a:fontRef>
+        </p:style>
+        <p:txBody>
+          <a:bodyPr rtlCol="0" anchor="ctr"/>
+          <a:lstStyle/>
+          <a:p>
+            <a:pPr algn="ctr"/>
+          </a:p>
+        </p:txBody>
+      </p:sp>
+      <p:sp>
+        <p:nvSpPr>
+          <p:cNvPr id="3" name="Rectangle 2"/>
+          <p:cNvSpPr/>
+          <p:nvPr/>
+        </p:nvSpPr>
+        <p:spPr>
+          <a:xfrm>
+            <a:off x="0" y="1965960"/>
+            <a:ext cx="12191695" cy="2651760"/>
+          </a:xfrm>
+          <a:prstGeom prst="rect">
+            <a:avLst/>
+          </a:prstGeom>
+          <a:solidFill>
+            <a:srgbClr val="151C26"/>
+          </a:solidFill>
+          <a:ln>
+            <a:noFill/>
+          </a:ln>
+        </p:spPr>
+        <p:style>
+          <a:lnRef idx="1">
+            <a:schemeClr val="accent1"/>
+          </a:lnRef>
+          <a:fillRef idx="3">
+            <a:schemeClr val="accent1"/>
+          </a:fillRef>
+          <a:effectRef idx="2">
+            <a:schemeClr val="accent1"/>
+          </a:effectRef>
+          <a:fontRef idx="minor">
+            <a:schemeClr val="lt1"/>
+          </a:fontRef>
+        </p:style>
+        <p:txBody>
+          <a:bodyPr rtlCol="0" anchor="ctr"/>
+          <a:lstStyle/>
+          <a:p>
+            <a:pPr algn="ctr"/>
+          </a:p>
+        </p:txBody>
+      </p:sp>
+      <p:sp>
+        <p:nvSpPr>
+          <p:cNvPr id="4" name="Rectangle 3"/>
+          <p:cNvSpPr/>
+          <p:nvPr/>
+        </p:nvSpPr>
+        <p:spPr>
+          <a:xfrm>
+            <a:off x="0" y="5943600"/>
+            <a:ext cx="12191695" cy="914400"/>
+          </a:xfrm>
+          <a:prstGeom prst="rect">
+            <a:avLst/>
+          </a:prstGeom>
+          <a:solidFill>
+            <a:srgbClr val="0A0D12"/>
+          </a:solidFill>
+          <a:ln>
+            <a:noFill/>
+          </a:ln>
+        </p:spPr>
+        <p:style>
+          <a:lnRef idx="1">
+            <a:schemeClr val="accent1"/>
+          </a:lnRef>
+          <a:fillRef idx="3">
+            <a:schemeClr val="accent1"/>
+          </a:fillRef>
+          <a:effectRef idx="2">
+            <a:schemeClr val="accent1"/>
+          </a:effectRef>
+          <a:fontRef idx="minor">
+            <a:schemeClr val="lt1"/>
+          </a:fontRef>
+        </p:style>
+        <p:txBody>
+          <a:bodyPr rtlCol="0" anchor="ctr"/>
+          <a:lstStyle/>
+          <a:p>
+            <a:pPr algn="ctr"/>
+          </a:p>
+        </p:txBody>
+      </p:sp>
+      <p:sp>
+        <p:nvSpPr>
+          <p:cNvPr id="5" name="Rectangle 4"/>
+          <p:cNvSpPr/>
+          <p:nvPr/>
+        </p:nvSpPr>
+        <p:spPr>
+          <a:xfrm>
+            <a:off x="1371600" y="256032"/>
+            <a:ext cx="9418320" cy="6263640"/>
+          </a:xfrm>
+          <a:prstGeom prst="rect">
+            <a:avLst/>
+          </a:prstGeom>
+          <a:solidFill>
+            <a:srgbClr val="1A232E"/>
+          </a:solidFill>
+          <a:ln>
+            <a:noFill/>
+          </a:ln>
+        </p:spPr>
+        <p:style>
+          <a:lnRef idx="1">
+            <a:schemeClr val="accent1"/>
+          </a:lnRef>
+          <a:fillRef idx="3">
+            <a:schemeClr val="accent1"/>
+          </a:fillRef>
+          <a:effectRef idx="2">
+            <a:schemeClr val="accent1"/>
+          </a:effectRef>
+          <a:fontRef idx="minor">
+            <a:schemeClr val="lt1"/>
+          </a:fontRef>
+        </p:style>
+        <p:txBody>
+          <a:bodyPr rtlCol="0" anchor="ctr"/>
+          <a:lstStyle/>
+          <a:p>
+            <a:pPr algn="ctr"/>
+          </a:p>
+        </p:txBody>
+      </p:sp>
+      <p:sp>
+        <p:nvSpPr>
+          <p:cNvPr id="6" name="Rectangle 5"/>
+          <p:cNvSpPr/>
+          <p:nvPr/>
+        </p:nvSpPr>
+        <p:spPr>
+          <a:xfrm>
+            <a:off x="0" y="0"/>
+            <a:ext cx="128016" cy="6858000"/>
+          </a:xfrm>
+          <a:prstGeom prst="rect">
+            <a:avLst/>
+          </a:prstGeom>
+          <a:solidFill>
+            <a:srgbClr val="D8B87A"/>
+          </a:solidFill>
+          <a:ln>
+            <a:noFill/>
+          </a:ln>
+        </p:spPr>
+        <p:style>
+          <a:lnRef idx="1">
+            <a:schemeClr val="accent1"/>
+          </a:lnRef>
+          <a:fillRef idx="3">
+            <a:schemeClr val="accent1"/>
+          </a:fillRef>
+          <a:effectRef idx="2">
+            <a:schemeClr val="accent1"/>
+          </a:effectRef>
+          <a:fontRef idx="minor">
+            <a:schemeClr val="lt1"/>
+          </a:fontRef>
+        </p:style>
+        <p:txBody>
+          <a:bodyPr rtlCol="0" anchor="ctr"/>
+          <a:lstStyle/>
+          <a:p>
+            <a:pPr algn="ctr"/>
+          </a:p>
+        </p:txBody>
+      </p:sp>
+      <p:sp>
+        <p:nvSpPr>
+          <p:cNvPr id="7" name="Rectangle 6"/>
+          <p:cNvSpPr/>
+          <p:nvPr/>
+        </p:nvSpPr>
+        <p:spPr>
+          <a:xfrm>
+            <a:off x="128016" y="0"/>
+            <a:ext cx="82296" cy="6858000"/>
+          </a:xfrm>
+          <a:prstGeom prst="rect">
+            <a:avLst/>
+          </a:prstGeom>
+          <a:solidFill>
+            <a:srgbClr val="7E9E90"/>
+          </a:solidFill>
+          <a:ln>
+            <a:noFill/>
+          </a:ln>
+        </p:spPr>
+        <p:style>
+          <a:lnRef idx="1">
+            <a:schemeClr val="accent1"/>
+          </a:lnRef>
+          <a:fillRef idx="3">
+            <a:schemeClr val="accent1"/>
+          </a:fillRef>
+          <a:effectRef idx="2">
+            <a:schemeClr val="accent1"/>
+          </a:effectRef>
+          <a:fontRef idx="minor">
+            <a:schemeClr val="lt1"/>
+          </a:fontRef>
+        </p:style>
+        <p:txBody>
+          <a:bodyPr rtlCol="0" anchor="ctr"/>
+          <a:lstStyle/>
+          <a:p>
+            <a:pPr algn="ctr"/>
+          </a:p>
+        </p:txBody>
+      </p:sp>
+      <p:sp>
+        <p:nvSpPr>
+          <p:cNvPr id="8" name="Rectangle 7"/>
+          <p:cNvSpPr/>
+          <p:nvPr/>
+        </p:nvSpPr>
+        <p:spPr>
+          <a:xfrm>
+            <a:off x="11978640" y="0"/>
+            <a:ext cx="91440" cy="6858000"/>
+          </a:xfrm>
+          <a:prstGeom prst="rect">
+            <a:avLst/>
+          </a:prstGeom>
+          <a:solidFill>
+            <a:srgbClr val="C48A94"/>
+          </a:solidFill>
+          <a:ln>
+            <a:noFill/>
+          </a:ln>
+        </p:spPr>
+        <p:style>
+          <a:lnRef idx="1">
+            <a:schemeClr val="accent1"/>
+          </a:lnRef>
+          <a:fillRef idx="3">
+            <a:schemeClr val="accent1"/>
+          </a:fillRef>
+          <a:effectRef idx="2">
+            <a:schemeClr val="accent1"/>
+          </a:effectRef>
+          <a:fontRef idx="minor">
+            <a:schemeClr val="lt1"/>
+          </a:fontRef>
+        </p:style>
+        <p:txBody>
+          <a:bodyPr rtlCol="0" anchor="ctr"/>
+          <a:lstStyle/>
+          <a:p>
+            <a:pPr algn="ctr"/>
+          </a:p>
+        </p:txBody>
+      </p:sp>
+      <p:sp>
+        <p:nvSpPr>
+          <p:cNvPr id="9" name="Rectangle 8"/>
+          <p:cNvSpPr/>
+          <p:nvPr/>
+        </p:nvSpPr>
+        <p:spPr>
+          <a:xfrm>
+            <a:off x="12070080" y="0"/>
+            <a:ext cx="118872" cy="6858000"/>
+          </a:xfrm>
+          <a:prstGeom prst="rect">
+            <a:avLst/>
+          </a:prstGeom>
+          <a:solidFill>
+            <a:srgbClr val="8E5E6A"/>
+          </a:solidFill>
+          <a:ln>
+            <a:noFill/>
+          </a:ln>
+        </p:spPr>
+        <p:style>
+          <a:lnRef idx="1">
+            <a:schemeClr val="accent1"/>
+          </a:lnRef>
+          <a:fillRef idx="3">
+            <a:schemeClr val="accent1"/>
+          </a:fillRef>
+          <a:effectRef idx="2">
+            <a:schemeClr val="accent1"/>
+          </a:effectRef>
+          <a:fontRef idx="minor">
+            <a:schemeClr val="lt1"/>
+          </a:fontRef>
+        </p:style>
+        <p:txBody>
+          <a:bodyPr rtlCol="0" anchor="ctr"/>
+          <a:lstStyle/>
+          <a:p>
+            <a:pPr algn="ctr"/>
+          </a:p>
+        </p:txBody>
+      </p:sp>
+      <p:cxnSp>
+        <p:nvCxnSpPr>
+          <p:cNvPr id="10" name="Connector 9"/>
+          <p:cNvCxnSpPr/>
+          <p:nvPr/>
+        </p:nvCxnSpPr>
+        <p:spPr>
+          <a:xfrm>
+            <a:off x="1554480" y="292608"/>
+            <a:ext cx="9052560" cy="0"/>
+          </a:xfrm>
+          <a:prstGeom prst="line">
+            <a:avLst/>
+          </a:prstGeom>
+          <a:ln w="13970">
+            <a:solidFill>
+              <a:srgbClr val="D8B87A"/>
+            </a:solidFill>
+          </a:ln>
+        </p:spPr>
+        <p:style>
+          <a:lnRef idx="2">
+            <a:schemeClr val="accent1"/>
+          </a:lnRef>
+          <a:fillRef idx="0">
+            <a:schemeClr val="accent1"/>
+          </a:fillRef>
+          <a:effectRef idx="1">
+            <a:schemeClr val="accent1"/>
+          </a:effectRef>
+          <a:fontRef idx="minor">
+            <a:schemeClr val="tx1"/>
+          </a:fontRef>
+        </p:style>
+      </p:cxnSp>
+      <p:cxnSp>
+        <p:nvCxnSpPr>
+          <p:cNvPr id="11" name="Connector 10"/>
+          <p:cNvCxnSpPr/>
+          <p:nvPr/>
+        </p:nvCxnSpPr>
+        <p:spPr>
+          <a:xfrm>
+            <a:off x="1554480" y="6446520"/>
+            <a:ext cx="9052560" cy="0"/>
+          </a:xfrm>
+          <a:prstGeom prst="line">
+            <a:avLst/>
+          </a:prstGeom>
+          <a:ln w="13970">
+            <a:solidFill>
+              <a:srgbClr val="D8B87A"/>
+            </a:solidFill>
+          </a:ln>
+        </p:spPr>
+        <p:style>
+          <a:lnRef idx="2">
+            <a:schemeClr val="accent1"/>
+          </a:lnRef>
+          <a:fillRef idx="0">
+            <a:schemeClr val="accent1"/>
+          </a:fillRef>
+          <a:effectRef idx="1">
+            <a:schemeClr val="accent1"/>
+          </a:effectRef>
+          <a:fontRef idx="minor">
+            <a:schemeClr val="tx1"/>
+          </a:fontRef>
+        </p:style>
+      </p:cxnSp>
+      <p:sp>
+        <p:nvSpPr>
+          <p:cNvPr id="12" name="Rectangle 11"/>
+          <p:cNvSpPr/>
+          <p:nvPr/>
+        </p:nvSpPr>
+        <p:spPr>
+          <a:xfrm>
+            <a:off x="237744" y="6565392"/>
+            <a:ext cx="11951208" cy="292608"/>
+          </a:xfrm>
+          <a:prstGeom prst="rect">
+            <a:avLst/>
+          </a:prstGeom>
+          <a:solidFill>
+            <a:srgbClr val="0A0D12"/>
+          </a:solidFill>
+          <a:ln>
+            <a:noFill/>
+          </a:ln>
+        </p:spPr>
+        <p:style>
+          <a:lnRef idx="1">
+            <a:schemeClr val="accent1"/>
+          </a:lnRef>
+          <a:fillRef idx="3">
+            <a:schemeClr val="accent1"/>
+          </a:fillRef>
+          <a:effectRef idx="2">
+            <a:schemeClr val="accent1"/>
+          </a:effectRef>
+          <a:fontRef idx="minor">
+            <a:schemeClr val="lt1"/>
+          </a:fontRef>
+        </p:style>
+        <p:txBody>
+          <a:bodyPr rtlCol="0" anchor="ctr"/>
+          <a:lstStyle/>
+          <a:p>
+            <a:pPr algn="ctr"/>
+          </a:p>
+        </p:txBody>
+      </p:sp>
+      <p:sp>
+        <p:nvSpPr>
+          <p:cNvPr id="13" name="Oval 12"/>
+          <p:cNvSpPr/>
+          <p:nvPr/>
+        </p:nvSpPr>
+        <p:spPr>
+          <a:xfrm>
+            <a:off x="654939" y="5891251"/>
+            <a:ext cx="116586" cy="116586"/>
+          </a:xfrm>
+          <a:prstGeom prst="ellipse">
+            <a:avLst/>
+          </a:prstGeom>
+          <a:solidFill>
+            <a:srgbClr val="D6A4AC"/>
+          </a:solidFill>
+          <a:ln>
+            <a:noFill/>
+          </a:ln>
+        </p:spPr>
+        <p:style>
+          <a:lnRef idx="1">
+            <a:schemeClr val="accent1"/>
+          </a:lnRef>
+          <a:fillRef idx="3">
+            <a:schemeClr val="accent1"/>
+          </a:fillRef>
+          <a:effectRef idx="2">
+            <a:schemeClr val="accent1"/>
+          </a:effectRef>
+          <a:fontRef idx="minor">
+            <a:schemeClr val="lt1"/>
+          </a:fontRef>
+        </p:style>
+        <p:txBody>
+          <a:bodyPr rtlCol="0" anchor="ctr"/>
+          <a:lstStyle/>
+          <a:p>
+            <a:pPr algn="ctr"/>
+          </a:p>
+        </p:txBody>
+      </p:sp>
+      <p:sp>
+        <p:nvSpPr>
+          <p:cNvPr id="14" name="Oval 13"/>
+          <p:cNvSpPr/>
+          <p:nvPr/>
+        </p:nvSpPr>
+        <p:spPr>
+          <a:xfrm>
+            <a:off x="732663" y="5953430"/>
+            <a:ext cx="116586" cy="116586"/>
+          </a:xfrm>
+          <a:prstGeom prst="ellipse">
+            <a:avLst/>
+          </a:prstGeom>
+          <a:solidFill>
+            <a:srgbClr val="D6A4AC"/>
+          </a:solidFill>
+          <a:ln>
+            <a:noFill/>
+          </a:ln>
+        </p:spPr>
+        <p:style>
+          <a:lnRef idx="1">
+            <a:schemeClr val="accent1"/>
+          </a:lnRef>
+          <a:fillRef idx="3">
+            <a:schemeClr val="accent1"/>
+          </a:fillRef>
+          <a:effectRef idx="2">
+            <a:schemeClr val="accent1"/>
+          </a:effectRef>
+          <a:fontRef idx="minor">
+            <a:schemeClr val="lt1"/>
+          </a:fontRef>
+        </p:style>
+        <p:txBody>
+          <a:bodyPr rtlCol="0" anchor="ctr"/>
+          <a:lstStyle/>
+          <a:p>
+            <a:pPr algn="ctr"/>
+          </a:p>
+        </p:txBody>
+      </p:sp>
+      <p:sp>
+        <p:nvSpPr>
+          <p:cNvPr id="15" name="Oval 14"/>
+          <p:cNvSpPr/>
+          <p:nvPr/>
+        </p:nvSpPr>
+        <p:spPr>
+          <a:xfrm>
+            <a:off x="709345" y="6046698"/>
+            <a:ext cx="116586" cy="116586"/>
+          </a:xfrm>
+          <a:prstGeom prst="ellipse">
+            <a:avLst/>
+          </a:prstGeom>
+          <a:solidFill>
+            <a:srgbClr val="D6A4AC"/>
+          </a:solidFill>
+          <a:ln>
+            <a:noFill/>
+          </a:ln>
+        </p:spPr>
+        <p:style>
+          <a:lnRef idx="1">
+            <a:schemeClr val="accent1"/>
+          </a:lnRef>
+          <a:fillRef idx="3">
+            <a:schemeClr val="accent1"/>
+          </a:fillRef>
+          <a:effectRef idx="2">
+            <a:schemeClr val="accent1"/>
+          </a:effectRef>
+          <a:fontRef idx="minor">
+            <a:schemeClr val="lt1"/>
+          </a:fontRef>
+        </p:style>
+        <p:txBody>
+          <a:bodyPr rtlCol="0" anchor="ctr"/>
+          <a:lstStyle/>
+          <a:p>
+            <a:pPr algn="ctr"/>
+          </a:p>
+        </p:txBody>
+      </p:sp>
+      <p:sp>
+        <p:nvSpPr>
+          <p:cNvPr id="16" name="Oval 15"/>
+          <p:cNvSpPr/>
+          <p:nvPr/>
+        </p:nvSpPr>
+        <p:spPr>
+          <a:xfrm>
+            <a:off x="600533" y="6046698"/>
+            <a:ext cx="116586" cy="116586"/>
+          </a:xfrm>
+          <a:prstGeom prst="ellipse">
+            <a:avLst/>
+          </a:prstGeom>
+          <a:solidFill>
+            <a:srgbClr val="D6A4AC"/>
+          </a:solidFill>
+          <a:ln>
+            <a:noFill/>
+          </a:ln>
+        </p:spPr>
+        <p:style>
+          <a:lnRef idx="1">
+            <a:schemeClr val="accent1"/>
+          </a:lnRef>
+          <a:fillRef idx="3">
+            <a:schemeClr val="accent1"/>
+          </a:fillRef>
+          <a:effectRef idx="2">
+            <a:schemeClr val="accent1"/>
+          </a:effectRef>
+          <a:fontRef idx="minor">
+            <a:schemeClr val="lt1"/>
+          </a:fontRef>
+        </p:style>
+        <p:txBody>
+          <a:bodyPr rtlCol="0" anchor="ctr"/>
+          <a:lstStyle/>
+          <a:p>
+            <a:pPr algn="ctr"/>
+          </a:p>
+        </p:txBody>
+      </p:sp>
+      <p:sp>
+        <p:nvSpPr>
+          <p:cNvPr id="17" name="Oval 16"/>
+          <p:cNvSpPr/>
+          <p:nvPr/>
+        </p:nvSpPr>
+        <p:spPr>
+          <a:xfrm>
+            <a:off x="577215" y="5953430"/>
+            <a:ext cx="116586" cy="116586"/>
+          </a:xfrm>
+          <a:prstGeom prst="ellipse">
+            <a:avLst/>
+          </a:prstGeom>
+          <a:solidFill>
+            <a:srgbClr val="D6A4AC"/>
+          </a:solidFill>
+          <a:ln>
+            <a:noFill/>
+          </a:ln>
+        </p:spPr>
+        <p:style>
+          <a:lnRef idx="1">
+            <a:schemeClr val="accent1"/>
+          </a:lnRef>
+          <a:fillRef idx="3">
+            <a:schemeClr val="accent1"/>
+          </a:fillRef>
+          <a:effectRef idx="2">
+            <a:schemeClr val="accent1"/>
+          </a:effectRef>
+          <a:fontRef idx="minor">
+            <a:schemeClr val="lt1"/>
+          </a:fontRef>
+        </p:style>
+        <p:txBody>
+          <a:bodyPr rtlCol="0" anchor="ctr"/>
+          <a:lstStyle/>
+          <a:p>
+            <a:pPr algn="ctr"/>
+          </a:p>
+        </p:txBody>
+      </p:sp>
+      <p:sp>
+        <p:nvSpPr>
+          <p:cNvPr id="18" name="Oval 17"/>
+          <p:cNvSpPr/>
+          <p:nvPr/>
+        </p:nvSpPr>
+        <p:spPr>
+          <a:xfrm>
+            <a:off x="670484" y="5992292"/>
+            <a:ext cx="85496" cy="85496"/>
+          </a:xfrm>
+          <a:prstGeom prst="ellipse">
+            <a:avLst/>
+          </a:prstGeom>
+          <a:solidFill>
+            <a:srgbClr val="C48A94"/>
+          </a:solidFill>
+          <a:ln>
+            <a:noFill/>
+          </a:ln>
+        </p:spPr>
+        <p:style>
+          <a:lnRef idx="1">
+            <a:schemeClr val="accent1"/>
+          </a:lnRef>
+          <a:fillRef idx="3">
+            <a:schemeClr val="accent1"/>
+          </a:fillRef>
+          <a:effectRef idx="2">
+            <a:schemeClr val="accent1"/>
+          </a:effectRef>
+          <a:fontRef idx="minor">
+            <a:schemeClr val="lt1"/>
+          </a:fontRef>
+        </p:style>
+        <p:txBody>
+          <a:bodyPr rtlCol="0" anchor="ctr"/>
+          <a:lstStyle/>
+          <a:p>
+            <a:pPr algn="ctr"/>
+          </a:p>
+        </p:txBody>
+      </p:sp>
+      <p:sp>
+        <p:nvSpPr>
+          <p:cNvPr id="19" name="Oval 18"/>
+          <p:cNvSpPr/>
+          <p:nvPr/>
+        </p:nvSpPr>
+        <p:spPr>
+          <a:xfrm>
+            <a:off x="798728" y="6073902"/>
+            <a:ext cx="108813" cy="54406"/>
+          </a:xfrm>
+          <a:prstGeom prst="ellipse">
+            <a:avLst/>
+          </a:prstGeom>
+          <a:solidFill>
+            <a:srgbClr val="7E9E90"/>
+          </a:solidFill>
+          <a:ln>
+            <a:noFill/>
+          </a:ln>
+        </p:spPr>
+        <p:style>
+          <a:lnRef idx="1">
+            <a:schemeClr val="accent1"/>
+          </a:lnRef>
+          <a:fillRef idx="3">
+            <a:schemeClr val="accent1"/>
+          </a:fillRef>
+          <a:effectRef idx="2">
+            <a:schemeClr val="accent1"/>
+          </a:effectRef>
+          <a:fontRef idx="minor">
+            <a:schemeClr val="lt1"/>
+          </a:fontRef>
+        </p:style>
+        <p:txBody>
+          <a:bodyPr rtlCol="0" anchor="ctr"/>
+          <a:lstStyle/>
+          <a:p>
+            <a:pPr algn="ctr"/>
+          </a:p>
+        </p:txBody>
+      </p:sp>
+      <p:sp>
+        <p:nvSpPr>
+          <p:cNvPr id="20" name="Oval 19"/>
+          <p:cNvSpPr/>
+          <p:nvPr/>
+        </p:nvSpPr>
+        <p:spPr>
+          <a:xfrm>
+            <a:off x="11389995" y="5891251"/>
+            <a:ext cx="116586" cy="116586"/>
+          </a:xfrm>
+          <a:prstGeom prst="ellipse">
+            <a:avLst/>
+          </a:prstGeom>
+          <a:solidFill>
+            <a:srgbClr val="D6A4AC"/>
+          </a:solidFill>
+          <a:ln>
+            <a:noFill/>
+          </a:ln>
+        </p:spPr>
+        <p:style>
+          <a:lnRef idx="1">
+            <a:schemeClr val="accent1"/>
+          </a:lnRef>
+          <a:fillRef idx="3">
+            <a:schemeClr val="accent1"/>
+          </a:fillRef>
+          <a:effectRef idx="2">
+            <a:schemeClr val="accent1"/>
+          </a:effectRef>
+          <a:fontRef idx="minor">
+            <a:schemeClr val="lt1"/>
+          </a:fontRef>
+        </p:style>
+        <p:txBody>
+          <a:bodyPr rtlCol="0" anchor="ctr"/>
+          <a:lstStyle/>
+          <a:p>
+            <a:pPr algn="ctr"/>
+          </a:p>
+        </p:txBody>
+      </p:sp>
+      <p:sp>
+        <p:nvSpPr>
+          <p:cNvPr id="21" name="Oval 20"/>
+          <p:cNvSpPr/>
+          <p:nvPr/>
+        </p:nvSpPr>
+        <p:spPr>
+          <a:xfrm>
+            <a:off x="11467719" y="5953430"/>
+            <a:ext cx="116586" cy="116586"/>
+          </a:xfrm>
+          <a:prstGeom prst="ellipse">
+            <a:avLst/>
+          </a:prstGeom>
+          <a:solidFill>
+            <a:srgbClr val="D6A4AC"/>
+          </a:solidFill>
+          <a:ln>
+            <a:noFill/>
+          </a:ln>
+        </p:spPr>
+        <p:style>
+          <a:lnRef idx="1">
+            <a:schemeClr val="accent1"/>
+          </a:lnRef>
+          <a:fillRef idx="3">
+            <a:schemeClr val="accent1"/>
+          </a:fillRef>
+          <a:effectRef idx="2">
+            <a:schemeClr val="accent1"/>
+          </a:effectRef>
+          <a:fontRef idx="minor">
+            <a:schemeClr val="lt1"/>
+          </a:fontRef>
+        </p:style>
+        <p:txBody>
+          <a:bodyPr rtlCol="0" anchor="ctr"/>
+          <a:lstStyle/>
+          <a:p>
+            <a:pPr algn="ctr"/>
+          </a:p>
+        </p:txBody>
+      </p:sp>
+      <p:sp>
+        <p:nvSpPr>
+          <p:cNvPr id="22" name="Oval 21"/>
+          <p:cNvSpPr/>
+          <p:nvPr/>
+        </p:nvSpPr>
+        <p:spPr>
+          <a:xfrm>
+            <a:off x="11444401" y="6046698"/>
+            <a:ext cx="116586" cy="116586"/>
+          </a:xfrm>
+          <a:prstGeom prst="ellipse">
+            <a:avLst/>
+          </a:prstGeom>
+          <a:solidFill>
+            <a:srgbClr val="D6A4AC"/>
+          </a:solidFill>
+          <a:ln>
+            <a:noFill/>
+          </a:ln>
+        </p:spPr>
+        <p:style>
+          <a:lnRef idx="1">
+            <a:schemeClr val="accent1"/>
+          </a:lnRef>
+          <a:fillRef idx="3">
+            <a:schemeClr val="accent1"/>
+          </a:fillRef>
+          <a:effectRef idx="2">
+            <a:schemeClr val="accent1"/>
+          </a:effectRef>
+          <a:fontRef idx="minor">
+            <a:schemeClr val="lt1"/>
+          </a:fontRef>
+        </p:style>
+        <p:txBody>
+          <a:bodyPr rtlCol="0" anchor="ctr"/>
+          <a:lstStyle/>
+          <a:p>
+            <a:pPr algn="ctr"/>
+          </a:p>
+        </p:txBody>
+      </p:sp>
+      <p:sp>
+        <p:nvSpPr>
+          <p:cNvPr id="23" name="Oval 22"/>
+          <p:cNvSpPr/>
+          <p:nvPr/>
+        </p:nvSpPr>
+        <p:spPr>
+          <a:xfrm>
+            <a:off x="11335589" y="6046698"/>
+            <a:ext cx="116586" cy="116586"/>
+          </a:xfrm>
+          <a:prstGeom prst="ellipse">
+            <a:avLst/>
+          </a:prstGeom>
+          <a:solidFill>
+            <a:srgbClr val="D6A4AC"/>
+          </a:solidFill>
+          <a:ln>
+            <a:noFill/>
+          </a:ln>
+        </p:spPr>
+        <p:style>
+          <a:lnRef idx="1">
+            <a:schemeClr val="accent1"/>
+          </a:lnRef>
+          <a:fillRef idx="3">
+            <a:schemeClr val="accent1"/>
+          </a:fillRef>
+          <a:effectRef idx="2">
+            <a:schemeClr val="accent1"/>
+          </a:effectRef>
+          <a:fontRef idx="minor">
+            <a:schemeClr val="lt1"/>
+          </a:fontRef>
+        </p:style>
+        <p:txBody>
+          <a:bodyPr rtlCol="0" anchor="ctr"/>
+          <a:lstStyle/>
+          <a:p>
+            <a:pPr algn="ctr"/>
+          </a:p>
+        </p:txBody>
+      </p:sp>
+      <p:sp>
+        <p:nvSpPr>
+          <p:cNvPr id="24" name="Oval 23"/>
+          <p:cNvSpPr/>
+          <p:nvPr/>
+        </p:nvSpPr>
+        <p:spPr>
+          <a:xfrm>
+            <a:off x="11312271" y="5953430"/>
+            <a:ext cx="116586" cy="116586"/>
+          </a:xfrm>
+          <a:prstGeom prst="ellipse">
+            <a:avLst/>
+          </a:prstGeom>
+          <a:solidFill>
+            <a:srgbClr val="D6A4AC"/>
+          </a:solidFill>
+          <a:ln>
+            <a:noFill/>
+          </a:ln>
+        </p:spPr>
+        <p:style>
+          <a:lnRef idx="1">
+            <a:schemeClr val="accent1"/>
+          </a:lnRef>
+          <a:fillRef idx="3">
+            <a:schemeClr val="accent1"/>
+          </a:fillRef>
+          <a:effectRef idx="2">
+            <a:schemeClr val="accent1"/>
+          </a:effectRef>
+          <a:fontRef idx="minor">
+            <a:schemeClr val="lt1"/>
+          </a:fontRef>
+        </p:style>
+        <p:txBody>
+          <a:bodyPr rtlCol="0" anchor="ctr"/>
+          <a:lstStyle/>
+          <a:p>
+            <a:pPr algn="ctr"/>
+          </a:p>
+        </p:txBody>
+      </p:sp>
+      <p:sp>
+        <p:nvSpPr>
+          <p:cNvPr id="25" name="Oval 24"/>
+          <p:cNvSpPr/>
+          <p:nvPr/>
+        </p:nvSpPr>
+        <p:spPr>
+          <a:xfrm>
+            <a:off x="11405540" y="5992292"/>
+            <a:ext cx="85496" cy="85496"/>
+          </a:xfrm>
+          <a:prstGeom prst="ellipse">
+            <a:avLst/>
+          </a:prstGeom>
+          <a:solidFill>
+            <a:srgbClr val="C48A94"/>
+          </a:solidFill>
+          <a:ln>
+            <a:noFill/>
+          </a:ln>
+        </p:spPr>
+        <p:style>
+          <a:lnRef idx="1">
+            <a:schemeClr val="accent1"/>
+          </a:lnRef>
+          <a:fillRef idx="3">
+            <a:schemeClr val="accent1"/>
+          </a:fillRef>
+          <a:effectRef idx="2">
+            <a:schemeClr val="accent1"/>
+          </a:effectRef>
+          <a:fontRef idx="minor">
+            <a:schemeClr val="lt1"/>
+          </a:fontRef>
+        </p:style>
+        <p:txBody>
+          <a:bodyPr rtlCol="0" anchor="ctr"/>
+          <a:lstStyle/>
+          <a:p>
+            <a:pPr algn="ctr"/>
+          </a:p>
+        </p:txBody>
+      </p:sp>
+      <p:sp>
+        <p:nvSpPr>
+          <p:cNvPr id="26" name="Oval 25"/>
+          <p:cNvSpPr/>
+          <p:nvPr/>
+        </p:nvSpPr>
+        <p:spPr>
+          <a:xfrm>
+            <a:off x="11533784" y="6073902"/>
+            <a:ext cx="108813" cy="54406"/>
+          </a:xfrm>
+          <a:prstGeom prst="ellipse">
+            <a:avLst/>
+          </a:prstGeom>
+          <a:solidFill>
+            <a:srgbClr val="7E9E90"/>
+          </a:solidFill>
+          <a:ln>
+            <a:noFill/>
+          </a:ln>
+        </p:spPr>
+        <p:style>
+          <a:lnRef idx="1">
+            <a:schemeClr val="accent1"/>
+          </a:lnRef>
+          <a:fillRef idx="3">
+            <a:schemeClr val="accent1"/>
+          </a:fillRef>
+          <a:effectRef idx="2">
+            <a:schemeClr val="accent1"/>
+          </a:effectRef>
+          <a:fontRef idx="minor">
+            <a:schemeClr val="lt1"/>
+          </a:fontRef>
+        </p:style>
+        <p:txBody>
+          <a:bodyPr rtlCol="0" anchor="ctr"/>
+          <a:lstStyle/>
+          <a:p>
+            <a:pPr algn="ctr"/>
+          </a:p>
+        </p:txBody>
+      </p:sp>
+      <p:cxnSp>
+        <p:nvCxnSpPr>
+          <p:cNvPr id="27" name="Connector 26"/>
+          <p:cNvCxnSpPr/>
+          <p:nvPr/>
+        </p:nvCxnSpPr>
+        <p:spPr>
+          <a:xfrm>
+            <a:off x="1600200" y="365760"/>
+            <a:ext cx="274320" cy="0"/>
+          </a:xfrm>
+          <a:prstGeom prst="line">
+            <a:avLst/>
+          </a:prstGeom>
+          <a:ln w="14604">
+            <a:solidFill>
+              <a:srgbClr val="D8B87A"/>
+            </a:solidFill>
+          </a:ln>
+        </p:spPr>
+        <p:style>
+          <a:lnRef idx="2">
+            <a:schemeClr val="accent1"/>
+          </a:lnRef>
+          <a:fillRef idx="0">
+            <a:schemeClr val="accent1"/>
+          </a:fillRef>
+          <a:effectRef idx="1">
+            <a:schemeClr val="accent1"/>
+          </a:effectRef>
+          <a:fontRef idx="minor">
+            <a:schemeClr val="tx1"/>
+          </a:fontRef>
+        </p:style>
+      </p:cxnSp>
+      <p:cxnSp>
+        <p:nvCxnSpPr>
+          <p:cNvPr id="28" name="Connector 27"/>
+          <p:cNvCxnSpPr/>
+          <p:nvPr/>
+        </p:nvCxnSpPr>
+        <p:spPr>
+          <a:xfrm>
+            <a:off x="1600200" y="365760"/>
+            <a:ext cx="0" cy="274320"/>
+          </a:xfrm>
+          <a:prstGeom prst="line">
+            <a:avLst/>
+          </a:prstGeom>
+          <a:ln w="14604">
+            <a:solidFill>
+              <a:srgbClr val="D8B87A"/>
+            </a:solidFill>
+          </a:ln>
+        </p:spPr>
+        <p:style>
+          <a:lnRef idx="2">
+            <a:schemeClr val="accent1"/>
+          </a:lnRef>
+          <a:fillRef idx="0">
+            <a:schemeClr val="accent1"/>
+          </a:fillRef>
+          <a:effectRef idx="1">
+            <a:schemeClr val="accent1"/>
+          </a:effectRef>
+          <a:fontRef idx="minor">
+            <a:schemeClr val="tx1"/>
+          </a:fontRef>
+        </p:style>
+      </p:cxnSp>
+      <p:cxnSp>
+        <p:nvCxnSpPr>
+          <p:cNvPr id="29" name="Connector 28"/>
+          <p:cNvCxnSpPr/>
+          <p:nvPr/>
+        </p:nvCxnSpPr>
+        <p:spPr>
+          <a:xfrm>
+            <a:off x="10287000" y="365760"/>
+            <a:ext cx="274320" cy="0"/>
+          </a:xfrm>
+          <a:prstGeom prst="line">
+            <a:avLst/>
+          </a:prstGeom>
+          <a:ln w="14604">
+            <a:solidFill>
+              <a:srgbClr val="D8B87A"/>
+            </a:solidFill>
+          </a:ln>
+        </p:spPr>
+        <p:style>
+          <a:lnRef idx="2">
+            <a:schemeClr val="accent1"/>
+          </a:lnRef>
+          <a:fillRef idx="0">
+            <a:schemeClr val="accent1"/>
+          </a:fillRef>
+          <a:effectRef idx="1">
+            <a:schemeClr val="accent1"/>
+          </a:effectRef>
+          <a:fontRef idx="minor">
+            <a:schemeClr val="tx1"/>
+          </a:fontRef>
+        </p:style>
+      </p:cxnSp>
+      <p:cxnSp>
+        <p:nvCxnSpPr>
+          <p:cNvPr id="30" name="Connector 29"/>
+          <p:cNvCxnSpPr/>
+          <p:nvPr/>
+        </p:nvCxnSpPr>
+        <p:spPr>
+          <a:xfrm>
+            <a:off x="10561320" y="365760"/>
+            <a:ext cx="0" cy="274320"/>
+          </a:xfrm>
+          <a:prstGeom prst="line">
+            <a:avLst/>
+          </a:prstGeom>
+          <a:ln w="14604">
+            <a:solidFill>
+              <a:srgbClr val="D8B87A"/>
+            </a:solidFill>
+          </a:ln>
+        </p:spPr>
+        <p:style>
+          <a:lnRef idx="2">
+            <a:schemeClr val="accent1"/>
+          </a:lnRef>
+          <a:fillRef idx="0">
+            <a:schemeClr val="accent1"/>
+          </a:fillRef>
+          <a:effectRef idx="1">
+            <a:schemeClr val="accent1"/>
+          </a:effectRef>
+          <a:fontRef idx="minor">
+            <a:schemeClr val="tx1"/>
+          </a:fontRef>
+        </p:style>
+      </p:cxnSp>
+      <p:sp>
+        <p:nvSpPr>
+          <p:cNvPr id="31" name="Diamond 30"/>
+          <p:cNvSpPr/>
+          <p:nvPr/>
+        </p:nvSpPr>
+        <p:spPr>
+          <a:xfrm>
+            <a:off x="1193292" y="3296412"/>
+            <a:ext cx="82296" cy="82296"/>
+          </a:xfrm>
+          <a:prstGeom prst="diamond">
+            <a:avLst/>
+          </a:prstGeom>
+          <a:solidFill>
+            <a:srgbClr val="D8B87A"/>
+          </a:solidFill>
+          <a:ln>
+            <a:noFill/>
+          </a:ln>
+        </p:spPr>
+        <p:style>
+          <a:lnRef idx="1">
+            <a:schemeClr val="accent1"/>
+          </a:lnRef>
+          <a:fillRef idx="3">
+            <a:schemeClr val="accent1"/>
+          </a:fillRef>
+          <a:effectRef idx="2">
+            <a:schemeClr val="accent1"/>
+          </a:effectRef>
+          <a:fontRef idx="minor">
+            <a:schemeClr val="lt1"/>
+          </a:fontRef>
+        </p:style>
+        <p:txBody>
+          <a:bodyPr rtlCol="0" anchor="ctr"/>
+          <a:lstStyle/>
+          <a:p>
+            <a:pPr algn="ctr"/>
+          </a:p>
+        </p:txBody>
+      </p:sp>
+      <p:sp>
+        <p:nvSpPr>
+          <p:cNvPr id="32" name="Diamond 31"/>
+          <p:cNvSpPr/>
+          <p:nvPr/>
+        </p:nvSpPr>
+        <p:spPr>
+          <a:xfrm>
+            <a:off x="10885932" y="3296412"/>
+            <a:ext cx="82296" cy="82296"/>
+          </a:xfrm>
+          <a:prstGeom prst="diamond">
+            <a:avLst/>
+          </a:prstGeom>
+          <a:solidFill>
+            <a:srgbClr val="D8B87A"/>
+          </a:solidFill>
+          <a:ln>
+            <a:noFill/>
+          </a:ln>
+        </p:spPr>
+        <p:style>
+          <a:lnRef idx="1">
+            <a:schemeClr val="accent1"/>
+          </a:lnRef>
+          <a:fillRef idx="3">
+            <a:schemeClr val="accent1"/>
+          </a:fillRef>
+          <a:effectRef idx="2">
+            <a:schemeClr val="accent1"/>
+          </a:effectRef>
+          <a:fontRef idx="minor">
+            <a:schemeClr val="lt1"/>
+          </a:fontRef>
+        </p:style>
+        <p:txBody>
+          <a:bodyPr rtlCol="0" anchor="ctr"/>
+          <a:lstStyle/>
+          <a:p>
+            <a:pPr algn="ctr"/>
+          </a:p>
+        </p:txBody>
+      </p:sp>
+      <p:cxnSp>
+        <p:nvCxnSpPr>
+          <p:cNvPr id="33" name="Connector 32"/>
+          <p:cNvCxnSpPr/>
+          <p:nvPr/>
+        </p:nvCxnSpPr>
+        <p:spPr>
+          <a:xfrm>
+            <a:off x="4983480.0" y="1627632"/>
+            <a:ext cx="822960.0" cy="0"/>
+          </a:xfrm>
+          <a:prstGeom prst="line">
+            <a:avLst/>
+          </a:prstGeom>
+          <a:ln w="15240">
+            <a:solidFill>
+              <a:srgbClr val="D8B87A"/>
+            </a:solidFill>
+          </a:ln>
+        </p:spPr>
+        <p:style>
+          <a:lnRef idx="2">
+            <a:schemeClr val="accent1"/>
+          </a:lnRef>
+          <a:fillRef idx="0">
+            <a:schemeClr val="accent1"/>
+          </a:fillRef>
+          <a:effectRef idx="1">
+            <a:schemeClr val="accent1"/>
+          </a:effectRef>
+          <a:fontRef idx="minor">
+            <a:schemeClr val="tx1"/>
+          </a:fontRef>
+        </p:style>
+      </p:cxnSp>
+      <p:cxnSp>
+        <p:nvCxnSpPr>
+          <p:cNvPr id="34" name="Connector 33"/>
+          <p:cNvCxnSpPr/>
+          <p:nvPr/>
+        </p:nvCxnSpPr>
+        <p:spPr>
+          <a:xfrm>
+            <a:off x="6355080.0" y="1627632"/>
+            <a:ext cx="822960.0" cy="0"/>
+          </a:xfrm>
+          <a:prstGeom prst="line">
+            <a:avLst/>
+          </a:prstGeom>
+          <a:ln w="15240">
+            <a:solidFill>
+              <a:srgbClr val="D8B87A"/>
+            </a:solidFill>
+          </a:ln>
+        </p:spPr>
+        <p:style>
+          <a:lnRef idx="2">
+            <a:schemeClr val="accent1"/>
+          </a:lnRef>
+          <a:fillRef idx="0">
+            <a:schemeClr val="accent1"/>
+          </a:fillRef>
+          <a:effectRef idx="1">
+            <a:schemeClr val="accent1"/>
+          </a:effectRef>
+          <a:fontRef idx="minor">
+            <a:schemeClr val="tx1"/>
+          </a:fontRef>
+        </p:style>
+      </p:cxnSp>
+      <p:sp>
+        <p:nvSpPr>
+          <p:cNvPr id="35" name="Diamond 34"/>
+          <p:cNvSpPr/>
+          <p:nvPr/>
+        </p:nvSpPr>
+        <p:spPr>
+          <a:xfrm>
+            <a:off x="4800600" y="1581912"/>
+            <a:ext cx="91440" cy="91440"/>
+          </a:xfrm>
+          <a:prstGeom prst="diamond">
+            <a:avLst/>
+          </a:prstGeom>
+          <a:solidFill>
+            <a:srgbClr val="D8B87A"/>
+          </a:solidFill>
+          <a:ln>
+            <a:noFill/>
+          </a:ln>
+        </p:spPr>
+        <p:style>
+          <a:lnRef idx="1">
+            <a:schemeClr val="accent1"/>
+          </a:lnRef>
+          <a:fillRef idx="3">
+            <a:schemeClr val="accent1"/>
+          </a:fillRef>
+          <a:effectRef idx="2">
+            <a:schemeClr val="accent1"/>
+          </a:effectRef>
+          <a:fontRef idx="minor">
+            <a:schemeClr val="lt1"/>
+          </a:fontRef>
+        </p:style>
+        <p:txBody>
+          <a:bodyPr rtlCol="0" anchor="ctr"/>
+          <a:lstStyle/>
+          <a:p>
+            <a:pPr algn="ctr"/>
+          </a:p>
+        </p:txBody>
+      </p:sp>
+      <p:sp>
+        <p:nvSpPr>
+          <p:cNvPr id="36" name="Diamond 35"/>
+          <p:cNvSpPr/>
+          <p:nvPr/>
+        </p:nvSpPr>
+        <p:spPr>
+          <a:xfrm>
+            <a:off x="7269480" y="1581912"/>
+            <a:ext cx="91440" cy="91440"/>
+          </a:xfrm>
+          <a:prstGeom prst="diamond">
+            <a:avLst/>
+          </a:prstGeom>
+          <a:solidFill>
+            <a:srgbClr val="D8B87A"/>
+          </a:solidFill>
+          <a:ln>
+            <a:noFill/>
+          </a:ln>
+        </p:spPr>
+        <p:style>
+          <a:lnRef idx="1">
+            <a:schemeClr val="accent1"/>
+          </a:lnRef>
+          <a:fillRef idx="3">
+            <a:schemeClr val="accent1"/>
+          </a:fillRef>
+          <a:effectRef idx="2">
+            <a:schemeClr val="accent1"/>
+          </a:effectRef>
+          <a:fontRef idx="minor">
+            <a:schemeClr val="lt1"/>
+          </a:fontRef>
+        </p:style>
+        <p:txBody>
+          <a:bodyPr rtlCol="0" anchor="ctr"/>
+          <a:lstStyle/>
+          <a:p>
+            <a:pPr algn="ctr"/>
+          </a:p>
+        </p:txBody>
+      </p:sp>
+      <p:sp>
+        <p:nvSpPr>
+          <p:cNvPr id="37" name="TextBox 36"/>
+          <p:cNvSpPr txBox="1"/>
+          <p:nvPr/>
+        </p:nvSpPr>
+        <p:spPr>
+          <a:xfrm>
+            <a:off x="1691640" y="384048"/>
+            <a:ext cx="8778240" cy="292608"/>
+          </a:xfrm>
+          <a:prstGeom prst="rect">
+            <a:avLst/>
+          </a:prstGeom>
+          <a:noFill/>
+        </p:spPr>
+        <p:txBody>
+          <a:bodyPr wrap="square" anchor="ctr" lIns="18288" rIns="73152" tIns="18288" bIns="18288"/>
+          <a:lstStyle/>
+          <a:p>
+            <a:pPr algn="ctr">
+              <a:lnSpc>
+                <a:spcPct val="100000"/>
+              </a:lnSpc>
+              <a:spcAft>
+                <a:spcPts val="0"/>
+              </a:spcAft>
+            </a:pPr>
+            <a:r>
+              <a:rPr sz="1600" b="0">
+                <a:solidFill>
+                  <a:srgbClr val="D8B87A"/>
+                </a:solidFill>
+                <a:latin typeface="Malgun Gothic"/>
+              </a:rPr>
+              <a:t>9. 감사와 봉헌</a:t>
+            </a:r>
+          </a:p>
+        </p:txBody>
+      </p:sp>
+      <p:cxnSp>
+        <p:nvCxnSpPr>
+          <p:cNvPr id="38" name="Connector 37"/>
+          <p:cNvCxnSpPr/>
+          <p:nvPr/>
+        </p:nvCxnSpPr>
+        <p:spPr>
+          <a:xfrm>
+            <a:off x="5257800.0" y="749808"/>
+            <a:ext cx="1645920.0" cy="0"/>
+          </a:xfrm>
+          <a:prstGeom prst="line">
+            <a:avLst/>
+          </a:prstGeom>
+          <a:ln w="17145">
+            <a:solidFill>
+              <a:srgbClr val="D8B87A"/>
+            </a:solidFill>
+          </a:ln>
+        </p:spPr>
+        <p:style>
+          <a:lnRef idx="2">
+            <a:schemeClr val="accent1"/>
+          </a:lnRef>
+          <a:fillRef idx="0">
+            <a:schemeClr val="accent1"/>
+          </a:fillRef>
+          <a:effectRef idx="1">
+            <a:schemeClr val="accent1"/>
+          </a:effectRef>
+          <a:fontRef idx="minor">
+            <a:schemeClr val="tx1"/>
+          </a:fontRef>
+        </p:style>
+      </p:cxnSp>
+      <p:sp>
+        <p:nvSpPr>
+          <p:cNvPr id="39" name="HYMN_3"/>
+          <p:cNvSpPr txBox="1"/>
+          <p:nvPr/>
+        </p:nvSpPr>
+        <p:spPr>
+          <a:xfrm>
+            <a:off x="1691640" y="2331720"/>
+            <a:ext cx="8778240" cy="1554480"/>
+          </a:xfrm>
+          <a:prstGeom prst="rect">
+            <a:avLst/>
+          </a:prstGeom>
+          <a:noFill/>
+        </p:spPr>
+        <p:txBody>
+          <a:bodyPr wrap="square" anchor="ctr" lIns="18288" rIns="73152" tIns="18288" bIns="18288"/>
+          <a:lstStyle/>
+          <a:p>
+            <a:pPr algn="ctr">
+              <a:lnSpc>
+                <a:spcPct val="115000"/>
+              </a:lnSpc>
+              <a:spcAft>
+                <a:spcPts val="0"/>
+              </a:spcAft>
+            </a:pPr>
+            <a:r>
+              <a:rPr sz="4400" b="1">
+                <a:solidFill>
+                  <a:srgbClr val="FFF8F0"/>
+                </a:solidFill>
+                <a:latin typeface="Malgun Gothic"/>
+              </a:rPr>
+              <a:t>{{HYMN_3}}</a:t>
+            </a:r>
+          </a:p>
+        </p:txBody>
+      </p:sp>
+      <p:cxnSp>
+        <p:nvCxnSpPr>
+          <p:cNvPr id="40" name="Connector 39"/>
+          <p:cNvCxnSpPr/>
+          <p:nvPr/>
+        </p:nvCxnSpPr>
+        <p:spPr>
+          <a:xfrm>
+            <a:off x="5394960.0" y="4160520"/>
+            <a:ext cx="1371600.0" cy="0"/>
+          </a:xfrm>
+          <a:prstGeom prst="line">
+            <a:avLst/>
+          </a:prstGeom>
+          <a:ln w="15240">
+            <a:solidFill>
+              <a:srgbClr val="D8B87A"/>
+            </a:solidFill>
+          </a:ln>
+        </p:spPr>
+        <p:style>
+          <a:lnRef idx="2">
+            <a:schemeClr val="accent1"/>
+          </a:lnRef>
+          <a:fillRef idx="0">
+            <a:schemeClr val="accent1"/>
+          </a:fillRef>
+          <a:effectRef idx="1">
+            <a:schemeClr val="accent1"/>
+          </a:effectRef>
+          <a:fontRef idx="minor">
+            <a:schemeClr val="tx1"/>
+          </a:fontRef>
+        </p:style>
+      </p:cxnSp>
+    </p:spTree>
+  </p:cSld>
+  <p:clrMapOvr>
+    <a:masterClrMapping/>
+  </p:clrMapOvr>
+</p:sld>
+</file>
+
+<file path=ppt/slides/slide16.xml><?xml version="1.0" encoding="utf-8"?>
+<p:sld xmlns:a="http://schemas.openxmlformats.org/drawingml/2006/main" xmlns:p="http://schemas.openxmlformats.org/presentationml/2006/main" xmlns:r="http://schemas.openxmlformats.org/officeDocument/2006/relationships">
+  <p:cSld>
+    <p:bg>
+      <p:bgPr>
+        <a:solidFill>
+          <a:srgbClr val="0E1218"/>
+        </a:solidFill>
+        <a:effectLst/>
+      </p:bgPr>
+    </p:bg>
+    <p:spTree>
+      <p:nvGrpSpPr>
+        <p:cNvPr id="1" name=""/>
+        <p:cNvGrpSpPr/>
+        <p:nvPr/>
+      </p:nvGrpSpPr>
+      <p:grpSpPr/>
+      <p:sp>
+        <p:nvSpPr>
+          <p:cNvPr id="2" name="Rectangle 1"/>
+          <p:cNvSpPr/>
+          <p:nvPr/>
+        </p:nvSpPr>
+        <p:spPr>
+          <a:xfrm>
+            <a:off x="0" y="0"/>
+            <a:ext cx="12191695" cy="2148840"/>
+          </a:xfrm>
+          <a:prstGeom prst="rect">
+            <a:avLst/>
+          </a:prstGeom>
+          <a:solidFill>
+            <a:srgbClr val="181F2A"/>
+          </a:solidFill>
+          <a:ln>
+            <a:noFill/>
+          </a:ln>
+        </p:spPr>
+        <p:style>
+          <a:lnRef idx="1">
+            <a:schemeClr val="accent1"/>
+          </a:lnRef>
+          <a:fillRef idx="3">
+            <a:schemeClr val="accent1"/>
+          </a:fillRef>
+          <a:effectRef idx="2">
+            <a:schemeClr val="accent1"/>
+          </a:effectRef>
+          <a:fontRef idx="minor">
+            <a:schemeClr val="lt1"/>
+          </a:fontRef>
+        </p:style>
+        <p:txBody>
+          <a:bodyPr rtlCol="0" anchor="ctr"/>
+          <a:lstStyle/>
+          <a:p>
+            <a:pPr algn="ctr"/>
+          </a:p>
+        </p:txBody>
+      </p:sp>
+      <p:sp>
+        <p:nvSpPr>
+          <p:cNvPr id="3" name="Rectangle 2"/>
+          <p:cNvSpPr/>
+          <p:nvPr/>
+        </p:nvSpPr>
+        <p:spPr>
+          <a:xfrm>
+            <a:off x="0" y="1965960"/>
+            <a:ext cx="12191695" cy="2651760"/>
+          </a:xfrm>
+          <a:prstGeom prst="rect">
+            <a:avLst/>
+          </a:prstGeom>
+          <a:solidFill>
+            <a:srgbClr val="151C26"/>
+          </a:solidFill>
+          <a:ln>
+            <a:noFill/>
+          </a:ln>
+        </p:spPr>
+        <p:style>
+          <a:lnRef idx="1">
+            <a:schemeClr val="accent1"/>
+          </a:lnRef>
+          <a:fillRef idx="3">
+            <a:schemeClr val="accent1"/>
+          </a:fillRef>
+          <a:effectRef idx="2">
+            <a:schemeClr val="accent1"/>
+          </a:effectRef>
+          <a:fontRef idx="minor">
+            <a:schemeClr val="lt1"/>
+          </a:fontRef>
+        </p:style>
+        <p:txBody>
+          <a:bodyPr rtlCol="0" anchor="ctr"/>
+          <a:lstStyle/>
+          <a:p>
+            <a:pPr algn="ctr"/>
+          </a:p>
+        </p:txBody>
+      </p:sp>
+      <p:sp>
+        <p:nvSpPr>
+          <p:cNvPr id="4" name="Rectangle 3"/>
+          <p:cNvSpPr/>
+          <p:nvPr/>
+        </p:nvSpPr>
+        <p:spPr>
+          <a:xfrm>
+            <a:off x="0" y="5943600"/>
+            <a:ext cx="12191695" cy="914400"/>
+          </a:xfrm>
+          <a:prstGeom prst="rect">
+            <a:avLst/>
+          </a:prstGeom>
+          <a:solidFill>
+            <a:srgbClr val="0A0D12"/>
+          </a:solidFill>
+          <a:ln>
+            <a:noFill/>
+          </a:ln>
+        </p:spPr>
+        <p:style>
+          <a:lnRef idx="1">
+            <a:schemeClr val="accent1"/>
+          </a:lnRef>
+          <a:fillRef idx="3">
+            <a:schemeClr val="accent1"/>
+          </a:fillRef>
+          <a:effectRef idx="2">
+            <a:schemeClr val="accent1"/>
+          </a:effectRef>
+          <a:fontRef idx="minor">
+            <a:schemeClr val="lt1"/>
+          </a:fontRef>
+        </p:style>
+        <p:txBody>
+          <a:bodyPr rtlCol="0" anchor="ctr"/>
+          <a:lstStyle/>
+          <a:p>
+            <a:pPr algn="ctr"/>
+          </a:p>
+        </p:txBody>
+      </p:sp>
+      <p:sp>
+        <p:nvSpPr>
+          <p:cNvPr id="5" name="Rectangle 4"/>
+          <p:cNvSpPr/>
+          <p:nvPr/>
+        </p:nvSpPr>
+        <p:spPr>
+          <a:xfrm>
+            <a:off x="1371600" y="256032"/>
+            <a:ext cx="9418320" cy="6263640"/>
+          </a:xfrm>
+          <a:prstGeom prst="rect">
+            <a:avLst/>
+          </a:prstGeom>
+          <a:solidFill>
+            <a:srgbClr val="1A232E"/>
+          </a:solidFill>
+          <a:ln>
+            <a:noFill/>
+          </a:ln>
+        </p:spPr>
+        <p:style>
+          <a:lnRef idx="1">
+            <a:schemeClr val="accent1"/>
+          </a:lnRef>
+          <a:fillRef idx="3">
+            <a:schemeClr val="accent1"/>
+          </a:fillRef>
+          <a:effectRef idx="2">
+            <a:schemeClr val="accent1"/>
+          </a:effectRef>
+          <a:fontRef idx="minor">
+            <a:schemeClr val="lt1"/>
+          </a:fontRef>
+        </p:style>
+        <p:txBody>
+          <a:bodyPr rtlCol="0" anchor="ctr"/>
+          <a:lstStyle/>
+          <a:p>
+            <a:pPr algn="ctr"/>
+          </a:p>
+        </p:txBody>
+      </p:sp>
+      <p:sp>
+        <p:nvSpPr>
+          <p:cNvPr id="6" name="Rectangle 5"/>
+          <p:cNvSpPr/>
+          <p:nvPr/>
+        </p:nvSpPr>
+        <p:spPr>
+          <a:xfrm>
+            <a:off x="0" y="0"/>
+            <a:ext cx="128016" cy="6858000"/>
+          </a:xfrm>
+          <a:prstGeom prst="rect">
+            <a:avLst/>
+          </a:prstGeom>
+          <a:solidFill>
+            <a:srgbClr val="D8B87A"/>
+          </a:solidFill>
+          <a:ln>
+            <a:noFill/>
+          </a:ln>
+        </p:spPr>
+        <p:style>
+          <a:lnRef idx="1">
+            <a:schemeClr val="accent1"/>
+          </a:lnRef>
+          <a:fillRef idx="3">
+            <a:schemeClr val="accent1"/>
+          </a:fillRef>
+          <a:effectRef idx="2">
+            <a:schemeClr val="accent1"/>
+          </a:effectRef>
+          <a:fontRef idx="minor">
+            <a:schemeClr val="lt1"/>
+          </a:fontRef>
+        </p:style>
+        <p:txBody>
+          <a:bodyPr rtlCol="0" anchor="ctr"/>
+          <a:lstStyle/>
+          <a:p>
+            <a:pPr algn="ctr"/>
+          </a:p>
+        </p:txBody>
+      </p:sp>
+      <p:sp>
+        <p:nvSpPr>
+          <p:cNvPr id="7" name="Rectangle 6"/>
+          <p:cNvSpPr/>
+          <p:nvPr/>
+        </p:nvSpPr>
+        <p:spPr>
+          <a:xfrm>
+            <a:off x="128016" y="0"/>
+            <a:ext cx="82296" cy="6858000"/>
+          </a:xfrm>
+          <a:prstGeom prst="rect">
+            <a:avLst/>
+          </a:prstGeom>
+          <a:solidFill>
+            <a:srgbClr val="7E9E90"/>
+          </a:solidFill>
+          <a:ln>
+            <a:noFill/>
+          </a:ln>
+        </p:spPr>
+        <p:style>
+          <a:lnRef idx="1">
+            <a:schemeClr val="accent1"/>
+          </a:lnRef>
+          <a:fillRef idx="3">
+            <a:schemeClr val="accent1"/>
+          </a:fillRef>
+          <a:effectRef idx="2">
+            <a:schemeClr val="accent1"/>
+          </a:effectRef>
+          <a:fontRef idx="minor">
+            <a:schemeClr val="lt1"/>
+          </a:fontRef>
+        </p:style>
+        <p:txBody>
+          <a:bodyPr rtlCol="0" anchor="ctr"/>
+          <a:lstStyle/>
+          <a:p>
+            <a:pPr algn="ctr"/>
+          </a:p>
+        </p:txBody>
+      </p:sp>
+      <p:sp>
+        <p:nvSpPr>
+          <p:cNvPr id="8" name="Rectangle 7"/>
+          <p:cNvSpPr/>
+          <p:nvPr/>
+        </p:nvSpPr>
+        <p:spPr>
+          <a:xfrm>
+            <a:off x="11978640" y="0"/>
+            <a:ext cx="91440" cy="6858000"/>
+          </a:xfrm>
+          <a:prstGeom prst="rect">
+            <a:avLst/>
+          </a:prstGeom>
+          <a:solidFill>
+            <a:srgbClr val="C48A94"/>
+          </a:solidFill>
+          <a:ln>
+            <a:noFill/>
+          </a:ln>
+        </p:spPr>
+        <p:style>
+          <a:lnRef idx="1">
+            <a:schemeClr val="accent1"/>
+          </a:lnRef>
+          <a:fillRef idx="3">
+            <a:schemeClr val="accent1"/>
+          </a:fillRef>
+          <a:effectRef idx="2">
+            <a:schemeClr val="accent1"/>
+          </a:effectRef>
+          <a:fontRef idx="minor">
+            <a:schemeClr val="lt1"/>
+          </a:fontRef>
+        </p:style>
+        <p:txBody>
+          <a:bodyPr rtlCol="0" anchor="ctr"/>
+          <a:lstStyle/>
+          <a:p>
+            <a:pPr algn="ctr"/>
+          </a:p>
+        </p:txBody>
+      </p:sp>
+      <p:sp>
+        <p:nvSpPr>
+          <p:cNvPr id="9" name="Rectangle 8"/>
+          <p:cNvSpPr/>
+          <p:nvPr/>
+        </p:nvSpPr>
+        <p:spPr>
+          <a:xfrm>
+            <a:off x="12070080" y="0"/>
+            <a:ext cx="118872" cy="6858000"/>
+          </a:xfrm>
+          <a:prstGeom prst="rect">
+            <a:avLst/>
+          </a:prstGeom>
+          <a:solidFill>
+            <a:srgbClr val="8E5E6A"/>
+          </a:solidFill>
+          <a:ln>
+            <a:noFill/>
+          </a:ln>
+        </p:spPr>
+        <p:style>
+          <a:lnRef idx="1">
+            <a:schemeClr val="accent1"/>
+          </a:lnRef>
+          <a:fillRef idx="3">
+            <a:schemeClr val="accent1"/>
+          </a:fillRef>
+          <a:effectRef idx="2">
+            <a:schemeClr val="accent1"/>
+          </a:effectRef>
+          <a:fontRef idx="minor">
+            <a:schemeClr val="lt1"/>
+          </a:fontRef>
+        </p:style>
+        <p:txBody>
+          <a:bodyPr rtlCol="0" anchor="ctr"/>
+          <a:lstStyle/>
+          <a:p>
+            <a:pPr algn="ctr"/>
+          </a:p>
+        </p:txBody>
+      </p:sp>
+      <p:cxnSp>
+        <p:nvCxnSpPr>
+          <p:cNvPr id="10" name="Connector 9"/>
+          <p:cNvCxnSpPr/>
+          <p:nvPr/>
+        </p:nvCxnSpPr>
+        <p:spPr>
+          <a:xfrm>
+            <a:off x="1554480" y="292608"/>
+            <a:ext cx="9052560" cy="0"/>
+          </a:xfrm>
+          <a:prstGeom prst="line">
+            <a:avLst/>
+          </a:prstGeom>
+          <a:ln w="13970">
+            <a:solidFill>
+              <a:srgbClr val="D8B87A"/>
+            </a:solidFill>
+          </a:ln>
+        </p:spPr>
+        <p:style>
+          <a:lnRef idx="2">
+            <a:schemeClr val="accent1"/>
+          </a:lnRef>
+          <a:fillRef idx="0">
+            <a:schemeClr val="accent1"/>
+          </a:fillRef>
+          <a:effectRef idx="1">
+            <a:schemeClr val="accent1"/>
+          </a:effectRef>
+          <a:fontRef idx="minor">
+            <a:schemeClr val="tx1"/>
+          </a:fontRef>
+        </p:style>
+      </p:cxnSp>
+      <p:cxnSp>
+        <p:nvCxnSpPr>
+          <p:cNvPr id="11" name="Connector 10"/>
+          <p:cNvCxnSpPr/>
+          <p:nvPr/>
+        </p:nvCxnSpPr>
+        <p:spPr>
+          <a:xfrm>
+            <a:off x="1554480" y="6446520"/>
+            <a:ext cx="9052560" cy="0"/>
+          </a:xfrm>
+          <a:prstGeom prst="line">
+            <a:avLst/>
+          </a:prstGeom>
+          <a:ln w="13970">
+            <a:solidFill>
+              <a:srgbClr val="D8B87A"/>
+            </a:solidFill>
+          </a:ln>
+        </p:spPr>
+        <p:style>
+          <a:lnRef idx="2">
+            <a:schemeClr val="accent1"/>
+          </a:lnRef>
+          <a:fillRef idx="0">
+            <a:schemeClr val="accent1"/>
+          </a:fillRef>
+          <a:effectRef idx="1">
+            <a:schemeClr val="accent1"/>
+          </a:effectRef>
+          <a:fontRef idx="minor">
+            <a:schemeClr val="tx1"/>
+          </a:fontRef>
+        </p:style>
+      </p:cxnSp>
+      <p:sp>
+        <p:nvSpPr>
+          <p:cNvPr id="12" name="Rectangle 11"/>
+          <p:cNvSpPr/>
+          <p:nvPr/>
+        </p:nvSpPr>
+        <p:spPr>
+          <a:xfrm>
+            <a:off x="237744" y="6565392"/>
+            <a:ext cx="11951208" cy="292608"/>
+          </a:xfrm>
+          <a:prstGeom prst="rect">
+            <a:avLst/>
+          </a:prstGeom>
+          <a:solidFill>
+            <a:srgbClr val="0A0D12"/>
+          </a:solidFill>
+          <a:ln>
+            <a:noFill/>
+          </a:ln>
+        </p:spPr>
+        <p:style>
+          <a:lnRef idx="1">
+            <a:schemeClr val="accent1"/>
+          </a:lnRef>
+          <a:fillRef idx="3">
+            <a:schemeClr val="accent1"/>
+          </a:fillRef>
+          <a:effectRef idx="2">
+            <a:schemeClr val="accent1"/>
+          </a:effectRef>
+          <a:fontRef idx="minor">
+            <a:schemeClr val="lt1"/>
+          </a:fontRef>
+        </p:style>
+        <p:txBody>
+          <a:bodyPr rtlCol="0" anchor="ctr"/>
+          <a:lstStyle/>
+          <a:p>
+            <a:pPr algn="ctr"/>
+          </a:p>
+        </p:txBody>
+      </p:sp>
+      <p:sp>
+        <p:nvSpPr>
+          <p:cNvPr id="13" name="Oval 12"/>
+          <p:cNvSpPr/>
+          <p:nvPr/>
+        </p:nvSpPr>
+        <p:spPr>
+          <a:xfrm>
+            <a:off x="654939" y="5891251"/>
+            <a:ext cx="116586" cy="116586"/>
+          </a:xfrm>
+          <a:prstGeom prst="ellipse">
+            <a:avLst/>
+          </a:prstGeom>
+          <a:solidFill>
+            <a:srgbClr val="D6A4AC"/>
+          </a:solidFill>
+          <a:ln>
+            <a:noFill/>
+          </a:ln>
+        </p:spPr>
+        <p:style>
+          <a:lnRef idx="1">
+            <a:schemeClr val="accent1"/>
+          </a:lnRef>
+          <a:fillRef idx="3">
+            <a:schemeClr val="accent1"/>
+          </a:fillRef>
+          <a:effectRef idx="2">
+            <a:schemeClr val="accent1"/>
+          </a:effectRef>
+          <a:fontRef idx="minor">
+            <a:schemeClr val="lt1"/>
+          </a:fontRef>
+        </p:style>
+        <p:txBody>
+          <a:bodyPr rtlCol="0" anchor="ctr"/>
+          <a:lstStyle/>
+          <a:p>
+            <a:pPr algn="ctr"/>
+          </a:p>
+        </p:txBody>
+      </p:sp>
+      <p:sp>
+        <p:nvSpPr>
+          <p:cNvPr id="14" name="Oval 13"/>
+          <p:cNvSpPr/>
+          <p:nvPr/>
+        </p:nvSpPr>
+        <p:spPr>
+          <a:xfrm>
+            <a:off x="732663" y="5953430"/>
+            <a:ext cx="116586" cy="116586"/>
+          </a:xfrm>
+          <a:prstGeom prst="ellipse">
+            <a:avLst/>
+          </a:prstGeom>
+          <a:solidFill>
+            <a:srgbClr val="D6A4AC"/>
+          </a:solidFill>
+          <a:ln>
+            <a:noFill/>
+          </a:ln>
+        </p:spPr>
+        <p:style>
+          <a:lnRef idx="1">
+            <a:schemeClr val="accent1"/>
+          </a:lnRef>
+          <a:fillRef idx="3">
+            <a:schemeClr val="accent1"/>
+          </a:fillRef>
+          <a:effectRef idx="2">
+            <a:schemeClr val="accent1"/>
+          </a:effectRef>
+          <a:fontRef idx="minor">
+            <a:schemeClr val="lt1"/>
+          </a:fontRef>
+        </p:style>
+        <p:txBody>
+          <a:bodyPr rtlCol="0" anchor="ctr"/>
+          <a:lstStyle/>
+          <a:p>
+            <a:pPr algn="ctr"/>
+          </a:p>
+        </p:txBody>
+      </p:sp>
+      <p:sp>
+        <p:nvSpPr>
+          <p:cNvPr id="15" name="Oval 14"/>
+          <p:cNvSpPr/>
+          <p:nvPr/>
+        </p:nvSpPr>
+        <p:spPr>
+          <a:xfrm>
+            <a:off x="709345" y="6046698"/>
+            <a:ext cx="116586" cy="116586"/>
+          </a:xfrm>
+          <a:prstGeom prst="ellipse">
+            <a:avLst/>
+          </a:prstGeom>
+          <a:solidFill>
+            <a:srgbClr val="D6A4AC"/>
+          </a:solidFill>
+          <a:ln>
+            <a:noFill/>
+          </a:ln>
+        </p:spPr>
+        <p:style>
+          <a:lnRef idx="1">
+            <a:schemeClr val="accent1"/>
+          </a:lnRef>
+          <a:fillRef idx="3">
+            <a:schemeClr val="accent1"/>
+          </a:fillRef>
+          <a:effectRef idx="2">
+            <a:schemeClr val="accent1"/>
+          </a:effectRef>
+          <a:fontRef idx="minor">
+            <a:schemeClr val="lt1"/>
+          </a:fontRef>
+        </p:style>
+        <p:txBody>
+          <a:bodyPr rtlCol="0" anchor="ctr"/>
+          <a:lstStyle/>
+          <a:p>
+            <a:pPr algn="ctr"/>
+          </a:p>
+        </p:txBody>
+      </p:sp>
+      <p:sp>
+        <p:nvSpPr>
+          <p:cNvPr id="16" name="Oval 15"/>
+          <p:cNvSpPr/>
+          <p:nvPr/>
+        </p:nvSpPr>
+        <p:spPr>
+          <a:xfrm>
+            <a:off x="600533" y="6046698"/>
+            <a:ext cx="116586" cy="116586"/>
+          </a:xfrm>
+          <a:prstGeom prst="ellipse">
+            <a:avLst/>
+          </a:prstGeom>
+          <a:solidFill>
+            <a:srgbClr val="D6A4AC"/>
+          </a:solidFill>
+          <a:ln>
+            <a:noFill/>
+          </a:ln>
+        </p:spPr>
+        <p:style>
+          <a:lnRef idx="1">
+            <a:schemeClr val="accent1"/>
+          </a:lnRef>
+          <a:fillRef idx="3">
+            <a:schemeClr val="accent1"/>
+          </a:fillRef>
+          <a:effectRef idx="2">
+            <a:schemeClr val="accent1"/>
+          </a:effectRef>
+          <a:fontRef idx="minor">
+            <a:schemeClr val="lt1"/>
+          </a:fontRef>
+        </p:style>
+        <p:txBody>
+          <a:bodyPr rtlCol="0" anchor="ctr"/>
+          <a:lstStyle/>
+          <a:p>
+            <a:pPr algn="ctr"/>
+          </a:p>
+        </p:txBody>
+      </p:sp>
+      <p:sp>
+        <p:nvSpPr>
+          <p:cNvPr id="17" name="Oval 16"/>
+          <p:cNvSpPr/>
+          <p:nvPr/>
+        </p:nvSpPr>
+        <p:spPr>
+          <a:xfrm>
+            <a:off x="577215" y="5953430"/>
+            <a:ext cx="116586" cy="116586"/>
+          </a:xfrm>
+          <a:prstGeom prst="ellipse">
+            <a:avLst/>
+          </a:prstGeom>
+          <a:solidFill>
+            <a:srgbClr val="D6A4AC"/>
+          </a:solidFill>
+          <a:ln>
+            <a:noFill/>
+          </a:ln>
+        </p:spPr>
+        <p:style>
+          <a:lnRef idx="1">
+            <a:schemeClr val="accent1"/>
+          </a:lnRef>
+          <a:fillRef idx="3">
+            <a:schemeClr val="accent1"/>
+          </a:fillRef>
+          <a:effectRef idx="2">
+            <a:schemeClr val="accent1"/>
+          </a:effectRef>
+          <a:fontRef idx="minor">
+            <a:schemeClr val="lt1"/>
+          </a:fontRef>
+        </p:style>
+        <p:txBody>
+          <a:bodyPr rtlCol="0" anchor="ctr"/>
+          <a:lstStyle/>
+          <a:p>
+            <a:pPr algn="ctr"/>
+          </a:p>
+        </p:txBody>
+      </p:sp>
+      <p:sp>
+        <p:nvSpPr>
+          <p:cNvPr id="18" name="Oval 17"/>
+          <p:cNvSpPr/>
+          <p:nvPr/>
+        </p:nvSpPr>
+        <p:spPr>
+          <a:xfrm>
+            <a:off x="670484" y="5992292"/>
+            <a:ext cx="85496" cy="85496"/>
+          </a:xfrm>
+          <a:prstGeom prst="ellipse">
+            <a:avLst/>
+          </a:prstGeom>
+          <a:solidFill>
+            <a:srgbClr val="C48A94"/>
+          </a:solidFill>
+          <a:ln>
+            <a:noFill/>
+          </a:ln>
+        </p:spPr>
+        <p:style>
+          <a:lnRef idx="1">
+            <a:schemeClr val="accent1"/>
+          </a:lnRef>
+          <a:fillRef idx="3">
+            <a:schemeClr val="accent1"/>
+          </a:fillRef>
+          <a:effectRef idx="2">
+            <a:schemeClr val="accent1"/>
+          </a:effectRef>
+          <a:fontRef idx="minor">
+            <a:schemeClr val="lt1"/>
+          </a:fontRef>
+        </p:style>
+        <p:txBody>
+          <a:bodyPr rtlCol="0" anchor="ctr"/>
+          <a:lstStyle/>
+          <a:p>
+            <a:pPr algn="ctr"/>
+          </a:p>
+        </p:txBody>
+      </p:sp>
+      <p:sp>
+        <p:nvSpPr>
+          <p:cNvPr id="19" name="Oval 18"/>
+          <p:cNvSpPr/>
+          <p:nvPr/>
+        </p:nvSpPr>
+        <p:spPr>
+          <a:xfrm>
+            <a:off x="798728" y="6073902"/>
+            <a:ext cx="108813" cy="54406"/>
+          </a:xfrm>
+          <a:prstGeom prst="ellipse">
+            <a:avLst/>
+          </a:prstGeom>
+          <a:solidFill>
+            <a:srgbClr val="7E9E90"/>
+          </a:solidFill>
+          <a:ln>
+            <a:noFill/>
+          </a:ln>
+        </p:spPr>
+        <p:style>
+          <a:lnRef idx="1">
+            <a:schemeClr val="accent1"/>
+          </a:lnRef>
+          <a:fillRef idx="3">
+            <a:schemeClr val="accent1"/>
+          </a:fillRef>
+          <a:effectRef idx="2">
+            <a:schemeClr val="accent1"/>
+          </a:effectRef>
+          <a:fontRef idx="minor">
+            <a:schemeClr val="lt1"/>
+          </a:fontRef>
+        </p:style>
+        <p:txBody>
+          <a:bodyPr rtlCol="0" anchor="ctr"/>
+          <a:lstStyle/>
+          <a:p>
+            <a:pPr algn="ctr"/>
+          </a:p>
+        </p:txBody>
+      </p:sp>
+      <p:sp>
+        <p:nvSpPr>
+          <p:cNvPr id="20" name="Oval 19"/>
+          <p:cNvSpPr/>
+          <p:nvPr/>
+        </p:nvSpPr>
+        <p:spPr>
+          <a:xfrm>
+            <a:off x="11389995" y="5891251"/>
+            <a:ext cx="116586" cy="116586"/>
+          </a:xfrm>
+          <a:prstGeom prst="ellipse">
+            <a:avLst/>
+          </a:prstGeom>
+          <a:solidFill>
+            <a:srgbClr val="D6A4AC"/>
+          </a:solidFill>
+          <a:ln>
+            <a:noFill/>
+          </a:ln>
+        </p:spPr>
+        <p:style>
+          <a:lnRef idx="1">
+            <a:schemeClr val="accent1"/>
+          </a:lnRef>
+          <a:fillRef idx="3">
+            <a:schemeClr val="accent1"/>
+          </a:fillRef>
+          <a:effectRef idx="2">
+            <a:schemeClr val="accent1"/>
+          </a:effectRef>
+          <a:fontRef idx="minor">
+            <a:schemeClr val="lt1"/>
+          </a:fontRef>
+        </p:style>
+        <p:txBody>
+          <a:bodyPr rtlCol="0" anchor="ctr"/>
+          <a:lstStyle/>
+          <a:p>
+            <a:pPr algn="ctr"/>
+          </a:p>
+        </p:txBody>
+      </p:sp>
+      <p:sp>
+        <p:nvSpPr>
+          <p:cNvPr id="21" name="Oval 20"/>
+          <p:cNvSpPr/>
+          <p:nvPr/>
+        </p:nvSpPr>
+        <p:spPr>
+          <a:xfrm>
+            <a:off x="11467719" y="5953430"/>
+            <a:ext cx="116586" cy="116586"/>
+          </a:xfrm>
+          <a:prstGeom prst="ellipse">
+            <a:avLst/>
+          </a:prstGeom>
+          <a:solidFill>
+            <a:srgbClr val="D6A4AC"/>
+          </a:solidFill>
+          <a:ln>
+            <a:noFill/>
+          </a:ln>
+        </p:spPr>
+        <p:style>
+          <a:lnRef idx="1">
+            <a:schemeClr val="accent1"/>
+          </a:lnRef>
+          <a:fillRef idx="3">
+            <a:schemeClr val="accent1"/>
+          </a:fillRef>
+          <a:effectRef idx="2">
+            <a:schemeClr val="accent1"/>
+          </a:effectRef>
+          <a:fontRef idx="minor">
+            <a:schemeClr val="lt1"/>
+          </a:fontRef>
+        </p:style>
+        <p:txBody>
+          <a:bodyPr rtlCol="0" anchor="ctr"/>
+          <a:lstStyle/>
+          <a:p>
+            <a:pPr algn="ctr"/>
+          </a:p>
+        </p:txBody>
+      </p:sp>
+      <p:sp>
+        <p:nvSpPr>
+          <p:cNvPr id="22" name="Oval 21"/>
+          <p:cNvSpPr/>
+          <p:nvPr/>
+        </p:nvSpPr>
+        <p:spPr>
+          <a:xfrm>
+            <a:off x="11444401" y="6046698"/>
+            <a:ext cx="116586" cy="116586"/>
+          </a:xfrm>
+          <a:prstGeom prst="ellipse">
+            <a:avLst/>
+          </a:prstGeom>
+          <a:solidFill>
+            <a:srgbClr val="D6A4AC"/>
+          </a:solidFill>
+          <a:ln>
+            <a:noFill/>
+          </a:ln>
+        </p:spPr>
+        <p:style>
+          <a:lnRef idx="1">
+            <a:schemeClr val="accent1"/>
+          </a:lnRef>
+          <a:fillRef idx="3">
+            <a:schemeClr val="accent1"/>
+          </a:fillRef>
+          <a:effectRef idx="2">
+            <a:schemeClr val="accent1"/>
+          </a:effectRef>
+          <a:fontRef idx="minor">
+            <a:schemeClr val="lt1"/>
+          </a:fontRef>
+        </p:style>
+        <p:txBody>
+          <a:bodyPr rtlCol="0" anchor="ctr"/>
+          <a:lstStyle/>
+          <a:p>
+            <a:pPr algn="ctr"/>
+          </a:p>
+        </p:txBody>
+      </p:sp>
+      <p:sp>
+        <p:nvSpPr>
+          <p:cNvPr id="23" name="Oval 22"/>
+          <p:cNvSpPr/>
+          <p:nvPr/>
+        </p:nvSpPr>
+        <p:spPr>
+          <a:xfrm>
+            <a:off x="11335589" y="6046698"/>
+            <a:ext cx="116586" cy="116586"/>
+          </a:xfrm>
+          <a:prstGeom prst="ellipse">
+            <a:avLst/>
+          </a:prstGeom>
+          <a:solidFill>
+            <a:srgbClr val="D6A4AC"/>
+          </a:solidFill>
+          <a:ln>
+            <a:noFill/>
+          </a:ln>
+        </p:spPr>
+        <p:style>
+          <a:lnRef idx="1">
+            <a:schemeClr val="accent1"/>
+          </a:lnRef>
+          <a:fillRef idx="3">
+            <a:schemeClr val="accent1"/>
+          </a:fillRef>
+          <a:effectRef idx="2">
+            <a:schemeClr val="accent1"/>
+          </a:effectRef>
+          <a:fontRef idx="minor">
+            <a:schemeClr val="lt1"/>
+          </a:fontRef>
+        </p:style>
+        <p:txBody>
+          <a:bodyPr rtlCol="0" anchor="ctr"/>
+          <a:lstStyle/>
+          <a:p>
+            <a:pPr algn="ctr"/>
+          </a:p>
+        </p:txBody>
+      </p:sp>
+      <p:sp>
+        <p:nvSpPr>
+          <p:cNvPr id="24" name="Oval 23"/>
+          <p:cNvSpPr/>
+          <p:nvPr/>
+        </p:nvSpPr>
+        <p:spPr>
+          <a:xfrm>
+            <a:off x="11312271" y="5953430"/>
+            <a:ext cx="116586" cy="116586"/>
+          </a:xfrm>
+          <a:prstGeom prst="ellipse">
+            <a:avLst/>
+          </a:prstGeom>
+          <a:solidFill>
+            <a:srgbClr val="D6A4AC"/>
+          </a:solidFill>
+          <a:ln>
+            <a:noFill/>
+          </a:ln>
+        </p:spPr>
+        <p:style>
+          <a:lnRef idx="1">
+            <a:schemeClr val="accent1"/>
+          </a:lnRef>
+          <a:fillRef idx="3">
+            <a:schemeClr val="accent1"/>
+          </a:fillRef>
+          <a:effectRef idx="2">
+            <a:schemeClr val="accent1"/>
+          </a:effectRef>
+          <a:fontRef idx="minor">
+            <a:schemeClr val="lt1"/>
+          </a:fontRef>
+        </p:style>
+        <p:txBody>
+          <a:bodyPr rtlCol="0" anchor="ctr"/>
+          <a:lstStyle/>
+          <a:p>
+            <a:pPr algn="ctr"/>
+          </a:p>
+        </p:txBody>
+      </p:sp>
+      <p:sp>
+        <p:nvSpPr>
+          <p:cNvPr id="25" name="Oval 24"/>
+          <p:cNvSpPr/>
+          <p:nvPr/>
+        </p:nvSpPr>
+        <p:spPr>
+          <a:xfrm>
+            <a:off x="11405540" y="5992292"/>
+            <a:ext cx="85496" cy="85496"/>
+          </a:xfrm>
+          <a:prstGeom prst="ellipse">
+            <a:avLst/>
+          </a:prstGeom>
+          <a:solidFill>
+            <a:srgbClr val="C48A94"/>
+          </a:solidFill>
+          <a:ln>
+            <a:noFill/>
+          </a:ln>
+        </p:spPr>
+        <p:style>
+          <a:lnRef idx="1">
+            <a:schemeClr val="accent1"/>
+          </a:lnRef>
+          <a:fillRef idx="3">
+            <a:schemeClr val="accent1"/>
+          </a:fillRef>
+          <a:effectRef idx="2">
+            <a:schemeClr val="accent1"/>
+          </a:effectRef>
+          <a:fontRef idx="minor">
+            <a:schemeClr val="lt1"/>
+          </a:fontRef>
+        </p:style>
+        <p:txBody>
+          <a:bodyPr rtlCol="0" anchor="ctr"/>
+          <a:lstStyle/>
+          <a:p>
+            <a:pPr algn="ctr"/>
+          </a:p>
+        </p:txBody>
+      </p:sp>
+      <p:sp>
+        <p:nvSpPr>
+          <p:cNvPr id="26" name="Oval 25"/>
+          <p:cNvSpPr/>
+          <p:nvPr/>
+        </p:nvSpPr>
+        <p:spPr>
+          <a:xfrm>
+            <a:off x="11533784" y="6073902"/>
+            <a:ext cx="108813" cy="54406"/>
+          </a:xfrm>
+          <a:prstGeom prst="ellipse">
+            <a:avLst/>
+          </a:prstGeom>
+          <a:solidFill>
+            <a:srgbClr val="7E9E90"/>
+          </a:solidFill>
+          <a:ln>
+            <a:noFill/>
+          </a:ln>
+        </p:spPr>
+        <p:style>
+          <a:lnRef idx="1">
+            <a:schemeClr val="accent1"/>
+          </a:lnRef>
+          <a:fillRef idx="3">
+            <a:schemeClr val="accent1"/>
+          </a:fillRef>
+          <a:effectRef idx="2">
+            <a:schemeClr val="accent1"/>
+          </a:effectRef>
+          <a:fontRef idx="minor">
+            <a:schemeClr val="lt1"/>
+          </a:fontRef>
+        </p:style>
+        <p:txBody>
+          <a:bodyPr rtlCol="0" anchor="ctr"/>
+          <a:lstStyle/>
+          <a:p>
+            <a:pPr algn="ctr"/>
+          </a:p>
+        </p:txBody>
+      </p:sp>
+      <p:cxnSp>
+        <p:nvCxnSpPr>
+          <p:cNvPr id="27" name="Connector 26"/>
+          <p:cNvCxnSpPr/>
+          <p:nvPr/>
+        </p:nvCxnSpPr>
+        <p:spPr>
+          <a:xfrm>
+            <a:off x="1600200" y="365760"/>
+            <a:ext cx="274320" cy="0"/>
+          </a:xfrm>
+          <a:prstGeom prst="line">
+            <a:avLst/>
+          </a:prstGeom>
+          <a:ln w="14604">
+            <a:solidFill>
+              <a:srgbClr val="D8B87A"/>
+            </a:solidFill>
+          </a:ln>
+        </p:spPr>
+        <p:style>
+          <a:lnRef idx="2">
+            <a:schemeClr val="accent1"/>
+          </a:lnRef>
+          <a:fillRef idx="0">
+            <a:schemeClr val="accent1"/>
+          </a:fillRef>
+          <a:effectRef idx="1">
+            <a:schemeClr val="accent1"/>
+          </a:effectRef>
+          <a:fontRef idx="minor">
+            <a:schemeClr val="tx1"/>
+          </a:fontRef>
+        </p:style>
+      </p:cxnSp>
+      <p:cxnSp>
+        <p:nvCxnSpPr>
+          <p:cNvPr id="28" name="Connector 27"/>
+          <p:cNvCxnSpPr/>
+          <p:nvPr/>
+        </p:nvCxnSpPr>
+        <p:spPr>
+          <a:xfrm>
+            <a:off x="1600200" y="365760"/>
+            <a:ext cx="0" cy="274320"/>
+          </a:xfrm>
+          <a:prstGeom prst="line">
+            <a:avLst/>
+          </a:prstGeom>
+          <a:ln w="14604">
+            <a:solidFill>
+              <a:srgbClr val="D8B87A"/>
+            </a:solidFill>
+          </a:ln>
+        </p:spPr>
+        <p:style>
+          <a:lnRef idx="2">
+            <a:schemeClr val="accent1"/>
+          </a:lnRef>
+          <a:fillRef idx="0">
+            <a:schemeClr val="accent1"/>
+          </a:fillRef>
+          <a:effectRef idx="1">
+            <a:schemeClr val="accent1"/>
+          </a:effectRef>
+          <a:fontRef idx="minor">
+            <a:schemeClr val="tx1"/>
+          </a:fontRef>
+        </p:style>
+      </p:cxnSp>
+      <p:cxnSp>
+        <p:nvCxnSpPr>
+          <p:cNvPr id="29" name="Connector 28"/>
+          <p:cNvCxnSpPr/>
+          <p:nvPr/>
+        </p:nvCxnSpPr>
+        <p:spPr>
+          <a:xfrm>
+            <a:off x="10287000" y="365760"/>
+            <a:ext cx="274320" cy="0"/>
+          </a:xfrm>
+          <a:prstGeom prst="line">
+            <a:avLst/>
+          </a:prstGeom>
+          <a:ln w="14604">
+            <a:solidFill>
+              <a:srgbClr val="D8B87A"/>
+            </a:solidFill>
+          </a:ln>
+        </p:spPr>
+        <p:style>
+          <a:lnRef idx="2">
+            <a:schemeClr val="accent1"/>
+          </a:lnRef>
+          <a:fillRef idx="0">
+            <a:schemeClr val="accent1"/>
+          </a:fillRef>
+          <a:effectRef idx="1">
+            <a:schemeClr val="accent1"/>
+          </a:effectRef>
+          <a:fontRef idx="minor">
+            <a:schemeClr val="tx1"/>
+          </a:fontRef>
+        </p:style>
+      </p:cxnSp>
+      <p:cxnSp>
+        <p:nvCxnSpPr>
+          <p:cNvPr id="30" name="Connector 29"/>
+          <p:cNvCxnSpPr/>
+          <p:nvPr/>
+        </p:nvCxnSpPr>
+        <p:spPr>
+          <a:xfrm>
+            <a:off x="10561320" y="365760"/>
+            <a:ext cx="0" cy="274320"/>
+          </a:xfrm>
+          <a:prstGeom prst="line">
+            <a:avLst/>
+          </a:prstGeom>
+          <a:ln w="14604">
+            <a:solidFill>
+              <a:srgbClr val="D8B87A"/>
+            </a:solidFill>
+          </a:ln>
+        </p:spPr>
+        <p:style>
+          <a:lnRef idx="2">
+            <a:schemeClr val="accent1"/>
+          </a:lnRef>
+          <a:fillRef idx="0">
+            <a:schemeClr val="accent1"/>
+          </a:fillRef>
+          <a:effectRef idx="1">
+            <a:schemeClr val="accent1"/>
+          </a:effectRef>
+          <a:fontRef idx="minor">
+            <a:schemeClr val="tx1"/>
+          </a:fontRef>
+        </p:style>
+      </p:cxnSp>
+      <p:sp>
+        <p:nvSpPr>
+          <p:cNvPr id="31" name="Diamond 30"/>
+          <p:cNvSpPr/>
+          <p:nvPr/>
+        </p:nvSpPr>
+        <p:spPr>
+          <a:xfrm>
+            <a:off x="1193292" y="3296412"/>
+            <a:ext cx="82296" cy="82296"/>
+          </a:xfrm>
+          <a:prstGeom prst="diamond">
+            <a:avLst/>
+          </a:prstGeom>
+          <a:solidFill>
+            <a:srgbClr val="D8B87A"/>
+          </a:solidFill>
+          <a:ln>
+            <a:noFill/>
+          </a:ln>
+        </p:spPr>
+        <p:style>
+          <a:lnRef idx="1">
+            <a:schemeClr val="accent1"/>
+          </a:lnRef>
+          <a:fillRef idx="3">
+            <a:schemeClr val="accent1"/>
+          </a:fillRef>
+          <a:effectRef idx="2">
+            <a:schemeClr val="accent1"/>
+          </a:effectRef>
+          <a:fontRef idx="minor">
+            <a:schemeClr val="lt1"/>
+          </a:fontRef>
+        </p:style>
+        <p:txBody>
+          <a:bodyPr rtlCol="0" anchor="ctr"/>
+          <a:lstStyle/>
+          <a:p>
+            <a:pPr algn="ctr"/>
+          </a:p>
+        </p:txBody>
+      </p:sp>
+      <p:sp>
+        <p:nvSpPr>
+          <p:cNvPr id="32" name="Diamond 31"/>
+          <p:cNvSpPr/>
+          <p:nvPr/>
+        </p:nvSpPr>
+        <p:spPr>
+          <a:xfrm>
+            <a:off x="10885932" y="3296412"/>
+            <a:ext cx="82296" cy="82296"/>
+          </a:xfrm>
+          <a:prstGeom prst="diamond">
+            <a:avLst/>
+          </a:prstGeom>
+          <a:solidFill>
+            <a:srgbClr val="D8B87A"/>
+          </a:solidFill>
+          <a:ln>
+            <a:noFill/>
+          </a:ln>
+        </p:spPr>
+        <p:style>
+          <a:lnRef idx="1">
+            <a:schemeClr val="accent1"/>
+          </a:lnRef>
+          <a:fillRef idx="3">
+            <a:schemeClr val="accent1"/>
+          </a:fillRef>
+          <a:effectRef idx="2">
+            <a:schemeClr val="accent1"/>
+          </a:effectRef>
+          <a:fontRef idx="minor">
+            <a:schemeClr val="lt1"/>
+          </a:fontRef>
+        </p:style>
+        <p:txBody>
+          <a:bodyPr rtlCol="0" anchor="ctr"/>
+          <a:lstStyle/>
+          <a:p>
+            <a:pPr algn="ctr"/>
+          </a:p>
+        </p:txBody>
+      </p:sp>
+      <p:cxnSp>
+        <p:nvCxnSpPr>
+          <p:cNvPr id="33" name="Connector 32"/>
+          <p:cNvCxnSpPr/>
+          <p:nvPr/>
+        </p:nvCxnSpPr>
+        <p:spPr>
+          <a:xfrm>
             <a:off x="4663440.0" y="1627632"/>
             <a:ext cx="274320.0" cy="0"/>
           </a:xfrm>
@@ -10499,7 +15309,7 @@
 </p:sld>
 </file>
 
-<file path=ppt/slides/slide14.xml><?xml version="1.0" encoding="utf-8"?>
+<file path=ppt/slides/slide17.xml><?xml version="1.0" encoding="utf-8"?>
 <p:sld xmlns:a="http://schemas.openxmlformats.org/drawingml/2006/main" xmlns:p="http://schemas.openxmlformats.org/presentationml/2006/main" xmlns:r="http://schemas.openxmlformats.org/officeDocument/2006/relationships">
   <p:cSld>
     <p:bg>
@@ -18307,7 +23117,7 @@
                 </a:solidFill>
                 <a:latin typeface="Malgun Gothic"/>
               </a:rPr>
-              <a:t>2. 찬양과 기도</a:t>
+              <a:t>1. 예배 준비의 시간</a:t>
             </a:r>
           </a:p>
         </p:txBody>
@@ -18349,7 +23159,7 @@
       </p:cxnSp>
       <p:sp>
         <p:nvSpPr>
-          <p:cNvPr id="37" name="HYMN_1"/>
+          <p:cNvPr id="37" name="HYMN_PREP_3"/>
           <p:cNvSpPr txBox="1"/>
           <p:nvPr/>
         </p:nvSpPr>
@@ -18382,7 +23192,7 @@
                 </a:solidFill>
                 <a:latin typeface="Malgun Gothic"/>
               </a:rPr>
-              <a:t>{{HYMN_1}}</a:t>
+              <a:t>{{HYMN_PREP_3}}</a:t>
             </a:r>
           </a:p>
         </p:txBody>
@@ -19733,149 +24543,95 @@
           </a:p>
         </p:txBody>
       </p:sp>
-      <p:cxnSp>
-        <p:nvCxnSpPr>
-          <p:cNvPr id="33" name="Connector 32"/>
-          <p:cNvCxnSpPr/>
-          <p:nvPr/>
-        </p:nvCxnSpPr>
-        <p:spPr>
-          <a:xfrm>
-            <a:off x="4517136.0" y="1627632"/>
-            <a:ext cx="292608.0" cy="0"/>
-          </a:xfrm>
-          <a:prstGeom prst="line">
-            <a:avLst/>
-          </a:prstGeom>
-          <a:ln w="15240">
-            <a:solidFill>
-              <a:srgbClr val="D8B87A"/>
-            </a:solidFill>
-          </a:ln>
-        </p:spPr>
-        <p:style>
-          <a:lnRef idx="2">
-            <a:schemeClr val="accent1"/>
-          </a:lnRef>
-          <a:fillRef idx="0">
-            <a:schemeClr val="accent1"/>
-          </a:fillRef>
-          <a:effectRef idx="1">
-            <a:schemeClr val="accent1"/>
-          </a:effectRef>
-          <a:fontRef idx="minor">
-            <a:schemeClr val="tx1"/>
-          </a:fontRef>
-        </p:style>
-      </p:cxnSp>
-      <p:cxnSp>
-        <p:nvCxnSpPr>
-          <p:cNvPr id="34" name="Connector 33"/>
-          <p:cNvCxnSpPr/>
-          <p:nvPr/>
-        </p:nvCxnSpPr>
-        <p:spPr>
-          <a:xfrm>
-            <a:off x="4663440.0" y="1481328"/>
-            <a:ext cx="0.0" cy="292608"/>
-          </a:xfrm>
-          <a:prstGeom prst="line">
-            <a:avLst/>
-          </a:prstGeom>
-          <a:ln w="15240">
-            <a:solidFill>
-              <a:srgbClr val="D8B87A"/>
-            </a:solidFill>
-          </a:ln>
-        </p:spPr>
-        <p:style>
-          <a:lnRef idx="2">
-            <a:schemeClr val="accent1"/>
-          </a:lnRef>
-          <a:fillRef idx="0">
-            <a:schemeClr val="accent1"/>
-          </a:fillRef>
-          <a:effectRef idx="1">
-            <a:schemeClr val="accent1"/>
-          </a:effectRef>
-          <a:fontRef idx="minor">
-            <a:schemeClr val="tx1"/>
-          </a:fontRef>
-        </p:style>
-      </p:cxnSp>
-      <p:cxnSp>
-        <p:nvCxnSpPr>
-          <p:cNvPr id="35" name="Connector 34"/>
-          <p:cNvCxnSpPr/>
-          <p:nvPr/>
-        </p:nvCxnSpPr>
-        <p:spPr>
-          <a:xfrm>
-            <a:off x="7351776.0" y="1627632"/>
-            <a:ext cx="292608.0" cy="0"/>
-          </a:xfrm>
-          <a:prstGeom prst="line">
-            <a:avLst/>
-          </a:prstGeom>
-          <a:ln w="15240">
-            <a:solidFill>
-              <a:srgbClr val="D8B87A"/>
-            </a:solidFill>
-          </a:ln>
-        </p:spPr>
-        <p:style>
-          <a:lnRef idx="2">
-            <a:schemeClr val="accent1"/>
-          </a:lnRef>
-          <a:fillRef idx="0">
-            <a:schemeClr val="accent1"/>
-          </a:fillRef>
-          <a:effectRef idx="1">
-            <a:schemeClr val="accent1"/>
-          </a:effectRef>
-          <a:fontRef idx="minor">
-            <a:schemeClr val="tx1"/>
-          </a:fontRef>
-        </p:style>
-      </p:cxnSp>
-      <p:cxnSp>
-        <p:nvCxnSpPr>
-          <p:cNvPr id="36" name="Connector 35"/>
-          <p:cNvCxnSpPr/>
-          <p:nvPr/>
-        </p:nvCxnSpPr>
-        <p:spPr>
-          <a:xfrm>
-            <a:off x="7498080.0" y="1481328"/>
-            <a:ext cx="0.0" cy="292608"/>
-          </a:xfrm>
-          <a:prstGeom prst="line">
-            <a:avLst/>
-          </a:prstGeom>
-          <a:ln w="15240">
-            <a:solidFill>
-              <a:srgbClr val="D8B87A"/>
-            </a:solidFill>
-          </a:ln>
-        </p:spPr>
-        <p:style>
-          <a:lnRef idx="2">
-            <a:schemeClr val="accent1"/>
-          </a:lnRef>
-          <a:fillRef idx="0">
-            <a:schemeClr val="accent1"/>
-          </a:fillRef>
-          <a:effectRef idx="1">
-            <a:schemeClr val="accent1"/>
-          </a:effectRef>
-          <a:fontRef idx="minor">
-            <a:schemeClr val="tx1"/>
-          </a:fontRef>
-        </p:style>
-      </p:cxnSp>
-      <p:sp>
-        <p:nvSpPr>
-          <p:cNvPr id="37" name="TextBox 36"/>
+      <p:sp>
+        <p:nvSpPr>
+          <p:cNvPr id="33" name="Diamond 32"/>
+          <p:cNvSpPr/>
+          <p:nvPr/>
+        </p:nvSpPr>
+        <p:spPr>
+          <a:xfrm>
+            <a:off x="4933188" y="2281428"/>
+            <a:ext cx="100584" cy="100584"/>
+          </a:xfrm>
+          <a:prstGeom prst="diamond">
+            <a:avLst/>
+          </a:prstGeom>
+          <a:solidFill>
+            <a:srgbClr val="D8B87A"/>
+          </a:solidFill>
+          <a:ln>
+            <a:noFill/>
+          </a:ln>
+        </p:spPr>
+        <p:style>
+          <a:lnRef idx="1">
+            <a:schemeClr val="accent1"/>
+          </a:lnRef>
+          <a:fillRef idx="3">
+            <a:schemeClr val="accent1"/>
+          </a:fillRef>
+          <a:effectRef idx="2">
+            <a:schemeClr val="accent1"/>
+          </a:effectRef>
+          <a:fontRef idx="minor">
+            <a:schemeClr val="lt1"/>
+          </a:fontRef>
+        </p:style>
+        <p:txBody>
+          <a:bodyPr rtlCol="0" anchor="ctr"/>
+          <a:lstStyle/>
+          <a:p>
+            <a:pPr algn="ctr"/>
+          </a:p>
+        </p:txBody>
+      </p:sp>
+      <p:sp>
+        <p:nvSpPr>
+          <p:cNvPr id="34" name="Diamond 33"/>
+          <p:cNvSpPr/>
+          <p:nvPr/>
+        </p:nvSpPr>
+        <p:spPr>
+          <a:xfrm>
+            <a:off x="7127748" y="2281428"/>
+            <a:ext cx="100584" cy="100584"/>
+          </a:xfrm>
+          <a:prstGeom prst="diamond">
+            <a:avLst/>
+          </a:prstGeom>
+          <a:solidFill>
+            <a:srgbClr val="D8B87A"/>
+          </a:solidFill>
+          <a:ln>
+            <a:noFill/>
+          </a:ln>
+        </p:spPr>
+        <p:style>
+          <a:lnRef idx="1">
+            <a:schemeClr val="accent1"/>
+          </a:lnRef>
+          <a:fillRef idx="3">
+            <a:schemeClr val="accent1"/>
+          </a:fillRef>
+          <a:effectRef idx="2">
+            <a:schemeClr val="accent1"/>
+          </a:effectRef>
+          <a:fontRef idx="minor">
+            <a:schemeClr val="lt1"/>
+          </a:fontRef>
+        </p:style>
+        <p:txBody>
+          <a:bodyPr rtlCol="0" anchor="ctr"/>
+          <a:lstStyle/>
+          <a:p>
+            <a:pPr algn="ctr"/>
+          </a:p>
+        </p:txBody>
+      </p:sp>
+      <p:sp>
+        <p:nvSpPr>
+          <p:cNvPr id="35" name="TextBox 34"/>
           <p:cNvSpPr txBox="1"/>
           <p:nvPr/>
         </p:nvSpPr>
@@ -19908,14 +24664,14 @@
                 </a:solidFill>
                 <a:latin typeface="Malgun Gothic"/>
               </a:rPr>
-              <a:t>3. 사도신경</a:t>
+              <a:t>1. 예배 준비의 시간</a:t>
             </a:r>
           </a:p>
         </p:txBody>
       </p:sp>
       <p:cxnSp>
         <p:nvCxnSpPr>
-          <p:cNvPr id="38" name="Connector 37"/>
+          <p:cNvPr id="36" name="Connector 35"/>
           <p:cNvCxnSpPr/>
           <p:nvPr/>
         </p:nvCxnSpPr>
@@ -19950,14 +24706,14 @@
       </p:cxnSp>
       <p:sp>
         <p:nvSpPr>
-          <p:cNvPr id="39" name="TextBox 38"/>
+          <p:cNvPr id="37" name="HYMN_PREP_4"/>
           <p:cNvSpPr txBox="1"/>
           <p:nvPr/>
         </p:nvSpPr>
         <p:spPr>
           <a:xfrm>
-            <a:off x="1691640" y="960120"/>
-            <a:ext cx="8778240" cy="777240"/>
+            <a:off x="1691640" y="2331720"/>
+            <a:ext cx="8778240" cy="1554480"/>
           </a:xfrm>
           <a:prstGeom prst="rect">
             <a:avLst/>
@@ -19977,57 +24733,52 @@
               </a:spcAft>
             </a:pPr>
             <a:r>
-              <a:rPr sz="3600" b="1">
+              <a:rPr sz="4400" b="1">
                 <a:solidFill>
                   <a:srgbClr val="FFF8F0"/>
                 </a:solidFill>
                 <a:latin typeface="Malgun Gothic"/>
               </a:rPr>
-              <a:t>{{APOSTLES_CREED_HEADING}}</a:t>
+              <a:t>{{HYMN_PREP_4}}</a:t>
             </a:r>
           </a:p>
         </p:txBody>
       </p:sp>
-      <p:sp>
-        <p:nvSpPr>
-          <p:cNvPr id="40" name="APOSTLES_CREED_1"/>
-          <p:cNvSpPr txBox="1"/>
-          <p:nvPr/>
-        </p:nvSpPr>
-        <p:spPr>
-          <a:xfrm>
-            <a:off x="1691640" y="1828800"/>
-            <a:ext cx="8778240" cy="4297680"/>
-          </a:xfrm>
-          <a:prstGeom prst="rect">
-            <a:avLst/>
-          </a:prstGeom>
-          <a:noFill/>
-        </p:spPr>
-        <p:txBody>
-          <a:bodyPr wrap="square" anchor="t" lIns="18288" rIns="73152" tIns="18288" bIns="18288"/>
-          <a:lstStyle/>
-          <a:p>
-            <a:pPr algn="ctr">
-              <a:lnSpc>
-                <a:spcPct val="130000"/>
-              </a:lnSpc>
-              <a:spcAft>
-                <a:spcPts val="600"/>
-              </a:spcAft>
-            </a:pPr>
-            <a:r>
-              <a:rPr sz="2800" b="0">
-                <a:solidFill>
-                  <a:srgbClr val="FFF8F0"/>
-                </a:solidFill>
-                <a:latin typeface="Malgun Gothic"/>
-              </a:rPr>
-              <a:t>{{APOSTLES_CREED_1}}</a:t>
-            </a:r>
-          </a:p>
-        </p:txBody>
-      </p:sp>
+      <p:cxnSp>
+        <p:nvCxnSpPr>
+          <p:cNvPr id="38" name="Connector 37"/>
+          <p:cNvCxnSpPr/>
+          <p:nvPr/>
+        </p:nvCxnSpPr>
+        <p:spPr>
+          <a:xfrm>
+            <a:off x="5394960.0" y="4160520"/>
+            <a:ext cx="1371600.0" cy="0"/>
+          </a:xfrm>
+          <a:prstGeom prst="line">
+            <a:avLst/>
+          </a:prstGeom>
+          <a:ln w="15240">
+            <a:solidFill>
+              <a:srgbClr val="D8B87A"/>
+            </a:solidFill>
+          </a:ln>
+        </p:spPr>
+        <p:style>
+          <a:lnRef idx="2">
+            <a:schemeClr val="accent1"/>
+          </a:lnRef>
+          <a:fillRef idx="0">
+            <a:schemeClr val="accent1"/>
+          </a:fillRef>
+          <a:effectRef idx="1">
+            <a:schemeClr val="accent1"/>
+          </a:effectRef>
+          <a:fontRef idx="minor">
+            <a:schemeClr val="tx1"/>
+          </a:fontRef>
+        </p:style>
+      </p:cxnSp>
     </p:spTree>
   </p:cSld>
   <p:clrMapOvr>
@@ -21341,163 +26092,93 @@
       </p:sp>
       <p:sp>
         <p:nvSpPr>
-          <p:cNvPr id="33" name="Rectangle 32"/>
-          <p:cNvSpPr/>
-          <p:nvPr/>
-        </p:nvSpPr>
-        <p:spPr>
-          <a:xfrm>
-            <a:off x="5029200" y="1627632"/>
-            <a:ext cx="256032" cy="109728"/>
-          </a:xfrm>
-          <a:prstGeom prst="rect">
-            <a:avLst/>
-          </a:prstGeom>
-          <a:solidFill>
-            <a:srgbClr val="FF5C5C"/>
-          </a:solidFill>
-          <a:ln>
-            <a:noFill/>
-          </a:ln>
-        </p:spPr>
-        <p:style>
-          <a:lnRef idx="1">
-            <a:schemeClr val="accent1"/>
-          </a:lnRef>
-          <a:fillRef idx="3">
-            <a:schemeClr val="accent1"/>
-          </a:fillRef>
-          <a:effectRef idx="2">
-            <a:schemeClr val="accent1"/>
-          </a:effectRef>
-          <a:fontRef idx="minor">
-            <a:schemeClr val="lt1"/>
-          </a:fontRef>
-        </p:style>
-        <p:txBody>
-          <a:bodyPr rtlCol="0" anchor="ctr"/>
-          <a:lstStyle/>
-          <a:p>
-            <a:pPr algn="ctr"/>
-          </a:p>
-        </p:txBody>
-      </p:sp>
-      <p:sp>
-        <p:nvSpPr>
-          <p:cNvPr id="34" name="Rectangle 33"/>
-          <p:cNvSpPr/>
-          <p:nvPr/>
-        </p:nvSpPr>
-        <p:spPr>
-          <a:xfrm>
-            <a:off x="6876288" y="1627632"/>
-            <a:ext cx="256032" cy="109728"/>
-          </a:xfrm>
-          <a:prstGeom prst="rect">
-            <a:avLst/>
-          </a:prstGeom>
-          <a:solidFill>
-            <a:srgbClr val="FFE066"/>
-          </a:solidFill>
-          <a:ln>
-            <a:noFill/>
-          </a:ln>
-        </p:spPr>
-        <p:style>
-          <a:lnRef idx="1">
-            <a:schemeClr val="accent1"/>
-          </a:lnRef>
-          <a:fillRef idx="3">
-            <a:schemeClr val="accent1"/>
-          </a:fillRef>
-          <a:effectRef idx="2">
-            <a:schemeClr val="accent1"/>
-          </a:effectRef>
-          <a:fontRef idx="minor">
-            <a:schemeClr val="lt1"/>
-          </a:fontRef>
-        </p:style>
-        <p:txBody>
-          <a:bodyPr rtlCol="0" anchor="ctr"/>
-          <a:lstStyle/>
-          <a:p>
-            <a:pPr algn="ctr"/>
-          </a:p>
-        </p:txBody>
-      </p:sp>
-      <p:cxnSp>
-        <p:nvCxnSpPr>
-          <p:cNvPr id="35" name="Connector 34"/>
-          <p:cNvCxnSpPr/>
-          <p:nvPr/>
-        </p:nvCxnSpPr>
-        <p:spPr>
-          <a:xfrm>
-            <a:off x="1527048" y="1828800"/>
-            <a:ext cx="0" cy="3931920"/>
-          </a:xfrm>
-          <a:prstGeom prst="line">
-            <a:avLst/>
-          </a:prstGeom>
-          <a:ln w="20320">
-            <a:solidFill>
-              <a:srgbClr val="D8B87A"/>
-            </a:solidFill>
-          </a:ln>
-        </p:spPr>
-        <p:style>
-          <a:lnRef idx="2">
-            <a:schemeClr val="accent1"/>
-          </a:lnRef>
-          <a:fillRef idx="0">
-            <a:schemeClr val="accent1"/>
-          </a:fillRef>
-          <a:effectRef idx="1">
-            <a:schemeClr val="accent1"/>
-          </a:effectRef>
-          <a:fontRef idx="minor">
-            <a:schemeClr val="tx1"/>
-          </a:fontRef>
-        </p:style>
-      </p:cxnSp>
-      <p:cxnSp>
-        <p:nvCxnSpPr>
-          <p:cNvPr id="36" name="Connector 35"/>
-          <p:cNvCxnSpPr/>
-          <p:nvPr/>
-        </p:nvCxnSpPr>
-        <p:spPr>
-          <a:xfrm>
-            <a:off x="10634472" y="1828800"/>
-            <a:ext cx="0" cy="3931920"/>
-          </a:xfrm>
-          <a:prstGeom prst="line">
-            <a:avLst/>
-          </a:prstGeom>
-          <a:ln w="20320">
-            <a:solidFill>
-              <a:srgbClr val="D8B87A"/>
-            </a:solidFill>
-          </a:ln>
-        </p:spPr>
-        <p:style>
-          <a:lnRef idx="2">
-            <a:schemeClr val="accent1"/>
-          </a:lnRef>
-          <a:fillRef idx="0">
-            <a:schemeClr val="accent1"/>
-          </a:fillRef>
-          <a:effectRef idx="1">
-            <a:schemeClr val="accent1"/>
-          </a:effectRef>
-          <a:fontRef idx="minor">
-            <a:schemeClr val="tx1"/>
-          </a:fontRef>
-        </p:style>
-      </p:cxnSp>
-      <p:sp>
-        <p:nvSpPr>
-          <p:cNvPr id="37" name="TextBox 36"/>
+          <p:cNvPr id="33" name="Diamond 32"/>
+          <p:cNvSpPr/>
+          <p:nvPr/>
+        </p:nvSpPr>
+        <p:spPr>
+          <a:xfrm>
+            <a:off x="4933188" y="2281428"/>
+            <a:ext cx="100584" cy="100584"/>
+          </a:xfrm>
+          <a:prstGeom prst="diamond">
+            <a:avLst/>
+          </a:prstGeom>
+          <a:solidFill>
+            <a:srgbClr val="D8B87A"/>
+          </a:solidFill>
+          <a:ln>
+            <a:noFill/>
+          </a:ln>
+        </p:spPr>
+        <p:style>
+          <a:lnRef idx="1">
+            <a:schemeClr val="accent1"/>
+          </a:lnRef>
+          <a:fillRef idx="3">
+            <a:schemeClr val="accent1"/>
+          </a:fillRef>
+          <a:effectRef idx="2">
+            <a:schemeClr val="accent1"/>
+          </a:effectRef>
+          <a:fontRef idx="minor">
+            <a:schemeClr val="lt1"/>
+          </a:fontRef>
+        </p:style>
+        <p:txBody>
+          <a:bodyPr rtlCol="0" anchor="ctr"/>
+          <a:lstStyle/>
+          <a:p>
+            <a:pPr algn="ctr"/>
+          </a:p>
+        </p:txBody>
+      </p:sp>
+      <p:sp>
+        <p:nvSpPr>
+          <p:cNvPr id="34" name="Diamond 33"/>
+          <p:cNvSpPr/>
+          <p:nvPr/>
+        </p:nvSpPr>
+        <p:spPr>
+          <a:xfrm>
+            <a:off x="7127748" y="2281428"/>
+            <a:ext cx="100584" cy="100584"/>
+          </a:xfrm>
+          <a:prstGeom prst="diamond">
+            <a:avLst/>
+          </a:prstGeom>
+          <a:solidFill>
+            <a:srgbClr val="D8B87A"/>
+          </a:solidFill>
+          <a:ln>
+            <a:noFill/>
+          </a:ln>
+        </p:spPr>
+        <p:style>
+          <a:lnRef idx="1">
+            <a:schemeClr val="accent1"/>
+          </a:lnRef>
+          <a:fillRef idx="3">
+            <a:schemeClr val="accent1"/>
+          </a:fillRef>
+          <a:effectRef idx="2">
+            <a:schemeClr val="accent1"/>
+          </a:effectRef>
+          <a:fontRef idx="minor">
+            <a:schemeClr val="lt1"/>
+          </a:fontRef>
+        </p:style>
+        <p:txBody>
+          <a:bodyPr rtlCol="0" anchor="ctr"/>
+          <a:lstStyle/>
+          <a:p>
+            <a:pPr algn="ctr"/>
+          </a:p>
+        </p:txBody>
+      </p:sp>
+      <p:sp>
+        <p:nvSpPr>
+          <p:cNvPr id="35" name="TextBox 34"/>
           <p:cNvSpPr txBox="1"/>
           <p:nvPr/>
         </p:nvSpPr>
@@ -21530,14 +26211,14 @@
                 </a:solidFill>
                 <a:latin typeface="Malgun Gothic"/>
               </a:rPr>
-              <a:t>4. 교독문</a:t>
+              <a:t>1. 예배 준비의 시간</a:t>
             </a:r>
           </a:p>
         </p:txBody>
       </p:sp>
       <p:cxnSp>
         <p:nvCxnSpPr>
-          <p:cNvPr id="38" name="Connector 37"/>
+          <p:cNvPr id="36" name="Connector 35"/>
           <p:cNvCxnSpPr/>
           <p:nvPr/>
         </p:nvCxnSpPr>
@@ -21572,14 +26253,14 @@
       </p:cxnSp>
       <p:sp>
         <p:nvSpPr>
-          <p:cNvPr id="39" name="TextBox 38"/>
+          <p:cNvPr id="37" name="HYMN_PREP_5"/>
           <p:cNvSpPr txBox="1"/>
           <p:nvPr/>
         </p:nvSpPr>
         <p:spPr>
           <a:xfrm>
-            <a:off x="1691640" y="960120"/>
-            <a:ext cx="8778240" cy="777240"/>
+            <a:off x="1691640" y="2331720"/>
+            <a:ext cx="8778240" cy="1554480"/>
           </a:xfrm>
           <a:prstGeom prst="rect">
             <a:avLst/>
@@ -21599,57 +26280,52 @@
               </a:spcAft>
             </a:pPr>
             <a:r>
-              <a:rPr sz="3600" b="1">
+              <a:rPr sz="4400" b="1">
                 <a:solidFill>
                   <a:srgbClr val="FFF8F0"/>
                 </a:solidFill>
                 <a:latin typeface="Malgun Gothic"/>
               </a:rPr>
-              <a:t>{{RESPONSIVE_TITLE}}</a:t>
+              <a:t>{{HYMN_PREP_5}}</a:t>
             </a:r>
           </a:p>
         </p:txBody>
       </p:sp>
-      <p:sp>
-        <p:nvSpPr>
-          <p:cNvPr id="40" name="RESPONSIVE_1"/>
-          <p:cNvSpPr txBox="1"/>
-          <p:nvPr/>
-        </p:nvSpPr>
-        <p:spPr>
-          <a:xfrm>
-            <a:off x="1691640" y="1828800"/>
-            <a:ext cx="8778240" cy="4297680"/>
-          </a:xfrm>
-          <a:prstGeom prst="rect">
-            <a:avLst/>
-          </a:prstGeom>
-          <a:noFill/>
-        </p:spPr>
-        <p:txBody>
-          <a:bodyPr wrap="square" anchor="t" lIns="18288" rIns="73152" tIns="18288" bIns="18288"/>
-          <a:lstStyle/>
-          <a:p>
-            <a:pPr algn="l">
-              <a:lnSpc>
-                <a:spcPct val="130000"/>
-              </a:lnSpc>
-              <a:spcAft>
-                <a:spcPts val="600"/>
-              </a:spcAft>
-            </a:pPr>
-            <a:r>
-              <a:rPr sz="2800" b="0">
-                <a:solidFill>
-                  <a:srgbClr val="FFF8F0"/>
-                </a:solidFill>
-                <a:latin typeface="Malgun Gothic"/>
-              </a:rPr>
-              <a:t>{{RESPONSIVE_1}}</a:t>
-            </a:r>
-          </a:p>
-        </p:txBody>
-      </p:sp>
+      <p:cxnSp>
+        <p:nvCxnSpPr>
+          <p:cNvPr id="38" name="Connector 37"/>
+          <p:cNvCxnSpPr/>
+          <p:nvPr/>
+        </p:nvCxnSpPr>
+        <p:spPr>
+          <a:xfrm>
+            <a:off x="5394960.0" y="4160520"/>
+            <a:ext cx="1371600.0" cy="0"/>
+          </a:xfrm>
+          <a:prstGeom prst="line">
+            <a:avLst/>
+          </a:prstGeom>
+          <a:ln w="15240">
+            <a:solidFill>
+              <a:srgbClr val="D8B87A"/>
+            </a:solidFill>
+          </a:ln>
+        </p:spPr>
+        <p:style>
+          <a:lnRef idx="2">
+            <a:schemeClr val="accent1"/>
+          </a:lnRef>
+          <a:fillRef idx="0">
+            <a:schemeClr val="accent1"/>
+          </a:fillRef>
+          <a:effectRef idx="1">
+            <a:schemeClr val="accent1"/>
+          </a:effectRef>
+          <a:fontRef idx="minor">
+            <a:schemeClr val="tx1"/>
+          </a:fontRef>
+        </p:style>
+      </p:cxnSp>
     </p:spTree>
   </p:cSld>
   <p:clrMapOvr>
@@ -23082,7 +27758,7 @@
                 </a:solidFill>
                 <a:latin typeface="Malgun Gothic"/>
               </a:rPr>
-              <a:t>5. 찬송가</a:t>
+              <a:t>2. 찬양과 기도</a:t>
             </a:r>
           </a:p>
         </p:txBody>
@@ -23124,7 +27800,7 @@
       </p:cxnSp>
       <p:sp>
         <p:nvSpPr>
-          <p:cNvPr id="37" name="HYMN_2"/>
+          <p:cNvPr id="37" name="HYMN_1"/>
           <p:cNvSpPr txBox="1"/>
           <p:nvPr/>
         </p:nvSpPr>
@@ -23157,7 +27833,7 @@
                 </a:solidFill>
                 <a:latin typeface="Malgun Gothic"/>
               </a:rPr>
-              <a:t>{{HYMN_2}}</a:t>
+              <a:t>{{HYMN_1}}</a:t>
             </a:r>
           </a:p>
         </p:txBody>
@@ -24508,178 +29184,146 @@
           </a:p>
         </p:txBody>
       </p:sp>
-      <p:sp>
-        <p:nvSpPr>
-          <p:cNvPr id="33" name="Diamond 32"/>
-          <p:cNvSpPr/>
-          <p:nvPr/>
-        </p:nvSpPr>
-        <p:spPr>
-          <a:xfrm>
-            <a:off x="5536692" y="1586484"/>
-            <a:ext cx="82296" cy="82296"/>
-          </a:xfrm>
-          <a:prstGeom prst="diamond">
-            <a:avLst/>
-          </a:prstGeom>
-          <a:solidFill>
-            <a:srgbClr val="D8B87A"/>
-          </a:solidFill>
-          <a:ln>
-            <a:noFill/>
-          </a:ln>
-        </p:spPr>
-        <p:style>
-          <a:lnRef idx="1">
-            <a:schemeClr val="accent1"/>
-          </a:lnRef>
-          <a:fillRef idx="3">
-            <a:schemeClr val="accent1"/>
-          </a:fillRef>
-          <a:effectRef idx="2">
-            <a:schemeClr val="accent1"/>
-          </a:effectRef>
-          <a:fontRef idx="minor">
-            <a:schemeClr val="lt1"/>
-          </a:fontRef>
-        </p:style>
-        <p:txBody>
-          <a:bodyPr rtlCol="0" anchor="ctr"/>
-          <a:lstStyle/>
-          <a:p>
-            <a:pPr algn="ctr"/>
-          </a:p>
-        </p:txBody>
-      </p:sp>
-      <p:sp>
-        <p:nvSpPr>
-          <p:cNvPr id="34" name="Diamond 33"/>
-          <p:cNvSpPr/>
-          <p:nvPr/>
-        </p:nvSpPr>
-        <p:spPr>
-          <a:xfrm>
-            <a:off x="5783580" y="1586484"/>
-            <a:ext cx="82296" cy="82296"/>
-          </a:xfrm>
-          <a:prstGeom prst="diamond">
-            <a:avLst/>
-          </a:prstGeom>
-          <a:solidFill>
-            <a:srgbClr val="D8B87A"/>
-          </a:solidFill>
-          <a:ln>
-            <a:noFill/>
-          </a:ln>
-        </p:spPr>
-        <p:style>
-          <a:lnRef idx="1">
-            <a:schemeClr val="accent1"/>
-          </a:lnRef>
-          <a:fillRef idx="3">
-            <a:schemeClr val="accent1"/>
-          </a:fillRef>
-          <a:effectRef idx="2">
-            <a:schemeClr val="accent1"/>
-          </a:effectRef>
-          <a:fontRef idx="minor">
-            <a:schemeClr val="lt1"/>
-          </a:fontRef>
-        </p:style>
-        <p:txBody>
-          <a:bodyPr rtlCol="0" anchor="ctr"/>
-          <a:lstStyle/>
-          <a:p>
-            <a:pPr algn="ctr"/>
-          </a:p>
-        </p:txBody>
-      </p:sp>
-      <p:sp>
-        <p:nvSpPr>
-          <p:cNvPr id="35" name="Diamond 34"/>
-          <p:cNvSpPr/>
-          <p:nvPr/>
-        </p:nvSpPr>
-        <p:spPr>
-          <a:xfrm>
-            <a:off x="6295644" y="1586484"/>
-            <a:ext cx="82296" cy="82296"/>
-          </a:xfrm>
-          <a:prstGeom prst="diamond">
-            <a:avLst/>
-          </a:prstGeom>
-          <a:solidFill>
-            <a:srgbClr val="D8B87A"/>
-          </a:solidFill>
-          <a:ln>
-            <a:noFill/>
-          </a:ln>
-        </p:spPr>
-        <p:style>
-          <a:lnRef idx="1">
-            <a:schemeClr val="accent1"/>
-          </a:lnRef>
-          <a:fillRef idx="3">
-            <a:schemeClr val="accent1"/>
-          </a:fillRef>
-          <a:effectRef idx="2">
-            <a:schemeClr val="accent1"/>
-          </a:effectRef>
-          <a:fontRef idx="minor">
-            <a:schemeClr val="lt1"/>
-          </a:fontRef>
-        </p:style>
-        <p:txBody>
-          <a:bodyPr rtlCol="0" anchor="ctr"/>
-          <a:lstStyle/>
-          <a:p>
-            <a:pPr algn="ctr"/>
-          </a:p>
-        </p:txBody>
-      </p:sp>
-      <p:sp>
-        <p:nvSpPr>
-          <p:cNvPr id="36" name="Diamond 35"/>
-          <p:cNvSpPr/>
-          <p:nvPr/>
-        </p:nvSpPr>
-        <p:spPr>
-          <a:xfrm>
-            <a:off x="6542532" y="1586484"/>
-            <a:ext cx="82296" cy="82296"/>
-          </a:xfrm>
-          <a:prstGeom prst="diamond">
-            <a:avLst/>
-          </a:prstGeom>
-          <a:solidFill>
-            <a:srgbClr val="D8B87A"/>
-          </a:solidFill>
-          <a:ln>
-            <a:noFill/>
-          </a:ln>
-        </p:spPr>
-        <p:style>
-          <a:lnRef idx="1">
-            <a:schemeClr val="accent1"/>
-          </a:lnRef>
-          <a:fillRef idx="3">
-            <a:schemeClr val="accent1"/>
-          </a:fillRef>
-          <a:effectRef idx="2">
-            <a:schemeClr val="accent1"/>
-          </a:effectRef>
-          <a:fontRef idx="minor">
-            <a:schemeClr val="lt1"/>
-          </a:fontRef>
-        </p:style>
-        <p:txBody>
-          <a:bodyPr rtlCol="0" anchor="ctr"/>
-          <a:lstStyle/>
-          <a:p>
-            <a:pPr algn="ctr"/>
-          </a:p>
-        </p:txBody>
-      </p:sp>
+      <p:cxnSp>
+        <p:nvCxnSpPr>
+          <p:cNvPr id="33" name="Connector 32"/>
+          <p:cNvCxnSpPr/>
+          <p:nvPr/>
+        </p:nvCxnSpPr>
+        <p:spPr>
+          <a:xfrm>
+            <a:off x="4517136.0" y="1627632"/>
+            <a:ext cx="292608.0" cy="0"/>
+          </a:xfrm>
+          <a:prstGeom prst="line">
+            <a:avLst/>
+          </a:prstGeom>
+          <a:ln w="15240">
+            <a:solidFill>
+              <a:srgbClr val="D8B87A"/>
+            </a:solidFill>
+          </a:ln>
+        </p:spPr>
+        <p:style>
+          <a:lnRef idx="2">
+            <a:schemeClr val="accent1"/>
+          </a:lnRef>
+          <a:fillRef idx="0">
+            <a:schemeClr val="accent1"/>
+          </a:fillRef>
+          <a:effectRef idx="1">
+            <a:schemeClr val="accent1"/>
+          </a:effectRef>
+          <a:fontRef idx="minor">
+            <a:schemeClr val="tx1"/>
+          </a:fontRef>
+        </p:style>
+      </p:cxnSp>
+      <p:cxnSp>
+        <p:nvCxnSpPr>
+          <p:cNvPr id="34" name="Connector 33"/>
+          <p:cNvCxnSpPr/>
+          <p:nvPr/>
+        </p:nvCxnSpPr>
+        <p:spPr>
+          <a:xfrm>
+            <a:off x="4663440.0" y="1481328"/>
+            <a:ext cx="0.0" cy="292608"/>
+          </a:xfrm>
+          <a:prstGeom prst="line">
+            <a:avLst/>
+          </a:prstGeom>
+          <a:ln w="15240">
+            <a:solidFill>
+              <a:srgbClr val="D8B87A"/>
+            </a:solidFill>
+          </a:ln>
+        </p:spPr>
+        <p:style>
+          <a:lnRef idx="2">
+            <a:schemeClr val="accent1"/>
+          </a:lnRef>
+          <a:fillRef idx="0">
+            <a:schemeClr val="accent1"/>
+          </a:fillRef>
+          <a:effectRef idx="1">
+            <a:schemeClr val="accent1"/>
+          </a:effectRef>
+          <a:fontRef idx="minor">
+            <a:schemeClr val="tx1"/>
+          </a:fontRef>
+        </p:style>
+      </p:cxnSp>
+      <p:cxnSp>
+        <p:nvCxnSpPr>
+          <p:cNvPr id="35" name="Connector 34"/>
+          <p:cNvCxnSpPr/>
+          <p:nvPr/>
+        </p:nvCxnSpPr>
+        <p:spPr>
+          <a:xfrm>
+            <a:off x="7351776.0" y="1627632"/>
+            <a:ext cx="292608.0" cy="0"/>
+          </a:xfrm>
+          <a:prstGeom prst="line">
+            <a:avLst/>
+          </a:prstGeom>
+          <a:ln w="15240">
+            <a:solidFill>
+              <a:srgbClr val="D8B87A"/>
+            </a:solidFill>
+          </a:ln>
+        </p:spPr>
+        <p:style>
+          <a:lnRef idx="2">
+            <a:schemeClr val="accent1"/>
+          </a:lnRef>
+          <a:fillRef idx="0">
+            <a:schemeClr val="accent1"/>
+          </a:fillRef>
+          <a:effectRef idx="1">
+            <a:schemeClr val="accent1"/>
+          </a:effectRef>
+          <a:fontRef idx="minor">
+            <a:schemeClr val="tx1"/>
+          </a:fontRef>
+        </p:style>
+      </p:cxnSp>
+      <p:cxnSp>
+        <p:nvCxnSpPr>
+          <p:cNvPr id="36" name="Connector 35"/>
+          <p:cNvCxnSpPr/>
+          <p:nvPr/>
+        </p:nvCxnSpPr>
+        <p:spPr>
+          <a:xfrm>
+            <a:off x="7498080.0" y="1481328"/>
+            <a:ext cx="0.0" cy="292608"/>
+          </a:xfrm>
+          <a:prstGeom prst="line">
+            <a:avLst/>
+          </a:prstGeom>
+          <a:ln w="15240">
+            <a:solidFill>
+              <a:srgbClr val="D8B87A"/>
+            </a:solidFill>
+          </a:ln>
+        </p:spPr>
+        <p:style>
+          <a:lnRef idx="2">
+            <a:schemeClr val="accent1"/>
+          </a:lnRef>
+          <a:fillRef idx="0">
+            <a:schemeClr val="accent1"/>
+          </a:fillRef>
+          <a:effectRef idx="1">
+            <a:schemeClr val="accent1"/>
+          </a:effectRef>
+          <a:fontRef idx="minor">
+            <a:schemeClr val="tx1"/>
+          </a:fontRef>
+        </p:style>
+      </p:cxnSp>
       <p:sp>
         <p:nvSpPr>
           <p:cNvPr id="37" name="TextBox 36"/>
@@ -24715,7 +29359,7 @@
                 </a:solidFill>
                 <a:latin typeface="Malgun Gothic"/>
               </a:rPr>
-              <a:t>6. 예배의 기도</a:t>
+              <a:t>3. 사도신경</a:t>
             </a:r>
           </a:p>
         </p:txBody>
@@ -24790,14 +29434,14 @@
                 </a:solidFill>
                 <a:latin typeface="Malgun Gothic"/>
               </a:rPr>
-              <a:t>{{PRAYER_LEADER}}</a:t>
+              <a:t>{{APOSTLES_CREED_HEADING}}</a:t>
             </a:r>
           </a:p>
         </p:txBody>
       </p:sp>
       <p:sp>
         <p:nvSpPr>
-          <p:cNvPr id="40" name="TextBox 39"/>
+          <p:cNvPr id="40" name="APOSTLES_CREED_1"/>
           <p:cNvSpPr txBox="1"/>
           <p:nvPr/>
         </p:nvSpPr>
@@ -24830,7 +29474,7 @@
                 </a:solidFill>
                 <a:latin typeface="Malgun Gothic"/>
               </a:rPr>
-              <a:t>{{PRAYER_TEXT}}</a:t>
+              <a:t>{{APOSTLES_CREED_1}}</a:t>
             </a:r>
           </a:p>
         </p:txBody>
